--- a/solar.pptx
+++ b/solar.pptx
@@ -5,20 +5,17 @@
     <p:sldMasterId id="2147483659" r:id="rId1"/>
   </p:sldMasterIdLst>
   <p:notesMasterIdLst>
-    <p:notesMasterId r:id="rId13"/>
+    <p:notesMasterId r:id="rId10"/>
   </p:notesMasterIdLst>
   <p:sldIdLst>
-    <p:sldId id="256" r:id="rId2"/>
-    <p:sldId id="257" r:id="rId3"/>
-    <p:sldId id="258" r:id="rId4"/>
-    <p:sldId id="259" r:id="rId5"/>
-    <p:sldId id="260" r:id="rId6"/>
-    <p:sldId id="261" r:id="rId7"/>
-    <p:sldId id="262" r:id="rId8"/>
+    <p:sldId id="260" r:id="rId2"/>
+    <p:sldId id="262" r:id="rId3"/>
+    <p:sldId id="256" r:id="rId4"/>
+    <p:sldId id="257" r:id="rId5"/>
+    <p:sldId id="258" r:id="rId6"/>
+    <p:sldId id="259" r:id="rId7"/>
+    <p:sldId id="261" r:id="rId8"/>
     <p:sldId id="263" r:id="rId9"/>
-    <p:sldId id="264" r:id="rId10"/>
-    <p:sldId id="265" r:id="rId11"/>
-    <p:sldId id="266" r:id="rId12"/>
   </p:sldIdLst>
   <p:sldSz cx="9144000" cy="5143500" type="screen16x9"/>
   <p:notesSz cx="6858000" cy="9144000"/>
@@ -251,6 +248,11 @@
       </a:defRPr>
     </a:lvl9pPr>
   </p:defaultTextStyle>
+  <p:extLst>
+    <p:ext uri="{EFAFB233-063F-42B5-8137-9DF3F51BA10A}">
+      <p15:sldGuideLst xmlns:p15="http://schemas.microsoft.com/office/powerpoint/2012/main"/>
+    </p:ext>
+  </p:extLst>
 </p:presentation>
 </file>
 
@@ -1452,6 +1454,214 @@
   <p:cSld>
     <p:spTree>
       <p:nvGrpSpPr>
+        <p:cNvPr id="1" name="Shape 115"/>
+        <p:cNvGrpSpPr/>
+        <p:nvPr/>
+      </p:nvGrpSpPr>
+      <p:grpSpPr>
+        <a:xfrm>
+          <a:off x="0" y="0"/>
+          <a:ext cx="0" cy="0"/>
+          <a:chOff x="0" y="0"/>
+          <a:chExt cx="0" cy="0"/>
+        </a:xfrm>
+      </p:grpSpPr>
+      <p:sp>
+        <p:nvSpPr>
+          <p:cNvPr id="116" name="Google Shape;116;g3e5eb4dda17_0_26:notes"/>
+          <p:cNvSpPr txBox="1">
+            <a:spLocks noGrp="1"/>
+          </p:cNvSpPr>
+          <p:nvPr>
+            <p:ph type="body" idx="1"/>
+          </p:nvPr>
+        </p:nvSpPr>
+        <p:spPr>
+          <a:xfrm>
+            <a:off x="685800" y="4400550"/>
+            <a:ext cx="5486400" cy="3600600"/>
+          </a:xfrm>
+          <a:prstGeom prst="rect">
+            <a:avLst/>
+          </a:prstGeom>
+        </p:spPr>
+        <p:txBody>
+          <a:bodyPr spcFirstLastPara="1" wrap="square" lIns="91425" tIns="45700" rIns="91425" bIns="45700" anchor="t" anchorCtr="0">
+            <a:noAutofit/>
+          </a:bodyPr>
+          <a:lstStyle/>
+          <a:p>
+            <a:pPr marL="0" lvl="0" indent="0" algn="l" rtl="0">
+              <a:spcBef>
+                <a:spcPts val="0"/>
+              </a:spcBef>
+              <a:spcAft>
+                <a:spcPts val="0"/>
+              </a:spcAft>
+              <a:buNone/>
+            </a:pPr>
+            <a:endParaRPr/>
+          </a:p>
+        </p:txBody>
+      </p:sp>
+      <p:sp>
+        <p:nvSpPr>
+          <p:cNvPr id="117" name="Google Shape;117;g3e5eb4dda17_0_26:notes"/>
+          <p:cNvSpPr>
+            <a:spLocks noGrp="1" noRot="1" noChangeAspect="1"/>
+          </p:cNvSpPr>
+          <p:nvPr>
+            <p:ph type="sldImg" idx="2"/>
+          </p:nvPr>
+        </p:nvSpPr>
+        <p:spPr>
+          <a:xfrm>
+            <a:off x="685800" y="1143000"/>
+            <a:ext cx="5486400" cy="3086100"/>
+          </a:xfrm>
+          <a:custGeom>
+            <a:avLst/>
+            <a:gdLst/>
+            <a:ahLst/>
+            <a:cxnLst/>
+            <a:rect l="l" t="t" r="r" b="b"/>
+            <a:pathLst>
+              <a:path w="120000" h="120000" extrusionOk="0">
+                <a:moveTo>
+                  <a:pt x="0" y="0"/>
+                </a:moveTo>
+                <a:lnTo>
+                  <a:pt x="120000" y="0"/>
+                </a:lnTo>
+                <a:lnTo>
+                  <a:pt x="120000" y="120000"/>
+                </a:lnTo>
+                <a:lnTo>
+                  <a:pt x="0" y="120000"/>
+                </a:lnTo>
+                <a:close/>
+              </a:path>
+            </a:pathLst>
+          </a:custGeom>
+        </p:spPr>
+      </p:sp>
+    </p:spTree>
+  </p:cSld>
+  <p:clrMapOvr>
+    <a:masterClrMapping/>
+  </p:clrMapOvr>
+</p:notes>
+</file>
+
+<file path=ppt/notesSlides/notesSlide2.xml><?xml version="1.0" encoding="utf-8"?>
+<p:notes xmlns:a="http://schemas.openxmlformats.org/drawingml/2006/main" xmlns:r="http://schemas.openxmlformats.org/officeDocument/2006/relationships" xmlns:p="http://schemas.openxmlformats.org/presentationml/2006/main" showMasterSp="0" showMasterPhAnim="0">
+  <p:cSld>
+    <p:spTree>
+      <p:nvGrpSpPr>
+        <p:cNvPr id="1" name="Shape 141"/>
+        <p:cNvGrpSpPr/>
+        <p:nvPr/>
+      </p:nvGrpSpPr>
+      <p:grpSpPr>
+        <a:xfrm>
+          <a:off x="0" y="0"/>
+          <a:ext cx="0" cy="0"/>
+          <a:chOff x="0" y="0"/>
+          <a:chExt cx="0" cy="0"/>
+        </a:xfrm>
+      </p:grpSpPr>
+      <p:sp>
+        <p:nvSpPr>
+          <p:cNvPr id="142" name="Google Shape;142;g3e5eb4dda17_0_48:notes"/>
+          <p:cNvSpPr txBox="1">
+            <a:spLocks noGrp="1"/>
+          </p:cNvSpPr>
+          <p:nvPr>
+            <p:ph type="body" idx="1"/>
+          </p:nvPr>
+        </p:nvSpPr>
+        <p:spPr>
+          <a:xfrm>
+            <a:off x="685800" y="4400550"/>
+            <a:ext cx="5486400" cy="3600600"/>
+          </a:xfrm>
+          <a:prstGeom prst="rect">
+            <a:avLst/>
+          </a:prstGeom>
+        </p:spPr>
+        <p:txBody>
+          <a:bodyPr spcFirstLastPara="1" wrap="square" lIns="91425" tIns="45700" rIns="91425" bIns="45700" anchor="t" anchorCtr="0">
+            <a:noAutofit/>
+          </a:bodyPr>
+          <a:lstStyle/>
+          <a:p>
+            <a:pPr marL="0" lvl="0" indent="0" algn="l" rtl="0">
+              <a:spcBef>
+                <a:spcPts val="0"/>
+              </a:spcBef>
+              <a:spcAft>
+                <a:spcPts val="0"/>
+              </a:spcAft>
+              <a:buNone/>
+            </a:pPr>
+            <a:endParaRPr/>
+          </a:p>
+        </p:txBody>
+      </p:sp>
+      <p:sp>
+        <p:nvSpPr>
+          <p:cNvPr id="143" name="Google Shape;143;g3e5eb4dda17_0_48:notes"/>
+          <p:cNvSpPr>
+            <a:spLocks noGrp="1" noRot="1" noChangeAspect="1"/>
+          </p:cNvSpPr>
+          <p:nvPr>
+            <p:ph type="sldImg" idx="2"/>
+          </p:nvPr>
+        </p:nvSpPr>
+        <p:spPr>
+          <a:xfrm>
+            <a:off x="685800" y="1143000"/>
+            <a:ext cx="5486400" cy="3086100"/>
+          </a:xfrm>
+          <a:custGeom>
+            <a:avLst/>
+            <a:gdLst/>
+            <a:ahLst/>
+            <a:cxnLst/>
+            <a:rect l="l" t="t" r="r" b="b"/>
+            <a:pathLst>
+              <a:path w="120000" h="120000" extrusionOk="0">
+                <a:moveTo>
+                  <a:pt x="0" y="0"/>
+                </a:moveTo>
+                <a:lnTo>
+                  <a:pt x="120000" y="0"/>
+                </a:lnTo>
+                <a:lnTo>
+                  <a:pt x="120000" y="120000"/>
+                </a:lnTo>
+                <a:lnTo>
+                  <a:pt x="0" y="120000"/>
+                </a:lnTo>
+                <a:close/>
+              </a:path>
+            </a:pathLst>
+          </a:custGeom>
+        </p:spPr>
+      </p:sp>
+    </p:spTree>
+  </p:cSld>
+  <p:clrMapOvr>
+    <a:masterClrMapping/>
+  </p:clrMapOvr>
+</p:notes>
+</file>
+
+<file path=ppt/notesSlides/notesSlide3.xml><?xml version="1.0" encoding="utf-8"?>
+<p:notes xmlns:a="http://schemas.openxmlformats.org/drawingml/2006/main" xmlns:r="http://schemas.openxmlformats.org/officeDocument/2006/relationships" xmlns:p="http://schemas.openxmlformats.org/presentationml/2006/main" showMasterSp="0" showMasterPhAnim="0">
+  <p:cSld>
+    <p:spTree>
+      <p:nvGrpSpPr>
         <p:cNvPr id="1" name="Shape 84"/>
         <p:cNvGrpSpPr/>
         <p:nvPr/>
@@ -1551,215 +1761,7 @@
 </p:notes>
 </file>
 
-<file path=ppt/notesSlides/notesSlide10.xml><?xml version="1.0" encoding="utf-8"?>
-<p:notes xmlns:a="http://schemas.openxmlformats.org/drawingml/2006/main" xmlns:r="http://schemas.openxmlformats.org/officeDocument/2006/relationships" xmlns:p="http://schemas.openxmlformats.org/presentationml/2006/main" showMasterSp="0" showMasterPhAnim="0">
-  <p:cSld>
-    <p:spTree>
-      <p:nvGrpSpPr>
-        <p:cNvPr id="1" name="Shape 164"/>
-        <p:cNvGrpSpPr/>
-        <p:nvPr/>
-      </p:nvGrpSpPr>
-      <p:grpSpPr>
-        <a:xfrm>
-          <a:off x="0" y="0"/>
-          <a:ext cx="0" cy="0"/>
-          <a:chOff x="0" y="0"/>
-          <a:chExt cx="0" cy="0"/>
-        </a:xfrm>
-      </p:grpSpPr>
-      <p:sp>
-        <p:nvSpPr>
-          <p:cNvPr id="165" name="Google Shape;165;g3e5eb4dda17_0_63:notes"/>
-          <p:cNvSpPr txBox="1">
-            <a:spLocks noGrp="1"/>
-          </p:cNvSpPr>
-          <p:nvPr>
-            <p:ph type="body" idx="1"/>
-          </p:nvPr>
-        </p:nvSpPr>
-        <p:spPr>
-          <a:xfrm>
-            <a:off x="685800" y="4400550"/>
-            <a:ext cx="5486400" cy="3600600"/>
-          </a:xfrm>
-          <a:prstGeom prst="rect">
-            <a:avLst/>
-          </a:prstGeom>
-        </p:spPr>
-        <p:txBody>
-          <a:bodyPr spcFirstLastPara="1" wrap="square" lIns="91425" tIns="45700" rIns="91425" bIns="45700" anchor="t" anchorCtr="0">
-            <a:noAutofit/>
-          </a:bodyPr>
-          <a:lstStyle/>
-          <a:p>
-            <a:pPr marL="0" lvl="0" indent="0" algn="l" rtl="0">
-              <a:spcBef>
-                <a:spcPts val="0"/>
-              </a:spcBef>
-              <a:spcAft>
-                <a:spcPts val="0"/>
-              </a:spcAft>
-              <a:buNone/>
-            </a:pPr>
-            <a:endParaRPr/>
-          </a:p>
-        </p:txBody>
-      </p:sp>
-      <p:sp>
-        <p:nvSpPr>
-          <p:cNvPr id="166" name="Google Shape;166;g3e5eb4dda17_0_63:notes"/>
-          <p:cNvSpPr>
-            <a:spLocks noGrp="1" noRot="1" noChangeAspect="1"/>
-          </p:cNvSpPr>
-          <p:nvPr>
-            <p:ph type="sldImg" idx="2"/>
-          </p:nvPr>
-        </p:nvSpPr>
-        <p:spPr>
-          <a:xfrm>
-            <a:off x="685800" y="1143000"/>
-            <a:ext cx="5486400" cy="3086100"/>
-          </a:xfrm>
-          <a:custGeom>
-            <a:avLst/>
-            <a:gdLst/>
-            <a:ahLst/>
-            <a:cxnLst/>
-            <a:rect l="l" t="t" r="r" b="b"/>
-            <a:pathLst>
-              <a:path w="120000" h="120000" extrusionOk="0">
-                <a:moveTo>
-                  <a:pt x="0" y="0"/>
-                </a:moveTo>
-                <a:lnTo>
-                  <a:pt x="120000" y="0"/>
-                </a:lnTo>
-                <a:lnTo>
-                  <a:pt x="120000" y="120000"/>
-                </a:lnTo>
-                <a:lnTo>
-                  <a:pt x="0" y="120000"/>
-                </a:lnTo>
-                <a:close/>
-              </a:path>
-            </a:pathLst>
-          </a:custGeom>
-        </p:spPr>
-      </p:sp>
-    </p:spTree>
-  </p:cSld>
-  <p:clrMapOvr>
-    <a:masterClrMapping/>
-  </p:clrMapOvr>
-</p:notes>
-</file>
-
-<file path=ppt/notesSlides/notesSlide11.xml><?xml version="1.0" encoding="utf-8"?>
-<p:notes xmlns:a="http://schemas.openxmlformats.org/drawingml/2006/main" xmlns:r="http://schemas.openxmlformats.org/officeDocument/2006/relationships" xmlns:p="http://schemas.openxmlformats.org/presentationml/2006/main" showMasterSp="0" showMasterPhAnim="0">
-  <p:cSld>
-    <p:spTree>
-      <p:nvGrpSpPr>
-        <p:cNvPr id="1" name="Shape 170"/>
-        <p:cNvGrpSpPr/>
-        <p:nvPr/>
-      </p:nvGrpSpPr>
-      <p:grpSpPr>
-        <a:xfrm>
-          <a:off x="0" y="0"/>
-          <a:ext cx="0" cy="0"/>
-          <a:chOff x="0" y="0"/>
-          <a:chExt cx="0" cy="0"/>
-        </a:xfrm>
-      </p:grpSpPr>
-      <p:sp>
-        <p:nvSpPr>
-          <p:cNvPr id="171" name="Google Shape;171;g3e5eb4dda17_0_68:notes"/>
-          <p:cNvSpPr txBox="1">
-            <a:spLocks noGrp="1"/>
-          </p:cNvSpPr>
-          <p:nvPr>
-            <p:ph type="body" idx="1"/>
-          </p:nvPr>
-        </p:nvSpPr>
-        <p:spPr>
-          <a:xfrm>
-            <a:off x="685800" y="4400550"/>
-            <a:ext cx="5486400" cy="3600600"/>
-          </a:xfrm>
-          <a:prstGeom prst="rect">
-            <a:avLst/>
-          </a:prstGeom>
-        </p:spPr>
-        <p:txBody>
-          <a:bodyPr spcFirstLastPara="1" wrap="square" lIns="91425" tIns="45700" rIns="91425" bIns="45700" anchor="t" anchorCtr="0">
-            <a:noAutofit/>
-          </a:bodyPr>
-          <a:lstStyle/>
-          <a:p>
-            <a:pPr marL="0" lvl="0" indent="0" algn="l" rtl="0">
-              <a:spcBef>
-                <a:spcPts val="0"/>
-              </a:spcBef>
-              <a:spcAft>
-                <a:spcPts val="0"/>
-              </a:spcAft>
-              <a:buNone/>
-            </a:pPr>
-            <a:endParaRPr/>
-          </a:p>
-        </p:txBody>
-      </p:sp>
-      <p:sp>
-        <p:nvSpPr>
-          <p:cNvPr id="172" name="Google Shape;172;g3e5eb4dda17_0_68:notes"/>
-          <p:cNvSpPr>
-            <a:spLocks noGrp="1" noRot="1" noChangeAspect="1"/>
-          </p:cNvSpPr>
-          <p:nvPr>
-            <p:ph type="sldImg" idx="2"/>
-          </p:nvPr>
-        </p:nvSpPr>
-        <p:spPr>
-          <a:xfrm>
-            <a:off x="685800" y="1143000"/>
-            <a:ext cx="5486400" cy="3086100"/>
-          </a:xfrm>
-          <a:custGeom>
-            <a:avLst/>
-            <a:gdLst/>
-            <a:ahLst/>
-            <a:cxnLst/>
-            <a:rect l="l" t="t" r="r" b="b"/>
-            <a:pathLst>
-              <a:path w="120000" h="120000" extrusionOk="0">
-                <a:moveTo>
-                  <a:pt x="0" y="0"/>
-                </a:moveTo>
-                <a:lnTo>
-                  <a:pt x="120000" y="0"/>
-                </a:lnTo>
-                <a:lnTo>
-                  <a:pt x="120000" y="120000"/>
-                </a:lnTo>
-                <a:lnTo>
-                  <a:pt x="0" y="120000"/>
-                </a:lnTo>
-                <a:close/>
-              </a:path>
-            </a:pathLst>
-          </a:custGeom>
-        </p:spPr>
-      </p:sp>
-    </p:spTree>
-  </p:cSld>
-  <p:clrMapOvr>
-    <a:masterClrMapping/>
-  </p:clrMapOvr>
-</p:notes>
-</file>
-
-<file path=ppt/notesSlides/notesSlide2.xml><?xml version="1.0" encoding="utf-8"?>
+<file path=ppt/notesSlides/notesSlide4.xml><?xml version="1.0" encoding="utf-8"?>
 <p:notes xmlns:a="http://schemas.openxmlformats.org/drawingml/2006/main" xmlns:r="http://schemas.openxmlformats.org/officeDocument/2006/relationships" xmlns:p="http://schemas.openxmlformats.org/presentationml/2006/main" showMasterSp="0" showMasterPhAnim="0">
   <p:cSld>
     <p:spTree>
@@ -1863,7 +1865,7 @@
 </p:notes>
 </file>
 
-<file path=ppt/notesSlides/notesSlide3.xml><?xml version="1.0" encoding="utf-8"?>
+<file path=ppt/notesSlides/notesSlide5.xml><?xml version="1.0" encoding="utf-8"?>
 <p:notes xmlns:a="http://schemas.openxmlformats.org/drawingml/2006/main" xmlns:r="http://schemas.openxmlformats.org/officeDocument/2006/relationships" xmlns:p="http://schemas.openxmlformats.org/presentationml/2006/main" showMasterSp="0" showMasterPhAnim="0">
   <p:cSld>
     <p:spTree>
@@ -1967,7 +1969,7 @@
 </p:notes>
 </file>
 
-<file path=ppt/notesSlides/notesSlide4.xml><?xml version="1.0" encoding="utf-8"?>
+<file path=ppt/notesSlides/notesSlide6.xml><?xml version="1.0" encoding="utf-8"?>
 <p:notes xmlns:a="http://schemas.openxmlformats.org/drawingml/2006/main" xmlns:r="http://schemas.openxmlformats.org/officeDocument/2006/relationships" xmlns:p="http://schemas.openxmlformats.org/presentationml/2006/main" showMasterSp="0" showMasterPhAnim="0">
   <p:cSld>
     <p:spTree>
@@ -2071,111 +2073,7 @@
 </p:notes>
 </file>
 
-<file path=ppt/notesSlides/notesSlide5.xml><?xml version="1.0" encoding="utf-8"?>
-<p:notes xmlns:a="http://schemas.openxmlformats.org/drawingml/2006/main" xmlns:r="http://schemas.openxmlformats.org/officeDocument/2006/relationships" xmlns:p="http://schemas.openxmlformats.org/presentationml/2006/main" showMasterSp="0" showMasterPhAnim="0">
-  <p:cSld>
-    <p:spTree>
-      <p:nvGrpSpPr>
-        <p:cNvPr id="1" name="Shape 115"/>
-        <p:cNvGrpSpPr/>
-        <p:nvPr/>
-      </p:nvGrpSpPr>
-      <p:grpSpPr>
-        <a:xfrm>
-          <a:off x="0" y="0"/>
-          <a:ext cx="0" cy="0"/>
-          <a:chOff x="0" y="0"/>
-          <a:chExt cx="0" cy="0"/>
-        </a:xfrm>
-      </p:grpSpPr>
-      <p:sp>
-        <p:nvSpPr>
-          <p:cNvPr id="116" name="Google Shape;116;g3e5eb4dda17_0_26:notes"/>
-          <p:cNvSpPr txBox="1">
-            <a:spLocks noGrp="1"/>
-          </p:cNvSpPr>
-          <p:nvPr>
-            <p:ph type="body" idx="1"/>
-          </p:nvPr>
-        </p:nvSpPr>
-        <p:spPr>
-          <a:xfrm>
-            <a:off x="685800" y="4400550"/>
-            <a:ext cx="5486400" cy="3600600"/>
-          </a:xfrm>
-          <a:prstGeom prst="rect">
-            <a:avLst/>
-          </a:prstGeom>
-        </p:spPr>
-        <p:txBody>
-          <a:bodyPr spcFirstLastPara="1" wrap="square" lIns="91425" tIns="45700" rIns="91425" bIns="45700" anchor="t" anchorCtr="0">
-            <a:noAutofit/>
-          </a:bodyPr>
-          <a:lstStyle/>
-          <a:p>
-            <a:pPr marL="0" lvl="0" indent="0" algn="l" rtl="0">
-              <a:spcBef>
-                <a:spcPts val="0"/>
-              </a:spcBef>
-              <a:spcAft>
-                <a:spcPts val="0"/>
-              </a:spcAft>
-              <a:buNone/>
-            </a:pPr>
-            <a:endParaRPr/>
-          </a:p>
-        </p:txBody>
-      </p:sp>
-      <p:sp>
-        <p:nvSpPr>
-          <p:cNvPr id="117" name="Google Shape;117;g3e5eb4dda17_0_26:notes"/>
-          <p:cNvSpPr>
-            <a:spLocks noGrp="1" noRot="1" noChangeAspect="1"/>
-          </p:cNvSpPr>
-          <p:nvPr>
-            <p:ph type="sldImg" idx="2"/>
-          </p:nvPr>
-        </p:nvSpPr>
-        <p:spPr>
-          <a:xfrm>
-            <a:off x="685800" y="1143000"/>
-            <a:ext cx="5486400" cy="3086100"/>
-          </a:xfrm>
-          <a:custGeom>
-            <a:avLst/>
-            <a:gdLst/>
-            <a:ahLst/>
-            <a:cxnLst/>
-            <a:rect l="l" t="t" r="r" b="b"/>
-            <a:pathLst>
-              <a:path w="120000" h="120000" extrusionOk="0">
-                <a:moveTo>
-                  <a:pt x="0" y="0"/>
-                </a:moveTo>
-                <a:lnTo>
-                  <a:pt x="120000" y="0"/>
-                </a:lnTo>
-                <a:lnTo>
-                  <a:pt x="120000" y="120000"/>
-                </a:lnTo>
-                <a:lnTo>
-                  <a:pt x="0" y="120000"/>
-                </a:lnTo>
-                <a:close/>
-              </a:path>
-            </a:pathLst>
-          </a:custGeom>
-        </p:spPr>
-      </p:sp>
-    </p:spTree>
-  </p:cSld>
-  <p:clrMapOvr>
-    <a:masterClrMapping/>
-  </p:clrMapOvr>
-</p:notes>
-</file>
-
-<file path=ppt/notesSlides/notesSlide6.xml><?xml version="1.0" encoding="utf-8"?>
+<file path=ppt/notesSlides/notesSlide7.xml><?xml version="1.0" encoding="utf-8"?>
 <p:notes xmlns:a="http://schemas.openxmlformats.org/drawingml/2006/main" xmlns:r="http://schemas.openxmlformats.org/officeDocument/2006/relationships" xmlns:p="http://schemas.openxmlformats.org/presentationml/2006/main" showMasterSp="0" showMasterPhAnim="0">
   <p:cSld>
     <p:spTree>
@@ -2233,110 +2131,6 @@
       <p:sp>
         <p:nvSpPr>
           <p:cNvPr id="130" name="Google Shape;130;g3e5eb4dda17_0_34:notes"/>
-          <p:cNvSpPr>
-            <a:spLocks noGrp="1" noRot="1" noChangeAspect="1"/>
-          </p:cNvSpPr>
-          <p:nvPr>
-            <p:ph type="sldImg" idx="2"/>
-          </p:nvPr>
-        </p:nvSpPr>
-        <p:spPr>
-          <a:xfrm>
-            <a:off x="685800" y="1143000"/>
-            <a:ext cx="5486400" cy="3086100"/>
-          </a:xfrm>
-          <a:custGeom>
-            <a:avLst/>
-            <a:gdLst/>
-            <a:ahLst/>
-            <a:cxnLst/>
-            <a:rect l="l" t="t" r="r" b="b"/>
-            <a:pathLst>
-              <a:path w="120000" h="120000" extrusionOk="0">
-                <a:moveTo>
-                  <a:pt x="0" y="0"/>
-                </a:moveTo>
-                <a:lnTo>
-                  <a:pt x="120000" y="0"/>
-                </a:lnTo>
-                <a:lnTo>
-                  <a:pt x="120000" y="120000"/>
-                </a:lnTo>
-                <a:lnTo>
-                  <a:pt x="0" y="120000"/>
-                </a:lnTo>
-                <a:close/>
-              </a:path>
-            </a:pathLst>
-          </a:custGeom>
-        </p:spPr>
-      </p:sp>
-    </p:spTree>
-  </p:cSld>
-  <p:clrMapOvr>
-    <a:masterClrMapping/>
-  </p:clrMapOvr>
-</p:notes>
-</file>
-
-<file path=ppt/notesSlides/notesSlide7.xml><?xml version="1.0" encoding="utf-8"?>
-<p:notes xmlns:a="http://schemas.openxmlformats.org/drawingml/2006/main" xmlns:r="http://schemas.openxmlformats.org/officeDocument/2006/relationships" xmlns:p="http://schemas.openxmlformats.org/presentationml/2006/main" showMasterSp="0" showMasterPhAnim="0">
-  <p:cSld>
-    <p:spTree>
-      <p:nvGrpSpPr>
-        <p:cNvPr id="1" name="Shape 141"/>
-        <p:cNvGrpSpPr/>
-        <p:nvPr/>
-      </p:nvGrpSpPr>
-      <p:grpSpPr>
-        <a:xfrm>
-          <a:off x="0" y="0"/>
-          <a:ext cx="0" cy="0"/>
-          <a:chOff x="0" y="0"/>
-          <a:chExt cx="0" cy="0"/>
-        </a:xfrm>
-      </p:grpSpPr>
-      <p:sp>
-        <p:nvSpPr>
-          <p:cNvPr id="142" name="Google Shape;142;g3e5eb4dda17_0_48:notes"/>
-          <p:cNvSpPr txBox="1">
-            <a:spLocks noGrp="1"/>
-          </p:cNvSpPr>
-          <p:nvPr>
-            <p:ph type="body" idx="1"/>
-          </p:nvPr>
-        </p:nvSpPr>
-        <p:spPr>
-          <a:xfrm>
-            <a:off x="685800" y="4400550"/>
-            <a:ext cx="5486400" cy="3600600"/>
-          </a:xfrm>
-          <a:prstGeom prst="rect">
-            <a:avLst/>
-          </a:prstGeom>
-        </p:spPr>
-        <p:txBody>
-          <a:bodyPr spcFirstLastPara="1" wrap="square" lIns="91425" tIns="45700" rIns="91425" bIns="45700" anchor="t" anchorCtr="0">
-            <a:noAutofit/>
-          </a:bodyPr>
-          <a:lstStyle/>
-          <a:p>
-            <a:pPr marL="0" lvl="0" indent="0" algn="l" rtl="0">
-              <a:spcBef>
-                <a:spcPts val="0"/>
-              </a:spcBef>
-              <a:spcAft>
-                <a:spcPts val="0"/>
-              </a:spcAft>
-              <a:buNone/>
-            </a:pPr>
-            <a:endParaRPr/>
-          </a:p>
-        </p:txBody>
-      </p:sp>
-      <p:sp>
-        <p:nvSpPr>
-          <p:cNvPr id="143" name="Google Shape;143;g3e5eb4dda17_0_48:notes"/>
           <p:cNvSpPr>
             <a:spLocks noGrp="1" noRot="1" noChangeAspect="1"/>
           </p:cNvSpPr>
@@ -2441,110 +2235,6 @@
       <p:sp>
         <p:nvSpPr>
           <p:cNvPr id="153" name="Google Shape;153;g3e5eb4dda17_0_53:notes"/>
-          <p:cNvSpPr>
-            <a:spLocks noGrp="1" noRot="1" noChangeAspect="1"/>
-          </p:cNvSpPr>
-          <p:nvPr>
-            <p:ph type="sldImg" idx="2"/>
-          </p:nvPr>
-        </p:nvSpPr>
-        <p:spPr>
-          <a:xfrm>
-            <a:off x="685800" y="1143000"/>
-            <a:ext cx="5486400" cy="3086100"/>
-          </a:xfrm>
-          <a:custGeom>
-            <a:avLst/>
-            <a:gdLst/>
-            <a:ahLst/>
-            <a:cxnLst/>
-            <a:rect l="l" t="t" r="r" b="b"/>
-            <a:pathLst>
-              <a:path w="120000" h="120000" extrusionOk="0">
-                <a:moveTo>
-                  <a:pt x="0" y="0"/>
-                </a:moveTo>
-                <a:lnTo>
-                  <a:pt x="120000" y="0"/>
-                </a:lnTo>
-                <a:lnTo>
-                  <a:pt x="120000" y="120000"/>
-                </a:lnTo>
-                <a:lnTo>
-                  <a:pt x="0" y="120000"/>
-                </a:lnTo>
-                <a:close/>
-              </a:path>
-            </a:pathLst>
-          </a:custGeom>
-        </p:spPr>
-      </p:sp>
-    </p:spTree>
-  </p:cSld>
-  <p:clrMapOvr>
-    <a:masterClrMapping/>
-  </p:clrMapOvr>
-</p:notes>
-</file>
-
-<file path=ppt/notesSlides/notesSlide9.xml><?xml version="1.0" encoding="utf-8"?>
-<p:notes xmlns:a="http://schemas.openxmlformats.org/drawingml/2006/main" xmlns:r="http://schemas.openxmlformats.org/officeDocument/2006/relationships" xmlns:p="http://schemas.openxmlformats.org/presentationml/2006/main" showMasterSp="0" showMasterPhAnim="0">
-  <p:cSld>
-    <p:spTree>
-      <p:nvGrpSpPr>
-        <p:cNvPr id="1" name="Shape 158"/>
-        <p:cNvGrpSpPr/>
-        <p:nvPr/>
-      </p:nvGrpSpPr>
-      <p:grpSpPr>
-        <a:xfrm>
-          <a:off x="0" y="0"/>
-          <a:ext cx="0" cy="0"/>
-          <a:chOff x="0" y="0"/>
-          <a:chExt cx="0" cy="0"/>
-        </a:xfrm>
-      </p:grpSpPr>
-      <p:sp>
-        <p:nvSpPr>
-          <p:cNvPr id="159" name="Google Shape;159;g3e5eb4dda17_0_58:notes"/>
-          <p:cNvSpPr txBox="1">
-            <a:spLocks noGrp="1"/>
-          </p:cNvSpPr>
-          <p:nvPr>
-            <p:ph type="body" idx="1"/>
-          </p:nvPr>
-        </p:nvSpPr>
-        <p:spPr>
-          <a:xfrm>
-            <a:off x="685800" y="4400550"/>
-            <a:ext cx="5486400" cy="3600600"/>
-          </a:xfrm>
-          <a:prstGeom prst="rect">
-            <a:avLst/>
-          </a:prstGeom>
-        </p:spPr>
-        <p:txBody>
-          <a:bodyPr spcFirstLastPara="1" wrap="square" lIns="91425" tIns="45700" rIns="91425" bIns="45700" anchor="t" anchorCtr="0">
-            <a:noAutofit/>
-          </a:bodyPr>
-          <a:lstStyle/>
-          <a:p>
-            <a:pPr marL="0" lvl="0" indent="0" algn="l" rtl="0">
-              <a:spcBef>
-                <a:spcPts val="0"/>
-              </a:spcBef>
-              <a:spcAft>
-                <a:spcPts val="0"/>
-              </a:spcAft>
-              <a:buNone/>
-            </a:pPr>
-            <a:endParaRPr/>
-          </a:p>
-        </p:txBody>
-      </p:sp>
-      <p:sp>
-        <p:nvSpPr>
-          <p:cNvPr id="160" name="Google Shape;160;g3e5eb4dda17_0_58:notes"/>
           <p:cNvSpPr>
             <a:spLocks noGrp="1" noRot="1" noChangeAspect="1"/>
           </p:cNvSpPr>
@@ -13217,6 +12907,1822 @@
   <p:cSld>
     <p:spTree>
       <p:nvGrpSpPr>
+        <p:cNvPr id="1" name="Shape 118"/>
+        <p:cNvGrpSpPr/>
+        <p:nvPr/>
+      </p:nvGrpSpPr>
+      <p:grpSpPr>
+        <a:xfrm>
+          <a:off x="0" y="0"/>
+          <a:ext cx="0" cy="0"/>
+          <a:chOff x="0" y="0"/>
+          <a:chExt cx="0" cy="0"/>
+        </a:xfrm>
+      </p:grpSpPr>
+      <p:pic>
+        <p:nvPicPr>
+          <p:cNvPr id="119" name="Google Shape;119;p17"/>
+          <p:cNvPicPr preferRelativeResize="0"/>
+          <p:nvPr/>
+        </p:nvPicPr>
+        <p:blipFill>
+          <a:blip r:embed="rId3" cstate="email">
+            <a:alphaModFix/>
+            <a:extLst>
+              <a:ext uri="{28A0092B-C50C-407E-A947-70E740481C1C}">
+                <a14:useLocalDpi xmlns:a14="http://schemas.microsoft.com/office/drawing/2010/main"/>
+              </a:ext>
+            </a:extLst>
+          </a:blip>
+          <a:stretch>
+            <a:fillRect/>
+          </a:stretch>
+        </p:blipFill>
+        <p:spPr>
+          <a:xfrm>
+            <a:off x="5645399" y="269270"/>
+            <a:ext cx="2660401" cy="2086476"/>
+          </a:xfrm>
+          <a:prstGeom prst="rect">
+            <a:avLst/>
+          </a:prstGeom>
+          <a:noFill/>
+          <a:ln w="9525" cap="flat" cmpd="sng">
+            <a:solidFill>
+              <a:srgbClr val="FF0000"/>
+            </a:solidFill>
+            <a:prstDash val="solid"/>
+            <a:round/>
+            <a:headEnd type="none" w="sm" len="sm"/>
+            <a:tailEnd type="none" w="sm" len="sm"/>
+          </a:ln>
+        </p:spPr>
+      </p:pic>
+      <p:sp>
+        <p:nvSpPr>
+          <p:cNvPr id="120" name="Google Shape;120;p17"/>
+          <p:cNvSpPr txBox="1"/>
+          <p:nvPr/>
+        </p:nvSpPr>
+        <p:spPr>
+          <a:xfrm>
+            <a:off x="65623" y="39645"/>
+            <a:ext cx="3988200" cy="346200"/>
+          </a:xfrm>
+          <a:prstGeom prst="rect">
+            <a:avLst/>
+          </a:prstGeom>
+          <a:noFill/>
+          <a:ln>
+            <a:noFill/>
+          </a:ln>
+        </p:spPr>
+        <p:txBody>
+          <a:bodyPr spcFirstLastPara="1" wrap="square" lIns="68575" tIns="34275" rIns="68575" bIns="34275" anchor="t" anchorCtr="0">
+            <a:spAutoFit/>
+          </a:bodyPr>
+          <a:lstStyle/>
+          <a:p>
+            <a:pPr marL="0" marR="0" lvl="0" indent="0" algn="l" rtl="0">
+              <a:spcBef>
+                <a:spcPts val="0"/>
+              </a:spcBef>
+              <a:spcAft>
+                <a:spcPts val="0"/>
+              </a:spcAft>
+              <a:buNone/>
+            </a:pPr>
+            <a:r>
+              <a:rPr lang="en-US" sz="1800" b="1" i="0" u="none" strike="noStrike" cap="none">
+                <a:solidFill>
+                  <a:schemeClr val="dk1"/>
+                </a:solidFill>
+                <a:latin typeface="Calibri"/>
+                <a:ea typeface="Calibri"/>
+                <a:cs typeface="Calibri"/>
+                <a:sym typeface="Calibri"/>
+              </a:rPr>
+              <a:t>Solar</a:t>
+            </a:r>
+            <a:endParaRPr sz="1800" b="1" i="0">
+              <a:solidFill>
+                <a:srgbClr val="333333"/>
+              </a:solidFill>
+              <a:latin typeface="Calibri"/>
+              <a:ea typeface="Calibri"/>
+              <a:cs typeface="Calibri"/>
+              <a:sym typeface="Calibri"/>
+            </a:endParaRPr>
+          </a:p>
+        </p:txBody>
+      </p:sp>
+      <p:sp>
+        <p:nvSpPr>
+          <p:cNvPr id="121" name="Google Shape;121;p17"/>
+          <p:cNvSpPr txBox="1"/>
+          <p:nvPr/>
+        </p:nvSpPr>
+        <p:spPr>
+          <a:xfrm>
+            <a:off x="65625" y="385894"/>
+            <a:ext cx="4473600" cy="1546800"/>
+          </a:xfrm>
+          <a:prstGeom prst="rect">
+            <a:avLst/>
+          </a:prstGeom>
+          <a:solidFill>
+            <a:srgbClr val="FFF2CC"/>
+          </a:solidFill>
+          <a:ln w="7150" cap="flat" cmpd="sng">
+            <a:solidFill>
+              <a:srgbClr val="FF0000"/>
+            </a:solidFill>
+            <a:prstDash val="solid"/>
+            <a:round/>
+            <a:headEnd type="none" w="sm" len="sm"/>
+            <a:tailEnd type="none" w="sm" len="sm"/>
+          </a:ln>
+        </p:spPr>
+        <p:txBody>
+          <a:bodyPr spcFirstLastPara="1" wrap="square" lIns="68575" tIns="34275" rIns="68575" bIns="34275" anchor="t" anchorCtr="0">
+            <a:spAutoFit/>
+          </a:bodyPr>
+          <a:lstStyle/>
+          <a:p>
+            <a:pPr marL="94060" marR="0" lvl="0" indent="-103585" algn="l" rtl="0">
+              <a:spcBef>
+                <a:spcPts val="0"/>
+              </a:spcBef>
+              <a:spcAft>
+                <a:spcPts val="0"/>
+              </a:spcAft>
+              <a:buClr>
+                <a:schemeClr val="dk1"/>
+              </a:buClr>
+              <a:buSzPts val="1200"/>
+              <a:buFont typeface="Arial"/>
+              <a:buChar char="•"/>
+            </a:pPr>
+            <a:r>
+              <a:rPr lang="en-US" sz="1200" b="1">
+                <a:solidFill>
+                  <a:srgbClr val="FF0000"/>
+                </a:solidFill>
+                <a:latin typeface="Calibri"/>
+                <a:ea typeface="Calibri"/>
+                <a:cs typeface="Calibri"/>
+                <a:sym typeface="Calibri"/>
+              </a:rPr>
+              <a:t>Put together 10KW 48V battery solar system in just one hour</a:t>
+            </a:r>
+            <a:br>
+              <a:rPr lang="en-US" sz="1200">
+                <a:solidFill>
+                  <a:schemeClr val="dk1"/>
+                </a:solidFill>
+                <a:latin typeface="Calibri"/>
+                <a:ea typeface="Calibri"/>
+                <a:cs typeface="Calibri"/>
+                <a:sym typeface="Calibri"/>
+              </a:rPr>
+            </a:br>
+            <a:r>
+              <a:rPr lang="en-US" sz="1200" u="sng">
+                <a:solidFill>
+                  <a:schemeClr val="hlink"/>
+                </a:solidFill>
+                <a:latin typeface="Calibri"/>
+                <a:ea typeface="Calibri"/>
+                <a:cs typeface="Calibri"/>
+                <a:sym typeface="Calibri"/>
+                <a:hlinkClick r:id="rId4"/>
+              </a:rPr>
+              <a:t>https://www.youtube.com/watch?v=rRqV8BHE8lY</a:t>
+            </a:r>
+            <a:r>
+              <a:rPr lang="en-US" sz="1200">
+                <a:solidFill>
+                  <a:schemeClr val="dk1"/>
+                </a:solidFill>
+                <a:latin typeface="Calibri"/>
+                <a:ea typeface="Calibri"/>
+                <a:cs typeface="Calibri"/>
+                <a:sym typeface="Calibri"/>
+              </a:rPr>
+              <a:t> </a:t>
+            </a:r>
+            <a:endParaRPr sz="1200">
+              <a:solidFill>
+                <a:schemeClr val="dk1"/>
+              </a:solidFill>
+              <a:latin typeface="Calibri"/>
+              <a:ea typeface="Calibri"/>
+              <a:cs typeface="Calibri"/>
+              <a:sym typeface="Calibri"/>
+            </a:endParaRPr>
+          </a:p>
+          <a:p>
+            <a:pPr marL="94060" marR="0" lvl="0" indent="-103585" algn="l" rtl="0">
+              <a:spcBef>
+                <a:spcPts val="0"/>
+              </a:spcBef>
+              <a:spcAft>
+                <a:spcPts val="0"/>
+              </a:spcAft>
+              <a:buClr>
+                <a:schemeClr val="dk1"/>
+              </a:buClr>
+              <a:buSzPts val="1200"/>
+              <a:buFont typeface="Arial"/>
+              <a:buChar char="•"/>
+            </a:pPr>
+            <a:r>
+              <a:rPr lang="en-US" sz="1200">
+                <a:solidFill>
+                  <a:schemeClr val="dk1"/>
+                </a:solidFill>
+                <a:latin typeface="Calibri"/>
+                <a:ea typeface="Calibri"/>
+                <a:cs typeface="Calibri"/>
+                <a:sym typeface="Calibri"/>
+              </a:rPr>
+              <a:t>"all-in-one" inverter unit - combines inverter, battery charger, and solar charge controller</a:t>
+            </a:r>
+            <a:endParaRPr sz="1200">
+              <a:solidFill>
+                <a:schemeClr val="dk1"/>
+              </a:solidFill>
+              <a:latin typeface="Calibri"/>
+              <a:ea typeface="Calibri"/>
+              <a:cs typeface="Calibri"/>
+              <a:sym typeface="Calibri"/>
+            </a:endParaRPr>
+          </a:p>
+          <a:p>
+            <a:pPr marL="94060" marR="0" lvl="0" indent="-103585" algn="l" rtl="0">
+              <a:spcBef>
+                <a:spcPts val="0"/>
+              </a:spcBef>
+              <a:spcAft>
+                <a:spcPts val="0"/>
+              </a:spcAft>
+              <a:buClr>
+                <a:schemeClr val="dk1"/>
+              </a:buClr>
+              <a:buSzPts val="1200"/>
+              <a:buFont typeface="Arial"/>
+              <a:buChar char="•"/>
+            </a:pPr>
+            <a:r>
+              <a:rPr lang="en-US" sz="1200">
+                <a:solidFill>
+                  <a:schemeClr val="dk1"/>
+                </a:solidFill>
+                <a:latin typeface="Calibri"/>
+                <a:ea typeface="Calibri"/>
+                <a:cs typeface="Calibri"/>
+                <a:sym typeface="Calibri"/>
+              </a:rPr>
+              <a:t>Connect a 48V 16kWh battery to the inverter (using thick cables)</a:t>
+            </a:r>
+            <a:endParaRPr sz="1200">
+              <a:solidFill>
+                <a:schemeClr val="dk1"/>
+              </a:solidFill>
+              <a:latin typeface="Calibri"/>
+              <a:ea typeface="Calibri"/>
+              <a:cs typeface="Calibri"/>
+              <a:sym typeface="Calibri"/>
+            </a:endParaRPr>
+          </a:p>
+          <a:p>
+            <a:pPr marL="94060" marR="0" lvl="0" indent="-103585" algn="l" rtl="0">
+              <a:spcBef>
+                <a:spcPts val="0"/>
+              </a:spcBef>
+              <a:spcAft>
+                <a:spcPts val="0"/>
+              </a:spcAft>
+              <a:buClr>
+                <a:schemeClr val="dk1"/>
+              </a:buClr>
+              <a:buSzPts val="1200"/>
+              <a:buFont typeface="Arial"/>
+              <a:buChar char="•"/>
+            </a:pPr>
+            <a:r>
+              <a:rPr lang="en-US" sz="1200">
+                <a:solidFill>
+                  <a:schemeClr val="dk1"/>
+                </a:solidFill>
+                <a:latin typeface="Calibri"/>
+                <a:ea typeface="Calibri"/>
+                <a:cs typeface="Calibri"/>
+                <a:sym typeface="Calibri"/>
+              </a:rPr>
+              <a:t>Install a solar PV disconnect switch (to disconnect the solar array)</a:t>
+            </a:r>
+            <a:endParaRPr sz="1200">
+              <a:solidFill>
+                <a:schemeClr val="dk1"/>
+              </a:solidFill>
+              <a:latin typeface="Calibri"/>
+              <a:ea typeface="Calibri"/>
+              <a:cs typeface="Calibri"/>
+              <a:sym typeface="Calibri"/>
+            </a:endParaRPr>
+          </a:p>
+          <a:p>
+            <a:pPr marL="94060" marR="0" lvl="0" indent="-103585" algn="l" rtl="0">
+              <a:spcBef>
+                <a:spcPts val="0"/>
+              </a:spcBef>
+              <a:spcAft>
+                <a:spcPts val="0"/>
+              </a:spcAft>
+              <a:buClr>
+                <a:schemeClr val="dk1"/>
+              </a:buClr>
+              <a:buSzPts val="1200"/>
+              <a:buFont typeface="Arial"/>
+              <a:buChar char="•"/>
+            </a:pPr>
+            <a:r>
+              <a:rPr lang="en-US" sz="1200">
+                <a:solidFill>
+                  <a:schemeClr val="dk1"/>
+                </a:solidFill>
+                <a:latin typeface="Calibri"/>
+                <a:ea typeface="Calibri"/>
+                <a:cs typeface="Calibri"/>
+                <a:sym typeface="Calibri"/>
+              </a:rPr>
+              <a:t>AC Outlet Box - pre-wired box with breakers and AC outlets</a:t>
+            </a:r>
+            <a:endParaRPr sz="1200">
+              <a:solidFill>
+                <a:schemeClr val="dk1"/>
+              </a:solidFill>
+              <a:latin typeface="Calibri"/>
+              <a:ea typeface="Calibri"/>
+              <a:cs typeface="Calibri"/>
+              <a:sym typeface="Calibri"/>
+            </a:endParaRPr>
+          </a:p>
+          <a:p>
+            <a:pPr marL="94060" marR="0" lvl="0" indent="-103585" algn="l" rtl="0">
+              <a:spcBef>
+                <a:spcPts val="0"/>
+              </a:spcBef>
+              <a:spcAft>
+                <a:spcPts val="0"/>
+              </a:spcAft>
+              <a:buClr>
+                <a:schemeClr val="dk1"/>
+              </a:buClr>
+              <a:buSzPts val="1200"/>
+              <a:buFont typeface="Calibri"/>
+              <a:buChar char="•"/>
+            </a:pPr>
+            <a:r>
+              <a:rPr lang="en-US" sz="1200">
+                <a:solidFill>
+                  <a:schemeClr val="dk1"/>
+                </a:solidFill>
+                <a:latin typeface="Calibri"/>
+                <a:ea typeface="Calibri"/>
+                <a:cs typeface="Calibri"/>
+                <a:sym typeface="Calibri"/>
+              </a:rPr>
+              <a:t>Use flexible conduit (hoses) to protect the wiring</a:t>
+            </a:r>
+            <a:endParaRPr sz="1200">
+              <a:solidFill>
+                <a:schemeClr val="dk1"/>
+              </a:solidFill>
+              <a:latin typeface="Calibri"/>
+              <a:ea typeface="Calibri"/>
+              <a:cs typeface="Calibri"/>
+              <a:sym typeface="Calibri"/>
+            </a:endParaRPr>
+          </a:p>
+        </p:txBody>
+      </p:sp>
+      <p:sp>
+        <p:nvSpPr>
+          <p:cNvPr id="122" name="Google Shape;122;p17"/>
+          <p:cNvSpPr txBox="1"/>
+          <p:nvPr/>
+        </p:nvSpPr>
+        <p:spPr>
+          <a:xfrm>
+            <a:off x="6123525" y="2218825"/>
+            <a:ext cx="867900" cy="253800"/>
+          </a:xfrm>
+          <a:prstGeom prst="rect">
+            <a:avLst/>
+          </a:prstGeom>
+          <a:solidFill>
+            <a:srgbClr val="FFF2CC"/>
+          </a:solidFill>
+          <a:ln w="7150" cap="flat" cmpd="sng">
+            <a:solidFill>
+              <a:srgbClr val="FF0000"/>
+            </a:solidFill>
+            <a:prstDash val="solid"/>
+            <a:round/>
+            <a:headEnd type="none" w="sm" len="sm"/>
+            <a:tailEnd type="none" w="sm" len="sm"/>
+          </a:ln>
+        </p:spPr>
+        <p:txBody>
+          <a:bodyPr spcFirstLastPara="1" wrap="square" lIns="68575" tIns="34275" rIns="68575" bIns="34275" anchor="t" anchorCtr="0">
+            <a:spAutoFit/>
+          </a:bodyPr>
+          <a:lstStyle/>
+          <a:p>
+            <a:pPr marL="0" marR="0" lvl="0" indent="0" algn="ctr" rtl="0">
+              <a:spcBef>
+                <a:spcPts val="0"/>
+              </a:spcBef>
+              <a:spcAft>
+                <a:spcPts val="0"/>
+              </a:spcAft>
+              <a:buNone/>
+            </a:pPr>
+            <a:r>
+              <a:rPr lang="en-US" sz="1200">
+                <a:solidFill>
+                  <a:schemeClr val="dk1"/>
+                </a:solidFill>
+                <a:latin typeface="Calibri"/>
+                <a:ea typeface="Calibri"/>
+                <a:cs typeface="Calibri"/>
+                <a:sym typeface="Calibri"/>
+              </a:rPr>
+              <a:t>Battery</a:t>
+            </a:r>
+            <a:endParaRPr sz="1200">
+              <a:solidFill>
+                <a:schemeClr val="dk1"/>
+              </a:solidFill>
+              <a:latin typeface="Calibri"/>
+              <a:ea typeface="Calibri"/>
+              <a:cs typeface="Calibri"/>
+              <a:sym typeface="Calibri"/>
+            </a:endParaRPr>
+          </a:p>
+        </p:txBody>
+      </p:sp>
+      <p:sp>
+        <p:nvSpPr>
+          <p:cNvPr id="123" name="Google Shape;123;p17"/>
+          <p:cNvSpPr txBox="1"/>
+          <p:nvPr/>
+        </p:nvSpPr>
+        <p:spPr>
+          <a:xfrm>
+            <a:off x="6514050" y="209550"/>
+            <a:ext cx="867900" cy="253800"/>
+          </a:xfrm>
+          <a:prstGeom prst="rect">
+            <a:avLst/>
+          </a:prstGeom>
+          <a:solidFill>
+            <a:srgbClr val="FFF2CC"/>
+          </a:solidFill>
+          <a:ln w="7150" cap="flat" cmpd="sng">
+            <a:solidFill>
+              <a:srgbClr val="FF0000"/>
+            </a:solidFill>
+            <a:prstDash val="solid"/>
+            <a:round/>
+            <a:headEnd type="none" w="sm" len="sm"/>
+            <a:tailEnd type="none" w="sm" len="sm"/>
+          </a:ln>
+        </p:spPr>
+        <p:txBody>
+          <a:bodyPr spcFirstLastPara="1" wrap="square" lIns="68575" tIns="34275" rIns="68575" bIns="34275" anchor="t" anchorCtr="0">
+            <a:spAutoFit/>
+          </a:bodyPr>
+          <a:lstStyle/>
+          <a:p>
+            <a:pPr marL="0" marR="0" lvl="0" indent="0" algn="ctr" rtl="0">
+              <a:spcBef>
+                <a:spcPts val="0"/>
+              </a:spcBef>
+              <a:spcAft>
+                <a:spcPts val="0"/>
+              </a:spcAft>
+              <a:buNone/>
+            </a:pPr>
+            <a:r>
+              <a:rPr lang="en-US" sz="1200">
+                <a:solidFill>
+                  <a:schemeClr val="dk1"/>
+                </a:solidFill>
+                <a:latin typeface="Calibri"/>
+                <a:ea typeface="Calibri"/>
+                <a:cs typeface="Calibri"/>
+                <a:sym typeface="Calibri"/>
+              </a:rPr>
+              <a:t>All-in-one</a:t>
+            </a:r>
+            <a:endParaRPr sz="1200">
+              <a:solidFill>
+                <a:schemeClr val="dk1"/>
+              </a:solidFill>
+              <a:latin typeface="Calibri"/>
+              <a:ea typeface="Calibri"/>
+              <a:cs typeface="Calibri"/>
+              <a:sym typeface="Calibri"/>
+            </a:endParaRPr>
+          </a:p>
+        </p:txBody>
+      </p:sp>
+      <p:sp>
+        <p:nvSpPr>
+          <p:cNvPr id="124" name="Google Shape;124;p17"/>
+          <p:cNvSpPr txBox="1"/>
+          <p:nvPr/>
+        </p:nvSpPr>
+        <p:spPr>
+          <a:xfrm>
+            <a:off x="5381625" y="752475"/>
+            <a:ext cx="635100" cy="253800"/>
+          </a:xfrm>
+          <a:prstGeom prst="rect">
+            <a:avLst/>
+          </a:prstGeom>
+          <a:solidFill>
+            <a:srgbClr val="FFF2CC"/>
+          </a:solidFill>
+          <a:ln w="7150" cap="flat" cmpd="sng">
+            <a:solidFill>
+              <a:srgbClr val="FF0000"/>
+            </a:solidFill>
+            <a:prstDash val="solid"/>
+            <a:round/>
+            <a:headEnd type="none" w="sm" len="sm"/>
+            <a:tailEnd type="none" w="sm" len="sm"/>
+          </a:ln>
+        </p:spPr>
+        <p:txBody>
+          <a:bodyPr spcFirstLastPara="1" wrap="square" lIns="68575" tIns="34275" rIns="68575" bIns="34275" anchor="t" anchorCtr="0">
+            <a:spAutoFit/>
+          </a:bodyPr>
+          <a:lstStyle/>
+          <a:p>
+            <a:pPr marL="0" marR="0" lvl="0" indent="0" algn="ctr" rtl="0">
+              <a:spcBef>
+                <a:spcPts val="0"/>
+              </a:spcBef>
+              <a:spcAft>
+                <a:spcPts val="0"/>
+              </a:spcAft>
+              <a:buNone/>
+            </a:pPr>
+            <a:r>
+              <a:rPr lang="en-US" sz="1200">
+                <a:solidFill>
+                  <a:schemeClr val="dk1"/>
+                </a:solidFill>
+                <a:latin typeface="Calibri"/>
+                <a:ea typeface="Calibri"/>
+                <a:cs typeface="Calibri"/>
+                <a:sym typeface="Calibri"/>
+              </a:rPr>
+              <a:t>outlets</a:t>
+            </a:r>
+            <a:endParaRPr sz="1200">
+              <a:solidFill>
+                <a:schemeClr val="dk1"/>
+              </a:solidFill>
+              <a:latin typeface="Calibri"/>
+              <a:ea typeface="Calibri"/>
+              <a:cs typeface="Calibri"/>
+              <a:sym typeface="Calibri"/>
+            </a:endParaRPr>
+          </a:p>
+        </p:txBody>
+      </p:sp>
+      <p:sp>
+        <p:nvSpPr>
+          <p:cNvPr id="125" name="Google Shape;125;p17"/>
+          <p:cNvSpPr txBox="1"/>
+          <p:nvPr/>
+        </p:nvSpPr>
+        <p:spPr>
+          <a:xfrm>
+            <a:off x="7486650" y="1362075"/>
+            <a:ext cx="876300" cy="253800"/>
+          </a:xfrm>
+          <a:prstGeom prst="rect">
+            <a:avLst/>
+          </a:prstGeom>
+          <a:solidFill>
+            <a:srgbClr val="FFF2CC"/>
+          </a:solidFill>
+          <a:ln w="7150" cap="flat" cmpd="sng">
+            <a:solidFill>
+              <a:srgbClr val="FF0000"/>
+            </a:solidFill>
+            <a:prstDash val="solid"/>
+            <a:round/>
+            <a:headEnd type="none" w="sm" len="sm"/>
+            <a:tailEnd type="none" w="sm" len="sm"/>
+          </a:ln>
+        </p:spPr>
+        <p:txBody>
+          <a:bodyPr spcFirstLastPara="1" wrap="square" lIns="68575" tIns="34275" rIns="68575" bIns="34275" anchor="t" anchorCtr="0">
+            <a:spAutoFit/>
+          </a:bodyPr>
+          <a:lstStyle/>
+          <a:p>
+            <a:pPr marL="0" marR="0" lvl="0" indent="0" algn="ctr" rtl="0">
+              <a:spcBef>
+                <a:spcPts val="0"/>
+              </a:spcBef>
+              <a:spcAft>
+                <a:spcPts val="0"/>
+              </a:spcAft>
+              <a:buNone/>
+            </a:pPr>
+            <a:r>
+              <a:rPr lang="en-US" sz="1200">
+                <a:solidFill>
+                  <a:schemeClr val="dk1"/>
+                </a:solidFill>
+                <a:latin typeface="Calibri"/>
+                <a:ea typeface="Calibri"/>
+                <a:cs typeface="Calibri"/>
+                <a:sym typeface="Calibri"/>
+              </a:rPr>
+              <a:t>disconnect</a:t>
+            </a:r>
+            <a:endParaRPr sz="1200">
+              <a:solidFill>
+                <a:schemeClr val="dk1"/>
+              </a:solidFill>
+              <a:latin typeface="Calibri"/>
+              <a:ea typeface="Calibri"/>
+              <a:cs typeface="Calibri"/>
+              <a:sym typeface="Calibri"/>
+            </a:endParaRPr>
+          </a:p>
+        </p:txBody>
+      </p:sp>
+      <p:sp>
+        <p:nvSpPr>
+          <p:cNvPr id="2" name="Google Shape;127;p17">
+            <a:extLst>
+              <a:ext uri="{FF2B5EF4-FFF2-40B4-BE49-F238E27FC236}">
+                <a16:creationId xmlns:a16="http://schemas.microsoft.com/office/drawing/2014/main" id="{FE9230C7-CFBB-ABCB-8DBD-808CCFA0D214}"/>
+              </a:ext>
+            </a:extLst>
+          </p:cNvPr>
+          <p:cNvSpPr txBox="1"/>
+          <p:nvPr/>
+        </p:nvSpPr>
+        <p:spPr>
+          <a:xfrm>
+            <a:off x="62958" y="2800350"/>
+            <a:ext cx="4473600" cy="1546547"/>
+          </a:xfrm>
+          <a:prstGeom prst="rect">
+            <a:avLst/>
+          </a:prstGeom>
+          <a:solidFill>
+            <a:srgbClr val="FFF2CC"/>
+          </a:solidFill>
+          <a:ln w="7150" cap="flat" cmpd="sng">
+            <a:solidFill>
+              <a:srgbClr val="FF0000"/>
+            </a:solidFill>
+            <a:prstDash val="solid"/>
+            <a:round/>
+            <a:headEnd type="none" w="sm" len="sm"/>
+            <a:tailEnd type="none" w="sm" len="sm"/>
+          </a:ln>
+        </p:spPr>
+        <p:txBody>
+          <a:bodyPr spcFirstLastPara="1" wrap="square" lIns="68575" tIns="34275" rIns="68575" bIns="34275" anchor="t" anchorCtr="0">
+            <a:spAutoFit/>
+          </a:bodyPr>
+          <a:lstStyle/>
+          <a:p>
+            <a:pPr marL="94060" lvl="0" indent="-103585">
+              <a:buClr>
+                <a:schemeClr val="dk1"/>
+              </a:buClr>
+              <a:buSzPts val="1200"/>
+              <a:buFont typeface="Calibri"/>
+              <a:buChar char="•"/>
+            </a:pPr>
+            <a:r>
+              <a:rPr lang="en-US" sz="1200" dirty="0">
+                <a:solidFill>
+                  <a:schemeClr val="dk1"/>
+                </a:solidFill>
+                <a:latin typeface="Calibri"/>
+                <a:ea typeface="Calibri"/>
+                <a:cs typeface="Calibri"/>
+                <a:sym typeface="Calibri"/>
+              </a:rPr>
+              <a:t>To combine solar battery power with grid power automatically, you need a hybrid inverter with the Automatic Transfer Switch (ATS)</a:t>
+            </a:r>
+            <a:br>
+              <a:rPr lang="en-US" sz="1200" dirty="0">
+                <a:solidFill>
+                  <a:schemeClr val="dk1"/>
+                </a:solidFill>
+                <a:latin typeface="Calibri"/>
+                <a:ea typeface="Calibri"/>
+                <a:cs typeface="Calibri"/>
+                <a:sym typeface="Calibri"/>
+              </a:rPr>
+            </a:br>
+            <a:r>
+              <a:rPr lang="en-US" sz="1200" dirty="0">
+                <a:solidFill>
+                  <a:schemeClr val="dk1"/>
+                </a:solidFill>
+                <a:latin typeface="Calibri"/>
+                <a:ea typeface="Calibri"/>
+                <a:cs typeface="Calibri"/>
+                <a:sym typeface="Calibri"/>
+              </a:rPr>
+              <a:t>to switch loads from solar battery to grid power when the battery level becomes low</a:t>
+            </a:r>
+          </a:p>
+          <a:p>
+            <a:pPr marL="94060" lvl="0" indent="-103585">
+              <a:buClr>
+                <a:schemeClr val="dk1"/>
+              </a:buClr>
+              <a:buSzPts val="1200"/>
+              <a:buFont typeface="Calibri"/>
+              <a:buChar char="•"/>
+            </a:pPr>
+            <a:r>
+              <a:rPr lang="en-US" sz="1200" dirty="0">
+                <a:solidFill>
+                  <a:schemeClr val="dk1"/>
+                </a:solidFill>
+                <a:latin typeface="Calibri"/>
+                <a:ea typeface="Calibri"/>
+                <a:cs typeface="Calibri"/>
+                <a:sym typeface="Calibri"/>
+              </a:rPr>
+              <a:t>Popular DIY-friendly options include EG4, </a:t>
+            </a:r>
+            <a:r>
+              <a:rPr lang="en-US" sz="1200" dirty="0" err="1">
+                <a:solidFill>
+                  <a:schemeClr val="dk1"/>
+                </a:solidFill>
+                <a:latin typeface="Calibri"/>
+                <a:ea typeface="Calibri"/>
+                <a:cs typeface="Calibri"/>
+                <a:sym typeface="Calibri"/>
+              </a:rPr>
+              <a:t>Growatt</a:t>
+            </a:r>
+            <a:r>
+              <a:rPr lang="en-US" sz="1200" dirty="0">
+                <a:solidFill>
+                  <a:schemeClr val="dk1"/>
+                </a:solidFill>
+                <a:latin typeface="Calibri"/>
+                <a:ea typeface="Calibri"/>
+                <a:cs typeface="Calibri"/>
+                <a:sym typeface="Calibri"/>
+              </a:rPr>
+              <a:t>, MPP Solar, and the premium Victron </a:t>
+            </a:r>
+            <a:r>
+              <a:rPr lang="en-US" sz="1200" dirty="0" err="1">
+                <a:solidFill>
+                  <a:schemeClr val="dk1"/>
+                </a:solidFill>
+                <a:latin typeface="Calibri"/>
+                <a:ea typeface="Calibri"/>
+                <a:cs typeface="Calibri"/>
+                <a:sym typeface="Calibri"/>
+              </a:rPr>
+              <a:t>MultiPlus</a:t>
+            </a:r>
+            <a:endParaRPr lang="en-US" sz="1200" dirty="0">
+              <a:solidFill>
+                <a:schemeClr val="dk1"/>
+              </a:solidFill>
+              <a:latin typeface="Calibri"/>
+              <a:ea typeface="Calibri"/>
+              <a:cs typeface="Calibri"/>
+              <a:sym typeface="Calibri"/>
+            </a:endParaRPr>
+          </a:p>
+          <a:p>
+            <a:pPr marL="94060" lvl="0" indent="-103585">
+              <a:buClr>
+                <a:schemeClr val="dk1"/>
+              </a:buClr>
+              <a:buSzPts val="1200"/>
+              <a:buFont typeface="Calibri"/>
+              <a:buChar char="•"/>
+            </a:pPr>
+            <a:r>
+              <a:rPr lang="en-US" sz="1200" dirty="0">
+                <a:solidFill>
+                  <a:schemeClr val="dk1"/>
+                </a:solidFill>
+                <a:latin typeface="Calibri"/>
+                <a:ea typeface="Calibri"/>
+                <a:cs typeface="Calibri"/>
+                <a:sym typeface="Calibri"/>
+              </a:rPr>
+              <a:t>These units can also blend both sources simultaneously, pulling partial power from each when needed.</a:t>
+            </a:r>
+            <a:endParaRPr sz="1200" dirty="0">
+              <a:solidFill>
+                <a:schemeClr val="dk1"/>
+              </a:solidFill>
+              <a:latin typeface="Calibri"/>
+              <a:ea typeface="Calibri"/>
+              <a:cs typeface="Calibri"/>
+              <a:sym typeface="Calibri"/>
+            </a:endParaRPr>
+          </a:p>
+        </p:txBody>
+      </p:sp>
+    </p:spTree>
+  </p:cSld>
+  <p:clrMapOvr>
+    <a:masterClrMapping/>
+  </p:clrMapOvr>
+</p:sld>
+</file>
+
+<file path=ppt/slides/slide2.xml><?xml version="1.0" encoding="utf-8"?>
+<p:sld xmlns:a="http://schemas.openxmlformats.org/drawingml/2006/main" xmlns:r="http://schemas.openxmlformats.org/officeDocument/2006/relationships" xmlns:p="http://schemas.openxmlformats.org/presentationml/2006/main">
+  <p:cSld>
+    <p:spTree>
+      <p:nvGrpSpPr>
+        <p:cNvPr id="1" name="Shape 144"/>
+        <p:cNvGrpSpPr/>
+        <p:nvPr/>
+      </p:nvGrpSpPr>
+      <p:grpSpPr>
+        <a:xfrm>
+          <a:off x="0" y="0"/>
+          <a:ext cx="0" cy="0"/>
+          <a:chOff x="0" y="0"/>
+          <a:chExt cx="0" cy="0"/>
+        </a:xfrm>
+      </p:grpSpPr>
+      <p:sp>
+        <p:nvSpPr>
+          <p:cNvPr id="145" name="Google Shape;145;p19"/>
+          <p:cNvSpPr txBox="1"/>
+          <p:nvPr/>
+        </p:nvSpPr>
+        <p:spPr>
+          <a:xfrm>
+            <a:off x="65625" y="24338"/>
+            <a:ext cx="3988200" cy="346200"/>
+          </a:xfrm>
+          <a:prstGeom prst="rect">
+            <a:avLst/>
+          </a:prstGeom>
+          <a:noFill/>
+          <a:ln>
+            <a:noFill/>
+          </a:ln>
+        </p:spPr>
+        <p:txBody>
+          <a:bodyPr spcFirstLastPara="1" wrap="square" lIns="68575" tIns="34275" rIns="68575" bIns="34275" anchor="t" anchorCtr="0">
+            <a:spAutoFit/>
+          </a:bodyPr>
+          <a:lstStyle/>
+          <a:p>
+            <a:pPr marL="0" marR="0" lvl="0" indent="0" algn="l" rtl="0">
+              <a:spcBef>
+                <a:spcPts val="0"/>
+              </a:spcBef>
+              <a:spcAft>
+                <a:spcPts val="0"/>
+              </a:spcAft>
+              <a:buNone/>
+            </a:pPr>
+            <a:r>
+              <a:rPr lang="en-US" sz="1800" b="1" i="0" u="none" strike="noStrike" cap="none" dirty="0">
+                <a:solidFill>
+                  <a:schemeClr val="dk1"/>
+                </a:solidFill>
+                <a:latin typeface="Calibri"/>
+                <a:ea typeface="Calibri"/>
+                <a:cs typeface="Calibri"/>
+                <a:sym typeface="Calibri"/>
+              </a:rPr>
+              <a:t>Recommendations from "What's Next"</a:t>
+            </a:r>
+            <a:endParaRPr sz="1800" b="1" i="0" dirty="0">
+              <a:solidFill>
+                <a:srgbClr val="333333"/>
+              </a:solidFill>
+              <a:latin typeface="Calibri"/>
+              <a:ea typeface="Calibri"/>
+              <a:cs typeface="Calibri"/>
+              <a:sym typeface="Calibri"/>
+            </a:endParaRPr>
+          </a:p>
+        </p:txBody>
+      </p:sp>
+      <p:pic>
+        <p:nvPicPr>
+          <p:cNvPr id="147" name="Google Shape;147;p19"/>
+          <p:cNvPicPr preferRelativeResize="0"/>
+          <p:nvPr/>
+        </p:nvPicPr>
+        <p:blipFill>
+          <a:blip r:embed="rId3" cstate="email">
+            <a:alphaModFix/>
+            <a:extLst>
+              <a:ext uri="{28A0092B-C50C-407E-A947-70E740481C1C}">
+                <a14:useLocalDpi xmlns:a14="http://schemas.microsoft.com/office/drawing/2010/main"/>
+              </a:ext>
+            </a:extLst>
+          </a:blip>
+          <a:stretch>
+            <a:fillRect/>
+          </a:stretch>
+        </p:blipFill>
+        <p:spPr>
+          <a:xfrm>
+            <a:off x="4699125" y="385850"/>
+            <a:ext cx="2006476" cy="2041799"/>
+          </a:xfrm>
+          <a:prstGeom prst="rect">
+            <a:avLst/>
+          </a:prstGeom>
+          <a:noFill/>
+          <a:ln w="9525" cap="flat" cmpd="sng">
+            <a:solidFill>
+              <a:srgbClr val="FF0000"/>
+            </a:solidFill>
+            <a:prstDash val="solid"/>
+            <a:round/>
+            <a:headEnd type="none" w="sm" len="sm"/>
+            <a:tailEnd type="none" w="sm" len="sm"/>
+          </a:ln>
+        </p:spPr>
+      </p:pic>
+      <p:sp>
+        <p:nvSpPr>
+          <p:cNvPr id="3" name="Google Shape;149;p19">
+            <a:extLst>
+              <a:ext uri="{FF2B5EF4-FFF2-40B4-BE49-F238E27FC236}">
+                <a16:creationId xmlns:a16="http://schemas.microsoft.com/office/drawing/2014/main" id="{A24E7F80-E6C7-F957-71E9-E650C384BD50}"/>
+              </a:ext>
+            </a:extLst>
+          </p:cNvPr>
+          <p:cNvSpPr txBox="1"/>
+          <p:nvPr/>
+        </p:nvSpPr>
+        <p:spPr>
+          <a:xfrm>
+            <a:off x="91063" y="389836"/>
+            <a:ext cx="4493700" cy="3624039"/>
+          </a:xfrm>
+          <a:prstGeom prst="rect">
+            <a:avLst/>
+          </a:prstGeom>
+          <a:solidFill>
+            <a:srgbClr val="FFF2CC"/>
+          </a:solidFill>
+          <a:ln w="7150" cap="flat" cmpd="sng">
+            <a:solidFill>
+              <a:srgbClr val="FF0000"/>
+            </a:solidFill>
+            <a:prstDash val="solid"/>
+            <a:round/>
+            <a:headEnd type="none" w="sm" len="sm"/>
+            <a:tailEnd type="none" w="sm" len="sm"/>
+          </a:ln>
+        </p:spPr>
+        <p:txBody>
+          <a:bodyPr spcFirstLastPara="1" wrap="square" lIns="68575" tIns="34275" rIns="68575" bIns="34275" anchor="t" anchorCtr="0">
+            <a:spAutoFit/>
+          </a:bodyPr>
+          <a:lstStyle/>
+          <a:p>
+            <a:pPr marL="94060" lvl="0" indent="-103585">
+              <a:buClr>
+                <a:schemeClr val="dk1"/>
+              </a:buClr>
+              <a:buSzPts val="1200"/>
+              <a:buFont typeface="Arial"/>
+              <a:buChar char="•"/>
+            </a:pPr>
+            <a:r>
+              <a:rPr lang="en-US" sz="1100" dirty="0">
+                <a:solidFill>
+                  <a:schemeClr val="dk1"/>
+                </a:solidFill>
+                <a:latin typeface="Calibri" panose="020F0502020204030204" pitchFamily="34" charset="0"/>
+                <a:ea typeface="Calibri"/>
+                <a:cs typeface="Calibri" panose="020F0502020204030204" pitchFamily="34" charset="0"/>
+                <a:sym typeface="Calibri"/>
+                <a:hlinkClick r:id="rId4"/>
+              </a:rPr>
+              <a:t>https://</a:t>
+            </a:r>
+            <a:r>
+              <a:rPr lang="en-US" sz="1100" dirty="0" err="1">
+                <a:solidFill>
+                  <a:schemeClr val="dk1"/>
+                </a:solidFill>
+                <a:latin typeface="Calibri" panose="020F0502020204030204" pitchFamily="34" charset="0"/>
+                <a:ea typeface="Calibri"/>
+                <a:cs typeface="Calibri" panose="020F0502020204030204" pitchFamily="34" charset="0"/>
+                <a:sym typeface="Calibri"/>
+                <a:hlinkClick r:id="rId4"/>
+              </a:rPr>
+              <a:t>www.youtube.com</a:t>
+            </a:r>
+            <a:r>
+              <a:rPr lang="en-US" sz="1100" dirty="0">
+                <a:solidFill>
+                  <a:schemeClr val="dk1"/>
+                </a:solidFill>
+                <a:latin typeface="Calibri" panose="020F0502020204030204" pitchFamily="34" charset="0"/>
+                <a:ea typeface="Calibri"/>
+                <a:cs typeface="Calibri" panose="020F0502020204030204" pitchFamily="34" charset="0"/>
+                <a:sym typeface="Calibri"/>
+                <a:hlinkClick r:id="rId4"/>
+              </a:rPr>
+              <a:t>/@WattsNextSolar25/videos </a:t>
+            </a:r>
+            <a:endParaRPr lang="en-US" sz="1100" dirty="0">
+              <a:solidFill>
+                <a:schemeClr val="dk1"/>
+              </a:solidFill>
+              <a:latin typeface="Calibri" panose="020F0502020204030204" pitchFamily="34" charset="0"/>
+              <a:ea typeface="Calibri"/>
+              <a:cs typeface="Calibri" panose="020F0502020204030204" pitchFamily="34" charset="0"/>
+              <a:sym typeface="Calibri"/>
+            </a:endParaRPr>
+          </a:p>
+          <a:p>
+            <a:pPr marL="94060" lvl="0" indent="-103585">
+              <a:buClr>
+                <a:schemeClr val="dk1"/>
+              </a:buClr>
+              <a:buSzPts val="1200"/>
+              <a:buFont typeface="Arial"/>
+              <a:buChar char="•"/>
+            </a:pPr>
+            <a:r>
+              <a:rPr lang="en-US" sz="1100" dirty="0" err="1">
+                <a:solidFill>
+                  <a:schemeClr val="dk1"/>
+                </a:solidFill>
+                <a:latin typeface="Calibri" panose="020F0502020204030204" pitchFamily="34" charset="0"/>
+                <a:ea typeface="Calibri"/>
+                <a:cs typeface="Calibri" panose="020F0502020204030204" pitchFamily="34" charset="0"/>
+                <a:sym typeface="Calibri"/>
+              </a:rPr>
+              <a:t>FOSSiBOT</a:t>
+            </a:r>
+            <a:r>
+              <a:rPr lang="en-US" sz="1100" dirty="0">
+                <a:solidFill>
+                  <a:schemeClr val="dk1"/>
+                </a:solidFill>
+                <a:latin typeface="Calibri" panose="020F0502020204030204" pitchFamily="34" charset="0"/>
+                <a:ea typeface="Calibri"/>
+                <a:cs typeface="Calibri" panose="020F0502020204030204" pitchFamily="34" charset="0"/>
+                <a:sym typeface="Calibri"/>
+              </a:rPr>
+              <a:t> F1800 (1,024 </a:t>
+            </a:r>
+            <a:r>
+              <a:rPr lang="en-US" sz="1100" dirty="0" err="1">
+                <a:solidFill>
+                  <a:schemeClr val="dk1"/>
+                </a:solidFill>
+                <a:latin typeface="Calibri" panose="020F0502020204030204" pitchFamily="34" charset="0"/>
+                <a:ea typeface="Calibri"/>
+                <a:cs typeface="Calibri" panose="020F0502020204030204" pitchFamily="34" charset="0"/>
+                <a:sym typeface="Calibri"/>
+              </a:rPr>
+              <a:t>Wh</a:t>
+            </a:r>
+            <a:r>
+              <a:rPr lang="en-US" sz="1100" dirty="0">
+                <a:solidFill>
+                  <a:schemeClr val="dk1"/>
+                </a:solidFill>
+                <a:latin typeface="Calibri" panose="020F0502020204030204" pitchFamily="34" charset="0"/>
+                <a:ea typeface="Calibri"/>
+                <a:cs typeface="Calibri" panose="020F0502020204030204" pitchFamily="34" charset="0"/>
+                <a:sym typeface="Calibri"/>
+              </a:rPr>
+              <a:t>, 1,800 W) – power station (</a:t>
+            </a:r>
+            <a:r>
+              <a:rPr lang="en-US" sz="1100" dirty="0" err="1">
+                <a:solidFill>
+                  <a:schemeClr val="dk1"/>
+                </a:solidFill>
+                <a:latin typeface="Calibri" panose="020F0502020204030204" pitchFamily="34" charset="0"/>
+                <a:ea typeface="Calibri"/>
+                <a:cs typeface="Calibri" panose="020F0502020204030204" pitchFamily="34" charset="0"/>
+                <a:sym typeface="Calibri"/>
+              </a:rPr>
+              <a:t>battery+inverter+charge</a:t>
+            </a:r>
+            <a:r>
+              <a:rPr lang="en-US" sz="1100" dirty="0">
+                <a:solidFill>
+                  <a:schemeClr val="dk1"/>
+                </a:solidFill>
+                <a:latin typeface="Calibri" panose="020F0502020204030204" pitchFamily="34" charset="0"/>
+                <a:ea typeface="Calibri"/>
+                <a:cs typeface="Calibri" panose="020F0502020204030204" pitchFamily="34" charset="0"/>
+                <a:sym typeface="Calibri"/>
+              </a:rPr>
+              <a:t> controller). Eco mode (solar first, grid backup)</a:t>
+            </a:r>
+          </a:p>
+          <a:p>
+            <a:pPr marL="94060" lvl="0" indent="-103585">
+              <a:buClr>
+                <a:schemeClr val="dk1"/>
+              </a:buClr>
+              <a:buSzPts val="1200"/>
+              <a:buFont typeface="Arial"/>
+              <a:buChar char="•"/>
+            </a:pPr>
+            <a:r>
+              <a:rPr lang="en-US" sz="1100" dirty="0" err="1">
+                <a:solidFill>
+                  <a:schemeClr val="dk1"/>
+                </a:solidFill>
+                <a:latin typeface="Calibri" panose="020F0502020204030204" pitchFamily="34" charset="0"/>
+                <a:ea typeface="Calibri"/>
+                <a:cs typeface="Calibri" panose="020F0502020204030204" pitchFamily="34" charset="0"/>
+                <a:sym typeface="Calibri"/>
+              </a:rPr>
+              <a:t>Aferiy</a:t>
+            </a:r>
+            <a:r>
+              <a:rPr lang="en-US" sz="1100" dirty="0">
+                <a:solidFill>
+                  <a:schemeClr val="dk1"/>
+                </a:solidFill>
+                <a:latin typeface="Calibri" panose="020F0502020204030204" pitchFamily="34" charset="0"/>
+                <a:ea typeface="Calibri"/>
+                <a:cs typeface="Calibri" panose="020F0502020204030204" pitchFamily="34" charset="0"/>
+                <a:sym typeface="Calibri"/>
+              </a:rPr>
+              <a:t> P310 (3,840 </a:t>
+            </a:r>
+            <a:r>
+              <a:rPr lang="en-US" sz="1100" dirty="0" err="1">
+                <a:solidFill>
+                  <a:schemeClr val="dk1"/>
+                </a:solidFill>
+                <a:latin typeface="Calibri" panose="020F0502020204030204" pitchFamily="34" charset="0"/>
+                <a:ea typeface="Calibri"/>
+                <a:cs typeface="Calibri" panose="020F0502020204030204" pitchFamily="34" charset="0"/>
+                <a:sym typeface="Calibri"/>
+              </a:rPr>
+              <a:t>Wh</a:t>
+            </a:r>
+            <a:r>
+              <a:rPr lang="en-US" sz="1100" dirty="0">
+                <a:solidFill>
+                  <a:schemeClr val="dk1"/>
+                </a:solidFill>
+                <a:latin typeface="Calibri" panose="020F0502020204030204" pitchFamily="34" charset="0"/>
+                <a:ea typeface="Calibri"/>
+                <a:cs typeface="Calibri" panose="020F0502020204030204" pitchFamily="34" charset="0"/>
+                <a:sym typeface="Calibri"/>
+              </a:rPr>
+              <a:t>, expandable to 11,520 </a:t>
+            </a:r>
+            <a:r>
+              <a:rPr lang="en-US" sz="1100" dirty="0" err="1">
+                <a:solidFill>
+                  <a:schemeClr val="dk1"/>
+                </a:solidFill>
+                <a:latin typeface="Calibri" panose="020F0502020204030204" pitchFamily="34" charset="0"/>
+                <a:ea typeface="Calibri"/>
+                <a:cs typeface="Calibri" panose="020F0502020204030204" pitchFamily="34" charset="0"/>
+                <a:sym typeface="Calibri"/>
+              </a:rPr>
+              <a:t>Wh</a:t>
+            </a:r>
+            <a:r>
+              <a:rPr lang="en-US" sz="1100" dirty="0">
+                <a:solidFill>
+                  <a:schemeClr val="dk1"/>
+                </a:solidFill>
+                <a:latin typeface="Calibri" panose="020F0502020204030204" pitchFamily="34" charset="0"/>
+                <a:ea typeface="Calibri"/>
+                <a:cs typeface="Calibri" panose="020F0502020204030204" pitchFamily="34" charset="0"/>
+                <a:sym typeface="Calibri"/>
+              </a:rPr>
+              <a:t>) - very good deal</a:t>
+            </a:r>
+          </a:p>
+          <a:p>
+            <a:pPr marL="94060" lvl="0" indent="-103585">
+              <a:buClr>
+                <a:schemeClr val="dk1"/>
+              </a:buClr>
+              <a:buSzPts val="1200"/>
+              <a:buFont typeface="Arial"/>
+              <a:buChar char="•"/>
+            </a:pPr>
+            <a:r>
+              <a:rPr lang="en-US" sz="1100" dirty="0" err="1">
+                <a:solidFill>
+                  <a:schemeClr val="dk1"/>
+                </a:solidFill>
+                <a:latin typeface="Calibri" panose="020F0502020204030204" pitchFamily="34" charset="0"/>
+                <a:ea typeface="Calibri"/>
+                <a:cs typeface="Calibri" panose="020F0502020204030204" pitchFamily="34" charset="0"/>
+                <a:sym typeface="Calibri"/>
+              </a:rPr>
+              <a:t>Oupes</a:t>
+            </a:r>
+            <a:r>
+              <a:rPr lang="en-US" sz="1100" dirty="0">
+                <a:solidFill>
+                  <a:schemeClr val="dk1"/>
+                </a:solidFill>
+                <a:latin typeface="Calibri" panose="020F0502020204030204" pitchFamily="34" charset="0"/>
+                <a:ea typeface="Calibri"/>
+                <a:cs typeface="Calibri" panose="020F0502020204030204" pitchFamily="34" charset="0"/>
+                <a:sym typeface="Calibri"/>
+              </a:rPr>
+              <a:t> Guardian 6000 (4,608 </a:t>
+            </a:r>
+            <a:r>
+              <a:rPr lang="en-US" sz="1100" dirty="0" err="1">
+                <a:solidFill>
+                  <a:schemeClr val="dk1"/>
+                </a:solidFill>
+                <a:latin typeface="Calibri" panose="020F0502020204030204" pitchFamily="34" charset="0"/>
+                <a:ea typeface="Calibri"/>
+                <a:cs typeface="Calibri" panose="020F0502020204030204" pitchFamily="34" charset="0"/>
+                <a:sym typeface="Calibri"/>
+              </a:rPr>
+              <a:t>Wh</a:t>
+            </a:r>
+            <a:r>
+              <a:rPr lang="en-US" sz="1100" dirty="0">
+                <a:solidFill>
+                  <a:schemeClr val="dk1"/>
+                </a:solidFill>
+                <a:latin typeface="Calibri" panose="020F0502020204030204" pitchFamily="34" charset="0"/>
+                <a:ea typeface="Calibri"/>
+                <a:cs typeface="Calibri" panose="020F0502020204030204" pitchFamily="34" charset="0"/>
+                <a:sym typeface="Calibri"/>
+              </a:rPr>
+              <a:t>, 3.6KW @ 120 V / 6KW @ 240 V) ~$1,600</a:t>
+            </a:r>
+            <a:br>
+              <a:rPr lang="en-US" sz="1100" dirty="0">
+                <a:solidFill>
+                  <a:schemeClr val="dk1"/>
+                </a:solidFill>
+                <a:latin typeface="Calibri" panose="020F0502020204030204" pitchFamily="34" charset="0"/>
+                <a:ea typeface="Calibri"/>
+                <a:cs typeface="Calibri" panose="020F0502020204030204" pitchFamily="34" charset="0"/>
+                <a:sym typeface="Calibri"/>
+              </a:rPr>
+            </a:br>
+            <a:r>
+              <a:rPr lang="en-US" sz="1100" dirty="0">
+                <a:solidFill>
+                  <a:schemeClr val="dk1"/>
+                </a:solidFill>
+                <a:latin typeface="Calibri" panose="020F0502020204030204" pitchFamily="34" charset="0"/>
+                <a:ea typeface="Calibri"/>
+                <a:cs typeface="Calibri" panose="020F0502020204030204" pitchFamily="34" charset="0"/>
+                <a:sym typeface="Calibri"/>
+              </a:rPr>
+              <a:t> (using self-installed Reliance generator transfer switch)</a:t>
+            </a:r>
+          </a:p>
+          <a:p>
+            <a:pPr marL="94060" lvl="0" indent="-103585">
+              <a:buClr>
+                <a:schemeClr val="dk1"/>
+              </a:buClr>
+              <a:buSzPts val="1200"/>
+              <a:buFont typeface="Arial"/>
+              <a:buChar char="•"/>
+            </a:pPr>
+            <a:r>
+              <a:rPr lang="en-US" sz="1100" dirty="0" err="1">
+                <a:solidFill>
+                  <a:schemeClr val="dk1"/>
+                </a:solidFill>
+                <a:latin typeface="Calibri" panose="020F0502020204030204" pitchFamily="34" charset="0"/>
+                <a:ea typeface="Calibri"/>
+                <a:cs typeface="Calibri" panose="020F0502020204030204" pitchFamily="34" charset="0"/>
+                <a:sym typeface="Calibri"/>
+              </a:rPr>
+              <a:t>EcoFlow</a:t>
+            </a:r>
+            <a:r>
+              <a:rPr lang="en-US" sz="1100" dirty="0">
+                <a:solidFill>
+                  <a:schemeClr val="dk1"/>
+                </a:solidFill>
+                <a:latin typeface="Calibri" panose="020F0502020204030204" pitchFamily="34" charset="0"/>
+                <a:ea typeface="Calibri"/>
+                <a:cs typeface="Calibri" panose="020F0502020204030204" pitchFamily="34" charset="0"/>
+                <a:sym typeface="Calibri"/>
+              </a:rPr>
+              <a:t> - not recommended (expensive, bad customer service)</a:t>
+            </a:r>
+          </a:p>
+          <a:p>
+            <a:pPr marL="94060" lvl="0" indent="-103585">
+              <a:buClr>
+                <a:schemeClr val="dk1"/>
+              </a:buClr>
+              <a:buSzPts val="1200"/>
+              <a:buFont typeface="Arial"/>
+              <a:buChar char="•"/>
+            </a:pPr>
+            <a:r>
+              <a:rPr lang="en-US" sz="1100" dirty="0">
+                <a:solidFill>
+                  <a:schemeClr val="dk1"/>
+                </a:solidFill>
+                <a:latin typeface="Calibri" panose="020F0502020204030204" pitchFamily="34" charset="0"/>
+                <a:ea typeface="Calibri"/>
+                <a:cs typeface="Calibri" panose="020F0502020204030204" pitchFamily="34" charset="0"/>
+                <a:sym typeface="Calibri"/>
+              </a:rPr>
+              <a:t>Even bigger - DIY hybrid:</a:t>
+            </a:r>
+          </a:p>
+          <a:p>
+            <a:pPr marL="401638" lvl="0" indent="-95250">
+              <a:buClr>
+                <a:schemeClr val="dk1"/>
+              </a:buClr>
+              <a:buSzPts val="1200"/>
+              <a:buFont typeface="Arial"/>
+              <a:buChar char="•"/>
+            </a:pPr>
+            <a:r>
+              <a:rPr lang="en-US" sz="1100" dirty="0" err="1">
+                <a:solidFill>
+                  <a:schemeClr val="dk1"/>
+                </a:solidFill>
+                <a:latin typeface="Calibri" panose="020F0502020204030204" pitchFamily="34" charset="0"/>
+                <a:ea typeface="Calibri"/>
+                <a:cs typeface="Calibri" panose="020F0502020204030204" pitchFamily="34" charset="0"/>
+                <a:sym typeface="Calibri"/>
+              </a:rPr>
+              <a:t>WattCycle</a:t>
+            </a:r>
+            <a:r>
+              <a:rPr lang="en-US" sz="1100" dirty="0">
+                <a:solidFill>
+                  <a:schemeClr val="dk1"/>
+                </a:solidFill>
+                <a:latin typeface="Calibri" panose="020F0502020204030204" pitchFamily="34" charset="0"/>
+                <a:ea typeface="Calibri"/>
+                <a:cs typeface="Calibri" panose="020F0502020204030204" pitchFamily="34" charset="0"/>
+                <a:sym typeface="Calibri"/>
+              </a:rPr>
+              <a:t> all-in-one 12,000 W split-phase hybrid inverter</a:t>
+            </a:r>
+          </a:p>
+          <a:p>
+            <a:pPr marL="401638" lvl="0" indent="-95250">
+              <a:buClr>
+                <a:schemeClr val="dk1"/>
+              </a:buClr>
+              <a:buSzPts val="1200"/>
+              <a:buFont typeface="Arial"/>
+              <a:buChar char="•"/>
+            </a:pPr>
+            <a:r>
+              <a:rPr lang="en-US" sz="1100" dirty="0">
+                <a:solidFill>
+                  <a:schemeClr val="dk1"/>
+                </a:solidFill>
+                <a:latin typeface="Calibri" panose="020F0502020204030204" pitchFamily="34" charset="0"/>
+                <a:ea typeface="Calibri"/>
+                <a:cs typeface="Calibri" panose="020F0502020204030204" pitchFamily="34" charset="0"/>
+                <a:sym typeface="Calibri"/>
+              </a:rPr>
+              <a:t>with matched LiFePO4, into the same transfer switch</a:t>
+            </a:r>
+          </a:p>
+          <a:p>
+            <a:pPr marL="94060" lvl="0" indent="-103585">
+              <a:buClr>
+                <a:schemeClr val="dk1"/>
+              </a:buClr>
+              <a:buSzPts val="1200"/>
+              <a:buFont typeface="Arial"/>
+              <a:buChar char="•"/>
+            </a:pPr>
+            <a:r>
+              <a:rPr lang="en-US" sz="1100" dirty="0">
+                <a:solidFill>
+                  <a:schemeClr val="dk1"/>
+                </a:solidFill>
+                <a:latin typeface="Calibri" panose="020F0502020204030204" pitchFamily="34" charset="0"/>
+                <a:ea typeface="Calibri"/>
+                <a:cs typeface="Calibri" panose="020F0502020204030204" pitchFamily="34" charset="0"/>
+                <a:sym typeface="Calibri"/>
+              </a:rPr>
+              <a:t>Recommended solar panels:</a:t>
+            </a:r>
+          </a:p>
+          <a:p>
+            <a:pPr marL="401638" lvl="0" indent="-106363">
+              <a:buClr>
+                <a:schemeClr val="dk1"/>
+              </a:buClr>
+              <a:buSzPts val="1200"/>
+              <a:buFont typeface="Arial"/>
+              <a:buChar char="•"/>
+            </a:pPr>
+            <a:r>
+              <a:rPr lang="en-US" sz="1100" dirty="0" err="1">
+                <a:solidFill>
+                  <a:schemeClr val="dk1"/>
+                </a:solidFill>
+                <a:latin typeface="Calibri" panose="020F0502020204030204" pitchFamily="34" charset="0"/>
+                <a:ea typeface="Calibri"/>
+                <a:cs typeface="Calibri" panose="020F0502020204030204" pitchFamily="34" charset="0"/>
+                <a:sym typeface="Calibri"/>
+              </a:rPr>
+              <a:t>Colsun</a:t>
+            </a:r>
+            <a:r>
+              <a:rPr lang="en-US" sz="1100" dirty="0">
+                <a:solidFill>
+                  <a:schemeClr val="dk1"/>
+                </a:solidFill>
+                <a:latin typeface="Calibri" panose="020F0502020204030204" pitchFamily="34" charset="0"/>
+                <a:ea typeface="Calibri"/>
+                <a:cs typeface="Calibri" panose="020F0502020204030204" pitchFamily="34" charset="0"/>
+                <a:sym typeface="Calibri"/>
+              </a:rPr>
+              <a:t> 215 W bifacial (56"x30")</a:t>
+            </a:r>
+            <a:r>
+              <a:rPr lang="en-US" sz="1100" dirty="0">
+                <a:solidFill>
+                  <a:schemeClr val="dk1"/>
+                </a:solidFill>
+                <a:latin typeface="Calibri"/>
+                <a:ea typeface="Calibri"/>
+                <a:cs typeface="Calibri"/>
+                <a:sym typeface="Calibri"/>
+              </a:rPr>
+              <a:t>efficient, bifacial(captures light from both sides), anti-shading technology</a:t>
+            </a:r>
+            <a:endParaRPr lang="en-US" sz="1100" dirty="0">
+              <a:solidFill>
+                <a:schemeClr val="dk1"/>
+              </a:solidFill>
+              <a:latin typeface="Calibri" panose="020F0502020204030204" pitchFamily="34" charset="0"/>
+              <a:ea typeface="Calibri"/>
+              <a:cs typeface="Calibri" panose="020F0502020204030204" pitchFamily="34" charset="0"/>
+              <a:sym typeface="Calibri"/>
+            </a:endParaRPr>
+          </a:p>
+          <a:p>
+            <a:pPr marL="401638" lvl="0" indent="-106363">
+              <a:buClr>
+                <a:schemeClr val="dk1"/>
+              </a:buClr>
+              <a:buSzPts val="1200"/>
+              <a:buFont typeface="Arial"/>
+              <a:buChar char="•"/>
+            </a:pPr>
+            <a:r>
+              <a:rPr lang="en-US" sz="1100" dirty="0" err="1">
+                <a:solidFill>
+                  <a:schemeClr val="dk1"/>
+                </a:solidFill>
+                <a:latin typeface="Calibri" panose="020F0502020204030204" pitchFamily="34" charset="0"/>
+                <a:ea typeface="Calibri"/>
+                <a:cs typeface="Calibri" panose="020F0502020204030204" pitchFamily="34" charset="0"/>
+                <a:sym typeface="Calibri"/>
+              </a:rPr>
+              <a:t>ZioUpw</a:t>
+            </a:r>
+            <a:r>
+              <a:rPr lang="en-US" sz="1100" dirty="0">
+                <a:solidFill>
+                  <a:schemeClr val="dk1"/>
+                </a:solidFill>
+                <a:latin typeface="Calibri" panose="020F0502020204030204" pitchFamily="34" charset="0"/>
+                <a:ea typeface="Calibri"/>
+                <a:cs typeface="Calibri" panose="020F0502020204030204" pitchFamily="34" charset="0"/>
+                <a:sym typeface="Calibri"/>
+              </a:rPr>
+              <a:t> 450 W folding (portable)</a:t>
+            </a:r>
+          </a:p>
+          <a:p>
+            <a:pPr marL="401638" lvl="0" indent="-106363">
+              <a:buClr>
+                <a:schemeClr val="dk1"/>
+              </a:buClr>
+              <a:buSzPts val="1200"/>
+              <a:buFont typeface="Arial"/>
+              <a:buChar char="•"/>
+            </a:pPr>
+            <a:r>
+              <a:rPr lang="en-US" sz="1100" dirty="0" err="1">
+                <a:solidFill>
+                  <a:schemeClr val="dk1"/>
+                </a:solidFill>
+                <a:latin typeface="Calibri" panose="020F0502020204030204" pitchFamily="34" charset="0"/>
+                <a:ea typeface="Calibri"/>
+                <a:cs typeface="Calibri" panose="020F0502020204030204" pitchFamily="34" charset="0"/>
+                <a:sym typeface="Calibri"/>
+              </a:rPr>
+              <a:t>FOSSiBOT</a:t>
+            </a:r>
+            <a:r>
+              <a:rPr lang="en-US" sz="1100" dirty="0">
+                <a:solidFill>
+                  <a:schemeClr val="dk1"/>
+                </a:solidFill>
+                <a:latin typeface="Calibri" panose="020F0502020204030204" pitchFamily="34" charset="0"/>
+                <a:ea typeface="Calibri"/>
+                <a:cs typeface="Calibri" panose="020F0502020204030204" pitchFamily="34" charset="0"/>
+                <a:sym typeface="Calibri"/>
+              </a:rPr>
+              <a:t> 200 W (storage-friendly)</a:t>
+            </a:r>
+          </a:p>
+          <a:p>
+            <a:pPr marL="94060" indent="-103585">
+              <a:buClr>
+                <a:schemeClr val="dk1"/>
+              </a:buClr>
+              <a:buSzPts val="1200"/>
+              <a:buFont typeface="Arial"/>
+              <a:buChar char="•"/>
+            </a:pPr>
+            <a:r>
+              <a:rPr lang="en-US" sz="1100" dirty="0">
+                <a:solidFill>
+                  <a:schemeClr val="dk1"/>
+                </a:solidFill>
+                <a:latin typeface="Calibri"/>
+                <a:ea typeface="Calibri"/>
+                <a:cs typeface="Calibri"/>
+                <a:sym typeface="Calibri"/>
+              </a:rPr>
+              <a:t>Solar to XT60i Cable with XT60 connector</a:t>
+            </a:r>
+            <a:endParaRPr lang="en-US" sz="1100" dirty="0">
+              <a:solidFill>
+                <a:schemeClr val="dk1"/>
+              </a:solidFill>
+              <a:latin typeface="Calibri" panose="020F0502020204030204" pitchFamily="34" charset="0"/>
+              <a:ea typeface="Calibri"/>
+              <a:cs typeface="Calibri" panose="020F0502020204030204" pitchFamily="34" charset="0"/>
+              <a:sym typeface="Calibri"/>
+            </a:endParaRPr>
+          </a:p>
+          <a:p>
+            <a:pPr marL="94060" lvl="0" indent="-103585">
+              <a:buClr>
+                <a:schemeClr val="dk1"/>
+              </a:buClr>
+              <a:buSzPts val="1200"/>
+              <a:buFont typeface="Arial"/>
+              <a:buChar char="•"/>
+            </a:pPr>
+            <a:r>
+              <a:rPr lang="en-US" sz="1100" dirty="0">
+                <a:solidFill>
+                  <a:schemeClr val="dk1"/>
+                </a:solidFill>
+                <a:latin typeface="Calibri" panose="020F0502020204030204" pitchFamily="34" charset="0"/>
+                <a:ea typeface="Calibri"/>
+                <a:cs typeface="Calibri" panose="020F0502020204030204" pitchFamily="34" charset="0"/>
+                <a:sym typeface="Calibri"/>
+              </a:rPr>
+              <a:t>Progression over time:</a:t>
+            </a:r>
+            <a:br>
+              <a:rPr lang="en-US" sz="1100" dirty="0">
+                <a:solidFill>
+                  <a:schemeClr val="dk1"/>
+                </a:solidFill>
+                <a:latin typeface="Calibri" panose="020F0502020204030204" pitchFamily="34" charset="0"/>
+                <a:ea typeface="Calibri"/>
+                <a:cs typeface="Calibri" panose="020F0502020204030204" pitchFamily="34" charset="0"/>
+                <a:sym typeface="Calibri"/>
+              </a:rPr>
+            </a:br>
+            <a:r>
+              <a:rPr lang="en-US" sz="1100" dirty="0">
+                <a:solidFill>
+                  <a:schemeClr val="dk1"/>
+                </a:solidFill>
+                <a:latin typeface="Calibri" panose="020F0502020204030204" pitchFamily="34" charset="0"/>
+                <a:ea typeface="Calibri"/>
+                <a:cs typeface="Calibri" panose="020F0502020204030204" pitchFamily="34" charset="0"/>
+                <a:sym typeface="Calibri"/>
+              </a:rPr>
+              <a:t>Harbor Freight cheap &gt; </a:t>
+            </a:r>
+            <a:r>
+              <a:rPr lang="en-US" sz="1100" dirty="0" err="1">
+                <a:solidFill>
+                  <a:schemeClr val="dk1"/>
+                </a:solidFill>
+                <a:latin typeface="Calibri" panose="020F0502020204030204" pitchFamily="34" charset="0"/>
+                <a:ea typeface="Calibri"/>
+                <a:cs typeface="Calibri" panose="020F0502020204030204" pitchFamily="34" charset="0"/>
+                <a:sym typeface="Calibri"/>
+              </a:rPr>
+              <a:t>EcoFlow</a:t>
+            </a:r>
+            <a:r>
+              <a:rPr lang="en-US" sz="1100" dirty="0">
+                <a:solidFill>
+                  <a:schemeClr val="dk1"/>
+                </a:solidFill>
+                <a:latin typeface="Calibri" panose="020F0502020204030204" pitchFamily="34" charset="0"/>
+                <a:ea typeface="Calibri"/>
+                <a:cs typeface="Calibri" panose="020F0502020204030204" pitchFamily="34" charset="0"/>
+                <a:sym typeface="Calibri"/>
+              </a:rPr>
+              <a:t> mid-tier &gt; </a:t>
+            </a:r>
+            <a:r>
+              <a:rPr lang="en-US" sz="1100" dirty="0" err="1">
+                <a:solidFill>
+                  <a:schemeClr val="dk1"/>
+                </a:solidFill>
+                <a:latin typeface="Calibri" panose="020F0502020204030204" pitchFamily="34" charset="0"/>
+                <a:ea typeface="Calibri"/>
+                <a:cs typeface="Calibri" panose="020F0502020204030204" pitchFamily="34" charset="0"/>
+                <a:sym typeface="Calibri"/>
+              </a:rPr>
+              <a:t>Oupes</a:t>
+            </a:r>
+            <a:r>
+              <a:rPr lang="en-US" sz="1100" dirty="0">
+                <a:solidFill>
+                  <a:schemeClr val="dk1"/>
+                </a:solidFill>
+                <a:latin typeface="Calibri" panose="020F0502020204030204" pitchFamily="34" charset="0"/>
+                <a:ea typeface="Calibri"/>
+                <a:cs typeface="Calibri" panose="020F0502020204030204" pitchFamily="34" charset="0"/>
+                <a:sym typeface="Calibri"/>
+              </a:rPr>
+              <a:t>/</a:t>
+            </a:r>
+            <a:r>
+              <a:rPr lang="en-US" sz="1100" dirty="0" err="1">
+                <a:solidFill>
+                  <a:schemeClr val="dk1"/>
+                </a:solidFill>
+                <a:latin typeface="Calibri" panose="020F0502020204030204" pitchFamily="34" charset="0"/>
+                <a:ea typeface="Calibri"/>
+                <a:cs typeface="Calibri" panose="020F0502020204030204" pitchFamily="34" charset="0"/>
+                <a:sym typeface="Calibri"/>
+              </a:rPr>
+              <a:t>WattCycle</a:t>
+            </a:r>
+            <a:r>
+              <a:rPr lang="en-US" sz="1100" dirty="0">
+                <a:solidFill>
+                  <a:schemeClr val="dk1"/>
+                </a:solidFill>
+                <a:latin typeface="Calibri" panose="020F0502020204030204" pitchFamily="34" charset="0"/>
+                <a:ea typeface="Calibri"/>
+                <a:cs typeface="Calibri" panose="020F0502020204030204" pitchFamily="34" charset="0"/>
+                <a:sym typeface="Calibri"/>
+              </a:rPr>
+              <a:t> whole-home</a:t>
+            </a:r>
+          </a:p>
+          <a:p>
+            <a:pPr marL="94060" lvl="0" indent="-103585">
+              <a:buClr>
+                <a:schemeClr val="dk1"/>
+              </a:buClr>
+              <a:buSzPts val="1200"/>
+              <a:buFont typeface="Arial"/>
+              <a:buChar char="•"/>
+            </a:pPr>
+            <a:r>
+              <a:rPr lang="en-US" sz="1100" dirty="0">
+                <a:solidFill>
+                  <a:schemeClr val="dk1"/>
+                </a:solidFill>
+                <a:latin typeface="Calibri" panose="020F0502020204030204" pitchFamily="34" charset="0"/>
+                <a:ea typeface="Calibri"/>
+                <a:cs typeface="Calibri" panose="020F0502020204030204" pitchFamily="34" charset="0"/>
+                <a:sym typeface="Calibri"/>
+              </a:rPr>
+              <a:t>Cabling: Use cables with MC4 connectors for the panels and an XT60 adapter to connect to the power station.</a:t>
+            </a:r>
+          </a:p>
+          <a:p>
+            <a:pPr marL="94060" lvl="0" indent="-103585">
+              <a:buClr>
+                <a:schemeClr val="dk1"/>
+              </a:buClr>
+              <a:buSzPts val="1200"/>
+              <a:buFont typeface="Arial"/>
+              <a:buChar char="•"/>
+            </a:pPr>
+            <a:r>
+              <a:rPr lang="en-US" sz="1100" dirty="0">
+                <a:solidFill>
+                  <a:schemeClr val="dk1"/>
+                </a:solidFill>
+                <a:latin typeface="Calibri" panose="020F0502020204030204" pitchFamily="34" charset="0"/>
+                <a:ea typeface="Calibri"/>
+                <a:cs typeface="Calibri" panose="020F0502020204030204" pitchFamily="34" charset="0"/>
+                <a:sym typeface="Calibri"/>
+              </a:rPr>
+              <a:t>Wall charging cable: Included for grid-tied "eco mode" or UPS functionality</a:t>
+            </a:r>
+          </a:p>
+        </p:txBody>
+      </p:sp>
+      <p:pic>
+        <p:nvPicPr>
+          <p:cNvPr id="4" name="Picture 3">
+            <a:extLst>
+              <a:ext uri="{FF2B5EF4-FFF2-40B4-BE49-F238E27FC236}">
+                <a16:creationId xmlns:a16="http://schemas.microsoft.com/office/drawing/2014/main" id="{13791D63-00B4-5B39-8538-951C95E60EE5}"/>
+              </a:ext>
+            </a:extLst>
+          </p:cNvPr>
+          <p:cNvPicPr>
+            <a:picLocks noChangeAspect="1"/>
+          </p:cNvPicPr>
+          <p:nvPr/>
+        </p:nvPicPr>
+        <p:blipFill>
+          <a:blip r:embed="rId5" cstate="email">
+            <a:extLst>
+              <a:ext uri="{28A0092B-C50C-407E-A947-70E740481C1C}">
+                <a14:useLocalDpi xmlns:a14="http://schemas.microsoft.com/office/drawing/2010/main"/>
+              </a:ext>
+            </a:extLst>
+          </a:blip>
+          <a:stretch>
+            <a:fillRect/>
+          </a:stretch>
+        </p:blipFill>
+        <p:spPr>
+          <a:xfrm>
+            <a:off x="4688492" y="2571750"/>
+            <a:ext cx="3289300" cy="1727200"/>
+          </a:xfrm>
+          <a:prstGeom prst="rect">
+            <a:avLst/>
+          </a:prstGeom>
+          <a:ln>
+            <a:solidFill>
+              <a:srgbClr val="FF0000"/>
+            </a:solidFill>
+          </a:ln>
+        </p:spPr>
+      </p:pic>
+    </p:spTree>
+  </p:cSld>
+  <p:clrMapOvr>
+    <a:masterClrMapping/>
+  </p:clrMapOvr>
+</p:sld>
+</file>
+
+<file path=ppt/slides/slide3.xml><?xml version="1.0" encoding="utf-8"?>
+<p:sld xmlns:a="http://schemas.openxmlformats.org/drawingml/2006/main" xmlns:r="http://schemas.openxmlformats.org/officeDocument/2006/relationships" xmlns:p="http://schemas.openxmlformats.org/presentationml/2006/main">
+  <p:cSld>
+    <p:spTree>
+      <p:nvGrpSpPr>
         <p:cNvPr id="1" name="Shape 87"/>
         <p:cNvGrpSpPr/>
         <p:nvPr/>
@@ -13771,99 +15277,67 @@
           </a:p>
         </p:txBody>
       </p:sp>
-    </p:spTree>
-  </p:cSld>
-  <p:clrMapOvr>
-    <a:masterClrMapping/>
-  </p:clrMapOvr>
-</p:sld>
-</file>
-
-<file path=ppt/slides/slide10.xml><?xml version="1.0" encoding="utf-8"?>
-<p:sld xmlns:a="http://schemas.openxmlformats.org/drawingml/2006/main" xmlns:r="http://schemas.openxmlformats.org/officeDocument/2006/relationships" xmlns:p="http://schemas.openxmlformats.org/presentationml/2006/main">
-  <p:cSld>
-    <p:spTree>
-      <p:nvGrpSpPr>
-        <p:cNvPr id="1" name="Shape 167"/>
-        <p:cNvGrpSpPr/>
-        <p:nvPr/>
-      </p:nvGrpSpPr>
-      <p:grpSpPr>
-        <a:xfrm>
-          <a:off x="0" y="0"/>
-          <a:ext cx="0" cy="0"/>
-          <a:chOff x="0" y="0"/>
-          <a:chExt cx="0" cy="0"/>
-        </a:xfrm>
-      </p:grpSpPr>
+      <p:pic>
+        <p:nvPicPr>
+          <p:cNvPr id="2" name="Google Shape;126;p17">
+            <a:extLst>
+              <a:ext uri="{FF2B5EF4-FFF2-40B4-BE49-F238E27FC236}">
+                <a16:creationId xmlns:a16="http://schemas.microsoft.com/office/drawing/2014/main" id="{1059633F-BF3C-A014-73D4-7BCB05487921}"/>
+              </a:ext>
+            </a:extLst>
+          </p:cNvPr>
+          <p:cNvPicPr preferRelativeResize="0"/>
+          <p:nvPr/>
+        </p:nvPicPr>
+        <p:blipFill>
+          <a:blip r:embed="rId5" cstate="email">
+            <a:alphaModFix/>
+            <a:extLst>
+              <a:ext uri="{28A0092B-C50C-407E-A947-70E740481C1C}">
+                <a14:useLocalDpi xmlns:a14="http://schemas.microsoft.com/office/drawing/2010/main"/>
+              </a:ext>
+            </a:extLst>
+          </a:blip>
+          <a:stretch>
+            <a:fillRect/>
+          </a:stretch>
+        </p:blipFill>
+        <p:spPr>
+          <a:xfrm>
+            <a:off x="5867400" y="3409950"/>
+            <a:ext cx="2904631" cy="1546801"/>
+          </a:xfrm>
+          <a:prstGeom prst="rect">
+            <a:avLst/>
+          </a:prstGeom>
+          <a:noFill/>
+          <a:ln w="9525" cap="flat" cmpd="sng">
+            <a:solidFill>
+              <a:srgbClr val="FF0000"/>
+            </a:solidFill>
+            <a:prstDash val="solid"/>
+            <a:round/>
+            <a:headEnd type="none" w="sm" len="sm"/>
+            <a:tailEnd type="none" w="sm" len="sm"/>
+          </a:ln>
+        </p:spPr>
+      </p:pic>
       <p:sp>
         <p:nvSpPr>
-          <p:cNvPr id="168" name="Google Shape;168;p22"/>
+          <p:cNvPr id="3" name="Google Shape;127;p17">
+            <a:extLst>
+              <a:ext uri="{FF2B5EF4-FFF2-40B4-BE49-F238E27FC236}">
+                <a16:creationId xmlns:a16="http://schemas.microsoft.com/office/drawing/2014/main" id="{8E98BA7A-8444-C749-470D-BD0D54705FA6}"/>
+              </a:ext>
+            </a:extLst>
+          </p:cNvPr>
           <p:cNvSpPr txBox="1"/>
           <p:nvPr/>
         </p:nvSpPr>
         <p:spPr>
           <a:xfrm>
-            <a:off x="65623" y="39645"/>
-            <a:ext cx="3988200" cy="346200"/>
-          </a:xfrm>
-          <a:prstGeom prst="rect">
-            <a:avLst/>
-          </a:prstGeom>
-          <a:noFill/>
-          <a:ln>
-            <a:noFill/>
-          </a:ln>
-        </p:spPr>
-        <p:txBody>
-          <a:bodyPr spcFirstLastPara="1" wrap="square" lIns="68575" tIns="34275" rIns="68575" bIns="34275" anchor="t" anchorCtr="0">
-            <a:spAutoFit/>
-          </a:bodyPr>
-          <a:lstStyle/>
-          <a:p>
-            <a:pPr marL="0" marR="0" lvl="0" indent="0" algn="l" rtl="0">
-              <a:spcBef>
-                <a:spcPts val="0"/>
-              </a:spcBef>
-              <a:spcAft>
-                <a:spcPts val="0"/>
-              </a:spcAft>
-              <a:buNone/>
-            </a:pPr>
-            <a:r>
-              <a:rPr lang="en-US" sz="1800" b="1" i="0" u="none" strike="noStrike" cap="none">
-                <a:solidFill>
-                  <a:schemeClr val="dk1"/>
-                </a:solidFill>
-                <a:latin typeface="Calibri"/>
-                <a:ea typeface="Calibri"/>
-                <a:cs typeface="Calibri"/>
-                <a:sym typeface="Calibri"/>
-              </a:rPr>
-              <a:t>Solar</a:t>
-            </a:r>
-            <a:endParaRPr sz="1800" b="1" i="0">
-              <a:solidFill>
-                <a:srgbClr val="333333"/>
-              </a:solidFill>
-              <a:latin typeface="Calibri"/>
-              <a:ea typeface="Calibri"/>
-              <a:cs typeface="Calibri"/>
-              <a:sym typeface="Calibri"/>
-            </a:endParaRPr>
-          </a:p>
-        </p:txBody>
-      </p:sp>
-      <p:sp>
-        <p:nvSpPr>
-          <p:cNvPr id="169" name="Google Shape;169;p22"/>
-          <p:cNvSpPr txBox="1"/>
-          <p:nvPr/>
-        </p:nvSpPr>
-        <p:spPr>
-          <a:xfrm>
-            <a:off x="65625" y="385894"/>
-            <a:ext cx="4473600" cy="253800"/>
+            <a:off x="5105400" y="1581150"/>
+            <a:ext cx="3972977" cy="1731213"/>
           </a:xfrm>
           <a:prstGeom prst="rect">
             <a:avLst/>
@@ -13898,11 +15372,11 @@
                 <a:schemeClr val="dk1"/>
               </a:buClr>
               <a:buSzPts val="1200"/>
-              <a:buFont typeface="Arial"/>
+              <a:buFont typeface="Calibri"/>
               <a:buChar char="•"/>
             </a:pPr>
             <a:r>
-              <a:rPr lang="en-US" sz="1200">
+              <a:rPr lang="en-US" sz="1200" dirty="0" err="1">
                 <a:solidFill>
                   <a:schemeClr val="dk1"/>
                 </a:solidFill>
@@ -13911,9 +15385,169 @@
                 <a:cs typeface="Calibri"/>
                 <a:sym typeface="Calibri"/>
               </a:rPr>
-              <a:t>xxx</a:t>
+              <a:t>Oupes</a:t>
             </a:r>
-            <a:endParaRPr sz="1200">
+            <a:r>
+              <a:rPr lang="en-US" sz="1200" dirty="0">
+                <a:solidFill>
+                  <a:schemeClr val="dk1"/>
+                </a:solidFill>
+                <a:latin typeface="Calibri"/>
+                <a:ea typeface="Calibri"/>
+                <a:cs typeface="Calibri"/>
+                <a:sym typeface="Calibri"/>
+              </a:rPr>
+              <a:t> Mega 2 Pro, a portable solar generator</a:t>
+            </a:r>
+            <a:endParaRPr sz="1200" dirty="0">
+              <a:solidFill>
+                <a:schemeClr val="dk1"/>
+              </a:solidFill>
+              <a:latin typeface="Calibri"/>
+              <a:ea typeface="Calibri"/>
+              <a:cs typeface="Calibri"/>
+              <a:sym typeface="Calibri"/>
+            </a:endParaRPr>
+          </a:p>
+          <a:p>
+            <a:pPr marL="94060" marR="0" lvl="0" indent="-103585" algn="l" rtl="0">
+              <a:spcBef>
+                <a:spcPts val="0"/>
+              </a:spcBef>
+              <a:spcAft>
+                <a:spcPts val="0"/>
+              </a:spcAft>
+              <a:buClr>
+                <a:schemeClr val="dk1"/>
+              </a:buClr>
+              <a:buSzPts val="1200"/>
+              <a:buFont typeface="Calibri"/>
+              <a:buChar char="•"/>
+            </a:pPr>
+            <a:r>
+              <a:rPr lang="en-US" sz="1200" dirty="0">
+                <a:solidFill>
+                  <a:schemeClr val="dk1"/>
+                </a:solidFill>
+                <a:latin typeface="Calibri"/>
+                <a:ea typeface="Calibri"/>
+                <a:cs typeface="Calibri"/>
+                <a:sym typeface="Calibri"/>
+              </a:rPr>
+              <a:t>2.5KW inverter, 140W USB-C ports, and a long-lasting lithium iron phosphate battery</a:t>
+            </a:r>
+            <a:endParaRPr sz="1200" dirty="0">
+              <a:solidFill>
+                <a:schemeClr val="dk1"/>
+              </a:solidFill>
+              <a:latin typeface="Calibri"/>
+              <a:ea typeface="Calibri"/>
+              <a:cs typeface="Calibri"/>
+              <a:sym typeface="Calibri"/>
+            </a:endParaRPr>
+          </a:p>
+          <a:p>
+            <a:pPr marL="94060" marR="0" lvl="0" indent="-103585" algn="l" rtl="0">
+              <a:spcBef>
+                <a:spcPts val="0"/>
+              </a:spcBef>
+              <a:spcAft>
+                <a:spcPts val="0"/>
+              </a:spcAft>
+              <a:buClr>
+                <a:schemeClr val="dk1"/>
+              </a:buClr>
+              <a:buSzPts val="1200"/>
+              <a:buFont typeface="Calibri"/>
+              <a:buChar char="•"/>
+            </a:pPr>
+            <a:r>
+              <a:rPr lang="en-US" sz="1200" dirty="0">
+                <a:solidFill>
+                  <a:schemeClr val="dk1"/>
+                </a:solidFill>
+                <a:latin typeface="Calibri"/>
+                <a:ea typeface="Calibri"/>
+                <a:cs typeface="Calibri"/>
+                <a:sym typeface="Calibri"/>
+              </a:rPr>
+              <a:t>But the original </a:t>
+            </a:r>
+            <a:r>
+              <a:rPr lang="en-US" sz="1200" dirty="0" err="1">
+                <a:solidFill>
+                  <a:schemeClr val="dk1"/>
+                </a:solidFill>
+                <a:latin typeface="Calibri"/>
+                <a:ea typeface="Calibri"/>
+                <a:cs typeface="Calibri"/>
+                <a:sym typeface="Calibri"/>
+              </a:rPr>
+              <a:t>Oupes</a:t>
+            </a:r>
+            <a:r>
+              <a:rPr lang="en-US" sz="1200" dirty="0">
+                <a:solidFill>
+                  <a:schemeClr val="dk1"/>
+                </a:solidFill>
+                <a:latin typeface="Calibri"/>
+                <a:ea typeface="Calibri"/>
+                <a:cs typeface="Calibri"/>
+                <a:sym typeface="Calibri"/>
+              </a:rPr>
+              <a:t> Mega 2 outperforms the "Pro" version in several key categories, including solar input capacity and overall value - </a:t>
+            </a:r>
+            <a:r>
+              <a:rPr lang="en-US" sz="1200" u="sng" dirty="0">
+                <a:solidFill>
+                  <a:schemeClr val="hlink"/>
+                </a:solidFill>
+                <a:latin typeface="Calibri"/>
+                <a:ea typeface="Calibri"/>
+                <a:cs typeface="Calibri"/>
+                <a:sym typeface="Calibri"/>
+                <a:hlinkClick r:id="rId6"/>
+              </a:rPr>
+              <a:t>https://www.youtube.com/watch?v=Fw3Ixuu8Ook</a:t>
+            </a:r>
+            <a:endParaRPr sz="1200" dirty="0">
+              <a:solidFill>
+                <a:schemeClr val="dk1"/>
+              </a:solidFill>
+              <a:latin typeface="Calibri"/>
+              <a:ea typeface="Calibri"/>
+              <a:cs typeface="Calibri"/>
+              <a:sym typeface="Calibri"/>
+            </a:endParaRPr>
+          </a:p>
+          <a:p>
+            <a:pPr marL="94060" marR="0" lvl="0" indent="-103585" algn="l" rtl="0">
+              <a:spcBef>
+                <a:spcPts val="0"/>
+              </a:spcBef>
+              <a:spcAft>
+                <a:spcPts val="0"/>
+              </a:spcAft>
+              <a:buClr>
+                <a:schemeClr val="dk1"/>
+              </a:buClr>
+              <a:buSzPts val="1200"/>
+              <a:buFont typeface="Calibri"/>
+              <a:buChar char="•"/>
+            </a:pPr>
+            <a:r>
+              <a:rPr lang="en-US" sz="1200" dirty="0">
+                <a:solidFill>
+                  <a:schemeClr val="dk1"/>
+                </a:solidFill>
+                <a:latin typeface="Calibri"/>
+                <a:ea typeface="Calibri"/>
+                <a:cs typeface="Calibri"/>
+                <a:sym typeface="Calibri"/>
+              </a:rPr>
+              <a:t>Ultimately, while the Mega 2 Pro is a decent unit, it is not recommended over the original Mega 2</a:t>
+            </a:r>
+            <a:endParaRPr sz="1200" dirty="0">
               <a:solidFill>
                 <a:schemeClr val="dk1"/>
               </a:solidFill>
@@ -13933,161 +15567,7 @@
 </p:sld>
 </file>
 
-<file path=ppt/slides/slide11.xml><?xml version="1.0" encoding="utf-8"?>
-<p:sld xmlns:a="http://schemas.openxmlformats.org/drawingml/2006/main" xmlns:r="http://schemas.openxmlformats.org/officeDocument/2006/relationships" xmlns:p="http://schemas.openxmlformats.org/presentationml/2006/main">
-  <p:cSld>
-    <p:spTree>
-      <p:nvGrpSpPr>
-        <p:cNvPr id="1" name="Shape 173"/>
-        <p:cNvGrpSpPr/>
-        <p:nvPr/>
-      </p:nvGrpSpPr>
-      <p:grpSpPr>
-        <a:xfrm>
-          <a:off x="0" y="0"/>
-          <a:ext cx="0" cy="0"/>
-          <a:chOff x="0" y="0"/>
-          <a:chExt cx="0" cy="0"/>
-        </a:xfrm>
-      </p:grpSpPr>
-      <p:sp>
-        <p:nvSpPr>
-          <p:cNvPr id="174" name="Google Shape;174;p23"/>
-          <p:cNvSpPr txBox="1"/>
-          <p:nvPr/>
-        </p:nvSpPr>
-        <p:spPr>
-          <a:xfrm>
-            <a:off x="65623" y="39645"/>
-            <a:ext cx="3988200" cy="346200"/>
-          </a:xfrm>
-          <a:prstGeom prst="rect">
-            <a:avLst/>
-          </a:prstGeom>
-          <a:noFill/>
-          <a:ln>
-            <a:noFill/>
-          </a:ln>
-        </p:spPr>
-        <p:txBody>
-          <a:bodyPr spcFirstLastPara="1" wrap="square" lIns="68575" tIns="34275" rIns="68575" bIns="34275" anchor="t" anchorCtr="0">
-            <a:spAutoFit/>
-          </a:bodyPr>
-          <a:lstStyle/>
-          <a:p>
-            <a:pPr marL="0" marR="0" lvl="0" indent="0" algn="l" rtl="0">
-              <a:spcBef>
-                <a:spcPts val="0"/>
-              </a:spcBef>
-              <a:spcAft>
-                <a:spcPts val="0"/>
-              </a:spcAft>
-              <a:buNone/>
-            </a:pPr>
-            <a:r>
-              <a:rPr lang="en-US" sz="1800" b="1" i="0" u="none" strike="noStrike" cap="none">
-                <a:solidFill>
-                  <a:schemeClr val="dk1"/>
-                </a:solidFill>
-                <a:latin typeface="Calibri"/>
-                <a:ea typeface="Calibri"/>
-                <a:cs typeface="Calibri"/>
-                <a:sym typeface="Calibri"/>
-              </a:rPr>
-              <a:t>Solar</a:t>
-            </a:r>
-            <a:endParaRPr sz="1800" b="1" i="0">
-              <a:solidFill>
-                <a:srgbClr val="333333"/>
-              </a:solidFill>
-              <a:latin typeface="Calibri"/>
-              <a:ea typeface="Calibri"/>
-              <a:cs typeface="Calibri"/>
-              <a:sym typeface="Calibri"/>
-            </a:endParaRPr>
-          </a:p>
-        </p:txBody>
-      </p:sp>
-      <p:sp>
-        <p:nvSpPr>
-          <p:cNvPr id="175" name="Google Shape;175;p23"/>
-          <p:cNvSpPr txBox="1"/>
-          <p:nvPr/>
-        </p:nvSpPr>
-        <p:spPr>
-          <a:xfrm>
-            <a:off x="65625" y="385894"/>
-            <a:ext cx="4473600" cy="253800"/>
-          </a:xfrm>
-          <a:prstGeom prst="rect">
-            <a:avLst/>
-          </a:prstGeom>
-          <a:solidFill>
-            <a:srgbClr val="FFF2CC"/>
-          </a:solidFill>
-          <a:ln w="7150" cap="flat" cmpd="sng">
-            <a:solidFill>
-              <a:srgbClr val="FF0000"/>
-            </a:solidFill>
-            <a:prstDash val="solid"/>
-            <a:round/>
-            <a:headEnd type="none" w="sm" len="sm"/>
-            <a:tailEnd type="none" w="sm" len="sm"/>
-          </a:ln>
-        </p:spPr>
-        <p:txBody>
-          <a:bodyPr spcFirstLastPara="1" wrap="square" lIns="68575" tIns="34275" rIns="68575" bIns="34275" anchor="t" anchorCtr="0">
-            <a:spAutoFit/>
-          </a:bodyPr>
-          <a:lstStyle/>
-          <a:p>
-            <a:pPr marL="94060" marR="0" lvl="0" indent="-103585" algn="l" rtl="0">
-              <a:spcBef>
-                <a:spcPts val="0"/>
-              </a:spcBef>
-              <a:spcAft>
-                <a:spcPts val="0"/>
-              </a:spcAft>
-              <a:buClr>
-                <a:schemeClr val="dk1"/>
-              </a:buClr>
-              <a:buSzPts val="1200"/>
-              <a:buFont typeface="Arial"/>
-              <a:buChar char="•"/>
-            </a:pPr>
-            <a:r>
-              <a:rPr lang="en-US" sz="1200">
-                <a:solidFill>
-                  <a:schemeClr val="dk1"/>
-                </a:solidFill>
-                <a:latin typeface="Calibri"/>
-                <a:ea typeface="Calibri"/>
-                <a:cs typeface="Calibri"/>
-                <a:sym typeface="Calibri"/>
-              </a:rPr>
-              <a:t>xxx</a:t>
-            </a:r>
-            <a:endParaRPr sz="1200">
-              <a:solidFill>
-                <a:schemeClr val="dk1"/>
-              </a:solidFill>
-              <a:latin typeface="Calibri"/>
-              <a:ea typeface="Calibri"/>
-              <a:cs typeface="Calibri"/>
-              <a:sym typeface="Calibri"/>
-            </a:endParaRPr>
-          </a:p>
-        </p:txBody>
-      </p:sp>
-    </p:spTree>
-  </p:cSld>
-  <p:clrMapOvr>
-    <a:masterClrMapping/>
-  </p:clrMapOvr>
-</p:sld>
-</file>
-
-<file path=ppt/slides/slide2.xml><?xml version="1.0" encoding="utf-8"?>
+<file path=ppt/slides/slide4.xml><?xml version="1.0" encoding="utf-8"?>
 <p:sld xmlns:a="http://schemas.openxmlformats.org/drawingml/2006/main" xmlns:r="http://schemas.openxmlformats.org/officeDocument/2006/relationships" xmlns:p="http://schemas.openxmlformats.org/presentationml/2006/main">
   <p:cSld>
     <p:spTree>
@@ -14651,7 +16131,7 @@
 </p:sld>
 </file>
 
-<file path=ppt/slides/slide3.xml><?xml version="1.0" encoding="utf-8"?>
+<file path=ppt/slides/slide5.xml><?xml version="1.0" encoding="utf-8"?>
 <p:sld xmlns:a="http://schemas.openxmlformats.org/drawingml/2006/main" xmlns:r="http://schemas.openxmlformats.org/officeDocument/2006/relationships" xmlns:p="http://schemas.openxmlformats.org/presentationml/2006/main">
   <p:cSld>
     <p:spTree>
@@ -15325,7 +16805,7 @@
 </p:sld>
 </file>
 
-<file path=ppt/slides/slide4.xml><?xml version="1.0" encoding="utf-8"?>
+<file path=ppt/slides/slide6.xml><?xml version="1.0" encoding="utf-8"?>
 <p:sld xmlns:a="http://schemas.openxmlformats.org/drawingml/2006/main" xmlns:r="http://schemas.openxmlformats.org/officeDocument/2006/relationships" xmlns:p="http://schemas.openxmlformats.org/presentationml/2006/main">
   <p:cSld>
     <p:spTree>
@@ -16232,919 +17712,7 @@
 </p:sld>
 </file>
 
-<file path=ppt/slides/slide5.xml><?xml version="1.0" encoding="utf-8"?>
-<p:sld xmlns:a="http://schemas.openxmlformats.org/drawingml/2006/main" xmlns:r="http://schemas.openxmlformats.org/officeDocument/2006/relationships" xmlns:p="http://schemas.openxmlformats.org/presentationml/2006/main">
-  <p:cSld>
-    <p:spTree>
-      <p:nvGrpSpPr>
-        <p:cNvPr id="1" name="Shape 118"/>
-        <p:cNvGrpSpPr/>
-        <p:nvPr/>
-      </p:nvGrpSpPr>
-      <p:grpSpPr>
-        <a:xfrm>
-          <a:off x="0" y="0"/>
-          <a:ext cx="0" cy="0"/>
-          <a:chOff x="0" y="0"/>
-          <a:chExt cx="0" cy="0"/>
-        </a:xfrm>
-      </p:grpSpPr>
-      <p:pic>
-        <p:nvPicPr>
-          <p:cNvPr id="119" name="Google Shape;119;p17"/>
-          <p:cNvPicPr preferRelativeResize="0"/>
-          <p:nvPr/>
-        </p:nvPicPr>
-        <p:blipFill>
-          <a:blip r:embed="rId3" cstate="email">
-            <a:alphaModFix/>
-            <a:extLst>
-              <a:ext uri="{28A0092B-C50C-407E-A947-70E740481C1C}">
-                <a14:useLocalDpi xmlns:a14="http://schemas.microsoft.com/office/drawing/2010/main"/>
-              </a:ext>
-            </a:extLst>
-          </a:blip>
-          <a:stretch>
-            <a:fillRect/>
-          </a:stretch>
-        </p:blipFill>
-        <p:spPr>
-          <a:xfrm>
-            <a:off x="5645399" y="337495"/>
-            <a:ext cx="2660401" cy="2086476"/>
-          </a:xfrm>
-          <a:prstGeom prst="rect">
-            <a:avLst/>
-          </a:prstGeom>
-          <a:noFill/>
-          <a:ln w="9525" cap="flat" cmpd="sng">
-            <a:solidFill>
-              <a:srgbClr val="FF0000"/>
-            </a:solidFill>
-            <a:prstDash val="solid"/>
-            <a:round/>
-            <a:headEnd type="none" w="sm" len="sm"/>
-            <a:tailEnd type="none" w="sm" len="sm"/>
-          </a:ln>
-        </p:spPr>
-      </p:pic>
-      <p:sp>
-        <p:nvSpPr>
-          <p:cNvPr id="120" name="Google Shape;120;p17"/>
-          <p:cNvSpPr txBox="1"/>
-          <p:nvPr/>
-        </p:nvSpPr>
-        <p:spPr>
-          <a:xfrm>
-            <a:off x="65623" y="39645"/>
-            <a:ext cx="3988200" cy="346200"/>
-          </a:xfrm>
-          <a:prstGeom prst="rect">
-            <a:avLst/>
-          </a:prstGeom>
-          <a:noFill/>
-          <a:ln>
-            <a:noFill/>
-          </a:ln>
-        </p:spPr>
-        <p:txBody>
-          <a:bodyPr spcFirstLastPara="1" wrap="square" lIns="68575" tIns="34275" rIns="68575" bIns="34275" anchor="t" anchorCtr="0">
-            <a:spAutoFit/>
-          </a:bodyPr>
-          <a:lstStyle/>
-          <a:p>
-            <a:pPr marL="0" marR="0" lvl="0" indent="0" algn="l" rtl="0">
-              <a:spcBef>
-                <a:spcPts val="0"/>
-              </a:spcBef>
-              <a:spcAft>
-                <a:spcPts val="0"/>
-              </a:spcAft>
-              <a:buNone/>
-            </a:pPr>
-            <a:r>
-              <a:rPr lang="en-US" sz="1800" b="1" i="0" u="none" strike="noStrike" cap="none">
-                <a:solidFill>
-                  <a:schemeClr val="dk1"/>
-                </a:solidFill>
-                <a:latin typeface="Calibri"/>
-                <a:ea typeface="Calibri"/>
-                <a:cs typeface="Calibri"/>
-                <a:sym typeface="Calibri"/>
-              </a:rPr>
-              <a:t>Solar</a:t>
-            </a:r>
-            <a:endParaRPr sz="1800" b="1" i="0">
-              <a:solidFill>
-                <a:srgbClr val="333333"/>
-              </a:solidFill>
-              <a:latin typeface="Calibri"/>
-              <a:ea typeface="Calibri"/>
-              <a:cs typeface="Calibri"/>
-              <a:sym typeface="Calibri"/>
-            </a:endParaRPr>
-          </a:p>
-        </p:txBody>
-      </p:sp>
-      <p:sp>
-        <p:nvSpPr>
-          <p:cNvPr id="121" name="Google Shape;121;p17"/>
-          <p:cNvSpPr txBox="1"/>
-          <p:nvPr/>
-        </p:nvSpPr>
-        <p:spPr>
-          <a:xfrm>
-            <a:off x="65625" y="385894"/>
-            <a:ext cx="4473600" cy="1546800"/>
-          </a:xfrm>
-          <a:prstGeom prst="rect">
-            <a:avLst/>
-          </a:prstGeom>
-          <a:solidFill>
-            <a:srgbClr val="FFF2CC"/>
-          </a:solidFill>
-          <a:ln w="7150" cap="flat" cmpd="sng">
-            <a:solidFill>
-              <a:srgbClr val="FF0000"/>
-            </a:solidFill>
-            <a:prstDash val="solid"/>
-            <a:round/>
-            <a:headEnd type="none" w="sm" len="sm"/>
-            <a:tailEnd type="none" w="sm" len="sm"/>
-          </a:ln>
-        </p:spPr>
-        <p:txBody>
-          <a:bodyPr spcFirstLastPara="1" wrap="square" lIns="68575" tIns="34275" rIns="68575" bIns="34275" anchor="t" anchorCtr="0">
-            <a:spAutoFit/>
-          </a:bodyPr>
-          <a:lstStyle/>
-          <a:p>
-            <a:pPr marL="94060" marR="0" lvl="0" indent="-103585" algn="l" rtl="0">
-              <a:spcBef>
-                <a:spcPts val="0"/>
-              </a:spcBef>
-              <a:spcAft>
-                <a:spcPts val="0"/>
-              </a:spcAft>
-              <a:buClr>
-                <a:schemeClr val="dk1"/>
-              </a:buClr>
-              <a:buSzPts val="1200"/>
-              <a:buFont typeface="Arial"/>
-              <a:buChar char="•"/>
-            </a:pPr>
-            <a:r>
-              <a:rPr lang="en-US" sz="1200" b="1">
-                <a:solidFill>
-                  <a:srgbClr val="FF0000"/>
-                </a:solidFill>
-                <a:latin typeface="Calibri"/>
-                <a:ea typeface="Calibri"/>
-                <a:cs typeface="Calibri"/>
-                <a:sym typeface="Calibri"/>
-              </a:rPr>
-              <a:t>Put together 10KW 48V battery solar system in just one hour</a:t>
-            </a:r>
-            <a:br>
-              <a:rPr lang="en-US" sz="1200">
-                <a:solidFill>
-                  <a:schemeClr val="dk1"/>
-                </a:solidFill>
-                <a:latin typeface="Calibri"/>
-                <a:ea typeface="Calibri"/>
-                <a:cs typeface="Calibri"/>
-                <a:sym typeface="Calibri"/>
-              </a:rPr>
-            </a:br>
-            <a:r>
-              <a:rPr lang="en-US" sz="1200" u="sng">
-                <a:solidFill>
-                  <a:schemeClr val="hlink"/>
-                </a:solidFill>
-                <a:latin typeface="Calibri"/>
-                <a:ea typeface="Calibri"/>
-                <a:cs typeface="Calibri"/>
-                <a:sym typeface="Calibri"/>
-                <a:hlinkClick r:id="rId4"/>
-              </a:rPr>
-              <a:t>https://www.youtube.com/watch?v=rRqV8BHE8lY</a:t>
-            </a:r>
-            <a:r>
-              <a:rPr lang="en-US" sz="1200">
-                <a:solidFill>
-                  <a:schemeClr val="dk1"/>
-                </a:solidFill>
-                <a:latin typeface="Calibri"/>
-                <a:ea typeface="Calibri"/>
-                <a:cs typeface="Calibri"/>
-                <a:sym typeface="Calibri"/>
-              </a:rPr>
-              <a:t> </a:t>
-            </a:r>
-            <a:endParaRPr sz="1200">
-              <a:solidFill>
-                <a:schemeClr val="dk1"/>
-              </a:solidFill>
-              <a:latin typeface="Calibri"/>
-              <a:ea typeface="Calibri"/>
-              <a:cs typeface="Calibri"/>
-              <a:sym typeface="Calibri"/>
-            </a:endParaRPr>
-          </a:p>
-          <a:p>
-            <a:pPr marL="94060" marR="0" lvl="0" indent="-103585" algn="l" rtl="0">
-              <a:spcBef>
-                <a:spcPts val="0"/>
-              </a:spcBef>
-              <a:spcAft>
-                <a:spcPts val="0"/>
-              </a:spcAft>
-              <a:buClr>
-                <a:schemeClr val="dk1"/>
-              </a:buClr>
-              <a:buSzPts val="1200"/>
-              <a:buFont typeface="Arial"/>
-              <a:buChar char="•"/>
-            </a:pPr>
-            <a:r>
-              <a:rPr lang="en-US" sz="1200">
-                <a:solidFill>
-                  <a:schemeClr val="dk1"/>
-                </a:solidFill>
-                <a:latin typeface="Calibri"/>
-                <a:ea typeface="Calibri"/>
-                <a:cs typeface="Calibri"/>
-                <a:sym typeface="Calibri"/>
-              </a:rPr>
-              <a:t>"all-in-one" inverter unit - combines inverter, battery charger, and solar charge controller</a:t>
-            </a:r>
-            <a:endParaRPr sz="1200">
-              <a:solidFill>
-                <a:schemeClr val="dk1"/>
-              </a:solidFill>
-              <a:latin typeface="Calibri"/>
-              <a:ea typeface="Calibri"/>
-              <a:cs typeface="Calibri"/>
-              <a:sym typeface="Calibri"/>
-            </a:endParaRPr>
-          </a:p>
-          <a:p>
-            <a:pPr marL="94060" marR="0" lvl="0" indent="-103585" algn="l" rtl="0">
-              <a:spcBef>
-                <a:spcPts val="0"/>
-              </a:spcBef>
-              <a:spcAft>
-                <a:spcPts val="0"/>
-              </a:spcAft>
-              <a:buClr>
-                <a:schemeClr val="dk1"/>
-              </a:buClr>
-              <a:buSzPts val="1200"/>
-              <a:buFont typeface="Arial"/>
-              <a:buChar char="•"/>
-            </a:pPr>
-            <a:r>
-              <a:rPr lang="en-US" sz="1200">
-                <a:solidFill>
-                  <a:schemeClr val="dk1"/>
-                </a:solidFill>
-                <a:latin typeface="Calibri"/>
-                <a:ea typeface="Calibri"/>
-                <a:cs typeface="Calibri"/>
-                <a:sym typeface="Calibri"/>
-              </a:rPr>
-              <a:t>Connect a 48V 16kWh battery to the inverter (using thick cables)</a:t>
-            </a:r>
-            <a:endParaRPr sz="1200">
-              <a:solidFill>
-                <a:schemeClr val="dk1"/>
-              </a:solidFill>
-              <a:latin typeface="Calibri"/>
-              <a:ea typeface="Calibri"/>
-              <a:cs typeface="Calibri"/>
-              <a:sym typeface="Calibri"/>
-            </a:endParaRPr>
-          </a:p>
-          <a:p>
-            <a:pPr marL="94060" marR="0" lvl="0" indent="-103585" algn="l" rtl="0">
-              <a:spcBef>
-                <a:spcPts val="0"/>
-              </a:spcBef>
-              <a:spcAft>
-                <a:spcPts val="0"/>
-              </a:spcAft>
-              <a:buClr>
-                <a:schemeClr val="dk1"/>
-              </a:buClr>
-              <a:buSzPts val="1200"/>
-              <a:buFont typeface="Arial"/>
-              <a:buChar char="•"/>
-            </a:pPr>
-            <a:r>
-              <a:rPr lang="en-US" sz="1200">
-                <a:solidFill>
-                  <a:schemeClr val="dk1"/>
-                </a:solidFill>
-                <a:latin typeface="Calibri"/>
-                <a:ea typeface="Calibri"/>
-                <a:cs typeface="Calibri"/>
-                <a:sym typeface="Calibri"/>
-              </a:rPr>
-              <a:t>Install a solar PV disconnect switch (to disconnect the solar array)</a:t>
-            </a:r>
-            <a:endParaRPr sz="1200">
-              <a:solidFill>
-                <a:schemeClr val="dk1"/>
-              </a:solidFill>
-              <a:latin typeface="Calibri"/>
-              <a:ea typeface="Calibri"/>
-              <a:cs typeface="Calibri"/>
-              <a:sym typeface="Calibri"/>
-            </a:endParaRPr>
-          </a:p>
-          <a:p>
-            <a:pPr marL="94060" marR="0" lvl="0" indent="-103585" algn="l" rtl="0">
-              <a:spcBef>
-                <a:spcPts val="0"/>
-              </a:spcBef>
-              <a:spcAft>
-                <a:spcPts val="0"/>
-              </a:spcAft>
-              <a:buClr>
-                <a:schemeClr val="dk1"/>
-              </a:buClr>
-              <a:buSzPts val="1200"/>
-              <a:buFont typeface="Arial"/>
-              <a:buChar char="•"/>
-            </a:pPr>
-            <a:r>
-              <a:rPr lang="en-US" sz="1200">
-                <a:solidFill>
-                  <a:schemeClr val="dk1"/>
-                </a:solidFill>
-                <a:latin typeface="Calibri"/>
-                <a:ea typeface="Calibri"/>
-                <a:cs typeface="Calibri"/>
-                <a:sym typeface="Calibri"/>
-              </a:rPr>
-              <a:t>AC Outlet Box - pre-wired box with breakers and AC outlets</a:t>
-            </a:r>
-            <a:endParaRPr sz="1200">
-              <a:solidFill>
-                <a:schemeClr val="dk1"/>
-              </a:solidFill>
-              <a:latin typeface="Calibri"/>
-              <a:ea typeface="Calibri"/>
-              <a:cs typeface="Calibri"/>
-              <a:sym typeface="Calibri"/>
-            </a:endParaRPr>
-          </a:p>
-          <a:p>
-            <a:pPr marL="94060" marR="0" lvl="0" indent="-103585" algn="l" rtl="0">
-              <a:spcBef>
-                <a:spcPts val="0"/>
-              </a:spcBef>
-              <a:spcAft>
-                <a:spcPts val="0"/>
-              </a:spcAft>
-              <a:buClr>
-                <a:schemeClr val="dk1"/>
-              </a:buClr>
-              <a:buSzPts val="1200"/>
-              <a:buFont typeface="Calibri"/>
-              <a:buChar char="•"/>
-            </a:pPr>
-            <a:r>
-              <a:rPr lang="en-US" sz="1200">
-                <a:solidFill>
-                  <a:schemeClr val="dk1"/>
-                </a:solidFill>
-                <a:latin typeface="Calibri"/>
-                <a:ea typeface="Calibri"/>
-                <a:cs typeface="Calibri"/>
-                <a:sym typeface="Calibri"/>
-              </a:rPr>
-              <a:t>Use flexible conduit (hoses) to protect the wiring</a:t>
-            </a:r>
-            <a:endParaRPr sz="1200">
-              <a:solidFill>
-                <a:schemeClr val="dk1"/>
-              </a:solidFill>
-              <a:latin typeface="Calibri"/>
-              <a:ea typeface="Calibri"/>
-              <a:cs typeface="Calibri"/>
-              <a:sym typeface="Calibri"/>
-            </a:endParaRPr>
-          </a:p>
-        </p:txBody>
-      </p:sp>
-      <p:sp>
-        <p:nvSpPr>
-          <p:cNvPr id="122" name="Google Shape;122;p17"/>
-          <p:cNvSpPr txBox="1"/>
-          <p:nvPr/>
-        </p:nvSpPr>
-        <p:spPr>
-          <a:xfrm>
-            <a:off x="6123525" y="2287050"/>
-            <a:ext cx="867900" cy="253800"/>
-          </a:xfrm>
-          <a:prstGeom prst="rect">
-            <a:avLst/>
-          </a:prstGeom>
-          <a:solidFill>
-            <a:srgbClr val="FFF2CC"/>
-          </a:solidFill>
-          <a:ln w="7150" cap="flat" cmpd="sng">
-            <a:solidFill>
-              <a:srgbClr val="FF0000"/>
-            </a:solidFill>
-            <a:prstDash val="solid"/>
-            <a:round/>
-            <a:headEnd type="none" w="sm" len="sm"/>
-            <a:tailEnd type="none" w="sm" len="sm"/>
-          </a:ln>
-        </p:spPr>
-        <p:txBody>
-          <a:bodyPr spcFirstLastPara="1" wrap="square" lIns="68575" tIns="34275" rIns="68575" bIns="34275" anchor="t" anchorCtr="0">
-            <a:spAutoFit/>
-          </a:bodyPr>
-          <a:lstStyle/>
-          <a:p>
-            <a:pPr marL="0" marR="0" lvl="0" indent="0" algn="ctr" rtl="0">
-              <a:spcBef>
-                <a:spcPts val="0"/>
-              </a:spcBef>
-              <a:spcAft>
-                <a:spcPts val="0"/>
-              </a:spcAft>
-              <a:buNone/>
-            </a:pPr>
-            <a:r>
-              <a:rPr lang="en-US" sz="1200">
-                <a:solidFill>
-                  <a:schemeClr val="dk1"/>
-                </a:solidFill>
-                <a:latin typeface="Calibri"/>
-                <a:ea typeface="Calibri"/>
-                <a:cs typeface="Calibri"/>
-                <a:sym typeface="Calibri"/>
-              </a:rPr>
-              <a:t>Battery</a:t>
-            </a:r>
-            <a:endParaRPr sz="1200">
-              <a:solidFill>
-                <a:schemeClr val="dk1"/>
-              </a:solidFill>
-              <a:latin typeface="Calibri"/>
-              <a:ea typeface="Calibri"/>
-              <a:cs typeface="Calibri"/>
-              <a:sym typeface="Calibri"/>
-            </a:endParaRPr>
-          </a:p>
-        </p:txBody>
-      </p:sp>
-      <p:sp>
-        <p:nvSpPr>
-          <p:cNvPr id="123" name="Google Shape;123;p17"/>
-          <p:cNvSpPr txBox="1"/>
-          <p:nvPr/>
-        </p:nvSpPr>
-        <p:spPr>
-          <a:xfrm>
-            <a:off x="6514050" y="277775"/>
-            <a:ext cx="867900" cy="253800"/>
-          </a:xfrm>
-          <a:prstGeom prst="rect">
-            <a:avLst/>
-          </a:prstGeom>
-          <a:solidFill>
-            <a:srgbClr val="FFF2CC"/>
-          </a:solidFill>
-          <a:ln w="7150" cap="flat" cmpd="sng">
-            <a:solidFill>
-              <a:srgbClr val="FF0000"/>
-            </a:solidFill>
-            <a:prstDash val="solid"/>
-            <a:round/>
-            <a:headEnd type="none" w="sm" len="sm"/>
-            <a:tailEnd type="none" w="sm" len="sm"/>
-          </a:ln>
-        </p:spPr>
-        <p:txBody>
-          <a:bodyPr spcFirstLastPara="1" wrap="square" lIns="68575" tIns="34275" rIns="68575" bIns="34275" anchor="t" anchorCtr="0">
-            <a:spAutoFit/>
-          </a:bodyPr>
-          <a:lstStyle/>
-          <a:p>
-            <a:pPr marL="0" marR="0" lvl="0" indent="0" algn="ctr" rtl="0">
-              <a:spcBef>
-                <a:spcPts val="0"/>
-              </a:spcBef>
-              <a:spcAft>
-                <a:spcPts val="0"/>
-              </a:spcAft>
-              <a:buNone/>
-            </a:pPr>
-            <a:r>
-              <a:rPr lang="en-US" sz="1200">
-                <a:solidFill>
-                  <a:schemeClr val="dk1"/>
-                </a:solidFill>
-                <a:latin typeface="Calibri"/>
-                <a:ea typeface="Calibri"/>
-                <a:cs typeface="Calibri"/>
-                <a:sym typeface="Calibri"/>
-              </a:rPr>
-              <a:t>All-in-one</a:t>
-            </a:r>
-            <a:endParaRPr sz="1200">
-              <a:solidFill>
-                <a:schemeClr val="dk1"/>
-              </a:solidFill>
-              <a:latin typeface="Calibri"/>
-              <a:ea typeface="Calibri"/>
-              <a:cs typeface="Calibri"/>
-              <a:sym typeface="Calibri"/>
-            </a:endParaRPr>
-          </a:p>
-        </p:txBody>
-      </p:sp>
-      <p:sp>
-        <p:nvSpPr>
-          <p:cNvPr id="124" name="Google Shape;124;p17"/>
-          <p:cNvSpPr txBox="1"/>
-          <p:nvPr/>
-        </p:nvSpPr>
-        <p:spPr>
-          <a:xfrm>
-            <a:off x="5381625" y="820700"/>
-            <a:ext cx="635100" cy="253800"/>
-          </a:xfrm>
-          <a:prstGeom prst="rect">
-            <a:avLst/>
-          </a:prstGeom>
-          <a:solidFill>
-            <a:srgbClr val="FFF2CC"/>
-          </a:solidFill>
-          <a:ln w="7150" cap="flat" cmpd="sng">
-            <a:solidFill>
-              <a:srgbClr val="FF0000"/>
-            </a:solidFill>
-            <a:prstDash val="solid"/>
-            <a:round/>
-            <a:headEnd type="none" w="sm" len="sm"/>
-            <a:tailEnd type="none" w="sm" len="sm"/>
-          </a:ln>
-        </p:spPr>
-        <p:txBody>
-          <a:bodyPr spcFirstLastPara="1" wrap="square" lIns="68575" tIns="34275" rIns="68575" bIns="34275" anchor="t" anchorCtr="0">
-            <a:spAutoFit/>
-          </a:bodyPr>
-          <a:lstStyle/>
-          <a:p>
-            <a:pPr marL="0" marR="0" lvl="0" indent="0" algn="ctr" rtl="0">
-              <a:spcBef>
-                <a:spcPts val="0"/>
-              </a:spcBef>
-              <a:spcAft>
-                <a:spcPts val="0"/>
-              </a:spcAft>
-              <a:buNone/>
-            </a:pPr>
-            <a:r>
-              <a:rPr lang="en-US" sz="1200">
-                <a:solidFill>
-                  <a:schemeClr val="dk1"/>
-                </a:solidFill>
-                <a:latin typeface="Calibri"/>
-                <a:ea typeface="Calibri"/>
-                <a:cs typeface="Calibri"/>
-                <a:sym typeface="Calibri"/>
-              </a:rPr>
-              <a:t>outlets</a:t>
-            </a:r>
-            <a:endParaRPr sz="1200">
-              <a:solidFill>
-                <a:schemeClr val="dk1"/>
-              </a:solidFill>
-              <a:latin typeface="Calibri"/>
-              <a:ea typeface="Calibri"/>
-              <a:cs typeface="Calibri"/>
-              <a:sym typeface="Calibri"/>
-            </a:endParaRPr>
-          </a:p>
-        </p:txBody>
-      </p:sp>
-      <p:sp>
-        <p:nvSpPr>
-          <p:cNvPr id="125" name="Google Shape;125;p17"/>
-          <p:cNvSpPr txBox="1"/>
-          <p:nvPr/>
-        </p:nvSpPr>
-        <p:spPr>
-          <a:xfrm>
-            <a:off x="7486650" y="1430300"/>
-            <a:ext cx="876300" cy="253800"/>
-          </a:xfrm>
-          <a:prstGeom prst="rect">
-            <a:avLst/>
-          </a:prstGeom>
-          <a:solidFill>
-            <a:srgbClr val="FFF2CC"/>
-          </a:solidFill>
-          <a:ln w="7150" cap="flat" cmpd="sng">
-            <a:solidFill>
-              <a:srgbClr val="FF0000"/>
-            </a:solidFill>
-            <a:prstDash val="solid"/>
-            <a:round/>
-            <a:headEnd type="none" w="sm" len="sm"/>
-            <a:tailEnd type="none" w="sm" len="sm"/>
-          </a:ln>
-        </p:spPr>
-        <p:txBody>
-          <a:bodyPr spcFirstLastPara="1" wrap="square" lIns="68575" tIns="34275" rIns="68575" bIns="34275" anchor="t" anchorCtr="0">
-            <a:spAutoFit/>
-          </a:bodyPr>
-          <a:lstStyle/>
-          <a:p>
-            <a:pPr marL="0" marR="0" lvl="0" indent="0" algn="ctr" rtl="0">
-              <a:spcBef>
-                <a:spcPts val="0"/>
-              </a:spcBef>
-              <a:spcAft>
-                <a:spcPts val="0"/>
-              </a:spcAft>
-              <a:buNone/>
-            </a:pPr>
-            <a:r>
-              <a:rPr lang="en-US" sz="1200">
-                <a:solidFill>
-                  <a:schemeClr val="dk1"/>
-                </a:solidFill>
-                <a:latin typeface="Calibri"/>
-                <a:ea typeface="Calibri"/>
-                <a:cs typeface="Calibri"/>
-                <a:sym typeface="Calibri"/>
-              </a:rPr>
-              <a:t>disconnect</a:t>
-            </a:r>
-            <a:endParaRPr sz="1200">
-              <a:solidFill>
-                <a:schemeClr val="dk1"/>
-              </a:solidFill>
-              <a:latin typeface="Calibri"/>
-              <a:ea typeface="Calibri"/>
-              <a:cs typeface="Calibri"/>
-              <a:sym typeface="Calibri"/>
-            </a:endParaRPr>
-          </a:p>
-        </p:txBody>
-      </p:sp>
-      <p:pic>
-        <p:nvPicPr>
-          <p:cNvPr id="126" name="Google Shape;126;p17"/>
-          <p:cNvPicPr preferRelativeResize="0"/>
-          <p:nvPr/>
-        </p:nvPicPr>
-        <p:blipFill>
-          <a:blip r:embed="rId5" cstate="email">
-            <a:alphaModFix/>
-            <a:extLst>
-              <a:ext uri="{28A0092B-C50C-407E-A947-70E740481C1C}">
-                <a14:useLocalDpi xmlns:a14="http://schemas.microsoft.com/office/drawing/2010/main"/>
-              </a:ext>
-            </a:extLst>
-          </a:blip>
-          <a:stretch>
-            <a:fillRect/>
-          </a:stretch>
-        </p:blipFill>
-        <p:spPr>
-          <a:xfrm>
-            <a:off x="4807694" y="3481524"/>
-            <a:ext cx="2904631" cy="1546801"/>
-          </a:xfrm>
-          <a:prstGeom prst="rect">
-            <a:avLst/>
-          </a:prstGeom>
-          <a:noFill/>
-          <a:ln w="9525" cap="flat" cmpd="sng">
-            <a:solidFill>
-              <a:srgbClr val="FF0000"/>
-            </a:solidFill>
-            <a:prstDash val="solid"/>
-            <a:round/>
-            <a:headEnd type="none" w="sm" len="sm"/>
-            <a:tailEnd type="none" w="sm" len="sm"/>
-          </a:ln>
-        </p:spPr>
-      </p:pic>
-      <p:sp>
-        <p:nvSpPr>
-          <p:cNvPr id="127" name="Google Shape;127;p17"/>
-          <p:cNvSpPr txBox="1"/>
-          <p:nvPr/>
-        </p:nvSpPr>
-        <p:spPr>
-          <a:xfrm>
-            <a:off x="65625" y="3481519"/>
-            <a:ext cx="4473600" cy="1546800"/>
-          </a:xfrm>
-          <a:prstGeom prst="rect">
-            <a:avLst/>
-          </a:prstGeom>
-          <a:solidFill>
-            <a:srgbClr val="FFF2CC"/>
-          </a:solidFill>
-          <a:ln w="7150" cap="flat" cmpd="sng">
-            <a:solidFill>
-              <a:srgbClr val="FF0000"/>
-            </a:solidFill>
-            <a:prstDash val="solid"/>
-            <a:round/>
-            <a:headEnd type="none" w="sm" len="sm"/>
-            <a:tailEnd type="none" w="sm" len="sm"/>
-          </a:ln>
-        </p:spPr>
-        <p:txBody>
-          <a:bodyPr spcFirstLastPara="1" wrap="square" lIns="68575" tIns="34275" rIns="68575" bIns="34275" anchor="t" anchorCtr="0">
-            <a:spAutoFit/>
-          </a:bodyPr>
-          <a:lstStyle/>
-          <a:p>
-            <a:pPr marL="94060" marR="0" lvl="0" indent="-103585" algn="l" rtl="0">
-              <a:spcBef>
-                <a:spcPts val="0"/>
-              </a:spcBef>
-              <a:spcAft>
-                <a:spcPts val="0"/>
-              </a:spcAft>
-              <a:buClr>
-                <a:schemeClr val="dk1"/>
-              </a:buClr>
-              <a:buSzPts val="1200"/>
-              <a:buFont typeface="Calibri"/>
-              <a:buChar char="•"/>
-            </a:pPr>
-            <a:r>
-              <a:rPr lang="en-US" sz="1200">
-                <a:solidFill>
-                  <a:schemeClr val="dk1"/>
-                </a:solidFill>
-                <a:latin typeface="Calibri"/>
-                <a:ea typeface="Calibri"/>
-                <a:cs typeface="Calibri"/>
-                <a:sym typeface="Calibri"/>
-              </a:rPr>
-              <a:t>Oupes Mega 2 Pro, a portable solar generator</a:t>
-            </a:r>
-            <a:endParaRPr sz="1200">
-              <a:solidFill>
-                <a:schemeClr val="dk1"/>
-              </a:solidFill>
-              <a:latin typeface="Calibri"/>
-              <a:ea typeface="Calibri"/>
-              <a:cs typeface="Calibri"/>
-              <a:sym typeface="Calibri"/>
-            </a:endParaRPr>
-          </a:p>
-          <a:p>
-            <a:pPr marL="94060" marR="0" lvl="0" indent="-103585" algn="l" rtl="0">
-              <a:spcBef>
-                <a:spcPts val="0"/>
-              </a:spcBef>
-              <a:spcAft>
-                <a:spcPts val="0"/>
-              </a:spcAft>
-              <a:buClr>
-                <a:schemeClr val="dk1"/>
-              </a:buClr>
-              <a:buSzPts val="1200"/>
-              <a:buFont typeface="Calibri"/>
-              <a:buChar char="•"/>
-            </a:pPr>
-            <a:r>
-              <a:rPr lang="en-US" sz="1200">
-                <a:solidFill>
-                  <a:schemeClr val="dk1"/>
-                </a:solidFill>
-                <a:latin typeface="Calibri"/>
-                <a:ea typeface="Calibri"/>
-                <a:cs typeface="Calibri"/>
-                <a:sym typeface="Calibri"/>
-              </a:rPr>
-              <a:t>2.5KW inverter, 140W USB-C ports, and a long-lasting lithium iron phosphate battery</a:t>
-            </a:r>
-            <a:endParaRPr sz="1200">
-              <a:solidFill>
-                <a:schemeClr val="dk1"/>
-              </a:solidFill>
-              <a:latin typeface="Calibri"/>
-              <a:ea typeface="Calibri"/>
-              <a:cs typeface="Calibri"/>
-              <a:sym typeface="Calibri"/>
-            </a:endParaRPr>
-          </a:p>
-          <a:p>
-            <a:pPr marL="94060" marR="0" lvl="0" indent="-103585" algn="l" rtl="0">
-              <a:spcBef>
-                <a:spcPts val="0"/>
-              </a:spcBef>
-              <a:spcAft>
-                <a:spcPts val="0"/>
-              </a:spcAft>
-              <a:buClr>
-                <a:schemeClr val="dk1"/>
-              </a:buClr>
-              <a:buSzPts val="1200"/>
-              <a:buFont typeface="Calibri"/>
-              <a:buChar char="•"/>
-            </a:pPr>
-            <a:r>
-              <a:rPr lang="en-US" sz="1200">
-                <a:solidFill>
-                  <a:schemeClr val="dk1"/>
-                </a:solidFill>
-                <a:latin typeface="Calibri"/>
-                <a:ea typeface="Calibri"/>
-                <a:cs typeface="Calibri"/>
-                <a:sym typeface="Calibri"/>
-              </a:rPr>
-              <a:t>But the original Oupes Mega 2 outperforms the "Pro" version in several key categories, including solar input capacity and overall value - </a:t>
-            </a:r>
-            <a:r>
-              <a:rPr lang="en-US" sz="1200" u="sng">
-                <a:solidFill>
-                  <a:schemeClr val="hlink"/>
-                </a:solidFill>
-                <a:latin typeface="Calibri"/>
-                <a:ea typeface="Calibri"/>
-                <a:cs typeface="Calibri"/>
-                <a:sym typeface="Calibri"/>
-                <a:hlinkClick r:id="rId6"/>
-              </a:rPr>
-              <a:t>https://www.youtube.com/watch?v=Fw3Ixuu8Ook</a:t>
-            </a:r>
-            <a:endParaRPr sz="1200">
-              <a:solidFill>
-                <a:schemeClr val="dk1"/>
-              </a:solidFill>
-              <a:latin typeface="Calibri"/>
-              <a:ea typeface="Calibri"/>
-              <a:cs typeface="Calibri"/>
-              <a:sym typeface="Calibri"/>
-            </a:endParaRPr>
-          </a:p>
-          <a:p>
-            <a:pPr marL="94060" marR="0" lvl="0" indent="-103585" algn="l" rtl="0">
-              <a:spcBef>
-                <a:spcPts val="0"/>
-              </a:spcBef>
-              <a:spcAft>
-                <a:spcPts val="0"/>
-              </a:spcAft>
-              <a:buClr>
-                <a:schemeClr val="dk1"/>
-              </a:buClr>
-              <a:buSzPts val="1200"/>
-              <a:buFont typeface="Calibri"/>
-              <a:buChar char="•"/>
-            </a:pPr>
-            <a:r>
-              <a:rPr lang="en-US" sz="1200">
-                <a:solidFill>
-                  <a:schemeClr val="dk1"/>
-                </a:solidFill>
-                <a:latin typeface="Calibri"/>
-                <a:ea typeface="Calibri"/>
-                <a:cs typeface="Calibri"/>
-                <a:sym typeface="Calibri"/>
-              </a:rPr>
-              <a:t>Ultimately, while the Mega 2 Pro is a decent unit, it is not recommended over the original Mega 2</a:t>
-            </a:r>
-            <a:endParaRPr sz="1200">
-              <a:solidFill>
-                <a:schemeClr val="dk1"/>
-              </a:solidFill>
-              <a:latin typeface="Calibri"/>
-              <a:ea typeface="Calibri"/>
-              <a:cs typeface="Calibri"/>
-              <a:sym typeface="Calibri"/>
-            </a:endParaRPr>
-          </a:p>
-        </p:txBody>
-      </p:sp>
-    </p:spTree>
-  </p:cSld>
-  <p:clrMapOvr>
-    <a:masterClrMapping/>
-  </p:clrMapOvr>
-</p:sld>
-</file>
-
-<file path=ppt/slides/slide6.xml><?xml version="1.0" encoding="utf-8"?>
+<file path=ppt/slides/slide7.xml><?xml version="1.0" encoding="utf-8"?>
 <p:sld xmlns:a="http://schemas.openxmlformats.org/drawingml/2006/main" xmlns:r="http://schemas.openxmlformats.org/officeDocument/2006/relationships" xmlns:p="http://schemas.openxmlformats.org/presentationml/2006/main">
   <p:cSld>
     <p:spTree>
@@ -18012,694 +18580,6 @@
 </p:sld>
 </file>
 
-<file path=ppt/slides/slide7.xml><?xml version="1.0" encoding="utf-8"?>
-<p:sld xmlns:a="http://schemas.openxmlformats.org/drawingml/2006/main" xmlns:r="http://schemas.openxmlformats.org/officeDocument/2006/relationships" xmlns:p="http://schemas.openxmlformats.org/presentationml/2006/main">
-  <p:cSld>
-    <p:spTree>
-      <p:nvGrpSpPr>
-        <p:cNvPr id="1" name="Shape 144"/>
-        <p:cNvGrpSpPr/>
-        <p:nvPr/>
-      </p:nvGrpSpPr>
-      <p:grpSpPr>
-        <a:xfrm>
-          <a:off x="0" y="0"/>
-          <a:ext cx="0" cy="0"/>
-          <a:chOff x="0" y="0"/>
-          <a:chExt cx="0" cy="0"/>
-        </a:xfrm>
-      </p:grpSpPr>
-      <p:sp>
-        <p:nvSpPr>
-          <p:cNvPr id="145" name="Google Shape;145;p19"/>
-          <p:cNvSpPr txBox="1"/>
-          <p:nvPr/>
-        </p:nvSpPr>
-        <p:spPr>
-          <a:xfrm>
-            <a:off x="65623" y="39645"/>
-            <a:ext cx="3988200" cy="346200"/>
-          </a:xfrm>
-          <a:prstGeom prst="rect">
-            <a:avLst/>
-          </a:prstGeom>
-          <a:noFill/>
-          <a:ln>
-            <a:noFill/>
-          </a:ln>
-        </p:spPr>
-        <p:txBody>
-          <a:bodyPr spcFirstLastPara="1" wrap="square" lIns="68575" tIns="34275" rIns="68575" bIns="34275" anchor="t" anchorCtr="0">
-            <a:spAutoFit/>
-          </a:bodyPr>
-          <a:lstStyle/>
-          <a:p>
-            <a:pPr marL="0" marR="0" lvl="0" indent="0" algn="l" rtl="0">
-              <a:spcBef>
-                <a:spcPts val="0"/>
-              </a:spcBef>
-              <a:spcAft>
-                <a:spcPts val="0"/>
-              </a:spcAft>
-              <a:buNone/>
-            </a:pPr>
-            <a:r>
-              <a:rPr lang="en-US" sz="1800" b="1" i="0" u="none" strike="noStrike" cap="none">
-                <a:solidFill>
-                  <a:schemeClr val="dk1"/>
-                </a:solidFill>
-                <a:latin typeface="Calibri"/>
-                <a:ea typeface="Calibri"/>
-                <a:cs typeface="Calibri"/>
-                <a:sym typeface="Calibri"/>
-              </a:rPr>
-              <a:t>Solar</a:t>
-            </a:r>
-            <a:endParaRPr sz="1800" b="1" i="0">
-              <a:solidFill>
-                <a:srgbClr val="333333"/>
-              </a:solidFill>
-              <a:latin typeface="Calibri"/>
-              <a:ea typeface="Calibri"/>
-              <a:cs typeface="Calibri"/>
-              <a:sym typeface="Calibri"/>
-            </a:endParaRPr>
-          </a:p>
-        </p:txBody>
-      </p:sp>
-      <p:sp>
-        <p:nvSpPr>
-          <p:cNvPr id="146" name="Google Shape;146;p19"/>
-          <p:cNvSpPr txBox="1"/>
-          <p:nvPr/>
-        </p:nvSpPr>
-        <p:spPr>
-          <a:xfrm>
-            <a:off x="65625" y="385900"/>
-            <a:ext cx="4493700" cy="2100900"/>
-          </a:xfrm>
-          <a:prstGeom prst="rect">
-            <a:avLst/>
-          </a:prstGeom>
-          <a:solidFill>
-            <a:srgbClr val="FFF2CC"/>
-          </a:solidFill>
-          <a:ln w="7150" cap="flat" cmpd="sng">
-            <a:solidFill>
-              <a:srgbClr val="FF0000"/>
-            </a:solidFill>
-            <a:prstDash val="solid"/>
-            <a:round/>
-            <a:headEnd type="none" w="sm" len="sm"/>
-            <a:tailEnd type="none" w="sm" len="sm"/>
-          </a:ln>
-        </p:spPr>
-        <p:txBody>
-          <a:bodyPr spcFirstLastPara="1" wrap="square" lIns="68575" tIns="34275" rIns="68575" bIns="34275" anchor="t" anchorCtr="0">
-            <a:spAutoFit/>
-          </a:bodyPr>
-          <a:lstStyle/>
-          <a:p>
-            <a:pPr marL="94060" marR="0" lvl="0" indent="-103585" algn="l" rtl="0">
-              <a:spcBef>
-                <a:spcPts val="0"/>
-              </a:spcBef>
-              <a:spcAft>
-                <a:spcPts val="0"/>
-              </a:spcAft>
-              <a:buClr>
-                <a:srgbClr val="FF0000"/>
-              </a:buClr>
-              <a:buSzPts val="1200"/>
-              <a:buChar char="•"/>
-            </a:pPr>
-            <a:r>
-              <a:rPr lang="en-US" sz="1200" b="1">
-                <a:solidFill>
-                  <a:srgbClr val="FF0000"/>
-                </a:solidFill>
-                <a:latin typeface="Calibri"/>
-                <a:ea typeface="Calibri"/>
-                <a:cs typeface="Calibri"/>
-                <a:sym typeface="Calibri"/>
-              </a:rPr>
-              <a:t>Simple solar system consisting of 2 parts:</a:t>
-            </a:r>
-            <a:endParaRPr sz="1200" b="1">
-              <a:solidFill>
-                <a:srgbClr val="FF0000"/>
-              </a:solidFill>
-              <a:latin typeface="Calibri"/>
-              <a:ea typeface="Calibri"/>
-              <a:cs typeface="Calibri"/>
-              <a:sym typeface="Calibri"/>
-            </a:endParaRPr>
-          </a:p>
-          <a:p>
-            <a:pPr marL="94060" marR="0" lvl="0" indent="-103585" algn="l" rtl="0">
-              <a:spcBef>
-                <a:spcPts val="0"/>
-              </a:spcBef>
-              <a:spcAft>
-                <a:spcPts val="0"/>
-              </a:spcAft>
-              <a:buClr>
-                <a:schemeClr val="dk1"/>
-              </a:buClr>
-              <a:buSzPts val="1200"/>
-              <a:buFont typeface="Arial"/>
-              <a:buChar char="•"/>
-            </a:pPr>
-            <a:r>
-              <a:rPr lang="en-US" sz="1200" b="1">
-                <a:solidFill>
-                  <a:srgbClr val="3C78D8"/>
-                </a:solidFill>
-                <a:latin typeface="Calibri"/>
-                <a:ea typeface="Calibri"/>
-                <a:cs typeface="Calibri"/>
-                <a:sym typeface="Calibri"/>
-              </a:rPr>
-              <a:t>EcoFlow Delta 3</a:t>
-            </a:r>
-            <a:r>
-              <a:rPr lang="en-US" sz="1200">
-                <a:solidFill>
-                  <a:schemeClr val="dk1"/>
-                </a:solidFill>
-                <a:latin typeface="Calibri"/>
-                <a:ea typeface="Calibri"/>
-                <a:cs typeface="Calibri"/>
-                <a:sym typeface="Calibri"/>
-              </a:rPr>
-              <a:t> -  Power Station (battery + inverter+ charge controller) - 1.8KW output, 1KWh capacity (expandable), various AC/USB ports</a:t>
-            </a:r>
-            <a:br>
-              <a:rPr lang="en-US" sz="1200">
-                <a:solidFill>
-                  <a:schemeClr val="dk1"/>
-                </a:solidFill>
-                <a:latin typeface="Calibri"/>
-                <a:ea typeface="Calibri"/>
-                <a:cs typeface="Calibri"/>
-                <a:sym typeface="Calibri"/>
-              </a:rPr>
-            </a:br>
-            <a:r>
-              <a:rPr lang="en-US" sz="1200" u="sng">
-                <a:solidFill>
-                  <a:schemeClr val="hlink"/>
-                </a:solidFill>
-                <a:latin typeface="Calibri"/>
-                <a:ea typeface="Calibri"/>
-                <a:cs typeface="Calibri"/>
-                <a:sym typeface="Calibri"/>
-                <a:hlinkClick r:id="rId3"/>
-              </a:rPr>
-              <a:t>https://www.amazon.com/dp/B0B9XB57XM?th=1</a:t>
-            </a:r>
-            <a:r>
-              <a:rPr lang="en-US" sz="1200">
-                <a:solidFill>
-                  <a:schemeClr val="dk1"/>
-                </a:solidFill>
-                <a:latin typeface="Calibri"/>
-                <a:ea typeface="Calibri"/>
-                <a:cs typeface="Calibri"/>
-                <a:sym typeface="Calibri"/>
-              </a:rPr>
-              <a:t> </a:t>
-            </a:r>
-            <a:endParaRPr sz="1200">
-              <a:solidFill>
-                <a:schemeClr val="dk1"/>
-              </a:solidFill>
-              <a:latin typeface="Calibri"/>
-              <a:ea typeface="Calibri"/>
-              <a:cs typeface="Calibri"/>
-              <a:sym typeface="Calibri"/>
-            </a:endParaRPr>
-          </a:p>
-          <a:p>
-            <a:pPr marL="94060" marR="0" lvl="0" indent="-103585" algn="l" rtl="0">
-              <a:spcBef>
-                <a:spcPts val="0"/>
-              </a:spcBef>
-              <a:spcAft>
-                <a:spcPts val="0"/>
-              </a:spcAft>
-              <a:buClr>
-                <a:schemeClr val="dk1"/>
-              </a:buClr>
-              <a:buSzPts val="1200"/>
-              <a:buFont typeface="Arial"/>
-              <a:buChar char="•"/>
-            </a:pPr>
-            <a:r>
-              <a:rPr lang="en-US" sz="1200" b="1">
-                <a:solidFill>
-                  <a:srgbClr val="3C78D8"/>
-                </a:solidFill>
-                <a:latin typeface="Calibri"/>
-                <a:ea typeface="Calibri"/>
-                <a:cs typeface="Calibri"/>
-                <a:sym typeface="Calibri"/>
-              </a:rPr>
-              <a:t>Callsun 215w Solar Panel (56"x30") </a:t>
-            </a:r>
-            <a:r>
-              <a:rPr lang="en-US" sz="1200">
-                <a:solidFill>
-                  <a:schemeClr val="dk1"/>
-                </a:solidFill>
-                <a:latin typeface="Calibri"/>
-                <a:ea typeface="Calibri"/>
-                <a:cs typeface="Calibri"/>
-                <a:sym typeface="Calibri"/>
-              </a:rPr>
-              <a:t>- efficient, bifacial(captures light from both sides), anti-shading technology, and IP68 waterproof rating</a:t>
-            </a:r>
-            <a:endParaRPr sz="1200">
-              <a:solidFill>
-                <a:schemeClr val="dk1"/>
-              </a:solidFill>
-              <a:latin typeface="Calibri"/>
-              <a:ea typeface="Calibri"/>
-              <a:cs typeface="Calibri"/>
-              <a:sym typeface="Calibri"/>
-            </a:endParaRPr>
-          </a:p>
-          <a:p>
-            <a:pPr marL="94060" marR="0" lvl="0" indent="-103585" algn="l" rtl="0">
-              <a:spcBef>
-                <a:spcPts val="0"/>
-              </a:spcBef>
-              <a:spcAft>
-                <a:spcPts val="0"/>
-              </a:spcAft>
-              <a:buClr>
-                <a:schemeClr val="dk1"/>
-              </a:buClr>
-              <a:buSzPts val="1200"/>
-              <a:buFont typeface="Arial"/>
-              <a:buChar char="•"/>
-            </a:pPr>
-            <a:r>
-              <a:rPr lang="en-US" sz="1200">
-                <a:solidFill>
-                  <a:schemeClr val="dk1"/>
-                </a:solidFill>
-                <a:latin typeface="Calibri"/>
-                <a:ea typeface="Calibri"/>
-                <a:cs typeface="Calibri"/>
-                <a:sym typeface="Calibri"/>
-              </a:rPr>
-              <a:t>Solar to XT60i Cable with XT60 connector</a:t>
-            </a:r>
-            <a:endParaRPr sz="1200">
-              <a:solidFill>
-                <a:schemeClr val="dk1"/>
-              </a:solidFill>
-              <a:latin typeface="Calibri"/>
-              <a:ea typeface="Calibri"/>
-              <a:cs typeface="Calibri"/>
-              <a:sym typeface="Calibri"/>
-            </a:endParaRPr>
-          </a:p>
-          <a:p>
-            <a:pPr marL="94060" marR="0" lvl="0" indent="-103585" algn="l" rtl="0">
-              <a:spcBef>
-                <a:spcPts val="0"/>
-              </a:spcBef>
-              <a:spcAft>
-                <a:spcPts val="0"/>
-              </a:spcAft>
-              <a:buClr>
-                <a:schemeClr val="dk1"/>
-              </a:buClr>
-              <a:buSzPts val="1200"/>
-              <a:buFont typeface="Arial"/>
-              <a:buChar char="•"/>
-            </a:pPr>
-            <a:r>
-              <a:rPr lang="en-US" sz="1200">
-                <a:solidFill>
-                  <a:schemeClr val="dk1"/>
-                </a:solidFill>
-                <a:latin typeface="Calibri"/>
-                <a:ea typeface="Calibri"/>
-                <a:cs typeface="Calibri"/>
-                <a:sym typeface="Calibri"/>
-              </a:rPr>
-              <a:t>Optional 400W Folding Temporary Solar Panel</a:t>
-            </a:r>
-            <a:endParaRPr sz="1200">
-              <a:solidFill>
-                <a:schemeClr val="dk1"/>
-              </a:solidFill>
-              <a:latin typeface="Calibri"/>
-              <a:ea typeface="Calibri"/>
-              <a:cs typeface="Calibri"/>
-              <a:sym typeface="Calibri"/>
-            </a:endParaRPr>
-          </a:p>
-          <a:p>
-            <a:pPr marL="94060" marR="0" lvl="0" indent="-103585" algn="l" rtl="0">
-              <a:spcBef>
-                <a:spcPts val="0"/>
-              </a:spcBef>
-              <a:spcAft>
-                <a:spcPts val="0"/>
-              </a:spcAft>
-              <a:buClr>
-                <a:schemeClr val="dk1"/>
-              </a:buClr>
-              <a:buSzPts val="1200"/>
-              <a:buFont typeface="Arial"/>
-              <a:buChar char="•"/>
-            </a:pPr>
-            <a:r>
-              <a:rPr lang="en-US" sz="1200" u="sng">
-                <a:solidFill>
-                  <a:schemeClr val="hlink"/>
-                </a:solidFill>
-                <a:latin typeface="Calibri"/>
-                <a:ea typeface="Calibri"/>
-                <a:cs typeface="Calibri"/>
-                <a:sym typeface="Calibri"/>
-                <a:hlinkClick r:id="rId4"/>
-              </a:rPr>
-              <a:t>https://www.youtube.com/watch?v=KUU6vWjmlo4</a:t>
-            </a:r>
-            <a:endParaRPr sz="1200">
-              <a:solidFill>
-                <a:schemeClr val="dk1"/>
-              </a:solidFill>
-              <a:latin typeface="Calibri"/>
-              <a:ea typeface="Calibri"/>
-              <a:cs typeface="Calibri"/>
-              <a:sym typeface="Calibri"/>
-            </a:endParaRPr>
-          </a:p>
-        </p:txBody>
-      </p:sp>
-      <p:pic>
-        <p:nvPicPr>
-          <p:cNvPr id="147" name="Google Shape;147;p19"/>
-          <p:cNvPicPr preferRelativeResize="0"/>
-          <p:nvPr/>
-        </p:nvPicPr>
-        <p:blipFill>
-          <a:blip r:embed="rId5" cstate="email">
-            <a:alphaModFix/>
-            <a:extLst>
-              <a:ext uri="{28A0092B-C50C-407E-A947-70E740481C1C}">
-                <a14:useLocalDpi xmlns:a14="http://schemas.microsoft.com/office/drawing/2010/main"/>
-              </a:ext>
-            </a:extLst>
-          </a:blip>
-          <a:stretch>
-            <a:fillRect/>
-          </a:stretch>
-        </p:blipFill>
-        <p:spPr>
-          <a:xfrm>
-            <a:off x="4699125" y="385850"/>
-            <a:ext cx="2006476" cy="2041799"/>
-          </a:xfrm>
-          <a:prstGeom prst="rect">
-            <a:avLst/>
-          </a:prstGeom>
-          <a:noFill/>
-          <a:ln w="9525" cap="flat" cmpd="sng">
-            <a:solidFill>
-              <a:srgbClr val="FF0000"/>
-            </a:solidFill>
-            <a:prstDash val="solid"/>
-            <a:round/>
-            <a:headEnd type="none" w="sm" len="sm"/>
-            <a:tailEnd type="none" w="sm" len="sm"/>
-          </a:ln>
-        </p:spPr>
-      </p:pic>
-      <p:pic>
-        <p:nvPicPr>
-          <p:cNvPr id="148" name="Google Shape;148;p19"/>
-          <p:cNvPicPr preferRelativeResize="0"/>
-          <p:nvPr/>
-        </p:nvPicPr>
-        <p:blipFill>
-          <a:blip r:embed="rId6">
-            <a:alphaModFix/>
-          </a:blip>
-          <a:stretch>
-            <a:fillRect/>
-          </a:stretch>
-        </p:blipFill>
-        <p:spPr>
-          <a:xfrm>
-            <a:off x="6934325" y="385849"/>
-            <a:ext cx="1828800" cy="1828800"/>
-          </a:xfrm>
-          <a:prstGeom prst="rect">
-            <a:avLst/>
-          </a:prstGeom>
-          <a:noFill/>
-          <a:ln w="9525" cap="flat" cmpd="sng">
-            <a:solidFill>
-              <a:srgbClr val="FF0000"/>
-            </a:solidFill>
-            <a:prstDash val="solid"/>
-            <a:round/>
-            <a:headEnd type="none" w="sm" len="sm"/>
-            <a:tailEnd type="none" w="sm" len="sm"/>
-          </a:ln>
-        </p:spPr>
-      </p:pic>
-      <p:sp>
-        <p:nvSpPr>
-          <p:cNvPr id="149" name="Google Shape;149;p19"/>
-          <p:cNvSpPr txBox="1"/>
-          <p:nvPr/>
-        </p:nvSpPr>
-        <p:spPr>
-          <a:xfrm>
-            <a:off x="65625" y="2557600"/>
-            <a:ext cx="4493700" cy="1546800"/>
-          </a:xfrm>
-          <a:prstGeom prst="rect">
-            <a:avLst/>
-          </a:prstGeom>
-          <a:solidFill>
-            <a:srgbClr val="FFF2CC"/>
-          </a:solidFill>
-          <a:ln w="7150" cap="flat" cmpd="sng">
-            <a:solidFill>
-              <a:srgbClr val="FF0000"/>
-            </a:solidFill>
-            <a:prstDash val="solid"/>
-            <a:round/>
-            <a:headEnd type="none" w="sm" len="sm"/>
-            <a:tailEnd type="none" w="sm" len="sm"/>
-          </a:ln>
-        </p:spPr>
-        <p:txBody>
-          <a:bodyPr spcFirstLastPara="1" wrap="square" lIns="68575" tIns="34275" rIns="68575" bIns="34275" anchor="t" anchorCtr="0">
-            <a:spAutoFit/>
-          </a:bodyPr>
-          <a:lstStyle/>
-          <a:p>
-            <a:pPr marL="94060" marR="0" lvl="0" indent="-103585" algn="l" rtl="0">
-              <a:spcBef>
-                <a:spcPts val="0"/>
-              </a:spcBef>
-              <a:spcAft>
-                <a:spcPts val="0"/>
-              </a:spcAft>
-              <a:buClr>
-                <a:schemeClr val="dk1"/>
-              </a:buClr>
-              <a:buSzPts val="1200"/>
-              <a:buFont typeface="Arial"/>
-              <a:buChar char="•"/>
-            </a:pPr>
-            <a:r>
-              <a:rPr lang="en-US" sz="1200">
-                <a:solidFill>
-                  <a:schemeClr val="dk1"/>
-                </a:solidFill>
-                <a:latin typeface="Calibri"/>
-                <a:ea typeface="Calibri"/>
-                <a:cs typeface="Calibri"/>
-                <a:sym typeface="Calibri"/>
-              </a:rPr>
-              <a:t>static ground mounts, single-axis trackers, and dual-axis trackers</a:t>
-            </a:r>
-            <a:endParaRPr sz="1200">
-              <a:solidFill>
-                <a:schemeClr val="dk1"/>
-              </a:solidFill>
-              <a:latin typeface="Calibri"/>
-              <a:ea typeface="Calibri"/>
-              <a:cs typeface="Calibri"/>
-              <a:sym typeface="Calibri"/>
-            </a:endParaRPr>
-          </a:p>
-          <a:p>
-            <a:pPr marL="94060" marR="0" lvl="0" indent="-103585" algn="l" rtl="0">
-              <a:spcBef>
-                <a:spcPts val="0"/>
-              </a:spcBef>
-              <a:spcAft>
-                <a:spcPts val="0"/>
-              </a:spcAft>
-              <a:buClr>
-                <a:schemeClr val="dk1"/>
-              </a:buClr>
-              <a:buSzPts val="1200"/>
-              <a:buFont typeface="Arial"/>
-              <a:buChar char="•"/>
-            </a:pPr>
-            <a:r>
-              <a:rPr lang="en-US" sz="1200">
-                <a:solidFill>
-                  <a:schemeClr val="dk1"/>
-                </a:solidFill>
-                <a:latin typeface="Calibri"/>
-                <a:ea typeface="Calibri"/>
-                <a:cs typeface="Calibri"/>
-                <a:sym typeface="Calibri"/>
-              </a:rPr>
-              <a:t>Trackers harvest more energy than static mounts, the benefit is most significant during early morning and late afternoon hours when they can better capture the sun's angle</a:t>
-            </a:r>
-            <a:endParaRPr sz="1200">
-              <a:solidFill>
-                <a:schemeClr val="dk1"/>
-              </a:solidFill>
-              <a:latin typeface="Calibri"/>
-              <a:ea typeface="Calibri"/>
-              <a:cs typeface="Calibri"/>
-              <a:sym typeface="Calibri"/>
-            </a:endParaRPr>
-          </a:p>
-          <a:p>
-            <a:pPr marL="94060" marR="0" lvl="0" indent="-103585" algn="l" rtl="0">
-              <a:spcBef>
-                <a:spcPts val="0"/>
-              </a:spcBef>
-              <a:spcAft>
-                <a:spcPts val="0"/>
-              </a:spcAft>
-              <a:buClr>
-                <a:schemeClr val="dk1"/>
-              </a:buClr>
-              <a:buSzPts val="1200"/>
-              <a:buFont typeface="Arial"/>
-              <a:buChar char="•"/>
-            </a:pPr>
-            <a:r>
-              <a:rPr lang="en-US" sz="1200">
-                <a:solidFill>
-                  <a:schemeClr val="dk1"/>
-                </a:solidFill>
-                <a:latin typeface="Calibri"/>
-                <a:ea typeface="Calibri"/>
-                <a:cs typeface="Calibri"/>
-                <a:sym typeface="Calibri"/>
-              </a:rPr>
-              <a:t>If you have ample space, simple ground mounts are often the more cost-effective and reliable choice, whereas trackers are best suited for those with limited space and clear sky views</a:t>
-            </a:r>
-            <a:endParaRPr sz="1200">
-              <a:solidFill>
-                <a:schemeClr val="dk1"/>
-              </a:solidFill>
-              <a:latin typeface="Calibri"/>
-              <a:ea typeface="Calibri"/>
-              <a:cs typeface="Calibri"/>
-              <a:sym typeface="Calibri"/>
-            </a:endParaRPr>
-          </a:p>
-          <a:p>
-            <a:pPr marL="94060" marR="0" lvl="0" indent="-103585" algn="l" rtl="0">
-              <a:spcBef>
-                <a:spcPts val="0"/>
-              </a:spcBef>
-              <a:spcAft>
-                <a:spcPts val="0"/>
-              </a:spcAft>
-              <a:buClr>
-                <a:schemeClr val="dk1"/>
-              </a:buClr>
-              <a:buSzPts val="1200"/>
-              <a:buFont typeface="Arial"/>
-              <a:buChar char="•"/>
-            </a:pPr>
-            <a:r>
-              <a:rPr lang="en-US" sz="1200" u="sng">
-                <a:solidFill>
-                  <a:schemeClr val="hlink"/>
-                </a:solidFill>
-                <a:latin typeface="Calibri"/>
-                <a:ea typeface="Calibri"/>
-                <a:cs typeface="Calibri"/>
-                <a:sym typeface="Calibri"/>
-                <a:hlinkClick r:id="rId7"/>
-              </a:rPr>
-              <a:t>https://www.youtube.com/watch?v=r7HwQdssbas</a:t>
-            </a:r>
-            <a:endParaRPr sz="1200">
-              <a:solidFill>
-                <a:schemeClr val="dk1"/>
-              </a:solidFill>
-              <a:latin typeface="Calibri"/>
-              <a:ea typeface="Calibri"/>
-              <a:cs typeface="Calibri"/>
-              <a:sym typeface="Calibri"/>
-            </a:endParaRPr>
-          </a:p>
-        </p:txBody>
-      </p:sp>
-      <p:pic>
-        <p:nvPicPr>
-          <p:cNvPr id="150" name="Google Shape;150;p19"/>
-          <p:cNvPicPr preferRelativeResize="0"/>
-          <p:nvPr/>
-        </p:nvPicPr>
-        <p:blipFill>
-          <a:blip r:embed="rId8" cstate="email">
-            <a:alphaModFix/>
-            <a:extLst>
-              <a:ext uri="{28A0092B-C50C-407E-A947-70E740481C1C}">
-                <a14:useLocalDpi xmlns:a14="http://schemas.microsoft.com/office/drawing/2010/main"/>
-              </a:ext>
-            </a:extLst>
-          </a:blip>
-          <a:stretch>
-            <a:fillRect/>
-          </a:stretch>
-        </p:blipFill>
-        <p:spPr>
-          <a:xfrm>
-            <a:off x="4711725" y="2580050"/>
-            <a:ext cx="3826127" cy="2100900"/>
-          </a:xfrm>
-          <a:prstGeom prst="rect">
-            <a:avLst/>
-          </a:prstGeom>
-          <a:noFill/>
-          <a:ln>
-            <a:noFill/>
-          </a:ln>
-        </p:spPr>
-      </p:pic>
-    </p:spTree>
-  </p:cSld>
-  <p:clrMapOvr>
-    <a:masterClrMapping/>
-  </p:clrMapOvr>
-</p:sld>
-</file>
-
 <file path=ppt/slides/slide8.xml><?xml version="1.0" encoding="utf-8"?>
 <p:sld xmlns:a="http://schemas.openxmlformats.org/drawingml/2006/main" xmlns:r="http://schemas.openxmlformats.org/officeDocument/2006/relationships" xmlns:p="http://schemas.openxmlformats.org/presentationml/2006/main">
   <p:cSld>
@@ -19058,99 +18938,22 @@
           </a:ln>
         </p:spPr>
       </p:pic>
-    </p:spTree>
-  </p:cSld>
-  <p:clrMapOvr>
-    <a:masterClrMapping/>
-  </p:clrMapOvr>
-</p:sld>
-</file>
-
-<file path=ppt/slides/slide9.xml><?xml version="1.0" encoding="utf-8"?>
-<p:sld xmlns:a="http://schemas.openxmlformats.org/drawingml/2006/main" xmlns:r="http://schemas.openxmlformats.org/officeDocument/2006/relationships" xmlns:p="http://schemas.openxmlformats.org/presentationml/2006/main">
-  <p:cSld>
-    <p:spTree>
-      <p:nvGrpSpPr>
-        <p:cNvPr id="1" name="Shape 161"/>
-        <p:cNvGrpSpPr/>
-        <p:nvPr/>
-      </p:nvGrpSpPr>
-      <p:grpSpPr>
-        <a:xfrm>
-          <a:off x="0" y="0"/>
-          <a:ext cx="0" cy="0"/>
-          <a:chOff x="0" y="0"/>
-          <a:chExt cx="0" cy="0"/>
-        </a:xfrm>
-      </p:grpSpPr>
       <p:sp>
         <p:nvSpPr>
-          <p:cNvPr id="162" name="Google Shape;162;p21"/>
+          <p:cNvPr id="2" name="Google Shape;149;p19">
+            <a:extLst>
+              <a:ext uri="{FF2B5EF4-FFF2-40B4-BE49-F238E27FC236}">
+                <a16:creationId xmlns:a16="http://schemas.microsoft.com/office/drawing/2014/main" id="{F565423F-B9ED-7DC2-A250-FE65CF8E9969}"/>
+              </a:ext>
+            </a:extLst>
+          </p:cNvPr>
           <p:cNvSpPr txBox="1"/>
           <p:nvPr/>
         </p:nvSpPr>
         <p:spPr>
           <a:xfrm>
-            <a:off x="65623" y="39645"/>
-            <a:ext cx="3988200" cy="346200"/>
-          </a:xfrm>
-          <a:prstGeom prst="rect">
-            <a:avLst/>
-          </a:prstGeom>
-          <a:noFill/>
-          <a:ln>
-            <a:noFill/>
-          </a:ln>
-        </p:spPr>
-        <p:txBody>
-          <a:bodyPr spcFirstLastPara="1" wrap="square" lIns="68575" tIns="34275" rIns="68575" bIns="34275" anchor="t" anchorCtr="0">
-            <a:spAutoFit/>
-          </a:bodyPr>
-          <a:lstStyle/>
-          <a:p>
-            <a:pPr marL="0" marR="0" lvl="0" indent="0" algn="l" rtl="0">
-              <a:spcBef>
-                <a:spcPts val="0"/>
-              </a:spcBef>
-              <a:spcAft>
-                <a:spcPts val="0"/>
-              </a:spcAft>
-              <a:buNone/>
-            </a:pPr>
-            <a:r>
-              <a:rPr lang="en-US" sz="1800" b="1" i="0" u="none" strike="noStrike" cap="none">
-                <a:solidFill>
-                  <a:schemeClr val="dk1"/>
-                </a:solidFill>
-                <a:latin typeface="Calibri"/>
-                <a:ea typeface="Calibri"/>
-                <a:cs typeface="Calibri"/>
-                <a:sym typeface="Calibri"/>
-              </a:rPr>
-              <a:t>Solar</a:t>
-            </a:r>
-            <a:endParaRPr sz="1800" b="1" i="0">
-              <a:solidFill>
-                <a:srgbClr val="333333"/>
-              </a:solidFill>
-              <a:latin typeface="Calibri"/>
-              <a:ea typeface="Calibri"/>
-              <a:cs typeface="Calibri"/>
-              <a:sym typeface="Calibri"/>
-            </a:endParaRPr>
-          </a:p>
-        </p:txBody>
-      </p:sp>
-      <p:sp>
-        <p:nvSpPr>
-          <p:cNvPr id="163" name="Google Shape;163;p21"/>
-          <p:cNvSpPr txBox="1"/>
-          <p:nvPr/>
-        </p:nvSpPr>
-        <p:spPr>
-          <a:xfrm>
-            <a:off x="65625" y="385894"/>
-            <a:ext cx="4473600" cy="253800"/>
+            <a:off x="67395" y="2571750"/>
+            <a:ext cx="4112700" cy="1423436"/>
           </a:xfrm>
           <a:prstGeom prst="rect">
             <a:avLst/>
@@ -19189,7 +18992,7 @@
               <a:buChar char="•"/>
             </a:pPr>
             <a:r>
-              <a:rPr lang="en-US" sz="1200">
+              <a:rPr lang="en-US" sz="1100" dirty="0">
                 <a:solidFill>
                   <a:schemeClr val="dk1"/>
                 </a:solidFill>
@@ -19198,9 +19001,167 @@
                 <a:cs typeface="Calibri"/>
                 <a:sym typeface="Calibri"/>
               </a:rPr>
-              <a:t>xxx</a:t>
+              <a:t>Some solar panels can track position of the sun.</a:t>
             </a:r>
-            <a:endParaRPr sz="1200">
+            <a:br>
+              <a:rPr lang="en-US" sz="1100" dirty="0">
+                <a:solidFill>
+                  <a:schemeClr val="dk1"/>
+                </a:solidFill>
+                <a:latin typeface="Calibri"/>
+                <a:ea typeface="Calibri"/>
+                <a:cs typeface="Calibri"/>
+                <a:sym typeface="Calibri"/>
+              </a:rPr>
+            </a:br>
+            <a:r>
+              <a:rPr lang="en-US" sz="1100" dirty="0">
+                <a:solidFill>
+                  <a:schemeClr val="dk1"/>
+                </a:solidFill>
+                <a:latin typeface="Calibri"/>
+                <a:ea typeface="Calibri"/>
+                <a:cs typeface="Calibri"/>
+                <a:sym typeface="Calibri"/>
+              </a:rPr>
+              <a:t>Compare 3 types of solar panel installations:</a:t>
+            </a:r>
+            <a:br>
+              <a:rPr lang="en-US" sz="1100" dirty="0">
+                <a:solidFill>
+                  <a:schemeClr val="dk1"/>
+                </a:solidFill>
+                <a:latin typeface="Calibri"/>
+                <a:ea typeface="Calibri"/>
+                <a:cs typeface="Calibri"/>
+                <a:sym typeface="Calibri"/>
+              </a:rPr>
+            </a:br>
+            <a:r>
+              <a:rPr lang="en-US" sz="1100" dirty="0">
+                <a:solidFill>
+                  <a:schemeClr val="dk1"/>
+                </a:solidFill>
+                <a:latin typeface="Calibri"/>
+                <a:ea typeface="Calibri"/>
+                <a:cs typeface="Calibri"/>
+                <a:sym typeface="Calibri"/>
+              </a:rPr>
+              <a:t>           static, single-axis trackers, dual-axis trackers</a:t>
+            </a:r>
+            <a:endParaRPr sz="1100" dirty="0">
+              <a:solidFill>
+                <a:schemeClr val="dk1"/>
+              </a:solidFill>
+              <a:latin typeface="Calibri"/>
+              <a:ea typeface="Calibri"/>
+              <a:cs typeface="Calibri"/>
+              <a:sym typeface="Calibri"/>
+            </a:endParaRPr>
+          </a:p>
+          <a:p>
+            <a:pPr marL="94060" marR="0" lvl="0" indent="-103585" algn="l" rtl="0">
+              <a:spcBef>
+                <a:spcPts val="0"/>
+              </a:spcBef>
+              <a:spcAft>
+                <a:spcPts val="0"/>
+              </a:spcAft>
+              <a:buClr>
+                <a:schemeClr val="dk1"/>
+              </a:buClr>
+              <a:buSzPts val="1200"/>
+              <a:buFont typeface="Arial"/>
+              <a:buChar char="•"/>
+            </a:pPr>
+            <a:r>
+              <a:rPr lang="en-US" sz="1100" dirty="0">
+                <a:solidFill>
+                  <a:schemeClr val="dk1"/>
+                </a:solidFill>
+                <a:latin typeface="Calibri"/>
+                <a:ea typeface="Calibri"/>
+                <a:cs typeface="Calibri"/>
+                <a:sym typeface="Calibri"/>
+              </a:rPr>
+              <a:t>Trackers harvest more energy than static (especially in early morning and late afternoon). </a:t>
+            </a:r>
+            <a:endParaRPr sz="1100" dirty="0">
+              <a:solidFill>
+                <a:schemeClr val="dk1"/>
+              </a:solidFill>
+              <a:latin typeface="Calibri"/>
+              <a:ea typeface="Calibri"/>
+              <a:cs typeface="Calibri"/>
+              <a:sym typeface="Calibri"/>
+            </a:endParaRPr>
+          </a:p>
+          <a:p>
+            <a:pPr marL="94060" marR="0" lvl="0" indent="-103585" algn="l" rtl="0">
+              <a:spcBef>
+                <a:spcPts val="0"/>
+              </a:spcBef>
+              <a:spcAft>
+                <a:spcPts val="0"/>
+              </a:spcAft>
+              <a:buClr>
+                <a:schemeClr val="dk1"/>
+              </a:buClr>
+              <a:buSzPts val="1200"/>
+              <a:buFont typeface="Arial"/>
+              <a:buChar char="•"/>
+            </a:pPr>
+            <a:r>
+              <a:rPr lang="en-US" sz="1100" dirty="0">
+                <a:solidFill>
+                  <a:schemeClr val="dk1"/>
+                </a:solidFill>
+                <a:latin typeface="Calibri"/>
+                <a:ea typeface="Calibri"/>
+                <a:cs typeface="Calibri"/>
+                <a:sym typeface="Calibri"/>
+              </a:rPr>
+              <a:t>But if you have ample space, simple static mounts may be cheaper and more reliable</a:t>
+            </a:r>
+            <a:endParaRPr sz="1100" dirty="0">
+              <a:solidFill>
+                <a:schemeClr val="dk1"/>
+              </a:solidFill>
+              <a:latin typeface="Calibri"/>
+              <a:ea typeface="Calibri"/>
+              <a:cs typeface="Calibri"/>
+              <a:sym typeface="Calibri"/>
+            </a:endParaRPr>
+          </a:p>
+          <a:p>
+            <a:pPr marL="94060" marR="0" lvl="0" indent="-103585" algn="l" rtl="0">
+              <a:spcBef>
+                <a:spcPts val="0"/>
+              </a:spcBef>
+              <a:spcAft>
+                <a:spcPts val="0"/>
+              </a:spcAft>
+              <a:buClr>
+                <a:schemeClr val="dk1"/>
+              </a:buClr>
+              <a:buSzPts val="1200"/>
+              <a:buFont typeface="Arial"/>
+              <a:buChar char="•"/>
+            </a:pPr>
+            <a:r>
+              <a:rPr lang="en-US" sz="1100" u="sng" dirty="0">
+                <a:solidFill>
+                  <a:schemeClr val="hlink"/>
+                </a:solidFill>
+                <a:latin typeface="Calibri"/>
+                <a:ea typeface="Calibri"/>
+                <a:cs typeface="Calibri"/>
+                <a:sym typeface="Calibri"/>
+                <a:hlinkClick r:id="rId5"/>
+              </a:rPr>
+              <a:t>https://www.youtube.com/watch?v=r7HwQdssbas</a:t>
+            </a:r>
+            <a:endParaRPr sz="1100" dirty="0">
               <a:solidFill>
                 <a:schemeClr val="dk1"/>
               </a:solidFill>
@@ -19212,6 +19173,45 @@
           </a:p>
         </p:txBody>
       </p:sp>
+      <p:pic>
+        <p:nvPicPr>
+          <p:cNvPr id="3" name="Google Shape;150;p19">
+            <a:extLst>
+              <a:ext uri="{FF2B5EF4-FFF2-40B4-BE49-F238E27FC236}">
+                <a16:creationId xmlns:a16="http://schemas.microsoft.com/office/drawing/2014/main" id="{246AB1F3-8F60-D924-E7A9-2D96CE926217}"/>
+              </a:ext>
+            </a:extLst>
+          </p:cNvPr>
+          <p:cNvPicPr preferRelativeResize="0"/>
+          <p:nvPr/>
+        </p:nvPicPr>
+        <p:blipFill>
+          <a:blip r:embed="rId6" cstate="email">
+            <a:alphaModFix/>
+            <a:extLst>
+              <a:ext uri="{28A0092B-C50C-407E-A947-70E740481C1C}">
+                <a14:useLocalDpi xmlns:a14="http://schemas.microsoft.com/office/drawing/2010/main"/>
+              </a:ext>
+            </a:extLst>
+          </a:blip>
+          <a:stretch>
+            <a:fillRect/>
+          </a:stretch>
+        </p:blipFill>
+        <p:spPr>
+          <a:xfrm>
+            <a:off x="4864100" y="2876550"/>
+            <a:ext cx="2158875" cy="925260"/>
+          </a:xfrm>
+          <a:prstGeom prst="rect">
+            <a:avLst/>
+          </a:prstGeom>
+          <a:noFill/>
+          <a:ln>
+            <a:noFill/>
+          </a:ln>
+        </p:spPr>
+      </p:pic>
     </p:spTree>
   </p:cSld>
   <p:clrMapOvr>

--- a/solar.pptx
+++ b/solar.pptx
@@ -5,17 +5,19 @@
     <p:sldMasterId id="2147483659" r:id="rId1"/>
   </p:sldMasterIdLst>
   <p:notesMasterIdLst>
-    <p:notesMasterId r:id="rId10"/>
+    <p:notesMasterId r:id="rId12"/>
   </p:notesMasterIdLst>
   <p:sldIdLst>
     <p:sldId id="260" r:id="rId2"/>
     <p:sldId id="262" r:id="rId3"/>
     <p:sldId id="256" r:id="rId4"/>
     <p:sldId id="257" r:id="rId5"/>
-    <p:sldId id="258" r:id="rId6"/>
-    <p:sldId id="259" r:id="rId7"/>
-    <p:sldId id="261" r:id="rId8"/>
-    <p:sldId id="263" r:id="rId9"/>
+    <p:sldId id="264" r:id="rId6"/>
+    <p:sldId id="258" r:id="rId7"/>
+    <p:sldId id="259" r:id="rId8"/>
+    <p:sldId id="261" r:id="rId9"/>
+    <p:sldId id="263" r:id="rId10"/>
+    <p:sldId id="265" r:id="rId11"/>
   </p:sldIdLst>
   <p:sldSz cx="9144000" cy="5143500" type="screen16x9"/>
   <p:notesSz cx="6858000" cy="9144000"/>
@@ -1553,6 +1555,115 @@
 </p:notes>
 </file>
 
+<file path=ppt/notesSlides/notesSlide10.xml><?xml version="1.0" encoding="utf-8"?>
+<p:notes xmlns:a="http://schemas.openxmlformats.org/drawingml/2006/main" xmlns:r="http://schemas.openxmlformats.org/officeDocument/2006/relationships" xmlns:p="http://schemas.openxmlformats.org/presentationml/2006/main" showMasterSp="0" showMasterPhAnim="0">
+  <p:cSld>
+    <p:spTree>
+      <p:nvGrpSpPr>
+        <p:cNvPr id="1" name="Shape 151"/>
+        <p:cNvGrpSpPr/>
+        <p:nvPr/>
+      </p:nvGrpSpPr>
+      <p:grpSpPr>
+        <a:xfrm>
+          <a:off x="0" y="0"/>
+          <a:ext cx="0" cy="0"/>
+          <a:chOff x="0" y="0"/>
+          <a:chExt cx="0" cy="0"/>
+        </a:xfrm>
+      </p:grpSpPr>
+      <p:sp>
+        <p:nvSpPr>
+          <p:cNvPr id="152" name="Google Shape;152;g3e5eb4dda17_0_53:notes"/>
+          <p:cNvSpPr txBox="1">
+            <a:spLocks noGrp="1"/>
+          </p:cNvSpPr>
+          <p:nvPr>
+            <p:ph type="body" idx="1"/>
+          </p:nvPr>
+        </p:nvSpPr>
+        <p:spPr>
+          <a:xfrm>
+            <a:off x="685800" y="4400550"/>
+            <a:ext cx="5486400" cy="3600600"/>
+          </a:xfrm>
+          <a:prstGeom prst="rect">
+            <a:avLst/>
+          </a:prstGeom>
+        </p:spPr>
+        <p:txBody>
+          <a:bodyPr spcFirstLastPara="1" wrap="square" lIns="91425" tIns="45700" rIns="91425" bIns="45700" anchor="t" anchorCtr="0">
+            <a:noAutofit/>
+          </a:bodyPr>
+          <a:lstStyle/>
+          <a:p>
+            <a:pPr marL="0" lvl="0" indent="0" algn="l" rtl="0">
+              <a:spcBef>
+                <a:spcPts val="0"/>
+              </a:spcBef>
+              <a:spcAft>
+                <a:spcPts val="0"/>
+              </a:spcAft>
+              <a:buNone/>
+            </a:pPr>
+            <a:endParaRPr/>
+          </a:p>
+        </p:txBody>
+      </p:sp>
+      <p:sp>
+        <p:nvSpPr>
+          <p:cNvPr id="153" name="Google Shape;153;g3e5eb4dda17_0_53:notes"/>
+          <p:cNvSpPr>
+            <a:spLocks noGrp="1" noRot="1" noChangeAspect="1"/>
+          </p:cNvSpPr>
+          <p:nvPr>
+            <p:ph type="sldImg" idx="2"/>
+          </p:nvPr>
+        </p:nvSpPr>
+        <p:spPr>
+          <a:xfrm>
+            <a:off x="685800" y="1143000"/>
+            <a:ext cx="5486400" cy="3086100"/>
+          </a:xfrm>
+          <a:custGeom>
+            <a:avLst/>
+            <a:gdLst/>
+            <a:ahLst/>
+            <a:cxnLst/>
+            <a:rect l="l" t="t" r="r" b="b"/>
+            <a:pathLst>
+              <a:path w="120000" h="120000" extrusionOk="0">
+                <a:moveTo>
+                  <a:pt x="0" y="0"/>
+                </a:moveTo>
+                <a:lnTo>
+                  <a:pt x="120000" y="0"/>
+                </a:lnTo>
+                <a:lnTo>
+                  <a:pt x="120000" y="120000"/>
+                </a:lnTo>
+                <a:lnTo>
+                  <a:pt x="0" y="120000"/>
+                </a:lnTo>
+                <a:close/>
+              </a:path>
+            </a:pathLst>
+          </a:custGeom>
+        </p:spPr>
+      </p:sp>
+    </p:spTree>
+    <p:extLst>
+      <p:ext uri="{BB962C8B-B14F-4D97-AF65-F5344CB8AC3E}">
+        <p14:creationId xmlns:p14="http://schemas.microsoft.com/office/powerpoint/2010/main" val="2868086858"/>
+      </p:ext>
+    </p:extLst>
+  </p:cSld>
+  <p:clrMapOvr>
+    <a:masterClrMapping/>
+  </p:clrMapOvr>
+</p:notes>
+</file>
+
 <file path=ppt/notesSlides/notesSlide2.xml><?xml version="1.0" encoding="utf-8"?>
 <p:notes xmlns:a="http://schemas.openxmlformats.org/drawingml/2006/main" xmlns:r="http://schemas.openxmlformats.org/officeDocument/2006/relationships" xmlns:p="http://schemas.openxmlformats.org/presentationml/2006/main" showMasterSp="0" showMasterPhAnim="0">
   <p:cSld>
@@ -1962,6 +2073,11 @@
         </p:spPr>
       </p:sp>
     </p:spTree>
+    <p:extLst>
+      <p:ext uri="{BB962C8B-B14F-4D97-AF65-F5344CB8AC3E}">
+        <p14:creationId xmlns:p14="http://schemas.microsoft.com/office/powerpoint/2010/main" val="1022976460"/>
+      </p:ext>
+    </p:extLst>
   </p:cSld>
   <p:clrMapOvr>
     <a:masterClrMapping/>
@@ -1970,6 +2086,110 @@
 </file>
 
 <file path=ppt/notesSlides/notesSlide6.xml><?xml version="1.0" encoding="utf-8"?>
+<p:notes xmlns:a="http://schemas.openxmlformats.org/drawingml/2006/main" xmlns:r="http://schemas.openxmlformats.org/officeDocument/2006/relationships" xmlns:p="http://schemas.openxmlformats.org/presentationml/2006/main" showMasterSp="0" showMasterPhAnim="0">
+  <p:cSld>
+    <p:spTree>
+      <p:nvGrpSpPr>
+        <p:cNvPr id="1" name="Shape 98"/>
+        <p:cNvGrpSpPr/>
+        <p:nvPr/>
+      </p:nvGrpSpPr>
+      <p:grpSpPr>
+        <a:xfrm>
+          <a:off x="0" y="0"/>
+          <a:ext cx="0" cy="0"/>
+          <a:chOff x="0" y="0"/>
+          <a:chExt cx="0" cy="0"/>
+        </a:xfrm>
+      </p:grpSpPr>
+      <p:sp>
+        <p:nvSpPr>
+          <p:cNvPr id="99" name="Google Shape;99;g3e5eb4dda17_0_1:notes"/>
+          <p:cNvSpPr txBox="1">
+            <a:spLocks noGrp="1"/>
+          </p:cNvSpPr>
+          <p:nvPr>
+            <p:ph type="body" idx="1"/>
+          </p:nvPr>
+        </p:nvSpPr>
+        <p:spPr>
+          <a:xfrm>
+            <a:off x="685800" y="4400550"/>
+            <a:ext cx="5486400" cy="3600600"/>
+          </a:xfrm>
+          <a:prstGeom prst="rect">
+            <a:avLst/>
+          </a:prstGeom>
+        </p:spPr>
+        <p:txBody>
+          <a:bodyPr spcFirstLastPara="1" wrap="square" lIns="91425" tIns="45700" rIns="91425" bIns="45700" anchor="t" anchorCtr="0">
+            <a:noAutofit/>
+          </a:bodyPr>
+          <a:lstStyle/>
+          <a:p>
+            <a:pPr marL="0" lvl="0" indent="0" algn="l" rtl="0">
+              <a:spcBef>
+                <a:spcPts val="0"/>
+              </a:spcBef>
+              <a:spcAft>
+                <a:spcPts val="0"/>
+              </a:spcAft>
+              <a:buNone/>
+            </a:pPr>
+            <a:endParaRPr/>
+          </a:p>
+        </p:txBody>
+      </p:sp>
+      <p:sp>
+        <p:nvSpPr>
+          <p:cNvPr id="100" name="Google Shape;100;g3e5eb4dda17_0_1:notes"/>
+          <p:cNvSpPr>
+            <a:spLocks noGrp="1" noRot="1" noChangeAspect="1"/>
+          </p:cNvSpPr>
+          <p:nvPr>
+            <p:ph type="sldImg" idx="2"/>
+          </p:nvPr>
+        </p:nvSpPr>
+        <p:spPr>
+          <a:xfrm>
+            <a:off x="685800" y="1143000"/>
+            <a:ext cx="5486400" cy="3086100"/>
+          </a:xfrm>
+          <a:custGeom>
+            <a:avLst/>
+            <a:gdLst/>
+            <a:ahLst/>
+            <a:cxnLst/>
+            <a:rect l="l" t="t" r="r" b="b"/>
+            <a:pathLst>
+              <a:path w="120000" h="120000" extrusionOk="0">
+                <a:moveTo>
+                  <a:pt x="0" y="0"/>
+                </a:moveTo>
+                <a:lnTo>
+                  <a:pt x="120000" y="0"/>
+                </a:lnTo>
+                <a:lnTo>
+                  <a:pt x="120000" y="120000"/>
+                </a:lnTo>
+                <a:lnTo>
+                  <a:pt x="0" y="120000"/>
+                </a:lnTo>
+                <a:close/>
+              </a:path>
+            </a:pathLst>
+          </a:custGeom>
+        </p:spPr>
+      </p:sp>
+    </p:spTree>
+  </p:cSld>
+  <p:clrMapOvr>
+    <a:masterClrMapping/>
+  </p:clrMapOvr>
+</p:notes>
+</file>
+
+<file path=ppt/notesSlides/notesSlide7.xml><?xml version="1.0" encoding="utf-8"?>
 <p:notes xmlns:a="http://schemas.openxmlformats.org/drawingml/2006/main" xmlns:r="http://schemas.openxmlformats.org/officeDocument/2006/relationships" xmlns:p="http://schemas.openxmlformats.org/presentationml/2006/main" showMasterSp="0" showMasterPhAnim="0">
   <p:cSld>
     <p:spTree>
@@ -2073,7 +2293,7 @@
 </p:notes>
 </file>
 
-<file path=ppt/notesSlides/notesSlide7.xml><?xml version="1.0" encoding="utf-8"?>
+<file path=ppt/notesSlides/notesSlide8.xml><?xml version="1.0" encoding="utf-8"?>
 <p:notes xmlns:a="http://schemas.openxmlformats.org/drawingml/2006/main" xmlns:r="http://schemas.openxmlformats.org/officeDocument/2006/relationships" xmlns:p="http://schemas.openxmlformats.org/presentationml/2006/main" showMasterSp="0" showMasterPhAnim="0">
   <p:cSld>
     <p:spTree>
@@ -2177,7 +2397,7 @@
 </p:notes>
 </file>
 
-<file path=ppt/notesSlides/notesSlide8.xml><?xml version="1.0" encoding="utf-8"?>
+<file path=ppt/notesSlides/notesSlide9.xml><?xml version="1.0" encoding="utf-8"?>
 <p:notes xmlns:a="http://schemas.openxmlformats.org/drawingml/2006/main" xmlns:r="http://schemas.openxmlformats.org/officeDocument/2006/relationships" xmlns:p="http://schemas.openxmlformats.org/presentationml/2006/main" showMasterSp="0" showMasterPhAnim="0">
   <p:cSld>
     <p:spTree>
@@ -13586,7 +13806,7 @@
         </p:nvSpPr>
         <p:spPr>
           <a:xfrm>
-            <a:off x="62958" y="2800350"/>
+            <a:off x="76509" y="2114550"/>
             <a:ext cx="4473600" cy="1546547"/>
           </a:xfrm>
           <a:prstGeom prst="rect">
@@ -13756,6 +13976,366 @@
         </p:txBody>
       </p:sp>
     </p:spTree>
+  </p:cSld>
+  <p:clrMapOvr>
+    <a:masterClrMapping/>
+  </p:clrMapOvr>
+</p:sld>
+</file>
+
+<file path=ppt/slides/slide10.xml><?xml version="1.0" encoding="utf-8"?>
+<p:sld xmlns:a="http://schemas.openxmlformats.org/drawingml/2006/main" xmlns:r="http://schemas.openxmlformats.org/officeDocument/2006/relationships" xmlns:p="http://schemas.openxmlformats.org/presentationml/2006/main">
+  <p:cSld>
+    <p:spTree>
+      <p:nvGrpSpPr>
+        <p:cNvPr id="1" name="Shape 154"/>
+        <p:cNvGrpSpPr/>
+        <p:nvPr/>
+      </p:nvGrpSpPr>
+      <p:grpSpPr>
+        <a:xfrm>
+          <a:off x="0" y="0"/>
+          <a:ext cx="0" cy="0"/>
+          <a:chOff x="0" y="0"/>
+          <a:chExt cx="0" cy="0"/>
+        </a:xfrm>
+      </p:grpSpPr>
+      <p:sp>
+        <p:nvSpPr>
+          <p:cNvPr id="155" name="Google Shape;155;p20"/>
+          <p:cNvSpPr txBox="1"/>
+          <p:nvPr/>
+        </p:nvSpPr>
+        <p:spPr>
+          <a:xfrm>
+            <a:off x="65623" y="39645"/>
+            <a:ext cx="3988200" cy="346200"/>
+          </a:xfrm>
+          <a:prstGeom prst="rect">
+            <a:avLst/>
+          </a:prstGeom>
+          <a:noFill/>
+          <a:ln>
+            <a:noFill/>
+          </a:ln>
+        </p:spPr>
+        <p:txBody>
+          <a:bodyPr spcFirstLastPara="1" wrap="square" lIns="68575" tIns="34275" rIns="68575" bIns="34275" anchor="t" anchorCtr="0">
+            <a:spAutoFit/>
+          </a:bodyPr>
+          <a:lstStyle/>
+          <a:p>
+            <a:pPr marL="0" marR="0" lvl="0" indent="0" algn="l" rtl="0">
+              <a:spcBef>
+                <a:spcPts val="0"/>
+              </a:spcBef>
+              <a:spcAft>
+                <a:spcPts val="0"/>
+              </a:spcAft>
+              <a:buNone/>
+            </a:pPr>
+            <a:r>
+              <a:rPr lang="en-US" sz="1800" b="1" i="0" u="none" strike="noStrike" cap="none" dirty="0">
+                <a:solidFill>
+                  <a:schemeClr val="dk1"/>
+                </a:solidFill>
+                <a:latin typeface="Calibri"/>
+                <a:ea typeface="Calibri"/>
+                <a:cs typeface="Calibri"/>
+                <a:sym typeface="Calibri"/>
+              </a:rPr>
+              <a:t>Solar Inverters - Reliability</a:t>
+            </a:r>
+            <a:endParaRPr sz="1800" b="1" i="0" dirty="0">
+              <a:solidFill>
+                <a:srgbClr val="333333"/>
+              </a:solidFill>
+              <a:latin typeface="Calibri"/>
+              <a:ea typeface="Calibri"/>
+              <a:cs typeface="Calibri"/>
+              <a:sym typeface="Calibri"/>
+            </a:endParaRPr>
+          </a:p>
+        </p:txBody>
+      </p:sp>
+      <p:sp>
+        <p:nvSpPr>
+          <p:cNvPr id="156" name="Google Shape;156;p20"/>
+          <p:cNvSpPr txBox="1"/>
+          <p:nvPr/>
+        </p:nvSpPr>
+        <p:spPr>
+          <a:xfrm>
+            <a:off x="65625" y="385894"/>
+            <a:ext cx="4473600" cy="2654543"/>
+          </a:xfrm>
+          <a:prstGeom prst="rect">
+            <a:avLst/>
+          </a:prstGeom>
+          <a:solidFill>
+            <a:srgbClr val="FFF2CC"/>
+          </a:solidFill>
+          <a:ln w="7150" cap="flat" cmpd="sng">
+            <a:solidFill>
+              <a:srgbClr val="FF0000"/>
+            </a:solidFill>
+            <a:prstDash val="solid"/>
+            <a:round/>
+            <a:headEnd type="none" w="sm" len="sm"/>
+            <a:tailEnd type="none" w="sm" len="sm"/>
+          </a:ln>
+        </p:spPr>
+        <p:txBody>
+          <a:bodyPr spcFirstLastPara="1" wrap="square" lIns="68575" tIns="34275" rIns="68575" bIns="34275" anchor="t" anchorCtr="0">
+            <a:spAutoFit/>
+          </a:bodyPr>
+          <a:lstStyle/>
+          <a:p>
+            <a:pPr marL="94060" lvl="0" indent="-103585">
+              <a:buClr>
+                <a:schemeClr val="dk1"/>
+              </a:buClr>
+              <a:buSzPts val="1200"/>
+              <a:buFont typeface="Arial"/>
+              <a:buChar char="•"/>
+            </a:pPr>
+            <a:r>
+              <a:rPr lang="en-US" sz="1200" dirty="0">
+                <a:solidFill>
+                  <a:schemeClr val="dk1"/>
+                </a:solidFill>
+                <a:latin typeface="Calibri"/>
+                <a:ea typeface="Calibri"/>
+                <a:cs typeface="Calibri"/>
+                <a:sym typeface="Calibri"/>
+              </a:rPr>
+              <a:t>Solar inverters are the most failure-prone component of home solar systems, often requiring costly replacements after 10–15 years</a:t>
+            </a:r>
+          </a:p>
+          <a:p>
+            <a:pPr marL="94060" lvl="0" indent="-103585">
+              <a:buClr>
+                <a:schemeClr val="dk1"/>
+              </a:buClr>
+              <a:buSzPts val="1200"/>
+              <a:buFont typeface="Arial"/>
+              <a:buChar char="•"/>
+            </a:pPr>
+            <a:r>
+              <a:rPr lang="en-US" sz="1200" dirty="0">
+                <a:solidFill>
+                  <a:schemeClr val="dk1"/>
+                </a:solidFill>
+                <a:latin typeface="Calibri"/>
+                <a:ea typeface="Calibri"/>
+                <a:cs typeface="Calibri"/>
+                <a:sym typeface="Calibri"/>
+              </a:rPr>
+              <a:t>The Solar Exposed video recommends three reliable options: </a:t>
+            </a:r>
+          </a:p>
+          <a:p>
+            <a:pPr marL="461963" lvl="0" indent="-119063">
+              <a:buClr>
+                <a:schemeClr val="dk1"/>
+              </a:buClr>
+              <a:buSzPts val="1200"/>
+              <a:buFont typeface="Arial"/>
+              <a:buChar char="•"/>
+            </a:pPr>
+            <a:r>
+              <a:rPr lang="en-US" sz="1200" dirty="0">
+                <a:solidFill>
+                  <a:srgbClr val="0070C0"/>
+                </a:solidFill>
+                <a:latin typeface="Calibri"/>
+                <a:ea typeface="Calibri"/>
+                <a:cs typeface="Calibri"/>
+                <a:sym typeface="Calibri"/>
+              </a:rPr>
+              <a:t>The SMA Sunny Boy for simple, unshaded roofs; </a:t>
+            </a:r>
+          </a:p>
+          <a:p>
+            <a:pPr marL="461963" lvl="0" indent="-119063">
+              <a:buClr>
+                <a:schemeClr val="dk1"/>
+              </a:buClr>
+              <a:buSzPts val="1200"/>
+              <a:buFont typeface="Arial"/>
+              <a:buChar char="•"/>
+            </a:pPr>
+            <a:r>
+              <a:rPr lang="en-US" sz="1200" dirty="0">
+                <a:solidFill>
+                  <a:srgbClr val="0070C0"/>
+                </a:solidFill>
+                <a:latin typeface="Calibri"/>
+                <a:ea typeface="Calibri"/>
+                <a:cs typeface="Calibri"/>
+                <a:sym typeface="Calibri"/>
+              </a:rPr>
+              <a:t>The Enphase IQ8 microinverter system for shaded roofs, complex layouts, or future expansions;</a:t>
+            </a:r>
+          </a:p>
+          <a:p>
+            <a:pPr marL="461963" lvl="0" indent="-119063">
+              <a:buClr>
+                <a:schemeClr val="dk1"/>
+              </a:buClr>
+              <a:buSzPts val="1200"/>
+              <a:buFont typeface="Arial"/>
+              <a:buChar char="•"/>
+            </a:pPr>
+            <a:r>
+              <a:rPr lang="en-US" sz="1200" dirty="0">
+                <a:solidFill>
+                  <a:srgbClr val="0070C0"/>
+                </a:solidFill>
+                <a:latin typeface="Calibri"/>
+                <a:ea typeface="Calibri"/>
+                <a:cs typeface="Calibri"/>
+                <a:sym typeface="Calibri"/>
+              </a:rPr>
+              <a:t>SolarEdge as a budget-conscious alternative that requires an extended warranty due to the company's financial instability</a:t>
+            </a:r>
+          </a:p>
+          <a:p>
+            <a:pPr marL="94060" lvl="0" indent="-103585">
+              <a:buClr>
+                <a:schemeClr val="dk1"/>
+              </a:buClr>
+              <a:buSzPts val="1200"/>
+              <a:buFont typeface="Arial"/>
+              <a:buChar char="•"/>
+            </a:pPr>
+            <a:r>
+              <a:rPr lang="en-US" sz="1200" dirty="0">
+                <a:solidFill>
+                  <a:schemeClr val="dk1"/>
+                </a:solidFill>
+                <a:latin typeface="Calibri"/>
+                <a:ea typeface="Calibri"/>
+                <a:cs typeface="Calibri"/>
+                <a:sym typeface="Calibri"/>
+              </a:rPr>
+              <a:t>Avoid installers who refuse to discuss your inverter choice, as they may be prioritizing their profit margins over your system's longevity</a:t>
+            </a:r>
+          </a:p>
+          <a:p>
+            <a:pPr marL="94060" lvl="0" indent="-103585">
+              <a:buClr>
+                <a:schemeClr val="dk1"/>
+              </a:buClr>
+              <a:buSzPts val="1200"/>
+              <a:buFont typeface="Arial"/>
+              <a:buChar char="•"/>
+            </a:pPr>
+            <a:r>
+              <a:rPr lang="en-US" sz="1200" dirty="0">
+                <a:solidFill>
+                  <a:schemeClr val="dk1"/>
+                </a:solidFill>
+                <a:latin typeface="Calibri"/>
+                <a:ea typeface="Calibri"/>
+                <a:cs typeface="Calibri"/>
+                <a:sym typeface="Calibri"/>
+              </a:rPr>
+              <a:t>Ultimately, choosing the right equipment—and securing a long-term warranty—is critical to ensuring your solar investment pays for itself rather than resulting in unexpected future bills</a:t>
+            </a:r>
+          </a:p>
+          <a:p>
+            <a:pPr marL="94060" lvl="0" indent="-103585">
+              <a:buClr>
+                <a:schemeClr val="dk1"/>
+              </a:buClr>
+              <a:buSzPts val="1200"/>
+              <a:buFont typeface="Arial"/>
+              <a:buChar char="•"/>
+            </a:pPr>
+            <a:r>
+              <a:rPr lang="en-US" sz="1200" dirty="0">
+                <a:solidFill>
+                  <a:schemeClr val="dk1"/>
+                </a:solidFill>
+                <a:latin typeface="Calibri"/>
+                <a:ea typeface="Calibri"/>
+                <a:cs typeface="Calibri"/>
+                <a:sym typeface="Calibri"/>
+                <a:hlinkClick r:id="rId3"/>
+              </a:rPr>
+              <a:t>https://</a:t>
+            </a:r>
+            <a:r>
+              <a:rPr lang="en-US" sz="1200" dirty="0" err="1">
+                <a:solidFill>
+                  <a:schemeClr val="dk1"/>
+                </a:solidFill>
+                <a:latin typeface="Calibri"/>
+                <a:ea typeface="Calibri"/>
+                <a:cs typeface="Calibri"/>
+                <a:sym typeface="Calibri"/>
+                <a:hlinkClick r:id="rId3"/>
+              </a:rPr>
+              <a:t>www.youtube.com</a:t>
+            </a:r>
+            <a:r>
+              <a:rPr lang="en-US" sz="1200" dirty="0">
+                <a:solidFill>
+                  <a:schemeClr val="dk1"/>
+                </a:solidFill>
+                <a:latin typeface="Calibri"/>
+                <a:ea typeface="Calibri"/>
+                <a:cs typeface="Calibri"/>
+                <a:sym typeface="Calibri"/>
+                <a:hlinkClick r:id="rId3"/>
+              </a:rPr>
+              <a:t>/</a:t>
+            </a:r>
+            <a:r>
+              <a:rPr lang="en-US" sz="1200" dirty="0" err="1">
+                <a:solidFill>
+                  <a:schemeClr val="dk1"/>
+                </a:solidFill>
+                <a:latin typeface="Calibri"/>
+                <a:ea typeface="Calibri"/>
+                <a:cs typeface="Calibri"/>
+                <a:sym typeface="Calibri"/>
+                <a:hlinkClick r:id="rId3"/>
+              </a:rPr>
+              <a:t>watch?v</a:t>
+            </a:r>
+            <a:r>
+              <a:rPr lang="en-US" sz="1200" dirty="0">
+                <a:solidFill>
+                  <a:schemeClr val="dk1"/>
+                </a:solidFill>
+                <a:latin typeface="Calibri"/>
+                <a:ea typeface="Calibri"/>
+                <a:cs typeface="Calibri"/>
+                <a:sym typeface="Calibri"/>
+                <a:hlinkClick r:id="rId3"/>
+              </a:rPr>
+              <a:t>=cG9MwK4-8C0</a:t>
+            </a:r>
+            <a:endParaRPr sz="1200" dirty="0">
+              <a:solidFill>
+                <a:schemeClr val="dk1"/>
+              </a:solidFill>
+              <a:latin typeface="Calibri"/>
+              <a:ea typeface="Calibri"/>
+              <a:cs typeface="Calibri"/>
+              <a:sym typeface="Calibri"/>
+            </a:endParaRPr>
+          </a:p>
+        </p:txBody>
+      </p:sp>
+    </p:spTree>
+    <p:extLst>
+      <p:ext uri="{BB962C8B-B14F-4D97-AF65-F5344CB8AC3E}">
+        <p14:creationId xmlns:p14="http://schemas.microsoft.com/office/powerpoint/2010/main" val="405659863"/>
+      </p:ext>
+    </p:extLst>
   </p:cSld>
   <p:clrMapOvr>
     <a:masterClrMapping/>
@@ -13859,8 +14439,8 @@
         </p:blipFill>
         <p:spPr>
           <a:xfrm>
-            <a:off x="4699125" y="385850"/>
-            <a:ext cx="2006476" cy="2041799"/>
+            <a:off x="4699125" y="157250"/>
+            <a:ext cx="1701675" cy="1881100"/>
           </a:xfrm>
           <a:prstGeom prst="rect">
             <a:avLst/>
@@ -13891,8 +14471,8 @@
         </p:nvSpPr>
         <p:spPr>
           <a:xfrm>
-            <a:off x="91063" y="389836"/>
-            <a:ext cx="4493700" cy="3624039"/>
+            <a:off x="91063" y="341267"/>
+            <a:ext cx="4493700" cy="2946930"/>
           </a:xfrm>
           <a:prstGeom prst="rect">
             <a:avLst/>
@@ -14271,11 +14851,35 @@
                 <a:cs typeface="Calibri" panose="020F0502020204030204" pitchFamily="34" charset="0"/>
                 <a:sym typeface="Calibri"/>
               </a:rPr>
-              <a:t>Even bigger - DIY hybrid:</a:t>
-            </a:r>
-          </a:p>
-          <a:p>
-            <a:pPr marL="401638" lvl="0" indent="-95250">
+              <a:t>Even bigger DIY hybrid: </a:t>
+            </a:r>
+            <a:r>
+              <a:rPr lang="en-US" sz="1100" dirty="0" err="1">
+                <a:solidFill>
+                  <a:schemeClr val="dk1"/>
+                </a:solidFill>
+                <a:latin typeface="Calibri" panose="020F0502020204030204" pitchFamily="34" charset="0"/>
+                <a:ea typeface="Calibri"/>
+                <a:cs typeface="Calibri" panose="020F0502020204030204" pitchFamily="34" charset="0"/>
+                <a:sym typeface="Calibri"/>
+              </a:rPr>
+              <a:t>WattCycle</a:t>
+            </a:r>
+            <a:r>
+              <a:rPr lang="en-US" sz="1100" dirty="0">
+                <a:solidFill>
+                  <a:schemeClr val="dk1"/>
+                </a:solidFill>
+                <a:latin typeface="Calibri" panose="020F0502020204030204" pitchFamily="34" charset="0"/>
+                <a:ea typeface="Calibri"/>
+                <a:cs typeface="Calibri" panose="020F0502020204030204" pitchFamily="34" charset="0"/>
+                <a:sym typeface="Calibri"/>
+              </a:rPr>
+              <a:t> all-in-one 12KW split-phase hybrid inverter with matched LiFePO4, into the same transfer switch</a:t>
+            </a:r>
+          </a:p>
+          <a:p>
+            <a:pPr marL="94060" lvl="0" indent="-103585">
               <a:buClr>
                 <a:schemeClr val="dk1"/>
               </a:buClr>
@@ -14284,7 +14888,7 @@
               <a:buChar char="•"/>
             </a:pPr>
             <a:r>
-              <a:rPr lang="en-US" sz="1100" dirty="0" err="1">
+              <a:rPr lang="en-US" sz="1100" dirty="0">
                 <a:solidFill>
                   <a:schemeClr val="dk1"/>
                 </a:solidFill>
@@ -14293,23 +14897,11 @@
                 <a:cs typeface="Calibri" panose="020F0502020204030204" pitchFamily="34" charset="0"/>
                 <a:sym typeface="Calibri"/>
               </a:rPr>
-              <a:t>WattCycle</a:t>
-            </a:r>
-            <a:r>
-              <a:rPr lang="en-US" sz="1100" dirty="0">
-                <a:solidFill>
-                  <a:schemeClr val="dk1"/>
-                </a:solidFill>
-                <a:latin typeface="Calibri" panose="020F0502020204030204" pitchFamily="34" charset="0"/>
-                <a:ea typeface="Calibri"/>
-                <a:cs typeface="Calibri" panose="020F0502020204030204" pitchFamily="34" charset="0"/>
-                <a:sym typeface="Calibri"/>
-              </a:rPr>
-              <a:t> all-in-one 12,000 W split-phase hybrid inverter</a:t>
-            </a:r>
-          </a:p>
-          <a:p>
-            <a:pPr marL="401638" lvl="0" indent="-95250">
+              <a:t>Recommended solar panels:</a:t>
+            </a:r>
+          </a:p>
+          <a:p>
+            <a:pPr marL="401638" lvl="0" indent="-106363">
               <a:buClr>
                 <a:schemeClr val="dk1"/>
               </a:buClr>
@@ -14318,6 +14910,18 @@
               <a:buChar char="•"/>
             </a:pPr>
             <a:r>
+              <a:rPr lang="en-US" sz="1100" dirty="0" err="1">
+                <a:solidFill>
+                  <a:schemeClr val="dk1"/>
+                </a:solidFill>
+                <a:latin typeface="Calibri" panose="020F0502020204030204" pitchFamily="34" charset="0"/>
+                <a:ea typeface="Calibri"/>
+                <a:cs typeface="Calibri" panose="020F0502020204030204" pitchFamily="34" charset="0"/>
+                <a:sym typeface="Calibri"/>
+              </a:rPr>
+              <a:t>Colsun</a:t>
+            </a:r>
+            <a:r>
               <a:rPr lang="en-US" sz="1100" dirty="0">
                 <a:solidFill>
                   <a:schemeClr val="dk1"/>
@@ -14327,75 +14931,19 @@
                 <a:cs typeface="Calibri" panose="020F0502020204030204" pitchFamily="34" charset="0"/>
                 <a:sym typeface="Calibri"/>
               </a:rPr>
-              <a:t>with matched LiFePO4, into the same transfer switch</a:t>
-            </a:r>
-          </a:p>
-          <a:p>
-            <a:pPr marL="94060" lvl="0" indent="-103585">
-              <a:buClr>
-                <a:schemeClr val="dk1"/>
-              </a:buClr>
-              <a:buSzPts val="1200"/>
-              <a:buFont typeface="Arial"/>
-              <a:buChar char="•"/>
-            </a:pPr>
+              <a:t> 215 W bifacial (56"x30") </a:t>
+            </a:r>
             <a:r>
               <a:rPr lang="en-US" sz="1100" dirty="0">
                 <a:solidFill>
                   <a:schemeClr val="dk1"/>
                 </a:solidFill>
-                <a:latin typeface="Calibri" panose="020F0502020204030204" pitchFamily="34" charset="0"/>
-                <a:ea typeface="Calibri"/>
-                <a:cs typeface="Calibri" panose="020F0502020204030204" pitchFamily="34" charset="0"/>
-                <a:sym typeface="Calibri"/>
-              </a:rPr>
-              <a:t>Recommended solar panels:</a:t>
-            </a:r>
-          </a:p>
-          <a:p>
-            <a:pPr marL="401638" lvl="0" indent="-106363">
-              <a:buClr>
-                <a:schemeClr val="dk1"/>
-              </a:buClr>
-              <a:buSzPts val="1200"/>
-              <a:buFont typeface="Arial"/>
-              <a:buChar char="•"/>
-            </a:pPr>
-            <a:r>
-              <a:rPr lang="en-US" sz="1100" dirty="0" err="1">
-                <a:solidFill>
-                  <a:schemeClr val="dk1"/>
-                </a:solidFill>
-                <a:latin typeface="Calibri" panose="020F0502020204030204" pitchFamily="34" charset="0"/>
-                <a:ea typeface="Calibri"/>
-                <a:cs typeface="Calibri" panose="020F0502020204030204" pitchFamily="34" charset="0"/>
-                <a:sym typeface="Calibri"/>
-              </a:rPr>
-              <a:t>Colsun</a:t>
-            </a:r>
-            <a:r>
-              <a:rPr lang="en-US" sz="1100" dirty="0">
-                <a:solidFill>
-                  <a:schemeClr val="dk1"/>
-                </a:solidFill>
-                <a:latin typeface="Calibri" panose="020F0502020204030204" pitchFamily="34" charset="0"/>
-                <a:ea typeface="Calibri"/>
-                <a:cs typeface="Calibri" panose="020F0502020204030204" pitchFamily="34" charset="0"/>
-                <a:sym typeface="Calibri"/>
-              </a:rPr>
-              <a:t> 215 W bifacial (56"x30")</a:t>
-            </a:r>
-            <a:r>
-              <a:rPr lang="en-US" sz="1100" dirty="0">
-                <a:solidFill>
-                  <a:schemeClr val="dk1"/>
-                </a:solidFill>
                 <a:latin typeface="Calibri"/>
                 <a:ea typeface="Calibri"/>
                 <a:cs typeface="Calibri"/>
                 <a:sym typeface="Calibri"/>
               </a:rPr>
-              <a:t>efficient, bifacial(captures light from both sides), anti-shading technology</a:t>
+              <a:t>efficient, bifacial, anti-shading</a:t>
             </a:r>
             <a:endParaRPr lang="en-US" sz="1100" dirty="0">
               <a:solidFill>
@@ -14525,29 +15073,6 @@
                 <a:cs typeface="Calibri" panose="020F0502020204030204" pitchFamily="34" charset="0"/>
                 <a:sym typeface="Calibri"/>
               </a:rPr>
-              <a:t>Progression over time:</a:t>
-            </a:r>
-            <a:br>
-              <a:rPr lang="en-US" sz="1100" dirty="0">
-                <a:solidFill>
-                  <a:schemeClr val="dk1"/>
-                </a:solidFill>
-                <a:latin typeface="Calibri" panose="020F0502020204030204" pitchFamily="34" charset="0"/>
-                <a:ea typeface="Calibri"/>
-                <a:cs typeface="Calibri" panose="020F0502020204030204" pitchFamily="34" charset="0"/>
-                <a:sym typeface="Calibri"/>
-              </a:rPr>
-            </a:br>
-            <a:r>
-              <a:rPr lang="en-US" sz="1100" dirty="0">
-                <a:solidFill>
-                  <a:schemeClr val="dk1"/>
-                </a:solidFill>
-                <a:latin typeface="Calibri" panose="020F0502020204030204" pitchFamily="34" charset="0"/>
-                <a:ea typeface="Calibri"/>
-                <a:cs typeface="Calibri" panose="020F0502020204030204" pitchFamily="34" charset="0"/>
-                <a:sym typeface="Calibri"/>
-              </a:rPr>
               <a:t>Harbor Freight cheap &gt; </a:t>
             </a:r>
             <a:r>
@@ -14642,7 +15167,7 @@
                 <a:cs typeface="Calibri" panose="020F0502020204030204" pitchFamily="34" charset="0"/>
                 <a:sym typeface="Calibri"/>
               </a:rPr>
-              <a:t>Cabling: Use cables with MC4 connectors for the panels and an XT60 adapter to connect to the power station.</a:t>
+              <a:t>Cables: MC4 for panels, XT60 for power station.</a:t>
             </a:r>
           </a:p>
           <a:p>
@@ -14697,8 +15222,8 @@
         </p:blipFill>
         <p:spPr>
           <a:xfrm>
-            <a:off x="4688492" y="2571750"/>
-            <a:ext cx="3289300" cy="1727200"/>
+            <a:off x="6515162" y="141937"/>
+            <a:ext cx="2368262" cy="1243566"/>
           </a:xfrm>
           <a:prstGeom prst="rect">
             <a:avLst/>
@@ -14710,6 +15235,569 @@
           </a:ln>
         </p:spPr>
       </p:pic>
+      <p:sp>
+        <p:nvSpPr>
+          <p:cNvPr id="2" name="Google Shape;149;p19">
+            <a:extLst>
+              <a:ext uri="{FF2B5EF4-FFF2-40B4-BE49-F238E27FC236}">
+                <a16:creationId xmlns:a16="http://schemas.microsoft.com/office/drawing/2014/main" id="{DEDE45ED-E3FA-7A0A-6760-CFA53441252C}"/>
+              </a:ext>
+            </a:extLst>
+          </p:cNvPr>
+          <p:cNvSpPr txBox="1"/>
+          <p:nvPr/>
+        </p:nvSpPr>
+        <p:spPr>
+          <a:xfrm>
+            <a:off x="91063" y="3486150"/>
+            <a:ext cx="4480937" cy="1423436"/>
+          </a:xfrm>
+          <a:prstGeom prst="rect">
+            <a:avLst/>
+          </a:prstGeom>
+          <a:solidFill>
+            <a:srgbClr val="FFF2CC"/>
+          </a:solidFill>
+          <a:ln w="7150" cap="flat" cmpd="sng">
+            <a:solidFill>
+              <a:srgbClr val="FF0000"/>
+            </a:solidFill>
+            <a:prstDash val="solid"/>
+            <a:round/>
+            <a:headEnd type="none" w="sm" len="sm"/>
+            <a:tailEnd type="none" w="sm" len="sm"/>
+          </a:ln>
+        </p:spPr>
+        <p:txBody>
+          <a:bodyPr spcFirstLastPara="1" wrap="square" lIns="68575" tIns="34275" rIns="68575" bIns="34275" anchor="t" anchorCtr="0">
+            <a:spAutoFit/>
+          </a:bodyPr>
+          <a:lstStyle/>
+          <a:p>
+            <a:pPr marL="94060" lvl="0" indent="-103585">
+              <a:buClr>
+                <a:schemeClr val="dk1"/>
+              </a:buClr>
+              <a:buSzPts val="1200"/>
+              <a:buFont typeface="Arial"/>
+              <a:buChar char="•"/>
+            </a:pPr>
+            <a:r>
+              <a:rPr lang="en-US" sz="1100" dirty="0">
+                <a:solidFill>
+                  <a:schemeClr val="dk1"/>
+                </a:solidFill>
+                <a:latin typeface="Calibri" panose="020F0502020204030204" pitchFamily="34" charset="0"/>
+                <a:ea typeface="Calibri"/>
+                <a:cs typeface="Calibri" panose="020F0502020204030204" pitchFamily="34" charset="0"/>
+                <a:sym typeface="Calibri"/>
+              </a:rPr>
+              <a:t>The </a:t>
+            </a:r>
+            <a:r>
+              <a:rPr lang="en-US" sz="1100" dirty="0" err="1">
+                <a:solidFill>
+                  <a:schemeClr val="dk1"/>
+                </a:solidFill>
+                <a:latin typeface="Calibri" panose="020F0502020204030204" pitchFamily="34" charset="0"/>
+                <a:ea typeface="Calibri"/>
+                <a:cs typeface="Calibri" panose="020F0502020204030204" pitchFamily="34" charset="0"/>
+                <a:sym typeface="Calibri"/>
+              </a:rPr>
+              <a:t>FOSSiBOT</a:t>
+            </a:r>
+            <a:r>
+              <a:rPr lang="en-US" sz="1100" dirty="0">
+                <a:solidFill>
+                  <a:schemeClr val="dk1"/>
+                </a:solidFill>
+                <a:latin typeface="Calibri" panose="020F0502020204030204" pitchFamily="34" charset="0"/>
+                <a:ea typeface="Calibri"/>
+                <a:cs typeface="Calibri" panose="020F0502020204030204" pitchFamily="34" charset="0"/>
+                <a:sym typeface="Calibri"/>
+              </a:rPr>
+              <a:t> F1800 accepts up to 500W of solar input via its XT60 port, with a voltage range of 12V–60V and a max current of 15A</a:t>
+            </a:r>
+          </a:p>
+          <a:p>
+            <a:pPr marL="94060" lvl="0" indent="-103585">
+              <a:buClr>
+                <a:schemeClr val="dk1"/>
+              </a:buClr>
+              <a:buSzPts val="1200"/>
+              <a:buFont typeface="Arial"/>
+              <a:buChar char="•"/>
+            </a:pPr>
+            <a:r>
+              <a:rPr lang="en-US" sz="1100" dirty="0">
+                <a:solidFill>
+                  <a:schemeClr val="dk1"/>
+                </a:solidFill>
+                <a:latin typeface="Calibri" panose="020F0502020204030204" pitchFamily="34" charset="0"/>
+                <a:ea typeface="Calibri"/>
+                <a:cs typeface="Calibri" panose="020F0502020204030204" pitchFamily="34" charset="0"/>
+                <a:sym typeface="Calibri"/>
+              </a:rPr>
+              <a:t>Panel: </a:t>
+            </a:r>
+            <a:r>
+              <a:rPr lang="en-US" sz="1100" dirty="0" err="1">
+                <a:solidFill>
+                  <a:schemeClr val="dk1"/>
+                </a:solidFill>
+                <a:latin typeface="Calibri" panose="020F0502020204030204" pitchFamily="34" charset="0"/>
+                <a:ea typeface="Calibri"/>
+                <a:cs typeface="Calibri" panose="020F0502020204030204" pitchFamily="34" charset="0"/>
+                <a:sym typeface="Calibri"/>
+              </a:rPr>
+              <a:t>FOSSiBOT</a:t>
+            </a:r>
+            <a:r>
+              <a:rPr lang="en-US" sz="1100" dirty="0">
+                <a:solidFill>
+                  <a:schemeClr val="dk1"/>
+                </a:solidFill>
+                <a:latin typeface="Calibri" panose="020F0502020204030204" pitchFamily="34" charset="0"/>
+                <a:ea typeface="Calibri"/>
+                <a:cs typeface="Calibri" panose="020F0502020204030204" pitchFamily="34" charset="0"/>
+                <a:sym typeface="Calibri"/>
+              </a:rPr>
+              <a:t> SP420 (420W, 32V) - charges the station in 2.5 </a:t>
+            </a:r>
+            <a:r>
+              <a:rPr lang="en-US" sz="1100" dirty="0" err="1">
+                <a:solidFill>
+                  <a:schemeClr val="dk1"/>
+                </a:solidFill>
+                <a:latin typeface="Calibri" panose="020F0502020204030204" pitchFamily="34" charset="0"/>
+                <a:ea typeface="Calibri"/>
+                <a:cs typeface="Calibri" panose="020F0502020204030204" pitchFamily="34" charset="0"/>
+                <a:sym typeface="Calibri"/>
+              </a:rPr>
+              <a:t>hrs</a:t>
+            </a:r>
+            <a:endParaRPr lang="en-US" sz="1100" dirty="0">
+              <a:solidFill>
+                <a:schemeClr val="dk1"/>
+              </a:solidFill>
+              <a:latin typeface="Calibri" panose="020F0502020204030204" pitchFamily="34" charset="0"/>
+              <a:ea typeface="Calibri"/>
+              <a:cs typeface="Calibri" panose="020F0502020204030204" pitchFamily="34" charset="0"/>
+              <a:sym typeface="Calibri"/>
+            </a:endParaRPr>
+          </a:p>
+          <a:p>
+            <a:pPr marL="94060" lvl="0" indent="-103585">
+              <a:buClr>
+                <a:schemeClr val="dk1"/>
+              </a:buClr>
+              <a:buSzPts val="1200"/>
+              <a:buFont typeface="Arial"/>
+              <a:buChar char="•"/>
+            </a:pPr>
+            <a:r>
+              <a:rPr lang="en-US" sz="1100" dirty="0">
+                <a:solidFill>
+                  <a:schemeClr val="dk1"/>
+                </a:solidFill>
+                <a:latin typeface="Calibri" panose="020F0502020204030204" pitchFamily="34" charset="0"/>
+                <a:ea typeface="Calibri"/>
+                <a:cs typeface="Calibri" panose="020F0502020204030204" pitchFamily="34" charset="0"/>
+                <a:sym typeface="Calibri"/>
+              </a:rPr>
+              <a:t>2 panels: </a:t>
+            </a:r>
+            <a:r>
+              <a:rPr lang="en-US" sz="1100" dirty="0" err="1">
+                <a:solidFill>
+                  <a:schemeClr val="dk1"/>
+                </a:solidFill>
+                <a:latin typeface="Calibri" panose="020F0502020204030204" pitchFamily="34" charset="0"/>
+                <a:ea typeface="Calibri"/>
+                <a:cs typeface="Calibri" panose="020F0502020204030204" pitchFamily="34" charset="0"/>
+                <a:sym typeface="Calibri"/>
+              </a:rPr>
+              <a:t>FOSSiBOT</a:t>
+            </a:r>
+            <a:r>
+              <a:rPr lang="en-US" sz="1100" dirty="0">
+                <a:solidFill>
+                  <a:schemeClr val="dk1"/>
+                </a:solidFill>
+                <a:latin typeface="Calibri" panose="020F0502020204030204" pitchFamily="34" charset="0"/>
+                <a:ea typeface="Calibri"/>
+                <a:cs typeface="Calibri" panose="020F0502020204030204" pitchFamily="34" charset="0"/>
+                <a:sym typeface="Calibri"/>
+              </a:rPr>
+              <a:t> SP200 panels (200W each) wired in series.</a:t>
+            </a:r>
+            <a:br>
+              <a:rPr lang="en-US" sz="1100" dirty="0">
+                <a:solidFill>
+                  <a:schemeClr val="dk1"/>
+                </a:solidFill>
+                <a:latin typeface="Calibri" panose="020F0502020204030204" pitchFamily="34" charset="0"/>
+                <a:ea typeface="Calibri"/>
+                <a:cs typeface="Calibri" panose="020F0502020204030204" pitchFamily="34" charset="0"/>
+                <a:sym typeface="Calibri"/>
+              </a:rPr>
+            </a:br>
+            <a:r>
+              <a:rPr lang="en-US" sz="1100" dirty="0">
+                <a:solidFill>
+                  <a:schemeClr val="dk1"/>
+                </a:solidFill>
+                <a:latin typeface="Calibri" panose="020F0502020204030204" pitchFamily="34" charset="0"/>
+                <a:ea typeface="Calibri"/>
+                <a:cs typeface="Calibri" panose="020F0502020204030204" pitchFamily="34" charset="0"/>
+                <a:sym typeface="Calibri"/>
+              </a:rPr>
+              <a:t>Important - never mix different panel models</a:t>
+            </a:r>
+          </a:p>
+          <a:p>
+            <a:pPr marL="94060" lvl="0" indent="-103585">
+              <a:buClr>
+                <a:schemeClr val="dk1"/>
+              </a:buClr>
+              <a:buSzPts val="1200"/>
+              <a:buFont typeface="Arial"/>
+              <a:buChar char="•"/>
+            </a:pPr>
+            <a:r>
+              <a:rPr lang="en-US" sz="1100" dirty="0">
+                <a:solidFill>
+                  <a:schemeClr val="dk1"/>
+                </a:solidFill>
+                <a:latin typeface="Calibri" panose="020F0502020204030204" pitchFamily="34" charset="0"/>
+                <a:ea typeface="Calibri"/>
+                <a:cs typeface="Calibri" panose="020F0502020204030204" pitchFamily="34" charset="0"/>
+                <a:sym typeface="Calibri"/>
+              </a:rPr>
+              <a:t>Third-party panels are also supported, as long as they stay within the 12–60V / 500W limits and use MC4 connectors</a:t>
+            </a:r>
+          </a:p>
+          <a:p>
+            <a:pPr marL="94060" lvl="0" indent="-103585">
+              <a:buClr>
+                <a:schemeClr val="dk1"/>
+              </a:buClr>
+              <a:buSzPts val="1200"/>
+              <a:buFont typeface="Arial"/>
+              <a:buChar char="•"/>
+            </a:pPr>
+            <a:r>
+              <a:rPr lang="en-US" sz="1100" dirty="0">
+                <a:solidFill>
+                  <a:schemeClr val="dk1"/>
+                </a:solidFill>
+                <a:latin typeface="Calibri" panose="020F0502020204030204" pitchFamily="34" charset="0"/>
+                <a:ea typeface="Calibri"/>
+                <a:cs typeface="Calibri" panose="020F0502020204030204" pitchFamily="34" charset="0"/>
+                <a:sym typeface="Calibri"/>
+              </a:rPr>
+              <a:t>Cable - MC4-to-XT60 type</a:t>
+            </a:r>
+          </a:p>
+        </p:txBody>
+      </p:sp>
+      <p:pic>
+        <p:nvPicPr>
+          <p:cNvPr id="5" name="Picture 4" descr="Solar MC4 to XT60 Portable Power Station Adapter Cable | Sapphire Energy">
+            <a:extLst>
+              <a:ext uri="{FF2B5EF4-FFF2-40B4-BE49-F238E27FC236}">
+                <a16:creationId xmlns:a16="http://schemas.microsoft.com/office/drawing/2014/main" id="{8E1093FD-B461-BAD2-677F-28F7CE97F118}"/>
+              </a:ext>
+            </a:extLst>
+          </p:cNvPr>
+          <p:cNvPicPr>
+            <a:picLocks noChangeAspect="1"/>
+          </p:cNvPicPr>
+          <p:nvPr/>
+        </p:nvPicPr>
+        <p:blipFill>
+          <a:blip r:embed="rId6" cstate="email">
+            <a:extLst>
+              <a:ext uri="{28A0092B-C50C-407E-A947-70E740481C1C}">
+                <a14:useLocalDpi xmlns:a14="http://schemas.microsoft.com/office/drawing/2010/main"/>
+              </a:ext>
+            </a:extLst>
+          </a:blip>
+          <a:stretch>
+            <a:fillRect/>
+          </a:stretch>
+        </p:blipFill>
+        <p:spPr>
+          <a:xfrm>
+            <a:off x="4699125" y="3384605"/>
+            <a:ext cx="1686884" cy="1686884"/>
+          </a:xfrm>
+          <a:prstGeom prst="rect">
+            <a:avLst/>
+          </a:prstGeom>
+          <a:ln>
+            <a:solidFill>
+              <a:srgbClr val="FF0000"/>
+            </a:solidFill>
+          </a:ln>
+        </p:spPr>
+      </p:pic>
+      <p:sp>
+        <p:nvSpPr>
+          <p:cNvPr id="7" name="Google Shape;149;p19">
+            <a:extLst>
+              <a:ext uri="{FF2B5EF4-FFF2-40B4-BE49-F238E27FC236}">
+                <a16:creationId xmlns:a16="http://schemas.microsoft.com/office/drawing/2014/main" id="{A05EB0DD-E54F-AC7D-656C-6DF81D6779D2}"/>
+              </a:ext>
+            </a:extLst>
+          </p:cNvPr>
+          <p:cNvSpPr txBox="1"/>
+          <p:nvPr/>
+        </p:nvSpPr>
+        <p:spPr>
+          <a:xfrm>
+            <a:off x="4699125" y="2120285"/>
+            <a:ext cx="3390799" cy="1177215"/>
+          </a:xfrm>
+          <a:prstGeom prst="rect">
+            <a:avLst/>
+          </a:prstGeom>
+          <a:solidFill>
+            <a:srgbClr val="FFF2CC"/>
+          </a:solidFill>
+          <a:ln w="7150" cap="flat" cmpd="sng">
+            <a:solidFill>
+              <a:srgbClr val="FF0000"/>
+            </a:solidFill>
+            <a:prstDash val="solid"/>
+            <a:round/>
+            <a:headEnd type="none" w="sm" len="sm"/>
+            <a:tailEnd type="none" w="sm" len="sm"/>
+          </a:ln>
+        </p:spPr>
+        <p:txBody>
+          <a:bodyPr spcFirstLastPara="1" wrap="square" lIns="68575" tIns="34275" rIns="68575" bIns="34275" anchor="t" anchorCtr="0">
+            <a:spAutoFit/>
+          </a:bodyPr>
+          <a:lstStyle/>
+          <a:p>
+            <a:pPr marL="94060" lvl="0" indent="-103585">
+              <a:buClr>
+                <a:schemeClr val="dk1"/>
+              </a:buClr>
+              <a:buSzPts val="1200"/>
+              <a:buFont typeface="Arial"/>
+              <a:buChar char="•"/>
+            </a:pPr>
+            <a:r>
+              <a:rPr lang="en-US" sz="900" dirty="0" err="1">
+                <a:solidFill>
+                  <a:srgbClr val="0070C0"/>
+                </a:solidFill>
+                <a:latin typeface="Menlo" panose="020B0609030804020204" pitchFamily="49" charset="0"/>
+                <a:ea typeface="Menlo" panose="020B0609030804020204" pitchFamily="49" charset="0"/>
+                <a:cs typeface="Menlo" panose="020B0609030804020204" pitchFamily="49" charset="0"/>
+                <a:sym typeface="Calibri"/>
+              </a:rPr>
+              <a:t>FOSSiBOT</a:t>
+            </a:r>
+            <a:r>
+              <a:rPr lang="en-US" sz="900" dirty="0">
+                <a:solidFill>
+                  <a:srgbClr val="0070C0"/>
+                </a:solidFill>
+                <a:latin typeface="Menlo" panose="020B0609030804020204" pitchFamily="49" charset="0"/>
+                <a:ea typeface="Menlo" panose="020B0609030804020204" pitchFamily="49" charset="0"/>
+                <a:cs typeface="Menlo" panose="020B0609030804020204" pitchFamily="49" charset="0"/>
+                <a:sym typeface="Calibri"/>
+              </a:rPr>
+              <a:t> F1800 + SP420</a:t>
+            </a:r>
+            <a:br>
+              <a:rPr lang="en-US" sz="900" dirty="0">
+                <a:solidFill>
+                  <a:srgbClr val="0070C0"/>
+                </a:solidFill>
+                <a:latin typeface="Menlo" panose="020B0609030804020204" pitchFamily="49" charset="0"/>
+                <a:ea typeface="Menlo" panose="020B0609030804020204" pitchFamily="49" charset="0"/>
+                <a:cs typeface="Menlo" panose="020B0609030804020204" pitchFamily="49" charset="0"/>
+                <a:sym typeface="Calibri"/>
+              </a:rPr>
+            </a:br>
+            <a:r>
+              <a:rPr lang="en-US" sz="900" dirty="0">
+                <a:solidFill>
+                  <a:srgbClr val="0070C0"/>
+                </a:solidFill>
+                <a:latin typeface="Menlo" panose="020B0609030804020204" pitchFamily="49" charset="0"/>
+                <a:ea typeface="Menlo" panose="020B0609030804020204" pitchFamily="49" charset="0"/>
+                <a:cs typeface="Menlo" panose="020B0609030804020204" pitchFamily="49" charset="0"/>
+                <a:sym typeface="Calibri"/>
+              </a:rPr>
+              <a:t>1.8 kW  1.0 kWh    ~$750   ~$417/kW</a:t>
+            </a:r>
+          </a:p>
+          <a:p>
+            <a:pPr marL="94060" lvl="0" indent="-103585">
+              <a:buClr>
+                <a:schemeClr val="dk1"/>
+              </a:buClr>
+              <a:buSzPts val="1200"/>
+              <a:buFont typeface="Arial"/>
+              <a:buChar char="•"/>
+            </a:pPr>
+            <a:r>
+              <a:rPr lang="en-US" sz="900" dirty="0" err="1">
+                <a:solidFill>
+                  <a:srgbClr val="0070C0"/>
+                </a:solidFill>
+                <a:latin typeface="Menlo" panose="020B0609030804020204" pitchFamily="49" charset="0"/>
+                <a:ea typeface="Menlo" panose="020B0609030804020204" pitchFamily="49" charset="0"/>
+                <a:cs typeface="Menlo" panose="020B0609030804020204" pitchFamily="49" charset="0"/>
+                <a:sym typeface="Calibri"/>
+              </a:rPr>
+              <a:t>Aferiy</a:t>
+            </a:r>
+            <a:r>
+              <a:rPr lang="en-US" sz="900" dirty="0">
+                <a:solidFill>
+                  <a:srgbClr val="0070C0"/>
+                </a:solidFill>
+                <a:latin typeface="Menlo" panose="020B0609030804020204" pitchFamily="49" charset="0"/>
+                <a:ea typeface="Menlo" panose="020B0609030804020204" pitchFamily="49" charset="0"/>
+                <a:cs typeface="Menlo" panose="020B0609030804020204" pitchFamily="49" charset="0"/>
+                <a:sym typeface="Calibri"/>
+              </a:rPr>
+              <a:t> P310 (base)</a:t>
+            </a:r>
+            <a:br>
+              <a:rPr lang="en-US" sz="900" dirty="0">
+                <a:solidFill>
+                  <a:srgbClr val="0070C0"/>
+                </a:solidFill>
+                <a:latin typeface="Menlo" panose="020B0609030804020204" pitchFamily="49" charset="0"/>
+                <a:ea typeface="Menlo" panose="020B0609030804020204" pitchFamily="49" charset="0"/>
+                <a:cs typeface="Menlo" panose="020B0609030804020204" pitchFamily="49" charset="0"/>
+                <a:sym typeface="Calibri"/>
+              </a:rPr>
+            </a:br>
+            <a:r>
+              <a:rPr lang="en-US" sz="900" dirty="0">
+                <a:solidFill>
+                  <a:srgbClr val="0070C0"/>
+                </a:solidFill>
+                <a:latin typeface="Menlo" panose="020B0609030804020204" pitchFamily="49" charset="0"/>
+                <a:ea typeface="Menlo" panose="020B0609030804020204" pitchFamily="49" charset="0"/>
+                <a:cs typeface="Menlo" panose="020B0609030804020204" pitchFamily="49" charset="0"/>
+                <a:sym typeface="Calibri"/>
+              </a:rPr>
+              <a:t>3.6 kW  3.8 kWh  ~$1,100   ~$306/kW</a:t>
+            </a:r>
+          </a:p>
+          <a:p>
+            <a:pPr marL="94060" lvl="0" indent="-103585">
+              <a:buClr>
+                <a:schemeClr val="dk1"/>
+              </a:buClr>
+              <a:buSzPts val="1200"/>
+              <a:buFont typeface="Arial"/>
+              <a:buChar char="•"/>
+            </a:pPr>
+            <a:r>
+              <a:rPr lang="en-US" sz="900" dirty="0">
+                <a:solidFill>
+                  <a:srgbClr val="0070C0"/>
+                </a:solidFill>
+                <a:latin typeface="Menlo" panose="020B0609030804020204" pitchFamily="49" charset="0"/>
+                <a:ea typeface="Menlo" panose="020B0609030804020204" pitchFamily="49" charset="0"/>
+                <a:cs typeface="Menlo" panose="020B0609030804020204" pitchFamily="49" charset="0"/>
+                <a:sym typeface="Calibri"/>
+              </a:rPr>
+              <a:t>OUPES Guardian 6000 + switch</a:t>
+            </a:r>
+            <a:br>
+              <a:rPr lang="en-US" sz="900" dirty="0">
+                <a:solidFill>
+                  <a:srgbClr val="0070C0"/>
+                </a:solidFill>
+                <a:latin typeface="Menlo" panose="020B0609030804020204" pitchFamily="49" charset="0"/>
+                <a:ea typeface="Menlo" panose="020B0609030804020204" pitchFamily="49" charset="0"/>
+                <a:cs typeface="Menlo" panose="020B0609030804020204" pitchFamily="49" charset="0"/>
+                <a:sym typeface="Calibri"/>
+              </a:rPr>
+            </a:br>
+            <a:r>
+              <a:rPr lang="en-US" sz="900" dirty="0">
+                <a:solidFill>
+                  <a:srgbClr val="0070C0"/>
+                </a:solidFill>
+                <a:latin typeface="Menlo" panose="020B0609030804020204" pitchFamily="49" charset="0"/>
+                <a:ea typeface="Menlo" panose="020B0609030804020204" pitchFamily="49" charset="0"/>
+                <a:cs typeface="Menlo" panose="020B0609030804020204" pitchFamily="49" charset="0"/>
+                <a:sym typeface="Calibri"/>
+              </a:rPr>
+              <a:t>6 kW    4.6 kWh  ~$1,909   ~$318/kW</a:t>
+            </a:r>
+          </a:p>
+          <a:p>
+            <a:pPr marL="94060" lvl="0" indent="-103585">
+              <a:buClr>
+                <a:schemeClr val="dk1"/>
+              </a:buClr>
+              <a:buSzPts val="1200"/>
+              <a:buFont typeface="Arial"/>
+              <a:buChar char="•"/>
+            </a:pPr>
+            <a:r>
+              <a:rPr lang="en-US" sz="900" dirty="0" err="1">
+                <a:solidFill>
+                  <a:srgbClr val="0070C0"/>
+                </a:solidFill>
+                <a:latin typeface="Menlo" panose="020B0609030804020204" pitchFamily="49" charset="0"/>
+                <a:ea typeface="Menlo" panose="020B0609030804020204" pitchFamily="49" charset="0"/>
+                <a:cs typeface="Menlo" panose="020B0609030804020204" pitchFamily="49" charset="0"/>
+                <a:sym typeface="Calibri"/>
+              </a:rPr>
+              <a:t>WattCycle</a:t>
+            </a:r>
+            <a:r>
+              <a:rPr lang="en-US" sz="900" dirty="0">
+                <a:solidFill>
+                  <a:srgbClr val="0070C0"/>
+                </a:solidFill>
+                <a:latin typeface="Menlo" panose="020B0609030804020204" pitchFamily="49" charset="0"/>
+                <a:ea typeface="Menlo" panose="020B0609030804020204" pitchFamily="49" charset="0"/>
+                <a:cs typeface="Menlo" panose="020B0609030804020204" pitchFamily="49" charset="0"/>
+                <a:sym typeface="Calibri"/>
+              </a:rPr>
+              <a:t> 12K DIY + 16kWh + panels</a:t>
+            </a:r>
+            <a:br>
+              <a:rPr lang="en-US" sz="900" dirty="0">
+                <a:solidFill>
+                  <a:srgbClr val="0070C0"/>
+                </a:solidFill>
+                <a:latin typeface="Menlo" panose="020B0609030804020204" pitchFamily="49" charset="0"/>
+                <a:ea typeface="Menlo" panose="020B0609030804020204" pitchFamily="49" charset="0"/>
+                <a:cs typeface="Menlo" panose="020B0609030804020204" pitchFamily="49" charset="0"/>
+                <a:sym typeface="Calibri"/>
+              </a:rPr>
+            </a:br>
+            <a:r>
+              <a:rPr lang="en-US" sz="900" dirty="0">
+                <a:solidFill>
+                  <a:srgbClr val="0070C0"/>
+                </a:solidFill>
+                <a:latin typeface="Menlo" panose="020B0609030804020204" pitchFamily="49" charset="0"/>
+                <a:ea typeface="Menlo" panose="020B0609030804020204" pitchFamily="49" charset="0"/>
+                <a:cs typeface="Menlo" panose="020B0609030804020204" pitchFamily="49" charset="0"/>
+                <a:sym typeface="Calibri"/>
+              </a:rPr>
+              <a:t>12 kW  16   kWh  ~$8,500   ~$708/kW</a:t>
+            </a:r>
+          </a:p>
+        </p:txBody>
+      </p:sp>
     </p:spTree>
   </p:cSld>
   <p:clrMapOvr>
@@ -16132,6 +17220,399 @@
 </file>
 
 <file path=ppt/slides/slide5.xml><?xml version="1.0" encoding="utf-8"?>
+<p:sld xmlns:a="http://schemas.openxmlformats.org/drawingml/2006/main" xmlns:r="http://schemas.openxmlformats.org/officeDocument/2006/relationships" xmlns:p="http://schemas.openxmlformats.org/presentationml/2006/main">
+  <p:cSld>
+    <p:spTree>
+      <p:nvGrpSpPr>
+        <p:cNvPr id="1" name="Shape 101"/>
+        <p:cNvGrpSpPr/>
+        <p:nvPr/>
+      </p:nvGrpSpPr>
+      <p:grpSpPr>
+        <a:xfrm>
+          <a:off x="0" y="0"/>
+          <a:ext cx="0" cy="0"/>
+          <a:chOff x="0" y="0"/>
+          <a:chExt cx="0" cy="0"/>
+        </a:xfrm>
+      </p:grpSpPr>
+      <p:sp>
+        <p:nvSpPr>
+          <p:cNvPr id="102" name="Google Shape;102;p15"/>
+          <p:cNvSpPr txBox="1"/>
+          <p:nvPr/>
+        </p:nvSpPr>
+        <p:spPr>
+          <a:xfrm>
+            <a:off x="65623" y="39645"/>
+            <a:ext cx="3988200" cy="346200"/>
+          </a:xfrm>
+          <a:prstGeom prst="rect">
+            <a:avLst/>
+          </a:prstGeom>
+          <a:noFill/>
+          <a:ln>
+            <a:noFill/>
+          </a:ln>
+        </p:spPr>
+        <p:txBody>
+          <a:bodyPr spcFirstLastPara="1" wrap="square" lIns="68575" tIns="34275" rIns="68575" bIns="34275" anchor="t" anchorCtr="0">
+            <a:spAutoFit/>
+          </a:bodyPr>
+          <a:lstStyle/>
+          <a:p>
+            <a:pPr marL="0" marR="0" lvl="0" indent="0" algn="l" rtl="0">
+              <a:spcBef>
+                <a:spcPts val="0"/>
+              </a:spcBef>
+              <a:spcAft>
+                <a:spcPts val="0"/>
+              </a:spcAft>
+              <a:buNone/>
+            </a:pPr>
+            <a:r>
+              <a:rPr lang="en-US" sz="1800" b="1" i="0" u="none" strike="noStrike" cap="none" dirty="0">
+                <a:solidFill>
+                  <a:schemeClr val="dk1"/>
+                </a:solidFill>
+                <a:latin typeface="Calibri"/>
+                <a:ea typeface="Calibri"/>
+                <a:cs typeface="Calibri"/>
+                <a:sym typeface="Calibri"/>
+              </a:rPr>
+              <a:t>Solar Charge Controller</a:t>
+            </a:r>
+            <a:endParaRPr sz="1800" b="1" i="0" dirty="0">
+              <a:solidFill>
+                <a:srgbClr val="333333"/>
+              </a:solidFill>
+              <a:latin typeface="Calibri"/>
+              <a:ea typeface="Calibri"/>
+              <a:cs typeface="Calibri"/>
+              <a:sym typeface="Calibri"/>
+            </a:endParaRPr>
+          </a:p>
+        </p:txBody>
+      </p:sp>
+      <p:sp>
+        <p:nvSpPr>
+          <p:cNvPr id="103" name="Google Shape;103;p15"/>
+          <p:cNvSpPr txBox="1"/>
+          <p:nvPr/>
+        </p:nvSpPr>
+        <p:spPr>
+          <a:xfrm>
+            <a:off x="65625" y="385894"/>
+            <a:ext cx="4473600" cy="2839208"/>
+          </a:xfrm>
+          <a:prstGeom prst="rect">
+            <a:avLst/>
+          </a:prstGeom>
+          <a:solidFill>
+            <a:srgbClr val="FFF2CC"/>
+          </a:solidFill>
+          <a:ln w="7150" cap="flat" cmpd="sng">
+            <a:solidFill>
+              <a:srgbClr val="FF0000"/>
+            </a:solidFill>
+            <a:prstDash val="solid"/>
+            <a:round/>
+            <a:headEnd type="none" w="sm" len="sm"/>
+            <a:tailEnd type="none" w="sm" len="sm"/>
+          </a:ln>
+        </p:spPr>
+        <p:txBody>
+          <a:bodyPr spcFirstLastPara="1" wrap="square" lIns="68575" tIns="34275" rIns="68575" bIns="34275" anchor="t" anchorCtr="0">
+            <a:spAutoFit/>
+          </a:bodyPr>
+          <a:lstStyle/>
+          <a:p>
+            <a:pPr marL="94060" lvl="0" indent="-103585">
+              <a:buClr>
+                <a:schemeClr val="dk1"/>
+              </a:buClr>
+              <a:buSzPts val="1200"/>
+              <a:buFont typeface="Arial"/>
+              <a:buChar char="•"/>
+            </a:pPr>
+            <a:r>
+              <a:rPr lang="en-US" sz="1200" dirty="0">
+                <a:solidFill>
+                  <a:schemeClr val="dk1"/>
+                </a:solidFill>
+                <a:latin typeface="Calibri"/>
+                <a:ea typeface="Calibri"/>
+                <a:cs typeface="Calibri"/>
+                <a:sym typeface="Calibri"/>
+              </a:rPr>
+              <a:t>A solar charge controller regulates the unstable voltage from solar panels into a safe, steady voltage for battery charging</a:t>
+            </a:r>
+          </a:p>
+          <a:p>
+            <a:pPr marL="94060" lvl="0" indent="-103585">
+              <a:buClr>
+                <a:schemeClr val="dk1"/>
+              </a:buClr>
+              <a:buSzPts val="1200"/>
+              <a:buFont typeface="Arial"/>
+              <a:buChar char="•"/>
+            </a:pPr>
+            <a:r>
+              <a:rPr lang="en-US" sz="1200" dirty="0">
+                <a:solidFill>
+                  <a:schemeClr val="dk1"/>
+                </a:solidFill>
+                <a:latin typeface="Calibri"/>
+                <a:ea typeface="Calibri"/>
+                <a:cs typeface="Calibri"/>
+                <a:sym typeface="Calibri"/>
+              </a:rPr>
+              <a:t>Panels can output 16–20V or higher depending on sunlight and temperature, while a 12V battery needs only ~14–14.5V. Too much voltage damages it</a:t>
+            </a:r>
+          </a:p>
+          <a:p>
+            <a:pPr marL="94060" lvl="0" indent="-103585">
+              <a:buClr>
+                <a:schemeClr val="dk1"/>
+              </a:buClr>
+              <a:buSzPts val="1200"/>
+              <a:buFont typeface="Arial"/>
+              <a:buChar char="•"/>
+            </a:pPr>
+            <a:r>
+              <a:rPr lang="en-US" sz="1200" dirty="0">
+                <a:solidFill>
+                  <a:schemeClr val="dk1"/>
+                </a:solidFill>
+                <a:latin typeface="Calibri"/>
+                <a:ea typeface="Calibri"/>
+                <a:cs typeface="Calibri"/>
+                <a:sym typeface="Calibri"/>
+              </a:rPr>
+              <a:t>There are two main types of controllers – both using switching: </a:t>
+            </a:r>
+          </a:p>
+          <a:p>
+            <a:pPr marL="404813" lvl="0" indent="-107950">
+              <a:buClr>
+                <a:schemeClr val="dk1"/>
+              </a:buClr>
+              <a:buSzPts val="1200"/>
+              <a:buFont typeface="Arial"/>
+              <a:buChar char="•"/>
+            </a:pPr>
+            <a:r>
+              <a:rPr lang="en-US" sz="1200" dirty="0">
+                <a:solidFill>
+                  <a:srgbClr val="FF0000"/>
+                </a:solidFill>
+                <a:latin typeface="Calibri"/>
+                <a:ea typeface="Calibri"/>
+                <a:cs typeface="Calibri"/>
+                <a:sym typeface="Calibri"/>
+              </a:rPr>
+              <a:t>PWM (Pulse Width Modulation) </a:t>
+            </a:r>
+            <a:r>
+              <a:rPr lang="en-US" sz="1200" dirty="0">
+                <a:solidFill>
+                  <a:srgbClr val="0070C0"/>
+                </a:solidFill>
+                <a:latin typeface="Calibri"/>
+                <a:ea typeface="Calibri"/>
+                <a:cs typeface="Calibri"/>
+                <a:sym typeface="Calibri"/>
+              </a:rPr>
+              <a:t>controller - rapidly switch the connection on/off to reduce voltage (simple, ~75% efficient)</a:t>
+            </a:r>
+          </a:p>
+          <a:p>
+            <a:pPr marL="404813" lvl="0" indent="-107950">
+              <a:buClr>
+                <a:schemeClr val="dk1"/>
+              </a:buClr>
+              <a:buSzPts val="1200"/>
+              <a:buFont typeface="Arial"/>
+              <a:buChar char="•"/>
+            </a:pPr>
+            <a:r>
+              <a:rPr lang="en-US" sz="1200" dirty="0">
+                <a:solidFill>
+                  <a:srgbClr val="FF0000"/>
+                </a:solidFill>
+                <a:latin typeface="Calibri"/>
+                <a:ea typeface="Calibri"/>
+                <a:cs typeface="Calibri"/>
+                <a:sym typeface="Calibri"/>
+              </a:rPr>
+              <a:t>MPPT (Max Power Point Tracking)</a:t>
+            </a:r>
+            <a:r>
+              <a:rPr lang="en-US" sz="1200" dirty="0">
+                <a:solidFill>
+                  <a:srgbClr val="0070C0"/>
+                </a:solidFill>
+                <a:latin typeface="Calibri"/>
+                <a:ea typeface="Calibri"/>
+                <a:cs typeface="Calibri"/>
+                <a:sym typeface="Calibri"/>
+              </a:rPr>
+              <a:t> controller is also a </a:t>
+            </a:r>
+            <a:r>
+              <a:rPr lang="en-US" sz="1200" dirty="0" err="1">
+                <a:solidFill>
+                  <a:srgbClr val="0070C0"/>
+                </a:solidFill>
+                <a:latin typeface="Calibri"/>
+                <a:ea typeface="Calibri"/>
+                <a:cs typeface="Calibri"/>
+                <a:sym typeface="Calibri"/>
+              </a:rPr>
+              <a:t>switchingDC</a:t>
+            </a:r>
+            <a:r>
+              <a:rPr lang="en-US" sz="1200" dirty="0">
+                <a:solidFill>
+                  <a:srgbClr val="0070C0"/>
+                </a:solidFill>
+                <a:latin typeface="Calibri"/>
+                <a:ea typeface="Calibri"/>
+                <a:cs typeface="Calibri"/>
+                <a:sym typeface="Calibri"/>
+              </a:rPr>
+              <a:t>-DC converter, but it uses feedback to find the optimal power point on the panel's output curve (~95% efficient, recovering 20–30% more energy)</a:t>
+            </a:r>
+          </a:p>
+          <a:p>
+            <a:pPr marL="94060" lvl="0" indent="-103585">
+              <a:buClr>
+                <a:schemeClr val="dk1"/>
+              </a:buClr>
+              <a:buSzPts val="1200"/>
+              <a:buFont typeface="Arial"/>
+              <a:buChar char="•"/>
+            </a:pPr>
+            <a:r>
+              <a:rPr lang="en-US" sz="1200" dirty="0">
+                <a:solidFill>
+                  <a:schemeClr val="dk1"/>
+                </a:solidFill>
+                <a:latin typeface="Calibri"/>
+                <a:ea typeface="Calibri"/>
+                <a:cs typeface="Calibri"/>
+                <a:sym typeface="Calibri"/>
+              </a:rPr>
+              <a:t>Both manage a three-stage charge cycle — bulk, absorption, and float — and block reverse current flow at night to prevent battery drain.</a:t>
+            </a:r>
+            <a:endParaRPr sz="1200" dirty="0">
+              <a:solidFill>
+                <a:schemeClr val="dk1"/>
+              </a:solidFill>
+              <a:latin typeface="Calibri"/>
+              <a:ea typeface="Calibri"/>
+              <a:cs typeface="Calibri"/>
+              <a:sym typeface="Calibri"/>
+            </a:endParaRPr>
+          </a:p>
+        </p:txBody>
+      </p:sp>
+      <p:pic>
+        <p:nvPicPr>
+          <p:cNvPr id="3" name="Picture 2" descr="Pulse Width Modulation Used for Motor ...">
+            <a:extLst>
+              <a:ext uri="{FF2B5EF4-FFF2-40B4-BE49-F238E27FC236}">
+                <a16:creationId xmlns:a16="http://schemas.microsoft.com/office/drawing/2014/main" id="{CE0B496F-E2A8-2B2D-C18B-826544826706}"/>
+              </a:ext>
+            </a:extLst>
+          </p:cNvPr>
+          <p:cNvPicPr>
+            <a:picLocks noChangeAspect="1"/>
+          </p:cNvPicPr>
+          <p:nvPr/>
+        </p:nvPicPr>
+        <p:blipFill>
+          <a:blip r:embed="rId3" cstate="email">
+            <a:extLst>
+              <a:ext uri="{28A0092B-C50C-407E-A947-70E740481C1C}">
+                <a14:useLocalDpi xmlns:a14="http://schemas.microsoft.com/office/drawing/2010/main"/>
+              </a:ext>
+            </a:extLst>
+          </a:blip>
+          <a:stretch>
+            <a:fillRect/>
+          </a:stretch>
+        </p:blipFill>
+        <p:spPr>
+          <a:xfrm>
+            <a:off x="5027365" y="588740"/>
+            <a:ext cx="3231770" cy="1122615"/>
+          </a:xfrm>
+          <a:prstGeom prst="rect">
+            <a:avLst/>
+          </a:prstGeom>
+          <a:ln>
+            <a:solidFill>
+              <a:srgbClr val="FF0000"/>
+            </a:solidFill>
+          </a:ln>
+        </p:spPr>
+      </p:pic>
+      <p:pic>
+        <p:nvPicPr>
+          <p:cNvPr id="4" name="Picture 3" descr="MPPT - Maximum Power Point Tracking">
+            <a:extLst>
+              <a:ext uri="{FF2B5EF4-FFF2-40B4-BE49-F238E27FC236}">
+                <a16:creationId xmlns:a16="http://schemas.microsoft.com/office/drawing/2014/main" id="{319FF64A-9EE7-0959-2018-759C60CF3F27}"/>
+              </a:ext>
+            </a:extLst>
+          </p:cNvPr>
+          <p:cNvPicPr>
+            <a:picLocks noChangeAspect="1"/>
+          </p:cNvPicPr>
+          <p:nvPr/>
+        </p:nvPicPr>
+        <p:blipFill>
+          <a:blip r:embed="rId4" cstate="email">
+            <a:extLst>
+              <a:ext uri="{28A0092B-C50C-407E-A947-70E740481C1C}">
+                <a14:useLocalDpi xmlns:a14="http://schemas.microsoft.com/office/drawing/2010/main"/>
+              </a:ext>
+            </a:extLst>
+          </a:blip>
+          <a:stretch>
+            <a:fillRect/>
+          </a:stretch>
+        </p:blipFill>
+        <p:spPr>
+          <a:xfrm>
+            <a:off x="5105400" y="2456752"/>
+            <a:ext cx="3022600" cy="1536700"/>
+          </a:xfrm>
+          <a:prstGeom prst="rect">
+            <a:avLst/>
+          </a:prstGeom>
+          <a:ln>
+            <a:solidFill>
+              <a:srgbClr val="FF0000"/>
+            </a:solidFill>
+          </a:ln>
+        </p:spPr>
+      </p:pic>
+    </p:spTree>
+    <p:extLst>
+      <p:ext uri="{BB962C8B-B14F-4D97-AF65-F5344CB8AC3E}">
+        <p14:creationId xmlns:p14="http://schemas.microsoft.com/office/powerpoint/2010/main" val="2956879150"/>
+      </p:ext>
+    </p:extLst>
+  </p:cSld>
+  <p:clrMapOvr>
+    <a:masterClrMapping/>
+  </p:clrMapOvr>
+</p:sld>
+</file>
+
+<file path=ppt/slides/slide6.xml><?xml version="1.0" encoding="utf-8"?>
 <p:sld xmlns:a="http://schemas.openxmlformats.org/drawingml/2006/main" xmlns:r="http://schemas.openxmlformats.org/officeDocument/2006/relationships" xmlns:p="http://schemas.openxmlformats.org/presentationml/2006/main">
   <p:cSld>
     <p:spTree>
@@ -16805,7 +18286,7 @@
 </p:sld>
 </file>
 
-<file path=ppt/slides/slide6.xml><?xml version="1.0" encoding="utf-8"?>
+<file path=ppt/slides/slide7.xml><?xml version="1.0" encoding="utf-8"?>
 <p:sld xmlns:a="http://schemas.openxmlformats.org/drawingml/2006/main" xmlns:r="http://schemas.openxmlformats.org/officeDocument/2006/relationships" xmlns:p="http://schemas.openxmlformats.org/presentationml/2006/main">
   <p:cSld>
     <p:spTree>
@@ -17712,7 +19193,7 @@
 </p:sld>
 </file>
 
-<file path=ppt/slides/slide7.xml><?xml version="1.0" encoding="utf-8"?>
+<file path=ppt/slides/slide8.xml><?xml version="1.0" encoding="utf-8"?>
 <p:sld xmlns:a="http://schemas.openxmlformats.org/drawingml/2006/main" xmlns:r="http://schemas.openxmlformats.org/officeDocument/2006/relationships" xmlns:p="http://schemas.openxmlformats.org/presentationml/2006/main">
   <p:cSld>
     <p:spTree>
@@ -18580,7 +20061,7 @@
 </p:sld>
 </file>
 
-<file path=ppt/slides/slide8.xml><?xml version="1.0" encoding="utf-8"?>
+<file path=ppt/slides/slide9.xml><?xml version="1.0" encoding="utf-8"?>
 <p:sld xmlns:a="http://schemas.openxmlformats.org/drawingml/2006/main" xmlns:r="http://schemas.openxmlformats.org/officeDocument/2006/relationships" xmlns:p="http://schemas.openxmlformats.org/presentationml/2006/main">
   <p:cSld>
     <p:spTree>
@@ -18952,7 +20433,7 @@
         </p:nvSpPr>
         <p:spPr>
           <a:xfrm>
-            <a:off x="67395" y="2571750"/>
+            <a:off x="67395" y="2038350"/>
             <a:ext cx="4112700" cy="1423436"/>
           </a:xfrm>
           <a:prstGeom prst="rect">
@@ -19200,7 +20681,7 @@
         </p:blipFill>
         <p:spPr>
           <a:xfrm>
-            <a:off x="4864100" y="2876550"/>
+            <a:off x="4539225" y="2287438"/>
             <a:ext cx="2158875" cy="925260"/>
           </a:xfrm>
           <a:prstGeom prst="rect">
@@ -19208,7 +20689,157 @@
           </a:prstGeom>
           <a:noFill/>
           <a:ln>
-            <a:noFill/>
+            <a:solidFill>
+              <a:srgbClr val="FF0000"/>
+            </a:solidFill>
+          </a:ln>
+        </p:spPr>
+      </p:pic>
+      <p:sp>
+        <p:nvSpPr>
+          <p:cNvPr id="4" name="Google Shape;149;p19">
+            <a:extLst>
+              <a:ext uri="{FF2B5EF4-FFF2-40B4-BE49-F238E27FC236}">
+                <a16:creationId xmlns:a16="http://schemas.microsoft.com/office/drawing/2014/main" id="{884EC012-69F9-14EB-0967-EE9CA52ACF6C}"/>
+              </a:ext>
+            </a:extLst>
+          </p:cNvPr>
+          <p:cNvSpPr txBox="1"/>
+          <p:nvPr/>
+        </p:nvSpPr>
+        <p:spPr>
+          <a:xfrm>
+            <a:off x="67395" y="3537541"/>
+            <a:ext cx="4112700" cy="746328"/>
+          </a:xfrm>
+          <a:prstGeom prst="rect">
+            <a:avLst/>
+          </a:prstGeom>
+          <a:solidFill>
+            <a:srgbClr val="FFF2CC"/>
+          </a:solidFill>
+          <a:ln w="7150" cap="flat" cmpd="sng">
+            <a:solidFill>
+              <a:srgbClr val="FF0000"/>
+            </a:solidFill>
+            <a:prstDash val="solid"/>
+            <a:round/>
+            <a:headEnd type="none" w="sm" len="sm"/>
+            <a:tailEnd type="none" w="sm" len="sm"/>
+          </a:ln>
+        </p:spPr>
+        <p:txBody>
+          <a:bodyPr spcFirstLastPara="1" wrap="square" lIns="68575" tIns="34275" rIns="68575" bIns="34275" anchor="t" anchorCtr="0">
+            <a:spAutoFit/>
+          </a:bodyPr>
+          <a:lstStyle/>
+          <a:p>
+            <a:pPr marL="94060" lvl="0" indent="-103585">
+              <a:buClr>
+                <a:schemeClr val="dk1"/>
+              </a:buClr>
+              <a:buSzPts val="1200"/>
+              <a:buFont typeface="Arial"/>
+              <a:buChar char="•"/>
+            </a:pPr>
+            <a:r>
+              <a:rPr lang="en-US" sz="1100" dirty="0"/>
+              <a:t>Vertical vs. South-Facing Panels, </a:t>
+            </a:r>
+          </a:p>
+          <a:p>
+            <a:pPr marL="94060" lvl="0" indent="-103585">
+              <a:buClr>
+                <a:schemeClr val="dk1"/>
+              </a:buClr>
+              <a:buSzPts val="1200"/>
+              <a:buFont typeface="Arial"/>
+              <a:buChar char="•"/>
+            </a:pPr>
+            <a:r>
+              <a:rPr lang="en-US" sz="1100" dirty="0"/>
+              <a:t>Adding reflectors </a:t>
+            </a:r>
+          </a:p>
+          <a:p>
+            <a:pPr marL="94060" lvl="0" indent="-103585">
+              <a:buClr>
+                <a:schemeClr val="dk1"/>
+              </a:buClr>
+              <a:buSzPts val="1200"/>
+              <a:buFont typeface="Arial"/>
+              <a:buChar char="•"/>
+            </a:pPr>
+            <a:r>
+              <a:rPr lang="en-US" sz="1100" dirty="0"/>
+              <a:t>Bifacial panels </a:t>
+            </a:r>
+          </a:p>
+          <a:p>
+            <a:pPr marL="94060" lvl="0" indent="-103585">
+              <a:buClr>
+                <a:schemeClr val="dk1"/>
+              </a:buClr>
+              <a:buSzPts val="1200"/>
+              <a:buFont typeface="Arial"/>
+              <a:buChar char="•"/>
+            </a:pPr>
+            <a:r>
+              <a:rPr lang="en-US" sz="1100" dirty="0">
+                <a:hlinkClick r:id="rId7"/>
+              </a:rPr>
+              <a:t>https://www.youtube.com/watch?v=xD1MT-ek05w</a:t>
+            </a:r>
+            <a:endParaRPr sz="1100" dirty="0">
+              <a:solidFill>
+                <a:schemeClr val="dk1"/>
+              </a:solidFill>
+              <a:latin typeface="Calibri"/>
+              <a:ea typeface="Calibri"/>
+              <a:cs typeface="Calibri"/>
+              <a:sym typeface="Calibri"/>
+            </a:endParaRPr>
+          </a:p>
+        </p:txBody>
+      </p:sp>
+      <p:pic>
+        <p:nvPicPr>
+          <p:cNvPr id="5" name="Picture 4">
+            <a:extLst>
+              <a:ext uri="{FF2B5EF4-FFF2-40B4-BE49-F238E27FC236}">
+                <a16:creationId xmlns:a16="http://schemas.microsoft.com/office/drawing/2014/main" id="{906980DD-B2AE-25F0-0096-604B0D323E43}"/>
+              </a:ext>
+            </a:extLst>
+          </p:cNvPr>
+          <p:cNvPicPr>
+            <a:picLocks noChangeAspect="1"/>
+          </p:cNvPicPr>
+          <p:nvPr/>
+        </p:nvPicPr>
+        <p:blipFill>
+          <a:blip r:embed="rId8" cstate="email">
+            <a:extLst>
+              <a:ext uri="{28A0092B-C50C-407E-A947-70E740481C1C}">
+                <a14:useLocalDpi xmlns:a14="http://schemas.microsoft.com/office/drawing/2010/main"/>
+              </a:ext>
+            </a:extLst>
+          </a:blip>
+          <a:stretch>
+            <a:fillRect/>
+          </a:stretch>
+        </p:blipFill>
+        <p:spPr>
+          <a:xfrm>
+            <a:off x="4539225" y="3446280"/>
+            <a:ext cx="2286000" cy="1261043"/>
+          </a:xfrm>
+          <a:prstGeom prst="rect">
+            <a:avLst/>
+          </a:prstGeom>
+          <a:ln>
+            <a:solidFill>
+              <a:srgbClr val="FF0000"/>
+            </a:solidFill>
           </a:ln>
         </p:spPr>
       </p:pic>

--- a/solar.pptx
+++ b/solar.pptx
@@ -5,7 +5,7 @@
     <p:sldMasterId id="2147483659" r:id="rId1"/>
   </p:sldMasterIdLst>
   <p:notesMasterIdLst>
-    <p:notesMasterId r:id="rId12"/>
+    <p:notesMasterId r:id="rId13"/>
   </p:notesMasterIdLst>
   <p:sldIdLst>
     <p:sldId id="260" r:id="rId2"/>
@@ -16,8 +16,9 @@
     <p:sldId id="258" r:id="rId7"/>
     <p:sldId id="259" r:id="rId8"/>
     <p:sldId id="261" r:id="rId9"/>
-    <p:sldId id="263" r:id="rId10"/>
-    <p:sldId id="265" r:id="rId11"/>
+    <p:sldId id="266" r:id="rId10"/>
+    <p:sldId id="263" r:id="rId11"/>
+    <p:sldId id="265" r:id="rId12"/>
   </p:sldIdLst>
   <p:sldSz cx="9144000" cy="5143500" type="screen16x9"/>
   <p:notesSz cx="6858000" cy="9144000"/>
@@ -1652,6 +1653,110 @@
         </p:spPr>
       </p:sp>
     </p:spTree>
+  </p:cSld>
+  <p:clrMapOvr>
+    <a:masterClrMapping/>
+  </p:clrMapOvr>
+</p:notes>
+</file>
+
+<file path=ppt/notesSlides/notesSlide11.xml><?xml version="1.0" encoding="utf-8"?>
+<p:notes xmlns:a="http://schemas.openxmlformats.org/drawingml/2006/main" xmlns:r="http://schemas.openxmlformats.org/officeDocument/2006/relationships" xmlns:p="http://schemas.openxmlformats.org/presentationml/2006/main" showMasterSp="0" showMasterPhAnim="0">
+  <p:cSld>
+    <p:spTree>
+      <p:nvGrpSpPr>
+        <p:cNvPr id="1" name="Shape 151"/>
+        <p:cNvGrpSpPr/>
+        <p:nvPr/>
+      </p:nvGrpSpPr>
+      <p:grpSpPr>
+        <a:xfrm>
+          <a:off x="0" y="0"/>
+          <a:ext cx="0" cy="0"/>
+          <a:chOff x="0" y="0"/>
+          <a:chExt cx="0" cy="0"/>
+        </a:xfrm>
+      </p:grpSpPr>
+      <p:sp>
+        <p:nvSpPr>
+          <p:cNvPr id="152" name="Google Shape;152;g3e5eb4dda17_0_53:notes"/>
+          <p:cNvSpPr txBox="1">
+            <a:spLocks noGrp="1"/>
+          </p:cNvSpPr>
+          <p:nvPr>
+            <p:ph type="body" idx="1"/>
+          </p:nvPr>
+        </p:nvSpPr>
+        <p:spPr>
+          <a:xfrm>
+            <a:off x="685800" y="4400550"/>
+            <a:ext cx="5486400" cy="3600600"/>
+          </a:xfrm>
+          <a:prstGeom prst="rect">
+            <a:avLst/>
+          </a:prstGeom>
+        </p:spPr>
+        <p:txBody>
+          <a:bodyPr spcFirstLastPara="1" wrap="square" lIns="91425" tIns="45700" rIns="91425" bIns="45700" anchor="t" anchorCtr="0">
+            <a:noAutofit/>
+          </a:bodyPr>
+          <a:lstStyle/>
+          <a:p>
+            <a:pPr marL="0" lvl="0" indent="0" algn="l" rtl="0">
+              <a:spcBef>
+                <a:spcPts val="0"/>
+              </a:spcBef>
+              <a:spcAft>
+                <a:spcPts val="0"/>
+              </a:spcAft>
+              <a:buNone/>
+            </a:pPr>
+            <a:endParaRPr/>
+          </a:p>
+        </p:txBody>
+      </p:sp>
+      <p:sp>
+        <p:nvSpPr>
+          <p:cNvPr id="153" name="Google Shape;153;g3e5eb4dda17_0_53:notes"/>
+          <p:cNvSpPr>
+            <a:spLocks noGrp="1" noRot="1" noChangeAspect="1"/>
+          </p:cNvSpPr>
+          <p:nvPr>
+            <p:ph type="sldImg" idx="2"/>
+          </p:nvPr>
+        </p:nvSpPr>
+        <p:spPr>
+          <a:xfrm>
+            <a:off x="685800" y="1143000"/>
+            <a:ext cx="5486400" cy="3086100"/>
+          </a:xfrm>
+          <a:custGeom>
+            <a:avLst/>
+            <a:gdLst/>
+            <a:ahLst/>
+            <a:cxnLst/>
+            <a:rect l="l" t="t" r="r" b="b"/>
+            <a:pathLst>
+              <a:path w="120000" h="120000" extrusionOk="0">
+                <a:moveTo>
+                  <a:pt x="0" y="0"/>
+                </a:moveTo>
+                <a:lnTo>
+                  <a:pt x="120000" y="0"/>
+                </a:lnTo>
+                <a:lnTo>
+                  <a:pt x="120000" y="120000"/>
+                </a:lnTo>
+                <a:lnTo>
+                  <a:pt x="0" y="120000"/>
+                </a:lnTo>
+                <a:close/>
+              </a:path>
+            </a:pathLst>
+          </a:custGeom>
+        </p:spPr>
+      </p:sp>
+    </p:spTree>
     <p:extLst>
       <p:ext uri="{BB962C8B-B14F-4D97-AF65-F5344CB8AC3E}">
         <p14:creationId xmlns:p14="http://schemas.microsoft.com/office/powerpoint/2010/main" val="2868086858"/>
@@ -2494,6 +2599,11 @@
         </p:spPr>
       </p:sp>
     </p:spTree>
+    <p:extLst>
+      <p:ext uri="{BB962C8B-B14F-4D97-AF65-F5344CB8AC3E}">
+        <p14:creationId xmlns:p14="http://schemas.microsoft.com/office/powerpoint/2010/main" val="1122873146"/>
+      </p:ext>
+    </p:extLst>
   </p:cSld>
   <p:clrMapOvr>
     <a:masterClrMapping/>
@@ -14035,6 +14145,796 @@
               <a:buNone/>
             </a:pPr>
             <a:r>
+              <a:rPr lang="en-US" sz="1800" b="1" i="0" u="none" strike="noStrike" cap="none">
+                <a:solidFill>
+                  <a:schemeClr val="dk1"/>
+                </a:solidFill>
+                <a:latin typeface="Calibri"/>
+                <a:ea typeface="Calibri"/>
+                <a:cs typeface="Calibri"/>
+                <a:sym typeface="Calibri"/>
+              </a:rPr>
+              <a:t>Solar</a:t>
+            </a:r>
+            <a:endParaRPr sz="1800" b="1" i="0">
+              <a:solidFill>
+                <a:srgbClr val="333333"/>
+              </a:solidFill>
+              <a:latin typeface="Calibri"/>
+              <a:ea typeface="Calibri"/>
+              <a:cs typeface="Calibri"/>
+              <a:sym typeface="Calibri"/>
+            </a:endParaRPr>
+          </a:p>
+        </p:txBody>
+      </p:sp>
+      <p:sp>
+        <p:nvSpPr>
+          <p:cNvPr id="156" name="Google Shape;156;p20"/>
+          <p:cNvSpPr txBox="1"/>
+          <p:nvPr/>
+        </p:nvSpPr>
+        <p:spPr>
+          <a:xfrm>
+            <a:off x="65625" y="385894"/>
+            <a:ext cx="4473600" cy="1546800"/>
+          </a:xfrm>
+          <a:prstGeom prst="rect">
+            <a:avLst/>
+          </a:prstGeom>
+          <a:solidFill>
+            <a:srgbClr val="FFF2CC"/>
+          </a:solidFill>
+          <a:ln w="7150" cap="flat" cmpd="sng">
+            <a:solidFill>
+              <a:srgbClr val="FF0000"/>
+            </a:solidFill>
+            <a:prstDash val="solid"/>
+            <a:round/>
+            <a:headEnd type="none" w="sm" len="sm"/>
+            <a:tailEnd type="none" w="sm" len="sm"/>
+          </a:ln>
+        </p:spPr>
+        <p:txBody>
+          <a:bodyPr spcFirstLastPara="1" wrap="square" lIns="68575" tIns="34275" rIns="68575" bIns="34275" anchor="t" anchorCtr="0">
+            <a:spAutoFit/>
+          </a:bodyPr>
+          <a:lstStyle/>
+          <a:p>
+            <a:pPr marL="94060" marR="0" lvl="0" indent="-103585" algn="l" rtl="0">
+              <a:spcBef>
+                <a:spcPts val="0"/>
+              </a:spcBef>
+              <a:spcAft>
+                <a:spcPts val="0"/>
+              </a:spcAft>
+              <a:buClr>
+                <a:schemeClr val="dk1"/>
+              </a:buClr>
+              <a:buSzPts val="1200"/>
+              <a:buFont typeface="Arial"/>
+              <a:buChar char="•"/>
+            </a:pPr>
+            <a:r>
+              <a:rPr lang="en-US" sz="1200" b="1">
+                <a:solidFill>
+                  <a:srgbClr val="FF0000"/>
+                </a:solidFill>
+                <a:latin typeface="Calibri"/>
+                <a:ea typeface="Calibri"/>
+                <a:cs typeface="Calibri"/>
+                <a:sym typeface="Calibri"/>
+              </a:rPr>
+              <a:t>JerryRigEverything </a:t>
+            </a:r>
+            <a:r>
+              <a:rPr lang="en-US" sz="1200">
+                <a:solidFill>
+                  <a:schemeClr val="dk1"/>
+                </a:solidFill>
+                <a:latin typeface="Calibri"/>
+                <a:ea typeface="Calibri"/>
+                <a:cs typeface="Calibri"/>
+                <a:sym typeface="Calibri"/>
+              </a:rPr>
+              <a:t>reflects on his home solar panel system six years after its initial installation. </a:t>
+            </a:r>
+            <a:endParaRPr sz="1200">
+              <a:solidFill>
+                <a:schemeClr val="dk1"/>
+              </a:solidFill>
+              <a:latin typeface="Calibri"/>
+              <a:ea typeface="Calibri"/>
+              <a:cs typeface="Calibri"/>
+              <a:sym typeface="Calibri"/>
+            </a:endParaRPr>
+          </a:p>
+          <a:p>
+            <a:pPr marL="94060" marR="0" lvl="0" indent="-103585" algn="l" rtl="0">
+              <a:spcBef>
+                <a:spcPts val="0"/>
+              </a:spcBef>
+              <a:spcAft>
+                <a:spcPts val="0"/>
+              </a:spcAft>
+              <a:buClr>
+                <a:schemeClr val="dk1"/>
+              </a:buClr>
+              <a:buSzPts val="1200"/>
+              <a:buFont typeface="Arial"/>
+              <a:buChar char="•"/>
+            </a:pPr>
+            <a:r>
+              <a:rPr lang="en-US" sz="1200">
+                <a:solidFill>
+                  <a:schemeClr val="dk1"/>
+                </a:solidFill>
+                <a:latin typeface="Calibri"/>
+                <a:ea typeface="Calibri"/>
+                <a:cs typeface="Calibri"/>
+                <a:sym typeface="Calibri"/>
+              </a:rPr>
+              <a:t>He discusses the long-term performance and reliability of his setup while highlighting the evolution of residential energy technology. </a:t>
+            </a:r>
+            <a:endParaRPr sz="1200">
+              <a:solidFill>
+                <a:schemeClr val="dk1"/>
+              </a:solidFill>
+              <a:latin typeface="Calibri"/>
+              <a:ea typeface="Calibri"/>
+              <a:cs typeface="Calibri"/>
+              <a:sym typeface="Calibri"/>
+            </a:endParaRPr>
+          </a:p>
+          <a:p>
+            <a:pPr marL="94060" marR="0" lvl="0" indent="-103585" algn="l" rtl="0">
+              <a:spcBef>
+                <a:spcPts val="0"/>
+              </a:spcBef>
+              <a:spcAft>
+                <a:spcPts val="0"/>
+              </a:spcAft>
+              <a:buClr>
+                <a:schemeClr val="dk1"/>
+              </a:buClr>
+              <a:buSzPts val="1200"/>
+              <a:buFont typeface="Arial"/>
+              <a:buChar char="•"/>
+            </a:pPr>
+            <a:r>
+              <a:rPr lang="en-US" sz="1200">
+                <a:solidFill>
+                  <a:schemeClr val="dk1"/>
+                </a:solidFill>
+                <a:latin typeface="Calibri"/>
+                <a:ea typeface="Calibri"/>
+                <a:cs typeface="Calibri"/>
+                <a:sym typeface="Calibri"/>
+              </a:rPr>
+              <a:t>The video serves as a transition to promote the EcoFlow DELTA Pro Ultra X, a modern whole-home backup system</a:t>
+            </a:r>
+            <a:endParaRPr sz="1200">
+              <a:solidFill>
+                <a:schemeClr val="dk1"/>
+              </a:solidFill>
+              <a:latin typeface="Calibri"/>
+              <a:ea typeface="Calibri"/>
+              <a:cs typeface="Calibri"/>
+              <a:sym typeface="Calibri"/>
+            </a:endParaRPr>
+          </a:p>
+          <a:p>
+            <a:pPr marL="94060" marR="0" lvl="0" indent="-103585" algn="l" rtl="0">
+              <a:spcBef>
+                <a:spcPts val="0"/>
+              </a:spcBef>
+              <a:spcAft>
+                <a:spcPts val="0"/>
+              </a:spcAft>
+              <a:buClr>
+                <a:schemeClr val="dk1"/>
+              </a:buClr>
+              <a:buSzPts val="1200"/>
+              <a:buFont typeface="Arial"/>
+              <a:buChar char="•"/>
+            </a:pPr>
+            <a:r>
+              <a:rPr lang="en-US" sz="1200">
+                <a:solidFill>
+                  <a:schemeClr val="dk1"/>
+                </a:solidFill>
+                <a:latin typeface="Calibri"/>
+                <a:ea typeface="Calibri"/>
+                <a:cs typeface="Calibri"/>
+                <a:sym typeface="Calibri"/>
+              </a:rPr>
+              <a:t>Ease of installation and power capacity</a:t>
+            </a:r>
+            <a:endParaRPr sz="1200">
+              <a:solidFill>
+                <a:schemeClr val="dk1"/>
+              </a:solidFill>
+              <a:latin typeface="Calibri"/>
+              <a:ea typeface="Calibri"/>
+              <a:cs typeface="Calibri"/>
+              <a:sym typeface="Calibri"/>
+            </a:endParaRPr>
+          </a:p>
+          <a:p>
+            <a:pPr marL="94060" marR="0" lvl="0" indent="-103585" algn="l" rtl="0">
+              <a:spcBef>
+                <a:spcPts val="0"/>
+              </a:spcBef>
+              <a:spcAft>
+                <a:spcPts val="0"/>
+              </a:spcAft>
+              <a:buClr>
+                <a:schemeClr val="dk1"/>
+              </a:buClr>
+              <a:buSzPts val="1200"/>
+              <a:buFont typeface="Arial"/>
+              <a:buChar char="•"/>
+            </a:pPr>
+            <a:r>
+              <a:rPr lang="en-US" sz="1200" u="sng">
+                <a:solidFill>
+                  <a:schemeClr val="hlink"/>
+                </a:solidFill>
+                <a:latin typeface="Calibri"/>
+                <a:ea typeface="Calibri"/>
+                <a:cs typeface="Calibri"/>
+                <a:sym typeface="Calibri"/>
+                <a:hlinkClick r:id="rId3"/>
+              </a:rPr>
+              <a:t>https://www.youtube.com/watch?v=w3QlyvY600Q</a:t>
+            </a:r>
+            <a:r>
+              <a:rPr lang="en-US" sz="1200">
+                <a:solidFill>
+                  <a:schemeClr val="dk1"/>
+                </a:solidFill>
+                <a:latin typeface="Calibri"/>
+                <a:ea typeface="Calibri"/>
+                <a:cs typeface="Calibri"/>
+                <a:sym typeface="Calibri"/>
+              </a:rPr>
+              <a:t> </a:t>
+            </a:r>
+            <a:endParaRPr sz="1200">
+              <a:solidFill>
+                <a:schemeClr val="dk1"/>
+              </a:solidFill>
+              <a:latin typeface="Calibri"/>
+              <a:ea typeface="Calibri"/>
+              <a:cs typeface="Calibri"/>
+              <a:sym typeface="Calibri"/>
+            </a:endParaRPr>
+          </a:p>
+        </p:txBody>
+      </p:sp>
+      <p:pic>
+        <p:nvPicPr>
+          <p:cNvPr id="157" name="Google Shape;157;p20"/>
+          <p:cNvPicPr preferRelativeResize="0"/>
+          <p:nvPr/>
+        </p:nvPicPr>
+        <p:blipFill>
+          <a:blip r:embed="rId4" cstate="email">
+            <a:alphaModFix/>
+            <a:extLst>
+              <a:ext uri="{28A0092B-C50C-407E-A947-70E740481C1C}">
+                <a14:useLocalDpi xmlns:a14="http://schemas.microsoft.com/office/drawing/2010/main"/>
+              </a:ext>
+            </a:extLst>
+          </a:blip>
+          <a:stretch>
+            <a:fillRect/>
+          </a:stretch>
+        </p:blipFill>
+        <p:spPr>
+          <a:xfrm>
+            <a:off x="4864100" y="385844"/>
+            <a:ext cx="3792675" cy="1493750"/>
+          </a:xfrm>
+          <a:prstGeom prst="rect">
+            <a:avLst/>
+          </a:prstGeom>
+          <a:noFill/>
+          <a:ln w="9525" cap="flat" cmpd="sng">
+            <a:solidFill>
+              <a:srgbClr val="FF0000"/>
+            </a:solidFill>
+            <a:prstDash val="solid"/>
+            <a:round/>
+            <a:headEnd type="none" w="sm" len="sm"/>
+            <a:tailEnd type="none" w="sm" len="sm"/>
+          </a:ln>
+        </p:spPr>
+      </p:pic>
+      <p:sp>
+        <p:nvSpPr>
+          <p:cNvPr id="2" name="Google Shape;149;p19">
+            <a:extLst>
+              <a:ext uri="{FF2B5EF4-FFF2-40B4-BE49-F238E27FC236}">
+                <a16:creationId xmlns:a16="http://schemas.microsoft.com/office/drawing/2014/main" id="{F565423F-B9ED-7DC2-A250-FE65CF8E9969}"/>
+              </a:ext>
+            </a:extLst>
+          </p:cNvPr>
+          <p:cNvSpPr txBox="1"/>
+          <p:nvPr/>
+        </p:nvSpPr>
+        <p:spPr>
+          <a:xfrm>
+            <a:off x="67395" y="2038350"/>
+            <a:ext cx="4112700" cy="1423436"/>
+          </a:xfrm>
+          <a:prstGeom prst="rect">
+            <a:avLst/>
+          </a:prstGeom>
+          <a:solidFill>
+            <a:srgbClr val="FFF2CC"/>
+          </a:solidFill>
+          <a:ln w="7150" cap="flat" cmpd="sng">
+            <a:solidFill>
+              <a:srgbClr val="FF0000"/>
+            </a:solidFill>
+            <a:prstDash val="solid"/>
+            <a:round/>
+            <a:headEnd type="none" w="sm" len="sm"/>
+            <a:tailEnd type="none" w="sm" len="sm"/>
+          </a:ln>
+        </p:spPr>
+        <p:txBody>
+          <a:bodyPr spcFirstLastPara="1" wrap="square" lIns="68575" tIns="34275" rIns="68575" bIns="34275" anchor="t" anchorCtr="0">
+            <a:spAutoFit/>
+          </a:bodyPr>
+          <a:lstStyle/>
+          <a:p>
+            <a:pPr marL="94060" marR="0" lvl="0" indent="-103585" algn="l" rtl="0">
+              <a:spcBef>
+                <a:spcPts val="0"/>
+              </a:spcBef>
+              <a:spcAft>
+                <a:spcPts val="0"/>
+              </a:spcAft>
+              <a:buClr>
+                <a:schemeClr val="dk1"/>
+              </a:buClr>
+              <a:buSzPts val="1200"/>
+              <a:buFont typeface="Arial"/>
+              <a:buChar char="•"/>
+            </a:pPr>
+            <a:r>
+              <a:rPr lang="en-US" sz="1100" dirty="0">
+                <a:solidFill>
+                  <a:schemeClr val="dk1"/>
+                </a:solidFill>
+                <a:latin typeface="Calibri"/>
+                <a:ea typeface="Calibri"/>
+                <a:cs typeface="Calibri"/>
+                <a:sym typeface="Calibri"/>
+              </a:rPr>
+              <a:t>Some solar panels can track position of the sun.</a:t>
+            </a:r>
+            <a:br>
+              <a:rPr lang="en-US" sz="1100" dirty="0">
+                <a:solidFill>
+                  <a:schemeClr val="dk1"/>
+                </a:solidFill>
+                <a:latin typeface="Calibri"/>
+                <a:ea typeface="Calibri"/>
+                <a:cs typeface="Calibri"/>
+                <a:sym typeface="Calibri"/>
+              </a:rPr>
+            </a:br>
+            <a:r>
+              <a:rPr lang="en-US" sz="1100" dirty="0">
+                <a:solidFill>
+                  <a:schemeClr val="dk1"/>
+                </a:solidFill>
+                <a:latin typeface="Calibri"/>
+                <a:ea typeface="Calibri"/>
+                <a:cs typeface="Calibri"/>
+                <a:sym typeface="Calibri"/>
+              </a:rPr>
+              <a:t>Compare 3 types of solar panel installations:</a:t>
+            </a:r>
+            <a:br>
+              <a:rPr lang="en-US" sz="1100" dirty="0">
+                <a:solidFill>
+                  <a:schemeClr val="dk1"/>
+                </a:solidFill>
+                <a:latin typeface="Calibri"/>
+                <a:ea typeface="Calibri"/>
+                <a:cs typeface="Calibri"/>
+                <a:sym typeface="Calibri"/>
+              </a:rPr>
+            </a:br>
+            <a:r>
+              <a:rPr lang="en-US" sz="1100" dirty="0">
+                <a:solidFill>
+                  <a:schemeClr val="dk1"/>
+                </a:solidFill>
+                <a:latin typeface="Calibri"/>
+                <a:ea typeface="Calibri"/>
+                <a:cs typeface="Calibri"/>
+                <a:sym typeface="Calibri"/>
+              </a:rPr>
+              <a:t>           static, single-axis trackers, dual-axis trackers</a:t>
+            </a:r>
+            <a:endParaRPr sz="1100" dirty="0">
+              <a:solidFill>
+                <a:schemeClr val="dk1"/>
+              </a:solidFill>
+              <a:latin typeface="Calibri"/>
+              <a:ea typeface="Calibri"/>
+              <a:cs typeface="Calibri"/>
+              <a:sym typeface="Calibri"/>
+            </a:endParaRPr>
+          </a:p>
+          <a:p>
+            <a:pPr marL="94060" marR="0" lvl="0" indent="-103585" algn="l" rtl="0">
+              <a:spcBef>
+                <a:spcPts val="0"/>
+              </a:spcBef>
+              <a:spcAft>
+                <a:spcPts val="0"/>
+              </a:spcAft>
+              <a:buClr>
+                <a:schemeClr val="dk1"/>
+              </a:buClr>
+              <a:buSzPts val="1200"/>
+              <a:buFont typeface="Arial"/>
+              <a:buChar char="•"/>
+            </a:pPr>
+            <a:r>
+              <a:rPr lang="en-US" sz="1100" dirty="0">
+                <a:solidFill>
+                  <a:schemeClr val="dk1"/>
+                </a:solidFill>
+                <a:latin typeface="Calibri"/>
+                <a:ea typeface="Calibri"/>
+                <a:cs typeface="Calibri"/>
+                <a:sym typeface="Calibri"/>
+              </a:rPr>
+              <a:t>Trackers harvest more energy than static (especially in early morning and late afternoon). </a:t>
+            </a:r>
+            <a:endParaRPr sz="1100" dirty="0">
+              <a:solidFill>
+                <a:schemeClr val="dk1"/>
+              </a:solidFill>
+              <a:latin typeface="Calibri"/>
+              <a:ea typeface="Calibri"/>
+              <a:cs typeface="Calibri"/>
+              <a:sym typeface="Calibri"/>
+            </a:endParaRPr>
+          </a:p>
+          <a:p>
+            <a:pPr marL="94060" marR="0" lvl="0" indent="-103585" algn="l" rtl="0">
+              <a:spcBef>
+                <a:spcPts val="0"/>
+              </a:spcBef>
+              <a:spcAft>
+                <a:spcPts val="0"/>
+              </a:spcAft>
+              <a:buClr>
+                <a:schemeClr val="dk1"/>
+              </a:buClr>
+              <a:buSzPts val="1200"/>
+              <a:buFont typeface="Arial"/>
+              <a:buChar char="•"/>
+            </a:pPr>
+            <a:r>
+              <a:rPr lang="en-US" sz="1100" dirty="0">
+                <a:solidFill>
+                  <a:schemeClr val="dk1"/>
+                </a:solidFill>
+                <a:latin typeface="Calibri"/>
+                <a:ea typeface="Calibri"/>
+                <a:cs typeface="Calibri"/>
+                <a:sym typeface="Calibri"/>
+              </a:rPr>
+              <a:t>But if you have ample space, simple static mounts may be cheaper and more reliable</a:t>
+            </a:r>
+            <a:endParaRPr sz="1100" dirty="0">
+              <a:solidFill>
+                <a:schemeClr val="dk1"/>
+              </a:solidFill>
+              <a:latin typeface="Calibri"/>
+              <a:ea typeface="Calibri"/>
+              <a:cs typeface="Calibri"/>
+              <a:sym typeface="Calibri"/>
+            </a:endParaRPr>
+          </a:p>
+          <a:p>
+            <a:pPr marL="94060" marR="0" lvl="0" indent="-103585" algn="l" rtl="0">
+              <a:spcBef>
+                <a:spcPts val="0"/>
+              </a:spcBef>
+              <a:spcAft>
+                <a:spcPts val="0"/>
+              </a:spcAft>
+              <a:buClr>
+                <a:schemeClr val="dk1"/>
+              </a:buClr>
+              <a:buSzPts val="1200"/>
+              <a:buFont typeface="Arial"/>
+              <a:buChar char="•"/>
+            </a:pPr>
+            <a:r>
+              <a:rPr lang="en-US" sz="1100" u="sng" dirty="0">
+                <a:solidFill>
+                  <a:schemeClr val="hlink"/>
+                </a:solidFill>
+                <a:latin typeface="Calibri"/>
+                <a:ea typeface="Calibri"/>
+                <a:cs typeface="Calibri"/>
+                <a:sym typeface="Calibri"/>
+                <a:hlinkClick r:id="rId5"/>
+              </a:rPr>
+              <a:t>https://www.youtube.com/watch?v=r7HwQdssbas</a:t>
+            </a:r>
+            <a:endParaRPr sz="1100" dirty="0">
+              <a:solidFill>
+                <a:schemeClr val="dk1"/>
+              </a:solidFill>
+              <a:latin typeface="Calibri"/>
+              <a:ea typeface="Calibri"/>
+              <a:cs typeface="Calibri"/>
+              <a:sym typeface="Calibri"/>
+            </a:endParaRPr>
+          </a:p>
+        </p:txBody>
+      </p:sp>
+      <p:pic>
+        <p:nvPicPr>
+          <p:cNvPr id="3" name="Google Shape;150;p19">
+            <a:extLst>
+              <a:ext uri="{FF2B5EF4-FFF2-40B4-BE49-F238E27FC236}">
+                <a16:creationId xmlns:a16="http://schemas.microsoft.com/office/drawing/2014/main" id="{246AB1F3-8F60-D924-E7A9-2D96CE926217}"/>
+              </a:ext>
+            </a:extLst>
+          </p:cNvPr>
+          <p:cNvPicPr preferRelativeResize="0"/>
+          <p:nvPr/>
+        </p:nvPicPr>
+        <p:blipFill>
+          <a:blip r:embed="rId6" cstate="email">
+            <a:alphaModFix/>
+            <a:extLst>
+              <a:ext uri="{28A0092B-C50C-407E-A947-70E740481C1C}">
+                <a14:useLocalDpi xmlns:a14="http://schemas.microsoft.com/office/drawing/2010/main"/>
+              </a:ext>
+            </a:extLst>
+          </a:blip>
+          <a:stretch>
+            <a:fillRect/>
+          </a:stretch>
+        </p:blipFill>
+        <p:spPr>
+          <a:xfrm>
+            <a:off x="4539225" y="2287438"/>
+            <a:ext cx="2158875" cy="925260"/>
+          </a:xfrm>
+          <a:prstGeom prst="rect">
+            <a:avLst/>
+          </a:prstGeom>
+          <a:noFill/>
+          <a:ln>
+            <a:solidFill>
+              <a:srgbClr val="FF0000"/>
+            </a:solidFill>
+          </a:ln>
+        </p:spPr>
+      </p:pic>
+      <p:sp>
+        <p:nvSpPr>
+          <p:cNvPr id="4" name="Google Shape;149;p19">
+            <a:extLst>
+              <a:ext uri="{FF2B5EF4-FFF2-40B4-BE49-F238E27FC236}">
+                <a16:creationId xmlns:a16="http://schemas.microsoft.com/office/drawing/2014/main" id="{884EC012-69F9-14EB-0967-EE9CA52ACF6C}"/>
+              </a:ext>
+            </a:extLst>
+          </p:cNvPr>
+          <p:cNvSpPr txBox="1"/>
+          <p:nvPr/>
+        </p:nvSpPr>
+        <p:spPr>
+          <a:xfrm>
+            <a:off x="67395" y="3537541"/>
+            <a:ext cx="4112700" cy="746328"/>
+          </a:xfrm>
+          <a:prstGeom prst="rect">
+            <a:avLst/>
+          </a:prstGeom>
+          <a:solidFill>
+            <a:srgbClr val="FFF2CC"/>
+          </a:solidFill>
+          <a:ln w="7150" cap="flat" cmpd="sng">
+            <a:solidFill>
+              <a:srgbClr val="FF0000"/>
+            </a:solidFill>
+            <a:prstDash val="solid"/>
+            <a:round/>
+            <a:headEnd type="none" w="sm" len="sm"/>
+            <a:tailEnd type="none" w="sm" len="sm"/>
+          </a:ln>
+        </p:spPr>
+        <p:txBody>
+          <a:bodyPr spcFirstLastPara="1" wrap="square" lIns="68575" tIns="34275" rIns="68575" bIns="34275" anchor="t" anchorCtr="0">
+            <a:spAutoFit/>
+          </a:bodyPr>
+          <a:lstStyle/>
+          <a:p>
+            <a:pPr marL="94060" lvl="0" indent="-103585">
+              <a:buClr>
+                <a:schemeClr val="dk1"/>
+              </a:buClr>
+              <a:buSzPts val="1200"/>
+              <a:buFont typeface="Arial"/>
+              <a:buChar char="•"/>
+            </a:pPr>
+            <a:r>
+              <a:rPr lang="en-US" sz="1100" dirty="0"/>
+              <a:t>Vertical vs. South-Facing Panels, </a:t>
+            </a:r>
+          </a:p>
+          <a:p>
+            <a:pPr marL="94060" lvl="0" indent="-103585">
+              <a:buClr>
+                <a:schemeClr val="dk1"/>
+              </a:buClr>
+              <a:buSzPts val="1200"/>
+              <a:buFont typeface="Arial"/>
+              <a:buChar char="•"/>
+            </a:pPr>
+            <a:r>
+              <a:rPr lang="en-US" sz="1100" dirty="0"/>
+              <a:t>Adding reflectors </a:t>
+            </a:r>
+          </a:p>
+          <a:p>
+            <a:pPr marL="94060" lvl="0" indent="-103585">
+              <a:buClr>
+                <a:schemeClr val="dk1"/>
+              </a:buClr>
+              <a:buSzPts val="1200"/>
+              <a:buFont typeface="Arial"/>
+              <a:buChar char="•"/>
+            </a:pPr>
+            <a:r>
+              <a:rPr lang="en-US" sz="1100" dirty="0"/>
+              <a:t>Bifacial panels </a:t>
+            </a:r>
+          </a:p>
+          <a:p>
+            <a:pPr marL="94060" lvl="0" indent="-103585">
+              <a:buClr>
+                <a:schemeClr val="dk1"/>
+              </a:buClr>
+              <a:buSzPts val="1200"/>
+              <a:buFont typeface="Arial"/>
+              <a:buChar char="•"/>
+            </a:pPr>
+            <a:r>
+              <a:rPr lang="en-US" sz="1100" dirty="0">
+                <a:hlinkClick r:id="rId7"/>
+              </a:rPr>
+              <a:t>https://www.youtube.com/watch?v=xD1MT-ek05w</a:t>
+            </a:r>
+            <a:endParaRPr sz="1100" dirty="0">
+              <a:solidFill>
+                <a:schemeClr val="dk1"/>
+              </a:solidFill>
+              <a:latin typeface="Calibri"/>
+              <a:ea typeface="Calibri"/>
+              <a:cs typeface="Calibri"/>
+              <a:sym typeface="Calibri"/>
+            </a:endParaRPr>
+          </a:p>
+        </p:txBody>
+      </p:sp>
+      <p:pic>
+        <p:nvPicPr>
+          <p:cNvPr id="5" name="Picture 4">
+            <a:extLst>
+              <a:ext uri="{FF2B5EF4-FFF2-40B4-BE49-F238E27FC236}">
+                <a16:creationId xmlns:a16="http://schemas.microsoft.com/office/drawing/2014/main" id="{906980DD-B2AE-25F0-0096-604B0D323E43}"/>
+              </a:ext>
+            </a:extLst>
+          </p:cNvPr>
+          <p:cNvPicPr>
+            <a:picLocks noChangeAspect="1"/>
+          </p:cNvPicPr>
+          <p:nvPr/>
+        </p:nvPicPr>
+        <p:blipFill>
+          <a:blip r:embed="rId8" cstate="email">
+            <a:extLst>
+              <a:ext uri="{28A0092B-C50C-407E-A947-70E740481C1C}">
+                <a14:useLocalDpi xmlns:a14="http://schemas.microsoft.com/office/drawing/2010/main"/>
+              </a:ext>
+            </a:extLst>
+          </a:blip>
+          <a:stretch>
+            <a:fillRect/>
+          </a:stretch>
+        </p:blipFill>
+        <p:spPr>
+          <a:xfrm>
+            <a:off x="4539225" y="3446281"/>
+            <a:ext cx="2158875" cy="1190916"/>
+          </a:xfrm>
+          <a:prstGeom prst="rect">
+            <a:avLst/>
+          </a:prstGeom>
+          <a:ln>
+            <a:solidFill>
+              <a:srgbClr val="FF0000"/>
+            </a:solidFill>
+          </a:ln>
+        </p:spPr>
+      </p:pic>
+    </p:spTree>
+  </p:cSld>
+  <p:clrMapOvr>
+    <a:masterClrMapping/>
+  </p:clrMapOvr>
+</p:sld>
+</file>
+
+<file path=ppt/slides/slide11.xml><?xml version="1.0" encoding="utf-8"?>
+<p:sld xmlns:a="http://schemas.openxmlformats.org/drawingml/2006/main" xmlns:r="http://schemas.openxmlformats.org/officeDocument/2006/relationships" xmlns:p="http://schemas.openxmlformats.org/presentationml/2006/main">
+  <p:cSld>
+    <p:spTree>
+      <p:nvGrpSpPr>
+        <p:cNvPr id="1" name="Shape 154"/>
+        <p:cNvGrpSpPr/>
+        <p:nvPr/>
+      </p:nvGrpSpPr>
+      <p:grpSpPr>
+        <a:xfrm>
+          <a:off x="0" y="0"/>
+          <a:ext cx="0" cy="0"/>
+          <a:chOff x="0" y="0"/>
+          <a:chExt cx="0" cy="0"/>
+        </a:xfrm>
+      </p:grpSpPr>
+      <p:sp>
+        <p:nvSpPr>
+          <p:cNvPr id="155" name="Google Shape;155;p20"/>
+          <p:cNvSpPr txBox="1"/>
+          <p:nvPr/>
+        </p:nvSpPr>
+        <p:spPr>
+          <a:xfrm>
+            <a:off x="65623" y="39645"/>
+            <a:ext cx="3988200" cy="346200"/>
+          </a:xfrm>
+          <a:prstGeom prst="rect">
+            <a:avLst/>
+          </a:prstGeom>
+          <a:noFill/>
+          <a:ln>
+            <a:noFill/>
+          </a:ln>
+        </p:spPr>
+        <p:txBody>
+          <a:bodyPr spcFirstLastPara="1" wrap="square" lIns="68575" tIns="34275" rIns="68575" bIns="34275" anchor="t" anchorCtr="0">
+            <a:spAutoFit/>
+          </a:bodyPr>
+          <a:lstStyle/>
+          <a:p>
+            <a:pPr marL="0" marR="0" lvl="0" indent="0" algn="l" rtl="0">
+              <a:spcBef>
+                <a:spcPts val="0"/>
+              </a:spcBef>
+              <a:spcAft>
+                <a:spcPts val="0"/>
+              </a:spcAft>
+              <a:buNone/>
+            </a:pPr>
+            <a:r>
               <a:rPr lang="en-US" sz="1800" b="1" i="0" u="none" strike="noStrike" cap="none" dirty="0">
                 <a:solidFill>
                   <a:schemeClr val="dk1"/>
@@ -20087,7 +20987,7 @@
         <p:spPr>
           <a:xfrm>
             <a:off x="65623" y="39645"/>
-            <a:ext cx="3988200" cy="346200"/>
+            <a:ext cx="3988200" cy="346218"/>
           </a:xfrm>
           <a:prstGeom prst="rect">
             <a:avLst/>
@@ -20103,30 +21003,22 @@
           </a:bodyPr>
           <a:lstStyle/>
           <a:p>
-            <a:pPr marL="0" marR="0" lvl="0" indent="0" algn="l" rtl="0">
-              <a:spcBef>
-                <a:spcPts val="0"/>
-              </a:spcBef>
-              <a:spcAft>
-                <a:spcPts val="0"/>
-              </a:spcAft>
-              <a:buNone/>
-            </a:pPr>
-            <a:r>
-              <a:rPr lang="en-US" sz="1800" b="1" i="0" u="none" strike="noStrike" cap="none">
-                <a:solidFill>
-                  <a:schemeClr val="dk1"/>
+            <a:pPr lvl="0"/>
+            <a:r>
+              <a:rPr lang="en-US" sz="1800" b="1" dirty="0">
+                <a:solidFill>
+                  <a:schemeClr val="tx1"/>
                 </a:solidFill>
                 <a:latin typeface="Calibri"/>
                 <a:ea typeface="Calibri"/>
                 <a:cs typeface="Calibri"/>
                 <a:sym typeface="Calibri"/>
               </a:rPr>
-              <a:t>Solar</a:t>
-            </a:r>
-            <a:endParaRPr sz="1800" b="1" i="0">
+              <a:t>Solar Panels Orientation matters</a:t>
+            </a:r>
+            <a:endParaRPr sz="1800" b="1" i="0" dirty="0">
               <a:solidFill>
-                <a:srgbClr val="333333"/>
+                <a:schemeClr val="tx1"/>
               </a:solidFill>
               <a:latin typeface="Calibri"/>
               <a:ea typeface="Calibri"/>
@@ -20144,8 +21036,8 @@
         </p:nvSpPr>
         <p:spPr>
           <a:xfrm>
-            <a:off x="65625" y="385894"/>
-            <a:ext cx="4473600" cy="1546800"/>
+            <a:off x="71626" y="385863"/>
+            <a:ext cx="5795774" cy="2269822"/>
           </a:xfrm>
           <a:prstGeom prst="rect">
             <a:avLst/>
@@ -20169,13 +21061,7 @@
           </a:bodyPr>
           <a:lstStyle/>
           <a:p>
-            <a:pPr marL="94060" marR="0" lvl="0" indent="-103585" algn="l" rtl="0">
-              <a:spcBef>
-                <a:spcPts val="0"/>
-              </a:spcBef>
-              <a:spcAft>
-                <a:spcPts val="0"/>
-              </a:spcAft>
+            <a:pPr marL="94060" lvl="0" indent="-103585">
               <a:buClr>
                 <a:schemeClr val="dk1"/>
               </a:buClr>
@@ -20184,7 +21070,7 @@
               <a:buChar char="•"/>
             </a:pPr>
             <a:r>
-              <a:rPr lang="en-US" sz="1200" b="1">
+              <a:rPr lang="en-US" sz="1100" b="1" dirty="0">
                 <a:solidFill>
                   <a:srgbClr val="FF0000"/>
                 </a:solidFill>
@@ -20193,10 +21079,10 @@
                 <a:cs typeface="Calibri"/>
                 <a:sym typeface="Calibri"/>
               </a:rPr>
-              <a:t>JerryRigEverything </a:t>
-            </a:r>
-            <a:r>
-              <a:rPr lang="en-US" sz="1200">
+              <a:t>Solar Panels Orientation matters</a:t>
+            </a:r>
+            <a:br>
+              <a:rPr lang="en-US" sz="1100" dirty="0">
                 <a:solidFill>
                   <a:schemeClr val="dk1"/>
                 </a:solidFill>
@@ -20205,9 +21091,73 @@
                 <a:cs typeface="Calibri"/>
                 <a:sym typeface="Calibri"/>
               </a:rPr>
-              <a:t>reflects on his home solar panel system six years after its initial installation. </a:t>
-            </a:r>
-            <a:endParaRPr sz="1200">
+            </a:br>
+            <a:r>
+              <a:rPr lang="en-US" sz="1100" dirty="0">
+                <a:solidFill>
+                  <a:schemeClr val="dk1"/>
+                </a:solidFill>
+                <a:latin typeface="Calibri"/>
+                <a:ea typeface="Calibri"/>
+                <a:cs typeface="Calibri"/>
+                <a:sym typeface="Calibri"/>
+                <a:hlinkClick r:id="rId3"/>
+              </a:rPr>
+              <a:t>https://</a:t>
+            </a:r>
+            <a:r>
+              <a:rPr lang="en-US" sz="1100" dirty="0" err="1">
+                <a:solidFill>
+                  <a:schemeClr val="dk1"/>
+                </a:solidFill>
+                <a:latin typeface="Calibri"/>
+                <a:ea typeface="Calibri"/>
+                <a:cs typeface="Calibri"/>
+                <a:sym typeface="Calibri"/>
+                <a:hlinkClick r:id="rId3"/>
+              </a:rPr>
+              <a:t>www.youtube.com</a:t>
+            </a:r>
+            <a:r>
+              <a:rPr lang="en-US" sz="1100" dirty="0">
+                <a:solidFill>
+                  <a:schemeClr val="dk1"/>
+                </a:solidFill>
+                <a:latin typeface="Calibri"/>
+                <a:ea typeface="Calibri"/>
+                <a:cs typeface="Calibri"/>
+                <a:sym typeface="Calibri"/>
+                <a:hlinkClick r:id="rId3"/>
+              </a:rPr>
+              <a:t>/</a:t>
+            </a:r>
+            <a:r>
+              <a:rPr lang="en-US" sz="1100" dirty="0" err="1">
+                <a:solidFill>
+                  <a:schemeClr val="dk1"/>
+                </a:solidFill>
+                <a:latin typeface="Calibri"/>
+                <a:ea typeface="Calibri"/>
+                <a:cs typeface="Calibri"/>
+                <a:sym typeface="Calibri"/>
+                <a:hlinkClick r:id="rId3"/>
+              </a:rPr>
+              <a:t>watch?v</a:t>
+            </a:r>
+            <a:r>
+              <a:rPr lang="en-US" sz="1100" dirty="0">
+                <a:solidFill>
+                  <a:schemeClr val="dk1"/>
+                </a:solidFill>
+                <a:latin typeface="Calibri"/>
+                <a:ea typeface="Calibri"/>
+                <a:cs typeface="Calibri"/>
+                <a:sym typeface="Calibri"/>
+                <a:hlinkClick r:id="rId3"/>
+              </a:rPr>
+              <a:t>=I-Fz5T5c0OQ</a:t>
+            </a:r>
+            <a:endParaRPr lang="en-US" sz="1100" dirty="0">
               <a:solidFill>
                 <a:schemeClr val="dk1"/>
               </a:solidFill>
@@ -20218,13 +21168,7 @@
             </a:endParaRPr>
           </a:p>
           <a:p>
-            <a:pPr marL="94060" marR="0" lvl="0" indent="-103585" algn="l" rtl="0">
-              <a:spcBef>
-                <a:spcPts val="0"/>
-              </a:spcBef>
-              <a:spcAft>
-                <a:spcPts val="0"/>
-              </a:spcAft>
+            <a:pPr marL="94060" lvl="0" indent="-103585">
               <a:buClr>
                 <a:schemeClr val="dk1"/>
               </a:buClr>
@@ -20233,7 +21177,7 @@
               <a:buChar char="•"/>
             </a:pPr>
             <a:r>
-              <a:rPr lang="en-US" sz="1200">
+              <a:rPr lang="en-US" sz="1100" dirty="0">
                 <a:solidFill>
                   <a:schemeClr val="dk1"/>
                 </a:solidFill>
@@ -20242,26 +21186,11 @@
                 <a:cs typeface="Calibri"/>
                 <a:sym typeface="Calibri"/>
               </a:rPr>
-              <a:t>He discusses the long-term performance and reliability of his setup while highlighting the evolution of residential energy technology. </a:t>
-            </a:r>
-            <a:endParaRPr sz="1200">
-              <a:solidFill>
-                <a:schemeClr val="dk1"/>
-              </a:solidFill>
-              <a:latin typeface="Calibri"/>
-              <a:ea typeface="Calibri"/>
-              <a:cs typeface="Calibri"/>
-              <a:sym typeface="Calibri"/>
-            </a:endParaRPr>
-          </a:p>
-          <a:p>
-            <a:pPr marL="94060" marR="0" lvl="0" indent="-103585" algn="l" rtl="0">
-              <a:spcBef>
-                <a:spcPts val="0"/>
-              </a:spcBef>
-              <a:spcAft>
-                <a:spcPts val="0"/>
-              </a:spcAft>
+              <a:t>Compared Canadian solar bifacial panels in north-south vertical, east-west vertical, and south-facing 30° tilted configurations</a:t>
+            </a:r>
+          </a:p>
+          <a:p>
+            <a:pPr marL="94060" lvl="0" indent="-103585">
               <a:buClr>
                 <a:schemeClr val="dk1"/>
               </a:buClr>
@@ -20270,7 +21199,7 @@
               <a:buChar char="•"/>
             </a:pPr>
             <a:r>
-              <a:rPr lang="en-US" sz="1200">
+              <a:rPr lang="en-US" sz="1100" dirty="0">
                 <a:solidFill>
                   <a:schemeClr val="dk1"/>
                 </a:solidFill>
@@ -20279,26 +21208,11 @@
                 <a:cs typeface="Calibri"/>
                 <a:sym typeface="Calibri"/>
               </a:rPr>
-              <a:t>The video serves as a transition to promote the EcoFlow DELTA Pro Ultra X, a modern whole-home backup system</a:t>
-            </a:r>
-            <a:endParaRPr sz="1200">
-              <a:solidFill>
-                <a:schemeClr val="dk1"/>
-              </a:solidFill>
-              <a:latin typeface="Calibri"/>
-              <a:ea typeface="Calibri"/>
-              <a:cs typeface="Calibri"/>
-              <a:sym typeface="Calibri"/>
-            </a:endParaRPr>
-          </a:p>
-          <a:p>
-            <a:pPr marL="94060" marR="0" lvl="0" indent="-103585" algn="l" rtl="0">
-              <a:spcBef>
-                <a:spcPts val="0"/>
-              </a:spcBef>
-              <a:spcAft>
-                <a:spcPts val="0"/>
-              </a:spcAft>
+              <a:t>The 30° south-facing bifacial setup is the highest overall producer annually</a:t>
+            </a:r>
+          </a:p>
+          <a:p>
+            <a:pPr marL="94060" lvl="0" indent="-103585">
               <a:buClr>
                 <a:schemeClr val="dk1"/>
               </a:buClr>
@@ -20307,7 +21221,7 @@
               <a:buChar char="•"/>
             </a:pPr>
             <a:r>
-              <a:rPr lang="en-US" sz="1200">
+              <a:rPr lang="en-US" sz="1100" dirty="0">
                 <a:solidFill>
                   <a:schemeClr val="dk1"/>
                 </a:solidFill>
@@ -20316,26 +21230,11 @@
                 <a:cs typeface="Calibri"/>
                 <a:sym typeface="Calibri"/>
               </a:rPr>
-              <a:t>Ease of installation and power capacity</a:t>
-            </a:r>
-            <a:endParaRPr sz="1200">
-              <a:solidFill>
-                <a:schemeClr val="dk1"/>
-              </a:solidFill>
-              <a:latin typeface="Calibri"/>
-              <a:ea typeface="Calibri"/>
-              <a:cs typeface="Calibri"/>
-              <a:sym typeface="Calibri"/>
-            </a:endParaRPr>
-          </a:p>
-          <a:p>
-            <a:pPr marL="94060" marR="0" lvl="0" indent="-103585" algn="l" rtl="0">
-              <a:spcBef>
-                <a:spcPts val="0"/>
-              </a:spcBef>
-              <a:spcAft>
-                <a:spcPts val="0"/>
-              </a:spcAft>
+              <a:t>The north-south vertical panels offer a distinct advantage by providing highly consistent, year-round energy production</a:t>
+            </a:r>
+          </a:p>
+          <a:p>
+            <a:pPr marL="94060" lvl="0" indent="-103585">
               <a:buClr>
                 <a:schemeClr val="dk1"/>
               </a:buClr>
@@ -20344,20 +21243,29 @@
               <a:buChar char="•"/>
             </a:pPr>
             <a:r>
-              <a:rPr lang="en-US" sz="1200" u="sng">
-                <a:solidFill>
-                  <a:schemeClr val="hlink"/>
+              <a:rPr lang="en-US" sz="1100" dirty="0">
+                <a:solidFill>
+                  <a:schemeClr val="dk1"/>
                 </a:solidFill>
                 <a:latin typeface="Calibri"/>
                 <a:ea typeface="Calibri"/>
                 <a:cs typeface="Calibri"/>
                 <a:sym typeface="Calibri"/>
-                <a:hlinkClick r:id="rId3"/>
-              </a:rPr>
-              <a:t>https://www.youtube.com/watch?v=w3QlyvY600Q</a:t>
-            </a:r>
-            <a:r>
-              <a:rPr lang="en-US" sz="1200">
+              </a:rPr>
+              <a:t>This makes them particularly effective for users in northern climates looking to avoid heavy winter snow accumulation </a:t>
+            </a:r>
+          </a:p>
+          <a:p>
+            <a:pPr marL="94060" lvl="0" indent="-103585">
+              <a:buClr>
+                <a:schemeClr val="dk1"/>
+              </a:buClr>
+              <a:buSzPts val="1200"/>
+              <a:buFont typeface="Arial"/>
+              <a:buChar char="•"/>
+            </a:pPr>
+            <a:r>
+              <a:rPr lang="en-US" sz="1100" dirty="0">
                 <a:solidFill>
                   <a:schemeClr val="dk1"/>
                 </a:solidFill>
@@ -20366,29 +21274,49 @@
                 <a:cs typeface="Calibri"/>
                 <a:sym typeface="Calibri"/>
               </a:rPr>
-              <a:t> </a:t>
-            </a:r>
-            <a:endParaRPr sz="1200">
-              <a:solidFill>
-                <a:schemeClr val="dk1"/>
-              </a:solidFill>
-              <a:latin typeface="Calibri"/>
-              <a:ea typeface="Calibri"/>
-              <a:cs typeface="Calibri"/>
-              <a:sym typeface="Calibri"/>
-            </a:endParaRPr>
+              <a:t>Conversely, for summer-heavy energy needs like air conditioning, east-west configurations may be more beneficial</a:t>
+            </a:r>
+          </a:p>
+          <a:p>
+            <a:pPr marL="94060" lvl="0" indent="-103585">
+              <a:buClr>
+                <a:schemeClr val="dk1"/>
+              </a:buClr>
+              <a:buSzPts val="1200"/>
+              <a:buFont typeface="Arial"/>
+              <a:buChar char="•"/>
+            </a:pPr>
+            <a:r>
+              <a:rPr lang="en-US" sz="1100" dirty="0">
+                <a:solidFill>
+                  <a:schemeClr val="dk1"/>
+                </a:solidFill>
+                <a:latin typeface="Calibri"/>
+                <a:ea typeface="Calibri"/>
+                <a:cs typeface="Calibri"/>
+                <a:sym typeface="Calibri"/>
+              </a:rPr>
+              <a:t>The analysis highlights that optimal installation strategy ultimately depends on specific regional sunlight patterns, weather conditions, and seasonal energy requirements</a:t>
+            </a:r>
           </a:p>
         </p:txBody>
       </p:sp>
       <p:pic>
         <p:nvPicPr>
-          <p:cNvPr id="157" name="Google Shape;157;p20"/>
-          <p:cNvPicPr preferRelativeResize="0"/>
+          <p:cNvPr id="6" name="Picture 5">
+            <a:extLst>
+              <a:ext uri="{FF2B5EF4-FFF2-40B4-BE49-F238E27FC236}">
+                <a16:creationId xmlns:a16="http://schemas.microsoft.com/office/drawing/2014/main" id="{78364363-2172-6A43-F27F-A057075E6534}"/>
+              </a:ext>
+            </a:extLst>
+          </p:cNvPr>
+          <p:cNvPicPr>
+            <a:picLocks noChangeAspect="1"/>
+          </p:cNvPicPr>
           <p:nvPr/>
         </p:nvPicPr>
         <p:blipFill>
           <a:blip r:embed="rId4" cstate="email">
-            <a:alphaModFix/>
             <a:extLst>
               <a:ext uri="{28A0092B-C50C-407E-A947-70E740481C1C}">
                 <a14:useLocalDpi xmlns:a14="http://schemas.microsoft.com/office/drawing/2010/main"/>
@@ -20401,30 +21329,25 @@
         </p:blipFill>
         <p:spPr>
           <a:xfrm>
-            <a:off x="4864100" y="385844"/>
-            <a:ext cx="3792675" cy="1493750"/>
+            <a:off x="5943600" y="385864"/>
+            <a:ext cx="3116416" cy="1457678"/>
           </a:xfrm>
           <a:prstGeom prst="rect">
             <a:avLst/>
           </a:prstGeom>
-          <a:noFill/>
-          <a:ln w="9525" cap="flat" cmpd="sng">
+          <a:ln>
             <a:solidFill>
               <a:srgbClr val="FF0000"/>
             </a:solidFill>
-            <a:prstDash val="solid"/>
-            <a:round/>
-            <a:headEnd type="none" w="sm" len="sm"/>
-            <a:tailEnd type="none" w="sm" len="sm"/>
           </a:ln>
         </p:spPr>
       </p:pic>
       <p:sp>
         <p:nvSpPr>
-          <p:cNvPr id="2" name="Google Shape;149;p19">
+          <p:cNvPr id="2" name="Google Shape;156;p20">
             <a:extLst>
               <a:ext uri="{FF2B5EF4-FFF2-40B4-BE49-F238E27FC236}">
-                <a16:creationId xmlns:a16="http://schemas.microsoft.com/office/drawing/2014/main" id="{F565423F-B9ED-7DC2-A250-FE65CF8E9969}"/>
+                <a16:creationId xmlns:a16="http://schemas.microsoft.com/office/drawing/2014/main" id="{641242F4-6615-FB46-4E53-5B8D6B276178}"/>
               </a:ext>
             </a:extLst>
           </p:cNvPr>
@@ -20433,8 +21356,8 @@
         </p:nvSpPr>
         <p:spPr>
           <a:xfrm>
-            <a:off x="67395" y="2038350"/>
-            <a:ext cx="4112700" cy="1423436"/>
+            <a:off x="78323" y="2862090"/>
+            <a:ext cx="5789077" cy="2100545"/>
           </a:xfrm>
           <a:prstGeom prst="rect">
             <a:avLst/>
@@ -20458,13 +21381,7 @@
           </a:bodyPr>
           <a:lstStyle/>
           <a:p>
-            <a:pPr marL="94060" marR="0" lvl="0" indent="-103585" algn="l" rtl="0">
-              <a:spcBef>
-                <a:spcPts val="0"/>
-              </a:spcBef>
-              <a:spcAft>
-                <a:spcPts val="0"/>
-              </a:spcAft>
+            <a:pPr marL="94060" lvl="0" indent="-103585">
               <a:buClr>
                 <a:schemeClr val="dk1"/>
               </a:buClr>
@@ -20473,6 +21390,28 @@
               <a:buChar char="•"/>
             </a:pPr>
             <a:r>
+              <a:rPr lang="en-US" sz="1100" b="1" dirty="0">
+                <a:solidFill>
+                  <a:srgbClr val="FF0000"/>
+                </a:solidFill>
+                <a:latin typeface="Calibri"/>
+                <a:ea typeface="Calibri"/>
+                <a:cs typeface="Calibri"/>
+                <a:sym typeface="Calibri"/>
+              </a:rPr>
+              <a:t>Vertical solar panel can outperform traditional horizontal arrays</a:t>
+            </a:r>
+          </a:p>
+          <a:p>
+            <a:pPr marL="94060" lvl="0" indent="-103585">
+              <a:buClr>
+                <a:schemeClr val="dk1"/>
+              </a:buClr>
+              <a:buSzPts val="1200"/>
+              <a:buFont typeface="Arial"/>
+              <a:buChar char="•"/>
+            </a:pPr>
+            <a:r>
               <a:rPr lang="en-US" sz="1100" dirty="0">
                 <a:solidFill>
                   <a:schemeClr val="dk1"/>
@@ -20482,7 +21421,7 @@
                 <a:cs typeface="Calibri"/>
                 <a:sym typeface="Calibri"/>
               </a:rPr>
-              <a:t>Some solar panels can track position of the sun.</a:t>
+              <a:t>The core advantage lies in temperature management: </a:t>
             </a:r>
             <a:br>
               <a:rPr lang="en-US" sz="1100" dirty="0">
@@ -20505,9 +21444,19 @@
                 <a:cs typeface="Calibri"/>
                 <a:sym typeface="Calibri"/>
               </a:rPr>
-              <a:t>Compare 3 types of solar panel installations:</a:t>
-            </a:r>
-            <a:br>
+              <a:t>vertical panels exhibit heat transfer coefficients nearly double those of horizontal counterparts</a:t>
+            </a:r>
+          </a:p>
+          <a:p>
+            <a:pPr marL="94060" lvl="0" indent="-103585">
+              <a:buClr>
+                <a:schemeClr val="dk1"/>
+              </a:buClr>
+              <a:buSzPts val="1200"/>
+              <a:buFont typeface="Arial"/>
+              <a:buChar char="•"/>
+            </a:pPr>
+            <a:r>
               <a:rPr lang="en-US" sz="1100" dirty="0">
                 <a:solidFill>
                   <a:schemeClr val="dk1"/>
@@ -20517,7 +21466,18 @@
                 <a:cs typeface="Calibri"/>
                 <a:sym typeface="Calibri"/>
               </a:rPr>
-            </a:br>
+              <a:t>They maintain significantly lower operating temperatures, so vertical systems avoid the voltage drops typically caused by heat-induced efficiency losses in high-irradiance conditions</a:t>
+            </a:r>
+          </a:p>
+          <a:p>
+            <a:pPr marL="94060" lvl="0" indent="-103585">
+              <a:buClr>
+                <a:schemeClr val="dk1"/>
+              </a:buClr>
+              <a:buSzPts val="1200"/>
+              <a:buFont typeface="Arial"/>
+              <a:buChar char="•"/>
+            </a:pPr>
             <a:r>
               <a:rPr lang="en-US" sz="1100" dirty="0">
                 <a:solidFill>
@@ -20528,9 +21488,76 @@
                 <a:cs typeface="Calibri"/>
                 <a:sym typeface="Calibri"/>
               </a:rPr>
-              <a:t>           static, single-axis trackers, dual-axis trackers</a:t>
-            </a:r>
-            <a:endParaRPr sz="1100" dirty="0">
+              <a:t>By reducing the temperature difference between the panels and the ambient environment, these vertical systems achieve more balanced voltage performance</a:t>
+            </a:r>
+          </a:p>
+          <a:p>
+            <a:pPr marL="94060" lvl="0" indent="-103585">
+              <a:buClr>
+                <a:schemeClr val="dk1"/>
+              </a:buClr>
+              <a:buSzPts val="1200"/>
+              <a:buFont typeface="Arial"/>
+              <a:buChar char="•"/>
+            </a:pPr>
+            <a:r>
+              <a:rPr lang="en-US" sz="1100" dirty="0">
+                <a:solidFill>
+                  <a:schemeClr val="dk1"/>
+                </a:solidFill>
+                <a:latin typeface="Calibri"/>
+                <a:ea typeface="Calibri"/>
+                <a:cs typeface="Calibri"/>
+                <a:sym typeface="Calibri"/>
+              </a:rPr>
+              <a:t>Consequently, researchers observed a 2.5% increase in annual energy yield</a:t>
+            </a:r>
+          </a:p>
+          <a:p>
+            <a:pPr marL="94060" lvl="0" indent="-103585">
+              <a:buClr>
+                <a:schemeClr val="dk1"/>
+              </a:buClr>
+              <a:buSzPts val="1200"/>
+              <a:buFont typeface="Arial"/>
+              <a:buChar char="•"/>
+            </a:pPr>
+            <a:r>
+              <a:rPr lang="en-US" sz="1100" dirty="0">
+                <a:solidFill>
+                  <a:schemeClr val="dk1"/>
+                </a:solidFill>
+                <a:latin typeface="Calibri"/>
+                <a:ea typeface="Calibri"/>
+                <a:cs typeface="Calibri"/>
+                <a:sym typeface="Calibri"/>
+              </a:rPr>
+              <a:t>This suggests that vertical configurations, such as solar fences, could be an unexpectedly effective and efficient solution for future solar energy generation</a:t>
+            </a:r>
+          </a:p>
+          <a:p>
+            <a:pPr marL="94060" lvl="0" indent="-103585">
+              <a:buClr>
+                <a:schemeClr val="dk1"/>
+              </a:buClr>
+              <a:buSzPts val="1200"/>
+              <a:buFont typeface="Arial"/>
+              <a:buChar char="•"/>
+            </a:pPr>
+            <a:r>
+              <a:rPr lang="en-US" sz="1100" dirty="0">
+                <a:solidFill>
+                  <a:schemeClr val="dk1"/>
+                </a:solidFill>
+                <a:latin typeface="Calibri"/>
+                <a:ea typeface="Calibri"/>
+                <a:cs typeface="Calibri"/>
+                <a:sym typeface="Calibri"/>
+                <a:hlinkClick r:id="rId5"/>
+              </a:rPr>
+              <a:t>https://www.youtube.com/watch?v=g7pfBidv7ug</a:t>
+            </a:r>
+            <a:endParaRPr lang="en-US" sz="1100" dirty="0">
               <a:solidFill>
                 <a:schemeClr val="dk1"/>
               </a:solidFill>
@@ -20541,13 +21568,7 @@
             </a:endParaRPr>
           </a:p>
           <a:p>
-            <a:pPr marL="94060" marR="0" lvl="0" indent="-103585" algn="l" rtl="0">
-              <a:spcBef>
-                <a:spcPts val="0"/>
-              </a:spcBef>
-              <a:spcAft>
-                <a:spcPts val="0"/>
-              </a:spcAft>
+            <a:pPr marL="94060" lvl="0" indent="-103585">
               <a:buClr>
                 <a:schemeClr val="dk1"/>
               </a:buClr>
@@ -20564,34 +21585,23 @@
                 <a:ea typeface="Calibri"/>
                 <a:cs typeface="Calibri"/>
                 <a:sym typeface="Calibri"/>
-              </a:rPr>
-              <a:t>Trackers harvest more energy than static (especially in early morning and late afternoon). </a:t>
-            </a:r>
-            <a:endParaRPr sz="1100" dirty="0">
-              <a:solidFill>
-                <a:schemeClr val="dk1"/>
-              </a:solidFill>
-              <a:latin typeface="Calibri"/>
-              <a:ea typeface="Calibri"/>
-              <a:cs typeface="Calibri"/>
-              <a:sym typeface="Calibri"/>
-            </a:endParaRPr>
-          </a:p>
-          <a:p>
-            <a:pPr marL="94060" marR="0" lvl="0" indent="-103585" algn="l" rtl="0">
-              <a:spcBef>
-                <a:spcPts val="0"/>
-              </a:spcBef>
-              <a:spcAft>
-                <a:spcPts val="0"/>
-              </a:spcAft>
-              <a:buClr>
-                <a:schemeClr val="dk1"/>
-              </a:buClr>
-              <a:buSzPts val="1200"/>
-              <a:buFont typeface="Arial"/>
-              <a:buChar char="•"/>
-            </a:pPr>
+                <a:hlinkClick r:id="rId6"/>
+              </a:rPr>
+              <a:t>https://</a:t>
+            </a:r>
+            <a:r>
+              <a:rPr lang="en-US" sz="1100" dirty="0" err="1">
+                <a:solidFill>
+                  <a:schemeClr val="dk1"/>
+                </a:solidFill>
+                <a:latin typeface="Calibri"/>
+                <a:ea typeface="Calibri"/>
+                <a:cs typeface="Calibri"/>
+                <a:sym typeface="Calibri"/>
+                <a:hlinkClick r:id="rId6"/>
+              </a:rPr>
+              <a:t>www.youtube.com</a:t>
+            </a:r>
             <a:r>
               <a:rPr lang="en-US" sz="1100" dirty="0">
                 <a:solidFill>
@@ -20601,74 +21611,93 @@
                 <a:ea typeface="Calibri"/>
                 <a:cs typeface="Calibri"/>
                 <a:sym typeface="Calibri"/>
-              </a:rPr>
-              <a:t>But if you have ample space, simple static mounts may be cheaper and more reliable</a:t>
-            </a:r>
-            <a:endParaRPr sz="1100" dirty="0">
-              <a:solidFill>
-                <a:schemeClr val="dk1"/>
-              </a:solidFill>
-              <a:latin typeface="Calibri"/>
-              <a:ea typeface="Calibri"/>
-              <a:cs typeface="Calibri"/>
-              <a:sym typeface="Calibri"/>
-            </a:endParaRPr>
-          </a:p>
-          <a:p>
-            <a:pPr marL="94060" marR="0" lvl="0" indent="-103585" algn="l" rtl="0">
-              <a:spcBef>
-                <a:spcPts val="0"/>
-              </a:spcBef>
-              <a:spcAft>
-                <a:spcPts val="0"/>
-              </a:spcAft>
-              <a:buClr>
-                <a:schemeClr val="dk1"/>
-              </a:buClr>
-              <a:buSzPts val="1200"/>
-              <a:buFont typeface="Arial"/>
-              <a:buChar char="•"/>
-            </a:pPr>
-            <a:r>
-              <a:rPr lang="en-US" sz="1100" u="sng" dirty="0">
-                <a:solidFill>
-                  <a:schemeClr val="hlink"/>
+                <a:hlinkClick r:id="rId6"/>
+              </a:rPr>
+              <a:t>/</a:t>
+            </a:r>
+            <a:r>
+              <a:rPr lang="en-US" sz="1100" dirty="0" err="1">
+                <a:solidFill>
+                  <a:schemeClr val="dk1"/>
                 </a:solidFill>
                 <a:latin typeface="Calibri"/>
                 <a:ea typeface="Calibri"/>
                 <a:cs typeface="Calibri"/>
                 <a:sym typeface="Calibri"/>
-                <a:hlinkClick r:id="rId5"/>
-              </a:rPr>
-              <a:t>https://www.youtube.com/watch?v=r7HwQdssbas</a:t>
-            </a:r>
-            <a:endParaRPr sz="1100" dirty="0">
-              <a:solidFill>
-                <a:schemeClr val="dk1"/>
-              </a:solidFill>
-              <a:latin typeface="Calibri"/>
-              <a:ea typeface="Calibri"/>
-              <a:cs typeface="Calibri"/>
-              <a:sym typeface="Calibri"/>
-            </a:endParaRPr>
+                <a:hlinkClick r:id="rId6"/>
+              </a:rPr>
+              <a:t>watch?v</a:t>
+            </a:r>
+            <a:r>
+              <a:rPr lang="en-US" sz="1100" dirty="0">
+                <a:solidFill>
+                  <a:schemeClr val="dk1"/>
+                </a:solidFill>
+                <a:latin typeface="Calibri"/>
+                <a:ea typeface="Calibri"/>
+                <a:cs typeface="Calibri"/>
+                <a:sym typeface="Calibri"/>
+                <a:hlinkClick r:id="rId6"/>
+              </a:rPr>
+              <a:t>=</a:t>
+            </a:r>
+            <a:r>
+              <a:rPr lang="en-US" sz="1100" dirty="0" err="1">
+                <a:solidFill>
+                  <a:schemeClr val="dk1"/>
+                </a:solidFill>
+                <a:latin typeface="Calibri"/>
+                <a:ea typeface="Calibri"/>
+                <a:cs typeface="Calibri"/>
+                <a:sym typeface="Calibri"/>
+                <a:hlinkClick r:id="rId6"/>
+              </a:rPr>
+              <a:t>sAwFOIXBAnE</a:t>
+            </a:r>
+            <a:r>
+              <a:rPr lang="en-US" sz="1100" dirty="0">
+                <a:solidFill>
+                  <a:schemeClr val="dk1"/>
+                </a:solidFill>
+                <a:latin typeface="Calibri"/>
+                <a:ea typeface="Calibri"/>
+                <a:cs typeface="Calibri"/>
+                <a:sym typeface="Calibri"/>
+                <a:hlinkClick r:id="rId6"/>
+              </a:rPr>
+              <a:t> </a:t>
+            </a:r>
+            <a:r>
+              <a:rPr lang="en-US" sz="1100" dirty="0">
+                <a:solidFill>
+                  <a:schemeClr val="dk1"/>
+                </a:solidFill>
+                <a:latin typeface="Calibri"/>
+                <a:ea typeface="Calibri"/>
+                <a:cs typeface="Calibri"/>
+                <a:sym typeface="Calibri"/>
+              </a:rPr>
+              <a:t>– turn any fence into solar</a:t>
+            </a:r>
           </a:p>
         </p:txBody>
       </p:sp>
       <p:pic>
         <p:nvPicPr>
-          <p:cNvPr id="3" name="Google Shape;150;p19">
+          <p:cNvPr id="3" name="Picture 2">
             <a:extLst>
               <a:ext uri="{FF2B5EF4-FFF2-40B4-BE49-F238E27FC236}">
-                <a16:creationId xmlns:a16="http://schemas.microsoft.com/office/drawing/2014/main" id="{246AB1F3-8F60-D924-E7A9-2D96CE926217}"/>
+                <a16:creationId xmlns:a16="http://schemas.microsoft.com/office/drawing/2014/main" id="{D3C1D3B7-00CE-9AD3-CB00-5FE21C4C709F}"/>
               </a:ext>
             </a:extLst>
           </p:cNvPr>
-          <p:cNvPicPr preferRelativeResize="0"/>
+          <p:cNvPicPr>
+            <a:picLocks noChangeAspect="1"/>
+          </p:cNvPicPr>
           <p:nvPr/>
         </p:nvPicPr>
         <p:blipFill>
-          <a:blip r:embed="rId6" cstate="email">
-            <a:alphaModFix/>
+          <a:blip r:embed="rId7" cstate="email">
             <a:extLst>
               <a:ext uri="{28A0092B-C50C-407E-A947-70E740481C1C}">
                 <a14:useLocalDpi xmlns:a14="http://schemas.microsoft.com/office/drawing/2010/main"/>
@@ -20681,157 +21710,8 @@
         </p:blipFill>
         <p:spPr>
           <a:xfrm>
-            <a:off x="4539225" y="2287438"/>
-            <a:ext cx="2158875" cy="925260"/>
-          </a:xfrm>
-          <a:prstGeom prst="rect">
-            <a:avLst/>
-          </a:prstGeom>
-          <a:noFill/>
-          <a:ln>
-            <a:solidFill>
-              <a:srgbClr val="FF0000"/>
-            </a:solidFill>
-          </a:ln>
-        </p:spPr>
-      </p:pic>
-      <p:sp>
-        <p:nvSpPr>
-          <p:cNvPr id="4" name="Google Shape;149;p19">
-            <a:extLst>
-              <a:ext uri="{FF2B5EF4-FFF2-40B4-BE49-F238E27FC236}">
-                <a16:creationId xmlns:a16="http://schemas.microsoft.com/office/drawing/2014/main" id="{884EC012-69F9-14EB-0967-EE9CA52ACF6C}"/>
-              </a:ext>
-            </a:extLst>
-          </p:cNvPr>
-          <p:cNvSpPr txBox="1"/>
-          <p:nvPr/>
-        </p:nvSpPr>
-        <p:spPr>
-          <a:xfrm>
-            <a:off x="67395" y="3537541"/>
-            <a:ext cx="4112700" cy="746328"/>
-          </a:xfrm>
-          <a:prstGeom prst="rect">
-            <a:avLst/>
-          </a:prstGeom>
-          <a:solidFill>
-            <a:srgbClr val="FFF2CC"/>
-          </a:solidFill>
-          <a:ln w="7150" cap="flat" cmpd="sng">
-            <a:solidFill>
-              <a:srgbClr val="FF0000"/>
-            </a:solidFill>
-            <a:prstDash val="solid"/>
-            <a:round/>
-            <a:headEnd type="none" w="sm" len="sm"/>
-            <a:tailEnd type="none" w="sm" len="sm"/>
-          </a:ln>
-        </p:spPr>
-        <p:txBody>
-          <a:bodyPr spcFirstLastPara="1" wrap="square" lIns="68575" tIns="34275" rIns="68575" bIns="34275" anchor="t" anchorCtr="0">
-            <a:spAutoFit/>
-          </a:bodyPr>
-          <a:lstStyle/>
-          <a:p>
-            <a:pPr marL="94060" lvl="0" indent="-103585">
-              <a:buClr>
-                <a:schemeClr val="dk1"/>
-              </a:buClr>
-              <a:buSzPts val="1200"/>
-              <a:buFont typeface="Arial"/>
-              <a:buChar char="•"/>
-            </a:pPr>
-            <a:r>
-              <a:rPr lang="en-US" sz="1100" dirty="0"/>
-              <a:t>Vertical vs. South-Facing Panels, </a:t>
-            </a:r>
-          </a:p>
-          <a:p>
-            <a:pPr marL="94060" lvl="0" indent="-103585">
-              <a:buClr>
-                <a:schemeClr val="dk1"/>
-              </a:buClr>
-              <a:buSzPts val="1200"/>
-              <a:buFont typeface="Arial"/>
-              <a:buChar char="•"/>
-            </a:pPr>
-            <a:r>
-              <a:rPr lang="en-US" sz="1100" dirty="0"/>
-              <a:t>Adding reflectors </a:t>
-            </a:r>
-          </a:p>
-          <a:p>
-            <a:pPr marL="94060" lvl="0" indent="-103585">
-              <a:buClr>
-                <a:schemeClr val="dk1"/>
-              </a:buClr>
-              <a:buSzPts val="1200"/>
-              <a:buFont typeface="Arial"/>
-              <a:buChar char="•"/>
-            </a:pPr>
-            <a:r>
-              <a:rPr lang="en-US" sz="1100" dirty="0"/>
-              <a:t>Bifacial panels </a:t>
-            </a:r>
-          </a:p>
-          <a:p>
-            <a:pPr marL="94060" lvl="0" indent="-103585">
-              <a:buClr>
-                <a:schemeClr val="dk1"/>
-              </a:buClr>
-              <a:buSzPts val="1200"/>
-              <a:buFont typeface="Arial"/>
-              <a:buChar char="•"/>
-            </a:pPr>
-            <a:r>
-              <a:rPr lang="en-US" sz="1100" dirty="0">
-                <a:hlinkClick r:id="rId7"/>
-              </a:rPr>
-              <a:t>https://www.youtube.com/watch?v=xD1MT-ek05w</a:t>
-            </a:r>
-            <a:endParaRPr sz="1100" dirty="0">
-              <a:solidFill>
-                <a:schemeClr val="dk1"/>
-              </a:solidFill>
-              <a:latin typeface="Calibri"/>
-              <a:ea typeface="Calibri"/>
-              <a:cs typeface="Calibri"/>
-              <a:sym typeface="Calibri"/>
-            </a:endParaRPr>
-          </a:p>
-        </p:txBody>
-      </p:sp>
-      <p:pic>
-        <p:nvPicPr>
-          <p:cNvPr id="5" name="Picture 4">
-            <a:extLst>
-              <a:ext uri="{FF2B5EF4-FFF2-40B4-BE49-F238E27FC236}">
-                <a16:creationId xmlns:a16="http://schemas.microsoft.com/office/drawing/2014/main" id="{906980DD-B2AE-25F0-0096-604B0D323E43}"/>
-              </a:ext>
-            </a:extLst>
-          </p:cNvPr>
-          <p:cNvPicPr>
-            <a:picLocks noChangeAspect="1"/>
-          </p:cNvPicPr>
-          <p:nvPr/>
-        </p:nvPicPr>
-        <p:blipFill>
-          <a:blip r:embed="rId8" cstate="email">
-            <a:extLst>
-              <a:ext uri="{28A0092B-C50C-407E-A947-70E740481C1C}">
-                <a14:useLocalDpi xmlns:a14="http://schemas.microsoft.com/office/drawing/2010/main"/>
-              </a:ext>
-            </a:extLst>
-          </a:blip>
-          <a:stretch>
-            <a:fillRect/>
-          </a:stretch>
-        </p:blipFill>
-        <p:spPr>
-          <a:xfrm>
-            <a:off x="4539225" y="3446280"/>
-            <a:ext cx="2286000" cy="1261043"/>
+            <a:off x="5943600" y="3118525"/>
+            <a:ext cx="3059992" cy="1650894"/>
           </a:xfrm>
           <a:prstGeom prst="rect">
             <a:avLst/>
@@ -20844,6 +21724,11 @@
         </p:spPr>
       </p:pic>
     </p:spTree>
+    <p:extLst>
+      <p:ext uri="{BB962C8B-B14F-4D97-AF65-F5344CB8AC3E}">
+        <p14:creationId xmlns:p14="http://schemas.microsoft.com/office/powerpoint/2010/main" val="3898007759"/>
+      </p:ext>
+    </p:extLst>
   </p:cSld>
   <p:clrMapOvr>
     <a:masterClrMapping/>

--- a/solar.pptx
+++ b/solar.pptx
@@ -5,7 +5,7 @@
     <p:sldMasterId id="2147483659" r:id="rId1"/>
   </p:sldMasterIdLst>
   <p:notesMasterIdLst>
-    <p:notesMasterId r:id="rId13"/>
+    <p:notesMasterId r:id="rId16"/>
   </p:notesMasterIdLst>
   <p:sldIdLst>
     <p:sldId id="260" r:id="rId2"/>
@@ -18,7 +18,10 @@
     <p:sldId id="261" r:id="rId9"/>
     <p:sldId id="266" r:id="rId10"/>
     <p:sldId id="263" r:id="rId11"/>
-    <p:sldId id="265" r:id="rId12"/>
+    <p:sldId id="267" r:id="rId12"/>
+    <p:sldId id="265" r:id="rId13"/>
+    <p:sldId id="269" r:id="rId14"/>
+    <p:sldId id="268" r:id="rId15"/>
   </p:sldIdLst>
   <p:sldSz cx="9144000" cy="5143500" type="screen16x9"/>
   <p:notesSz cx="6858000" cy="9144000"/>
@@ -1665,6 +1668,133 @@
   <p:cSld>
     <p:spTree>
       <p:nvGrpSpPr>
+        <p:cNvPr id="1" name="Shape 151">
+          <a:extLst>
+            <a:ext uri="{FF2B5EF4-FFF2-40B4-BE49-F238E27FC236}">
+              <a16:creationId xmlns:a16="http://schemas.microsoft.com/office/drawing/2014/main" id="{A029801F-A94A-544E-2E2A-CB77431F9B36}"/>
+            </a:ext>
+          </a:extLst>
+        </p:cNvPr>
+        <p:cNvGrpSpPr/>
+        <p:nvPr/>
+      </p:nvGrpSpPr>
+      <p:grpSpPr>
+        <a:xfrm>
+          <a:off x="0" y="0"/>
+          <a:ext cx="0" cy="0"/>
+          <a:chOff x="0" y="0"/>
+          <a:chExt cx="0" cy="0"/>
+        </a:xfrm>
+      </p:grpSpPr>
+      <p:sp>
+        <p:nvSpPr>
+          <p:cNvPr id="152" name="Google Shape;152;g3e5eb4dda17_0_53:notes">
+            <a:extLst>
+              <a:ext uri="{FF2B5EF4-FFF2-40B4-BE49-F238E27FC236}">
+                <a16:creationId xmlns:a16="http://schemas.microsoft.com/office/drawing/2014/main" id="{0955E0C4-8901-EFD7-0593-C6A1EC9B84EF}"/>
+              </a:ext>
+            </a:extLst>
+          </p:cNvPr>
+          <p:cNvSpPr txBox="1">
+            <a:spLocks noGrp="1"/>
+          </p:cNvSpPr>
+          <p:nvPr>
+            <p:ph type="body" idx="1"/>
+          </p:nvPr>
+        </p:nvSpPr>
+        <p:spPr>
+          <a:xfrm>
+            <a:off x="685800" y="4400550"/>
+            <a:ext cx="5486400" cy="3600600"/>
+          </a:xfrm>
+          <a:prstGeom prst="rect">
+            <a:avLst/>
+          </a:prstGeom>
+        </p:spPr>
+        <p:txBody>
+          <a:bodyPr spcFirstLastPara="1" wrap="square" lIns="91425" tIns="45700" rIns="91425" bIns="45700" anchor="t" anchorCtr="0">
+            <a:noAutofit/>
+          </a:bodyPr>
+          <a:lstStyle/>
+          <a:p>
+            <a:pPr marL="0" lvl="0" indent="0" algn="l" rtl="0">
+              <a:spcBef>
+                <a:spcPts val="0"/>
+              </a:spcBef>
+              <a:spcAft>
+                <a:spcPts val="0"/>
+              </a:spcAft>
+              <a:buNone/>
+            </a:pPr>
+            <a:endParaRPr/>
+          </a:p>
+        </p:txBody>
+      </p:sp>
+      <p:sp>
+        <p:nvSpPr>
+          <p:cNvPr id="153" name="Google Shape;153;g3e5eb4dda17_0_53:notes">
+            <a:extLst>
+              <a:ext uri="{FF2B5EF4-FFF2-40B4-BE49-F238E27FC236}">
+                <a16:creationId xmlns:a16="http://schemas.microsoft.com/office/drawing/2014/main" id="{C1AB8B1E-AEA2-6949-3F04-67394CED7404}"/>
+              </a:ext>
+            </a:extLst>
+          </p:cNvPr>
+          <p:cNvSpPr>
+            <a:spLocks noGrp="1" noRot="1" noChangeAspect="1"/>
+          </p:cNvSpPr>
+          <p:nvPr>
+            <p:ph type="sldImg" idx="2"/>
+          </p:nvPr>
+        </p:nvSpPr>
+        <p:spPr>
+          <a:xfrm>
+            <a:off x="685800" y="1143000"/>
+            <a:ext cx="5486400" cy="3086100"/>
+          </a:xfrm>
+          <a:custGeom>
+            <a:avLst/>
+            <a:gdLst/>
+            <a:ahLst/>
+            <a:cxnLst/>
+            <a:rect l="l" t="t" r="r" b="b"/>
+            <a:pathLst>
+              <a:path w="120000" h="120000" extrusionOk="0">
+                <a:moveTo>
+                  <a:pt x="0" y="0"/>
+                </a:moveTo>
+                <a:lnTo>
+                  <a:pt x="120000" y="0"/>
+                </a:lnTo>
+                <a:lnTo>
+                  <a:pt x="120000" y="120000"/>
+                </a:lnTo>
+                <a:lnTo>
+                  <a:pt x="0" y="120000"/>
+                </a:lnTo>
+                <a:close/>
+              </a:path>
+            </a:pathLst>
+          </a:custGeom>
+        </p:spPr>
+      </p:sp>
+    </p:spTree>
+    <p:extLst>
+      <p:ext uri="{BB962C8B-B14F-4D97-AF65-F5344CB8AC3E}">
+        <p14:creationId xmlns:p14="http://schemas.microsoft.com/office/powerpoint/2010/main" val="1470415219"/>
+      </p:ext>
+    </p:extLst>
+  </p:cSld>
+  <p:clrMapOvr>
+    <a:masterClrMapping/>
+  </p:clrMapOvr>
+</p:notes>
+</file>
+
+<file path=ppt/notesSlides/notesSlide12.xml><?xml version="1.0" encoding="utf-8"?>
+<p:notes xmlns:a="http://schemas.openxmlformats.org/drawingml/2006/main" xmlns:r="http://schemas.openxmlformats.org/officeDocument/2006/relationships" xmlns:p="http://schemas.openxmlformats.org/presentationml/2006/main" showMasterSp="0" showMasterPhAnim="0">
+  <p:cSld>
+    <p:spTree>
+      <p:nvGrpSpPr>
         <p:cNvPr id="1" name="Shape 151"/>
         <p:cNvGrpSpPr/>
         <p:nvPr/>
@@ -1760,6 +1890,260 @@
     <p:extLst>
       <p:ext uri="{BB962C8B-B14F-4D97-AF65-F5344CB8AC3E}">
         <p14:creationId xmlns:p14="http://schemas.microsoft.com/office/powerpoint/2010/main" val="2868086858"/>
+      </p:ext>
+    </p:extLst>
+  </p:cSld>
+  <p:clrMapOvr>
+    <a:masterClrMapping/>
+  </p:clrMapOvr>
+</p:notes>
+</file>
+
+<file path=ppt/notesSlides/notesSlide13.xml><?xml version="1.0" encoding="utf-8"?>
+<p:notes xmlns:a="http://schemas.openxmlformats.org/drawingml/2006/main" xmlns:r="http://schemas.openxmlformats.org/officeDocument/2006/relationships" xmlns:p="http://schemas.openxmlformats.org/presentationml/2006/main" showMasterSp="0" showMasterPhAnim="0">
+  <p:cSld>
+    <p:spTree>
+      <p:nvGrpSpPr>
+        <p:cNvPr id="1" name="Shape 151">
+          <a:extLst>
+            <a:ext uri="{FF2B5EF4-FFF2-40B4-BE49-F238E27FC236}">
+              <a16:creationId xmlns:a16="http://schemas.microsoft.com/office/drawing/2014/main" id="{93FE5761-0D28-118D-BCA2-1FB0EA84DC7D}"/>
+            </a:ext>
+          </a:extLst>
+        </p:cNvPr>
+        <p:cNvGrpSpPr/>
+        <p:nvPr/>
+      </p:nvGrpSpPr>
+      <p:grpSpPr>
+        <a:xfrm>
+          <a:off x="0" y="0"/>
+          <a:ext cx="0" cy="0"/>
+          <a:chOff x="0" y="0"/>
+          <a:chExt cx="0" cy="0"/>
+        </a:xfrm>
+      </p:grpSpPr>
+      <p:sp>
+        <p:nvSpPr>
+          <p:cNvPr id="152" name="Google Shape;152;g3e5eb4dda17_0_53:notes">
+            <a:extLst>
+              <a:ext uri="{FF2B5EF4-FFF2-40B4-BE49-F238E27FC236}">
+                <a16:creationId xmlns:a16="http://schemas.microsoft.com/office/drawing/2014/main" id="{970DEC63-F310-0C3A-D813-D85985C16C96}"/>
+              </a:ext>
+            </a:extLst>
+          </p:cNvPr>
+          <p:cNvSpPr txBox="1">
+            <a:spLocks noGrp="1"/>
+          </p:cNvSpPr>
+          <p:nvPr>
+            <p:ph type="body" idx="1"/>
+          </p:nvPr>
+        </p:nvSpPr>
+        <p:spPr>
+          <a:xfrm>
+            <a:off x="685800" y="4400550"/>
+            <a:ext cx="5486400" cy="3600600"/>
+          </a:xfrm>
+          <a:prstGeom prst="rect">
+            <a:avLst/>
+          </a:prstGeom>
+        </p:spPr>
+        <p:txBody>
+          <a:bodyPr spcFirstLastPara="1" wrap="square" lIns="91425" tIns="45700" rIns="91425" bIns="45700" anchor="t" anchorCtr="0">
+            <a:noAutofit/>
+          </a:bodyPr>
+          <a:lstStyle/>
+          <a:p>
+            <a:pPr marL="0" lvl="0" indent="0" algn="l" rtl="0">
+              <a:spcBef>
+                <a:spcPts val="0"/>
+              </a:spcBef>
+              <a:spcAft>
+                <a:spcPts val="0"/>
+              </a:spcAft>
+              <a:buNone/>
+            </a:pPr>
+            <a:endParaRPr/>
+          </a:p>
+        </p:txBody>
+      </p:sp>
+      <p:sp>
+        <p:nvSpPr>
+          <p:cNvPr id="153" name="Google Shape;153;g3e5eb4dda17_0_53:notes">
+            <a:extLst>
+              <a:ext uri="{FF2B5EF4-FFF2-40B4-BE49-F238E27FC236}">
+                <a16:creationId xmlns:a16="http://schemas.microsoft.com/office/drawing/2014/main" id="{99A75620-A66F-9108-AB7B-A614F113CEC4}"/>
+              </a:ext>
+            </a:extLst>
+          </p:cNvPr>
+          <p:cNvSpPr>
+            <a:spLocks noGrp="1" noRot="1" noChangeAspect="1"/>
+          </p:cNvSpPr>
+          <p:nvPr>
+            <p:ph type="sldImg" idx="2"/>
+          </p:nvPr>
+        </p:nvSpPr>
+        <p:spPr>
+          <a:xfrm>
+            <a:off x="685800" y="1143000"/>
+            <a:ext cx="5486400" cy="3086100"/>
+          </a:xfrm>
+          <a:custGeom>
+            <a:avLst/>
+            <a:gdLst/>
+            <a:ahLst/>
+            <a:cxnLst/>
+            <a:rect l="l" t="t" r="r" b="b"/>
+            <a:pathLst>
+              <a:path w="120000" h="120000" extrusionOk="0">
+                <a:moveTo>
+                  <a:pt x="0" y="0"/>
+                </a:moveTo>
+                <a:lnTo>
+                  <a:pt x="120000" y="0"/>
+                </a:lnTo>
+                <a:lnTo>
+                  <a:pt x="120000" y="120000"/>
+                </a:lnTo>
+                <a:lnTo>
+                  <a:pt x="0" y="120000"/>
+                </a:lnTo>
+                <a:close/>
+              </a:path>
+            </a:pathLst>
+          </a:custGeom>
+        </p:spPr>
+      </p:sp>
+    </p:spTree>
+    <p:extLst>
+      <p:ext uri="{BB962C8B-B14F-4D97-AF65-F5344CB8AC3E}">
+        <p14:creationId xmlns:p14="http://schemas.microsoft.com/office/powerpoint/2010/main" val="3258978516"/>
+      </p:ext>
+    </p:extLst>
+  </p:cSld>
+  <p:clrMapOvr>
+    <a:masterClrMapping/>
+  </p:clrMapOvr>
+</p:notes>
+</file>
+
+<file path=ppt/notesSlides/notesSlide14.xml><?xml version="1.0" encoding="utf-8"?>
+<p:notes xmlns:a="http://schemas.openxmlformats.org/drawingml/2006/main" xmlns:r="http://schemas.openxmlformats.org/officeDocument/2006/relationships" xmlns:p="http://schemas.openxmlformats.org/presentationml/2006/main" showMasterSp="0" showMasterPhAnim="0">
+  <p:cSld>
+    <p:spTree>
+      <p:nvGrpSpPr>
+        <p:cNvPr id="1" name="Shape 151">
+          <a:extLst>
+            <a:ext uri="{FF2B5EF4-FFF2-40B4-BE49-F238E27FC236}">
+              <a16:creationId xmlns:a16="http://schemas.microsoft.com/office/drawing/2014/main" id="{93FE5761-0D28-118D-BCA2-1FB0EA84DC7D}"/>
+            </a:ext>
+          </a:extLst>
+        </p:cNvPr>
+        <p:cNvGrpSpPr/>
+        <p:nvPr/>
+      </p:nvGrpSpPr>
+      <p:grpSpPr>
+        <a:xfrm>
+          <a:off x="0" y="0"/>
+          <a:ext cx="0" cy="0"/>
+          <a:chOff x="0" y="0"/>
+          <a:chExt cx="0" cy="0"/>
+        </a:xfrm>
+      </p:grpSpPr>
+      <p:sp>
+        <p:nvSpPr>
+          <p:cNvPr id="152" name="Google Shape;152;g3e5eb4dda17_0_53:notes">
+            <a:extLst>
+              <a:ext uri="{FF2B5EF4-FFF2-40B4-BE49-F238E27FC236}">
+                <a16:creationId xmlns:a16="http://schemas.microsoft.com/office/drawing/2014/main" id="{970DEC63-F310-0C3A-D813-D85985C16C96}"/>
+              </a:ext>
+            </a:extLst>
+          </p:cNvPr>
+          <p:cNvSpPr txBox="1">
+            <a:spLocks noGrp="1"/>
+          </p:cNvSpPr>
+          <p:nvPr>
+            <p:ph type="body" idx="1"/>
+          </p:nvPr>
+        </p:nvSpPr>
+        <p:spPr>
+          <a:xfrm>
+            <a:off x="685800" y="4400550"/>
+            <a:ext cx="5486400" cy="3600600"/>
+          </a:xfrm>
+          <a:prstGeom prst="rect">
+            <a:avLst/>
+          </a:prstGeom>
+        </p:spPr>
+        <p:txBody>
+          <a:bodyPr spcFirstLastPara="1" wrap="square" lIns="91425" tIns="45700" rIns="91425" bIns="45700" anchor="t" anchorCtr="0">
+            <a:noAutofit/>
+          </a:bodyPr>
+          <a:lstStyle/>
+          <a:p>
+            <a:pPr marL="0" lvl="0" indent="0" algn="l" rtl="0">
+              <a:spcBef>
+                <a:spcPts val="0"/>
+              </a:spcBef>
+              <a:spcAft>
+                <a:spcPts val="0"/>
+              </a:spcAft>
+              <a:buNone/>
+            </a:pPr>
+            <a:endParaRPr/>
+          </a:p>
+        </p:txBody>
+      </p:sp>
+      <p:sp>
+        <p:nvSpPr>
+          <p:cNvPr id="153" name="Google Shape;153;g3e5eb4dda17_0_53:notes">
+            <a:extLst>
+              <a:ext uri="{FF2B5EF4-FFF2-40B4-BE49-F238E27FC236}">
+                <a16:creationId xmlns:a16="http://schemas.microsoft.com/office/drawing/2014/main" id="{99A75620-A66F-9108-AB7B-A614F113CEC4}"/>
+              </a:ext>
+            </a:extLst>
+          </p:cNvPr>
+          <p:cNvSpPr>
+            <a:spLocks noGrp="1" noRot="1" noChangeAspect="1"/>
+          </p:cNvSpPr>
+          <p:nvPr>
+            <p:ph type="sldImg" idx="2"/>
+          </p:nvPr>
+        </p:nvSpPr>
+        <p:spPr>
+          <a:xfrm>
+            <a:off x="685800" y="1143000"/>
+            <a:ext cx="5486400" cy="3086100"/>
+          </a:xfrm>
+          <a:custGeom>
+            <a:avLst/>
+            <a:gdLst/>
+            <a:ahLst/>
+            <a:cxnLst/>
+            <a:rect l="l" t="t" r="r" b="b"/>
+            <a:pathLst>
+              <a:path w="120000" h="120000" extrusionOk="0">
+                <a:moveTo>
+                  <a:pt x="0" y="0"/>
+                </a:moveTo>
+                <a:lnTo>
+                  <a:pt x="120000" y="0"/>
+                </a:lnTo>
+                <a:lnTo>
+                  <a:pt x="120000" y="120000"/>
+                </a:lnTo>
+                <a:lnTo>
+                  <a:pt x="0" y="120000"/>
+                </a:lnTo>
+                <a:close/>
+              </a:path>
+            </a:pathLst>
+          </a:custGeom>
+        </p:spPr>
+      </p:sp>
+    </p:spTree>
+    <p:extLst>
+      <p:ext uri="{BB962C8B-B14F-4D97-AF65-F5344CB8AC3E}">
+        <p14:creationId xmlns:p14="http://schemas.microsoft.com/office/powerpoint/2010/main" val="2230146145"/>
       </p:ext>
     </p:extLst>
   </p:cSld>
@@ -14085,6 +14469,134 @@
           </a:p>
         </p:txBody>
       </p:sp>
+      <p:sp>
+        <p:nvSpPr>
+          <p:cNvPr id="3" name="Google Shape;127;p17">
+            <a:extLst>
+              <a:ext uri="{FF2B5EF4-FFF2-40B4-BE49-F238E27FC236}">
+                <a16:creationId xmlns:a16="http://schemas.microsoft.com/office/drawing/2014/main" id="{E168738E-CC53-2D54-153C-E7CF90CA0085}"/>
+              </a:ext>
+            </a:extLst>
+          </p:cNvPr>
+          <p:cNvSpPr txBox="1"/>
+          <p:nvPr/>
+        </p:nvSpPr>
+        <p:spPr>
+          <a:xfrm>
+            <a:off x="6212654" y="3322315"/>
+            <a:ext cx="2854837" cy="1731213"/>
+          </a:xfrm>
+          <a:prstGeom prst="rect">
+            <a:avLst/>
+          </a:prstGeom>
+          <a:solidFill>
+            <a:srgbClr val="FFF2CC"/>
+          </a:solidFill>
+          <a:ln w="7150" cap="flat" cmpd="sng">
+            <a:solidFill>
+              <a:srgbClr val="FF0000"/>
+            </a:solidFill>
+            <a:prstDash val="solid"/>
+            <a:round/>
+            <a:headEnd type="none" w="sm" len="sm"/>
+            <a:tailEnd type="none" w="sm" len="sm"/>
+          </a:ln>
+        </p:spPr>
+        <p:txBody>
+          <a:bodyPr spcFirstLastPara="1" wrap="square" lIns="68575" tIns="34275" rIns="68575" bIns="34275" anchor="t" anchorCtr="0">
+            <a:spAutoFit/>
+          </a:bodyPr>
+          <a:lstStyle/>
+          <a:p>
+            <a:pPr marL="171450" indent="-171450">
+              <a:buFont typeface="Arial" panose="020B0604020202020204" pitchFamily="34" charset="0"/>
+              <a:buChar char="•"/>
+            </a:pPr>
+            <a:r>
+              <a:rPr lang="en-US" sz="1200" dirty="0">
+                <a:latin typeface="Calibri" panose="020F0502020204030204" pitchFamily="34" charset="0"/>
+                <a:cs typeface="Calibri" panose="020F0502020204030204" pitchFamily="34" charset="0"/>
+              </a:rPr>
+              <a:t>PV panels = photovoltaic panels</a:t>
+            </a:r>
+          </a:p>
+          <a:p>
+            <a:pPr marL="171450" indent="-171450">
+              <a:buFont typeface="Arial" panose="020B0604020202020204" pitchFamily="34" charset="0"/>
+              <a:buChar char="•"/>
+            </a:pPr>
+            <a:r>
+              <a:rPr lang="en-US" sz="1200" dirty="0">
+                <a:latin typeface="Calibri" panose="020F0502020204030204" pitchFamily="34" charset="0"/>
+                <a:cs typeface="Calibri" panose="020F0502020204030204" pitchFamily="34" charset="0"/>
+              </a:rPr>
+              <a:t>convert sunlight directly into electricity using the photovoltaic effect</a:t>
+            </a:r>
+          </a:p>
+          <a:p>
+            <a:pPr marL="171450" indent="-171450">
+              <a:buFont typeface="Arial" panose="020B0604020202020204" pitchFamily="34" charset="0"/>
+              <a:buChar char="•"/>
+            </a:pPr>
+            <a:r>
+              <a:rPr lang="en-US" sz="1200" dirty="0">
+                <a:latin typeface="Calibri" panose="020F0502020204030204" pitchFamily="34" charset="0"/>
+                <a:cs typeface="Calibri" panose="020F0502020204030204" pitchFamily="34" charset="0"/>
+              </a:rPr>
+              <a:t>A PV panel is made up of many individual PV cells (usually silicon) that release electrons when photons from sunlight strike them</a:t>
+            </a:r>
+          </a:p>
+          <a:p>
+            <a:pPr marL="171450" indent="-171450">
+              <a:buFont typeface="Arial" panose="020B0604020202020204" pitchFamily="34" charset="0"/>
+              <a:buChar char="•"/>
+            </a:pPr>
+            <a:r>
+              <a:rPr lang="en-US" sz="1200" dirty="0">
+                <a:latin typeface="Calibri" panose="020F0502020204030204" pitchFamily="34" charset="0"/>
+                <a:cs typeface="Calibri" panose="020F0502020204030204" pitchFamily="34" charset="0"/>
+              </a:rPr>
+              <a:t>This electron movement creates a direct current (DC)</a:t>
+            </a:r>
+          </a:p>
+        </p:txBody>
+      </p:sp>
+      <p:pic>
+        <p:nvPicPr>
+          <p:cNvPr id="5" name="Picture 4" descr="HEET's Blog">
+            <a:extLst>
+              <a:ext uri="{FF2B5EF4-FFF2-40B4-BE49-F238E27FC236}">
+                <a16:creationId xmlns:a16="http://schemas.microsoft.com/office/drawing/2014/main" id="{3D2AC785-2A90-79A1-E2A8-80DF16C2F3E0}"/>
+              </a:ext>
+            </a:extLst>
+          </p:cNvPr>
+          <p:cNvPicPr>
+            <a:picLocks noChangeAspect="1"/>
+          </p:cNvPicPr>
+          <p:nvPr/>
+        </p:nvPicPr>
+        <p:blipFill>
+          <a:blip r:embed="rId5" cstate="email">
+            <a:extLst>
+              <a:ext uri="{28A0092B-C50C-407E-A947-70E740481C1C}">
+                <a14:useLocalDpi xmlns:a14="http://schemas.microsoft.com/office/drawing/2010/main"/>
+              </a:ext>
+            </a:extLst>
+          </a:blip>
+          <a:stretch>
+            <a:fillRect/>
+          </a:stretch>
+        </p:blipFill>
+        <p:spPr>
+          <a:xfrm>
+            <a:off x="4457339" y="3706654"/>
+            <a:ext cx="1638300" cy="1231900"/>
+          </a:xfrm>
+          <a:prstGeom prst="rect">
+            <a:avLst/>
+          </a:prstGeom>
+        </p:spPr>
+      </p:pic>
     </p:spTree>
   </p:cSld>
   <p:clrMapOvr>
@@ -14888,6 +15400,377 @@
   <p:cSld>
     <p:spTree>
       <p:nvGrpSpPr>
+        <p:cNvPr id="1" name="Shape 154">
+          <a:extLst>
+            <a:ext uri="{FF2B5EF4-FFF2-40B4-BE49-F238E27FC236}">
+              <a16:creationId xmlns:a16="http://schemas.microsoft.com/office/drawing/2014/main" id="{209C7A3F-E092-E202-8F05-A1FBB5735800}"/>
+            </a:ext>
+          </a:extLst>
+        </p:cNvPr>
+        <p:cNvGrpSpPr/>
+        <p:nvPr/>
+      </p:nvGrpSpPr>
+      <p:grpSpPr>
+        <a:xfrm>
+          <a:off x="0" y="0"/>
+          <a:ext cx="0" cy="0"/>
+          <a:chOff x="0" y="0"/>
+          <a:chExt cx="0" cy="0"/>
+        </a:xfrm>
+      </p:grpSpPr>
+      <p:sp>
+        <p:nvSpPr>
+          <p:cNvPr id="155" name="Google Shape;155;p20">
+            <a:extLst>
+              <a:ext uri="{FF2B5EF4-FFF2-40B4-BE49-F238E27FC236}">
+                <a16:creationId xmlns:a16="http://schemas.microsoft.com/office/drawing/2014/main" id="{F5266911-422B-A2C0-2D57-99C6A5E41BB1}"/>
+              </a:ext>
+            </a:extLst>
+          </p:cNvPr>
+          <p:cNvSpPr txBox="1"/>
+          <p:nvPr/>
+        </p:nvSpPr>
+        <p:spPr>
+          <a:xfrm>
+            <a:off x="65623" y="39645"/>
+            <a:ext cx="3988200" cy="346200"/>
+          </a:xfrm>
+          <a:prstGeom prst="rect">
+            <a:avLst/>
+          </a:prstGeom>
+          <a:noFill/>
+          <a:ln>
+            <a:noFill/>
+          </a:ln>
+        </p:spPr>
+        <p:txBody>
+          <a:bodyPr spcFirstLastPara="1" wrap="square" lIns="68575" tIns="34275" rIns="68575" bIns="34275" anchor="t" anchorCtr="0">
+            <a:spAutoFit/>
+          </a:bodyPr>
+          <a:lstStyle/>
+          <a:p>
+            <a:pPr marL="0" marR="0" lvl="0" indent="0" algn="l" rtl="0">
+              <a:spcBef>
+                <a:spcPts val="0"/>
+              </a:spcBef>
+              <a:spcAft>
+                <a:spcPts val="0"/>
+              </a:spcAft>
+              <a:buNone/>
+            </a:pPr>
+            <a:r>
+              <a:rPr lang="en-US" sz="1800" b="1" i="0" u="none" strike="noStrike" cap="none" dirty="0">
+                <a:solidFill>
+                  <a:schemeClr val="dk1"/>
+                </a:solidFill>
+                <a:latin typeface="Calibri"/>
+                <a:ea typeface="Calibri"/>
+                <a:cs typeface="Calibri"/>
+                <a:sym typeface="Calibri"/>
+              </a:rPr>
+              <a:t>Solar Panels on Garden Fences</a:t>
+            </a:r>
+            <a:endParaRPr sz="1800" b="1" i="0" dirty="0">
+              <a:solidFill>
+                <a:srgbClr val="333333"/>
+              </a:solidFill>
+              <a:latin typeface="Calibri"/>
+              <a:ea typeface="Calibri"/>
+              <a:cs typeface="Calibri"/>
+              <a:sym typeface="Calibri"/>
+            </a:endParaRPr>
+          </a:p>
+        </p:txBody>
+      </p:sp>
+      <p:sp>
+        <p:nvSpPr>
+          <p:cNvPr id="156" name="Google Shape;156;p20">
+            <a:extLst>
+              <a:ext uri="{FF2B5EF4-FFF2-40B4-BE49-F238E27FC236}">
+                <a16:creationId xmlns:a16="http://schemas.microsoft.com/office/drawing/2014/main" id="{64CF3D02-5306-10AD-88D6-FF35FA4F5035}"/>
+              </a:ext>
+            </a:extLst>
+          </p:cNvPr>
+          <p:cNvSpPr txBox="1"/>
+          <p:nvPr/>
+        </p:nvSpPr>
+        <p:spPr>
+          <a:xfrm>
+            <a:off x="65625" y="385894"/>
+            <a:ext cx="4473600" cy="807883"/>
+          </a:xfrm>
+          <a:prstGeom prst="rect">
+            <a:avLst/>
+          </a:prstGeom>
+          <a:solidFill>
+            <a:srgbClr val="FFF2CC"/>
+          </a:solidFill>
+          <a:ln w="7150" cap="flat" cmpd="sng">
+            <a:solidFill>
+              <a:srgbClr val="FF0000"/>
+            </a:solidFill>
+            <a:prstDash val="solid"/>
+            <a:round/>
+            <a:headEnd type="none" w="sm" len="sm"/>
+            <a:tailEnd type="none" w="sm" len="sm"/>
+          </a:ln>
+        </p:spPr>
+        <p:txBody>
+          <a:bodyPr spcFirstLastPara="1" wrap="square" lIns="68575" tIns="34275" rIns="68575" bIns="34275" anchor="t" anchorCtr="0">
+            <a:spAutoFit/>
+          </a:bodyPr>
+          <a:lstStyle/>
+          <a:p>
+            <a:pPr marL="94060" lvl="0" indent="-103585">
+              <a:buClr>
+                <a:schemeClr val="dk1"/>
+              </a:buClr>
+              <a:buSzPts val="1200"/>
+              <a:buFont typeface="Arial"/>
+              <a:buChar char="•"/>
+            </a:pPr>
+            <a:r>
+              <a:rPr lang="en-US" sz="1200" dirty="0"/>
+              <a:t>solar panels mounted on garden fences</a:t>
+            </a:r>
+          </a:p>
+          <a:p>
+            <a:pPr marL="94060" lvl="0" indent="-103585">
+              <a:buClr>
+                <a:schemeClr val="dk1"/>
+              </a:buClr>
+              <a:buSzPts val="1200"/>
+              <a:buFont typeface="Arial"/>
+              <a:buChar char="•"/>
+            </a:pPr>
+            <a:r>
+              <a:rPr lang="en-US" sz="1200" dirty="0">
+                <a:solidFill>
+                  <a:schemeClr val="dk1"/>
+                </a:solidFill>
+                <a:latin typeface="Calibri"/>
+                <a:ea typeface="Calibri"/>
+                <a:cs typeface="Calibri"/>
+                <a:sym typeface="Calibri"/>
+                <a:hlinkClick r:id="rId3"/>
+              </a:rPr>
+              <a:t>https://www.youtube.com/watch?v=8-FtZZwq758</a:t>
+            </a:r>
+            <a:endParaRPr lang="en-US" sz="1200" dirty="0">
+              <a:solidFill>
+                <a:schemeClr val="dk1"/>
+              </a:solidFill>
+              <a:latin typeface="Calibri"/>
+              <a:ea typeface="Calibri"/>
+              <a:cs typeface="Calibri"/>
+              <a:sym typeface="Calibri"/>
+            </a:endParaRPr>
+          </a:p>
+          <a:p>
+            <a:pPr marL="94060" lvl="0" indent="-103585">
+              <a:buClr>
+                <a:schemeClr val="dk1"/>
+              </a:buClr>
+              <a:buSzPts val="1200"/>
+              <a:buFont typeface="Arial"/>
+              <a:buChar char="•"/>
+            </a:pPr>
+            <a:r>
+              <a:rPr lang="en-US" sz="1200" dirty="0">
+                <a:solidFill>
+                  <a:schemeClr val="dk1"/>
+                </a:solidFill>
+                <a:latin typeface="Calibri"/>
+                <a:ea typeface="Calibri"/>
+                <a:cs typeface="Calibri"/>
+                <a:sym typeface="Calibri"/>
+                <a:hlinkClick r:id="rId4"/>
+              </a:rPr>
+              <a:t>https://</a:t>
+            </a:r>
+            <a:r>
+              <a:rPr lang="en-US" sz="1200" dirty="0" err="1">
+                <a:solidFill>
+                  <a:schemeClr val="dk1"/>
+                </a:solidFill>
+                <a:latin typeface="Calibri"/>
+                <a:ea typeface="Calibri"/>
+                <a:cs typeface="Calibri"/>
+                <a:sym typeface="Calibri"/>
+                <a:hlinkClick r:id="rId4"/>
+              </a:rPr>
+              <a:t>www.youtube.com</a:t>
+            </a:r>
+            <a:r>
+              <a:rPr lang="en-US" sz="1200" dirty="0">
+                <a:solidFill>
+                  <a:schemeClr val="dk1"/>
+                </a:solidFill>
+                <a:latin typeface="Calibri"/>
+                <a:ea typeface="Calibri"/>
+                <a:cs typeface="Calibri"/>
+                <a:sym typeface="Calibri"/>
+                <a:hlinkClick r:id="rId4"/>
+              </a:rPr>
+              <a:t>/</a:t>
+            </a:r>
+            <a:r>
+              <a:rPr lang="en-US" sz="1200" dirty="0" err="1">
+                <a:solidFill>
+                  <a:schemeClr val="dk1"/>
+                </a:solidFill>
+                <a:latin typeface="Calibri"/>
+                <a:ea typeface="Calibri"/>
+                <a:cs typeface="Calibri"/>
+                <a:sym typeface="Calibri"/>
+                <a:hlinkClick r:id="rId4"/>
+              </a:rPr>
+              <a:t>watch?v</a:t>
+            </a:r>
+            <a:r>
+              <a:rPr lang="en-US" sz="1200" dirty="0">
+                <a:solidFill>
+                  <a:schemeClr val="dk1"/>
+                </a:solidFill>
+                <a:latin typeface="Calibri"/>
+                <a:ea typeface="Calibri"/>
+                <a:cs typeface="Calibri"/>
+                <a:sym typeface="Calibri"/>
+                <a:hlinkClick r:id="rId4"/>
+              </a:rPr>
+              <a:t>=L-GqZ2Z90aM</a:t>
+            </a:r>
+            <a:endParaRPr lang="en-US" sz="1200" dirty="0">
+              <a:solidFill>
+                <a:schemeClr val="dk1"/>
+              </a:solidFill>
+              <a:latin typeface="Calibri"/>
+              <a:ea typeface="Calibri"/>
+              <a:cs typeface="Calibri"/>
+              <a:sym typeface="Calibri"/>
+            </a:endParaRPr>
+          </a:p>
+          <a:p>
+            <a:pPr marL="94060" lvl="0" indent="-103585">
+              <a:buClr>
+                <a:schemeClr val="dk1"/>
+              </a:buClr>
+              <a:buSzPts val="1200"/>
+              <a:buFont typeface="Arial"/>
+              <a:buChar char="•"/>
+            </a:pPr>
+            <a:endParaRPr sz="1200" dirty="0">
+              <a:solidFill>
+                <a:schemeClr val="dk1"/>
+              </a:solidFill>
+              <a:latin typeface="Calibri"/>
+              <a:ea typeface="Calibri"/>
+              <a:cs typeface="Calibri"/>
+              <a:sym typeface="Calibri"/>
+            </a:endParaRPr>
+          </a:p>
+        </p:txBody>
+      </p:sp>
+      <p:pic>
+        <p:nvPicPr>
+          <p:cNvPr id="6" name="Picture 5">
+            <a:extLst>
+              <a:ext uri="{FF2B5EF4-FFF2-40B4-BE49-F238E27FC236}">
+                <a16:creationId xmlns:a16="http://schemas.microsoft.com/office/drawing/2014/main" id="{DC7C836F-78DF-51C8-6AE5-A6AC071DF8FC}"/>
+              </a:ext>
+            </a:extLst>
+          </p:cNvPr>
+          <p:cNvPicPr>
+            <a:picLocks noChangeAspect="1"/>
+          </p:cNvPicPr>
+          <p:nvPr/>
+        </p:nvPicPr>
+        <p:blipFill>
+          <a:blip r:embed="rId5" cstate="email">
+            <a:extLst>
+              <a:ext uri="{28A0092B-C50C-407E-A947-70E740481C1C}">
+                <a14:useLocalDpi xmlns:a14="http://schemas.microsoft.com/office/drawing/2010/main"/>
+              </a:ext>
+            </a:extLst>
+          </a:blip>
+          <a:stretch>
+            <a:fillRect/>
+          </a:stretch>
+        </p:blipFill>
+        <p:spPr>
+          <a:xfrm>
+            <a:off x="5943600" y="231795"/>
+            <a:ext cx="2615877" cy="1517650"/>
+          </a:xfrm>
+          <a:prstGeom prst="rect">
+            <a:avLst/>
+          </a:prstGeom>
+          <a:ln>
+            <a:solidFill>
+              <a:srgbClr val="FF0000"/>
+            </a:solidFill>
+          </a:ln>
+        </p:spPr>
+      </p:pic>
+      <p:pic>
+        <p:nvPicPr>
+          <p:cNvPr id="7" name="Picture 6">
+            <a:extLst>
+              <a:ext uri="{FF2B5EF4-FFF2-40B4-BE49-F238E27FC236}">
+                <a16:creationId xmlns:a16="http://schemas.microsoft.com/office/drawing/2014/main" id="{BE8555A4-D4B9-4392-807D-AA28D125D8FE}"/>
+              </a:ext>
+            </a:extLst>
+          </p:cNvPr>
+          <p:cNvPicPr>
+            <a:picLocks noChangeAspect="1"/>
+          </p:cNvPicPr>
+          <p:nvPr/>
+        </p:nvPicPr>
+        <p:blipFill>
+          <a:blip r:embed="rId6" cstate="email">
+            <a:extLst>
+              <a:ext uri="{28A0092B-C50C-407E-A947-70E740481C1C}">
+                <a14:useLocalDpi xmlns:a14="http://schemas.microsoft.com/office/drawing/2010/main"/>
+              </a:ext>
+            </a:extLst>
+          </a:blip>
+          <a:stretch>
+            <a:fillRect/>
+          </a:stretch>
+        </p:blipFill>
+        <p:spPr>
+          <a:xfrm>
+            <a:off x="4539225" y="1885950"/>
+            <a:ext cx="4318000" cy="2032000"/>
+          </a:xfrm>
+          <a:prstGeom prst="rect">
+            <a:avLst/>
+          </a:prstGeom>
+          <a:ln>
+            <a:solidFill>
+              <a:srgbClr val="FF0000"/>
+            </a:solidFill>
+          </a:ln>
+        </p:spPr>
+      </p:pic>
+    </p:spTree>
+    <p:extLst>
+      <p:ext uri="{BB962C8B-B14F-4D97-AF65-F5344CB8AC3E}">
+        <p14:creationId xmlns:p14="http://schemas.microsoft.com/office/powerpoint/2010/main" val="3247111139"/>
+      </p:ext>
+    </p:extLst>
+  </p:cSld>
+  <p:clrMapOvr>
+    <a:masterClrMapping/>
+  </p:clrMapOvr>
+</p:sld>
+</file>
+
+<file path=ppt/slides/slide12.xml><?xml version="1.0" encoding="utf-8"?>
+<p:sld xmlns:a="http://schemas.openxmlformats.org/drawingml/2006/main" xmlns:r="http://schemas.openxmlformats.org/officeDocument/2006/relationships" xmlns:p="http://schemas.openxmlformats.org/presentationml/2006/main">
+  <p:cSld>
+    <p:spTree>
+      <p:nvGrpSpPr>
         <p:cNvPr id="1" name="Shape 154"/>
         <p:cNvGrpSpPr/>
         <p:nvPr/>
@@ -15000,6 +15883,18 @@
               <a:buChar char="•"/>
             </a:pPr>
             <a:r>
+              <a:rPr lang="en-US" sz="1200" b="1" dirty="0">
+                <a:solidFill>
+                  <a:srgbClr val="FF0000"/>
+                </a:solidFill>
+                <a:latin typeface="Calibri"/>
+                <a:ea typeface="Calibri"/>
+                <a:cs typeface="Calibri"/>
+                <a:sym typeface="Calibri"/>
+              </a:rPr>
+              <a:t>Solar inverters are the most failure-prone component </a:t>
+            </a:r>
+            <a:r>
               <a:rPr lang="en-US" sz="1200" dirty="0">
                 <a:solidFill>
                   <a:schemeClr val="dk1"/>
@@ -15009,7 +15904,7 @@
                 <a:cs typeface="Calibri"/>
                 <a:sym typeface="Calibri"/>
               </a:rPr>
-              <a:t>Solar inverters are the most failure-prone component of home solar systems, often requiring costly replacements after 10–15 years</a:t>
+              <a:t>of home solar systems, often requiring costly replacements after 10–15 years</a:t>
             </a:r>
           </a:p>
           <a:p>
@@ -15164,61 +16059,9 @@
                 <a:sym typeface="Calibri"/>
                 <a:hlinkClick r:id="rId3"/>
               </a:rPr>
-              <a:t>https://</a:t>
-            </a:r>
-            <a:r>
-              <a:rPr lang="en-US" sz="1200" dirty="0" err="1">
-                <a:solidFill>
-                  <a:schemeClr val="dk1"/>
-                </a:solidFill>
-                <a:latin typeface="Calibri"/>
-                <a:ea typeface="Calibri"/>
-                <a:cs typeface="Calibri"/>
-                <a:sym typeface="Calibri"/>
-                <a:hlinkClick r:id="rId3"/>
-              </a:rPr>
-              <a:t>www.youtube.com</a:t>
-            </a:r>
-            <a:r>
-              <a:rPr lang="en-US" sz="1200" dirty="0">
-                <a:solidFill>
-                  <a:schemeClr val="dk1"/>
-                </a:solidFill>
-                <a:latin typeface="Calibri"/>
-                <a:ea typeface="Calibri"/>
-                <a:cs typeface="Calibri"/>
-                <a:sym typeface="Calibri"/>
-                <a:hlinkClick r:id="rId3"/>
-              </a:rPr>
-              <a:t>/</a:t>
-            </a:r>
-            <a:r>
-              <a:rPr lang="en-US" sz="1200" dirty="0" err="1">
-                <a:solidFill>
-                  <a:schemeClr val="dk1"/>
-                </a:solidFill>
-                <a:latin typeface="Calibri"/>
-                <a:ea typeface="Calibri"/>
-                <a:cs typeface="Calibri"/>
-                <a:sym typeface="Calibri"/>
-                <a:hlinkClick r:id="rId3"/>
-              </a:rPr>
-              <a:t>watch?v</a:t>
-            </a:r>
-            <a:r>
-              <a:rPr lang="en-US" sz="1200" dirty="0">
-                <a:solidFill>
-                  <a:schemeClr val="dk1"/>
-                </a:solidFill>
-                <a:latin typeface="Calibri"/>
-                <a:ea typeface="Calibri"/>
-                <a:cs typeface="Calibri"/>
-                <a:sym typeface="Calibri"/>
-                <a:hlinkClick r:id="rId3"/>
-              </a:rPr>
-              <a:t>=cG9MwK4-8C0</a:t>
-            </a:r>
-            <a:endParaRPr sz="1200" dirty="0">
+              <a:t>https://www.youtube.com/watch?v=cG9MwK4-8C0</a:t>
+            </a:r>
+            <a:endParaRPr lang="en-US" sz="1200" dirty="0">
               <a:solidFill>
                 <a:schemeClr val="dk1"/>
               </a:solidFill>
@@ -15230,10 +16073,1468 @@
           </a:p>
         </p:txBody>
       </p:sp>
+      <p:pic>
+        <p:nvPicPr>
+          <p:cNvPr id="3" name="Picture 2">
+            <a:extLst>
+              <a:ext uri="{FF2B5EF4-FFF2-40B4-BE49-F238E27FC236}">
+                <a16:creationId xmlns:a16="http://schemas.microsoft.com/office/drawing/2014/main" id="{814C23E5-9297-4512-652F-69499798CD73}"/>
+              </a:ext>
+            </a:extLst>
+          </p:cNvPr>
+          <p:cNvPicPr>
+            <a:picLocks noChangeAspect="1"/>
+          </p:cNvPicPr>
+          <p:nvPr/>
+        </p:nvPicPr>
+        <p:blipFill>
+          <a:blip r:embed="rId4" cstate="email">
+            <a:extLst>
+              <a:ext uri="{28A0092B-C50C-407E-A947-70E740481C1C}">
+                <a14:useLocalDpi xmlns:a14="http://schemas.microsoft.com/office/drawing/2010/main"/>
+              </a:ext>
+            </a:extLst>
+          </a:blip>
+          <a:stretch>
+            <a:fillRect/>
+          </a:stretch>
+        </p:blipFill>
+        <p:spPr>
+          <a:xfrm>
+            <a:off x="6859031" y="98326"/>
+            <a:ext cx="1897434" cy="1412439"/>
+          </a:xfrm>
+          <a:prstGeom prst="rect">
+            <a:avLst/>
+          </a:prstGeom>
+          <a:ln>
+            <a:solidFill>
+              <a:srgbClr val="FF0000"/>
+            </a:solidFill>
+          </a:ln>
+        </p:spPr>
+      </p:pic>
+      <p:pic>
+        <p:nvPicPr>
+          <p:cNvPr id="5" name="Picture 4">
+            <a:extLst>
+              <a:ext uri="{FF2B5EF4-FFF2-40B4-BE49-F238E27FC236}">
+                <a16:creationId xmlns:a16="http://schemas.microsoft.com/office/drawing/2014/main" id="{F4D62D1F-29B1-3FE7-C4C8-761624560EAE}"/>
+              </a:ext>
+            </a:extLst>
+          </p:cNvPr>
+          <p:cNvPicPr>
+            <a:picLocks noChangeAspect="1"/>
+          </p:cNvPicPr>
+          <p:nvPr/>
+        </p:nvPicPr>
+        <p:blipFill>
+          <a:blip r:embed="rId5" cstate="email">
+            <a:extLst>
+              <a:ext uri="{28A0092B-C50C-407E-A947-70E740481C1C}">
+                <a14:useLocalDpi xmlns:a14="http://schemas.microsoft.com/office/drawing/2010/main"/>
+              </a:ext>
+            </a:extLst>
+          </a:blip>
+          <a:stretch>
+            <a:fillRect/>
+          </a:stretch>
+        </p:blipFill>
+        <p:spPr>
+          <a:xfrm>
+            <a:off x="4624658" y="100228"/>
+            <a:ext cx="940077" cy="1415519"/>
+          </a:xfrm>
+          <a:prstGeom prst="rect">
+            <a:avLst/>
+          </a:prstGeom>
+          <a:ln>
+            <a:solidFill>
+              <a:srgbClr val="FF0000"/>
+            </a:solidFill>
+          </a:ln>
+        </p:spPr>
+      </p:pic>
+      <p:pic>
+        <p:nvPicPr>
+          <p:cNvPr id="6" name="Picture 5" descr="Proper installation of home solar systems is crucial">
+            <a:extLst>
+              <a:ext uri="{FF2B5EF4-FFF2-40B4-BE49-F238E27FC236}">
+                <a16:creationId xmlns:a16="http://schemas.microsoft.com/office/drawing/2014/main" id="{1CDD0FAC-6246-2658-610F-F1C21EBFA7EF}"/>
+              </a:ext>
+            </a:extLst>
+          </p:cNvPr>
+          <p:cNvPicPr>
+            <a:picLocks noChangeAspect="1"/>
+          </p:cNvPicPr>
+          <p:nvPr/>
+        </p:nvPicPr>
+        <p:blipFill>
+          <a:blip r:embed="rId6" cstate="email">
+            <a:extLst>
+              <a:ext uri="{28A0092B-C50C-407E-A947-70E740481C1C}">
+                <a14:useLocalDpi xmlns:a14="http://schemas.microsoft.com/office/drawing/2010/main"/>
+              </a:ext>
+            </a:extLst>
+          </a:blip>
+          <a:stretch>
+            <a:fillRect/>
+          </a:stretch>
+        </p:blipFill>
+        <p:spPr>
+          <a:xfrm>
+            <a:off x="5650169" y="95246"/>
+            <a:ext cx="1123428" cy="1415519"/>
+          </a:xfrm>
+          <a:prstGeom prst="rect">
+            <a:avLst/>
+          </a:prstGeom>
+          <a:ln>
+            <a:solidFill>
+              <a:srgbClr val="FF0000"/>
+            </a:solidFill>
+          </a:ln>
+        </p:spPr>
+      </p:pic>
+      <p:sp>
+        <p:nvSpPr>
+          <p:cNvPr id="7" name="Google Shape;156;p20">
+            <a:extLst>
+              <a:ext uri="{FF2B5EF4-FFF2-40B4-BE49-F238E27FC236}">
+                <a16:creationId xmlns:a16="http://schemas.microsoft.com/office/drawing/2014/main" id="{E349C5BA-0857-EBE2-BFBD-58EB376E0570}"/>
+              </a:ext>
+            </a:extLst>
+          </p:cNvPr>
+          <p:cNvSpPr txBox="1"/>
+          <p:nvPr/>
+        </p:nvSpPr>
+        <p:spPr>
+          <a:xfrm>
+            <a:off x="4572000" y="1581150"/>
+            <a:ext cx="4473600" cy="3116207"/>
+          </a:xfrm>
+          <a:prstGeom prst="rect">
+            <a:avLst/>
+          </a:prstGeom>
+          <a:solidFill>
+            <a:srgbClr val="FFF2CC"/>
+          </a:solidFill>
+          <a:ln w="7150" cap="flat" cmpd="sng">
+            <a:solidFill>
+              <a:srgbClr val="FF0000"/>
+            </a:solidFill>
+            <a:prstDash val="solid"/>
+            <a:round/>
+            <a:headEnd type="none" w="sm" len="sm"/>
+            <a:tailEnd type="none" w="sm" len="sm"/>
+          </a:ln>
+        </p:spPr>
+        <p:txBody>
+          <a:bodyPr spcFirstLastPara="1" wrap="square" lIns="68575" tIns="34275" rIns="68575" bIns="34275" anchor="t" anchorCtr="0">
+            <a:spAutoFit/>
+          </a:bodyPr>
+          <a:lstStyle/>
+          <a:p>
+            <a:pPr marL="94060" lvl="0" indent="-103585">
+              <a:buClr>
+                <a:schemeClr val="dk1"/>
+              </a:buClr>
+              <a:buSzPts val="1200"/>
+              <a:buFont typeface="Arial"/>
+              <a:buChar char="•"/>
+            </a:pPr>
+            <a:r>
+              <a:rPr lang="en-US" sz="1200" b="1" dirty="0">
+                <a:solidFill>
+                  <a:srgbClr val="FF0000"/>
+                </a:solidFill>
+                <a:latin typeface="Calibri"/>
+                <a:ea typeface="Calibri"/>
+                <a:cs typeface="Calibri"/>
+                <a:sym typeface="Calibri"/>
+              </a:rPr>
+              <a:t>Safety measures:</a:t>
+            </a:r>
+          </a:p>
+          <a:p>
+            <a:pPr marL="94060" lvl="0" indent="-103585">
+              <a:buClr>
+                <a:schemeClr val="dk1"/>
+              </a:buClr>
+              <a:buSzPts val="1200"/>
+              <a:buFont typeface="Arial"/>
+              <a:buChar char="•"/>
+            </a:pPr>
+            <a:r>
+              <a:rPr lang="en-US" sz="1100" b="1" dirty="0">
+                <a:solidFill>
+                  <a:srgbClr val="FF0000"/>
+                </a:solidFill>
+                <a:latin typeface="Calibri"/>
+                <a:ea typeface="Calibri"/>
+                <a:cs typeface="Calibri"/>
+                <a:sym typeface="Calibri"/>
+              </a:rPr>
+              <a:t>Rapid Shutdown </a:t>
+            </a:r>
+            <a:r>
+              <a:rPr lang="en-US" sz="1100" dirty="0">
+                <a:solidFill>
+                  <a:schemeClr val="dk1"/>
+                </a:solidFill>
+                <a:latin typeface="Calibri"/>
+                <a:ea typeface="Calibri"/>
+                <a:cs typeface="Calibri"/>
+                <a:sym typeface="Calibri"/>
+              </a:rPr>
+              <a:t>- reducing system voltage to safe levels within seconds during emergencies - required by the National Electrical Code</a:t>
+            </a:r>
+          </a:p>
+          <a:p>
+            <a:pPr marL="94060" lvl="0" indent="-103585">
+              <a:buClr>
+                <a:schemeClr val="dk1"/>
+              </a:buClr>
+              <a:buSzPts val="1200"/>
+              <a:buFont typeface="Arial"/>
+              <a:buChar char="•"/>
+            </a:pPr>
+            <a:r>
+              <a:rPr lang="en-US" sz="1100" b="1" dirty="0">
+                <a:solidFill>
+                  <a:srgbClr val="FF0000"/>
+                </a:solidFill>
+                <a:latin typeface="Calibri"/>
+                <a:ea typeface="Calibri"/>
+                <a:cs typeface="Calibri"/>
+                <a:sym typeface="Calibri"/>
+              </a:rPr>
+              <a:t>Arc Fault Circuit Interrupters (AFCIs) </a:t>
+            </a:r>
+            <a:r>
+              <a:rPr lang="en-US" sz="1100" dirty="0">
+                <a:solidFill>
+                  <a:schemeClr val="dk1"/>
+                </a:solidFill>
+                <a:latin typeface="Calibri"/>
+                <a:ea typeface="Calibri"/>
+                <a:cs typeface="Calibri"/>
+                <a:sym typeface="Calibri"/>
+              </a:rPr>
+              <a:t>automatically detect and shut down dangerous electrical arcs</a:t>
+            </a:r>
+          </a:p>
+          <a:p>
+            <a:pPr marL="94060" lvl="0" indent="-103585">
+              <a:buClr>
+                <a:schemeClr val="dk1"/>
+              </a:buClr>
+              <a:buSzPts val="1200"/>
+              <a:buFont typeface="Arial"/>
+              <a:buChar char="•"/>
+            </a:pPr>
+            <a:r>
+              <a:rPr lang="en-US" sz="1100" b="1" dirty="0">
+                <a:solidFill>
+                  <a:srgbClr val="FF0000"/>
+                </a:solidFill>
+                <a:latin typeface="Calibri"/>
+                <a:ea typeface="Calibri"/>
+                <a:cs typeface="Calibri"/>
+                <a:sym typeface="Calibri"/>
+              </a:rPr>
+              <a:t>Ground Fault Protection Devices (GFPDs) </a:t>
+            </a:r>
+            <a:r>
+              <a:rPr lang="en-US" sz="1100" dirty="0">
+                <a:solidFill>
+                  <a:schemeClr val="dk1"/>
+                </a:solidFill>
+                <a:latin typeface="Calibri"/>
+                <a:ea typeface="Calibri"/>
+                <a:cs typeface="Calibri"/>
+                <a:sym typeface="Calibri"/>
+              </a:rPr>
+              <a:t>detect leakage currents and disconnect the system</a:t>
+            </a:r>
+          </a:p>
+          <a:p>
+            <a:pPr marL="94060" lvl="0" indent="-103585">
+              <a:buClr>
+                <a:schemeClr val="dk1"/>
+              </a:buClr>
+              <a:buSzPts val="1200"/>
+              <a:buFont typeface="Arial"/>
+              <a:buChar char="•"/>
+            </a:pPr>
+            <a:r>
+              <a:rPr lang="en-US" sz="1100" b="1" dirty="0">
+                <a:solidFill>
+                  <a:srgbClr val="FF0000"/>
+                </a:solidFill>
+                <a:latin typeface="Calibri"/>
+                <a:ea typeface="Calibri"/>
+                <a:cs typeface="Calibri"/>
+                <a:sym typeface="Calibri"/>
+              </a:rPr>
+              <a:t>Anti-islanding protection </a:t>
+            </a:r>
+            <a:r>
+              <a:rPr lang="en-US" sz="1100" dirty="0">
+                <a:solidFill>
+                  <a:schemeClr val="dk1"/>
+                </a:solidFill>
+                <a:latin typeface="Calibri"/>
+                <a:ea typeface="Calibri"/>
+                <a:cs typeface="Calibri"/>
+                <a:sym typeface="Calibri"/>
+              </a:rPr>
+              <a:t>shuts down grid-tied inverters immediately if the utility grid goes offline</a:t>
+            </a:r>
+          </a:p>
+          <a:p>
+            <a:pPr marL="94060" lvl="0" indent="-103585">
+              <a:buClr>
+                <a:schemeClr val="dk1"/>
+              </a:buClr>
+              <a:buSzPts val="1200"/>
+              <a:buFont typeface="Arial"/>
+              <a:buChar char="•"/>
+            </a:pPr>
+            <a:r>
+              <a:rPr lang="en-US" sz="1100" b="1" dirty="0">
+                <a:solidFill>
+                  <a:srgbClr val="FF0000"/>
+                </a:solidFill>
+                <a:latin typeface="Calibri"/>
+                <a:ea typeface="Calibri"/>
+                <a:cs typeface="Calibri"/>
+                <a:sym typeface="Calibri"/>
+              </a:rPr>
+              <a:t>Overcurrent breakers </a:t>
+            </a:r>
+            <a:r>
+              <a:rPr lang="en-US" sz="1100" dirty="0">
+                <a:solidFill>
+                  <a:schemeClr val="dk1"/>
+                </a:solidFill>
+                <a:latin typeface="Calibri"/>
+                <a:ea typeface="Calibri"/>
+                <a:cs typeface="Calibri"/>
+                <a:sym typeface="Calibri"/>
+              </a:rPr>
+              <a:t>isolate strings when voltage or current anomalies are detected</a:t>
+            </a:r>
+          </a:p>
+          <a:p>
+            <a:pPr marL="94060" lvl="0" indent="-103585">
+              <a:buClr>
+                <a:schemeClr val="dk1"/>
+              </a:buClr>
+              <a:buSzPts val="1200"/>
+              <a:buFont typeface="Arial"/>
+              <a:buChar char="•"/>
+            </a:pPr>
+            <a:r>
+              <a:rPr lang="en-US" sz="1100" b="1" dirty="0">
+                <a:solidFill>
+                  <a:srgbClr val="FF0000"/>
+                </a:solidFill>
+                <a:latin typeface="Calibri"/>
+                <a:ea typeface="Calibri"/>
+                <a:cs typeface="Calibri"/>
+                <a:sym typeface="Calibri"/>
+              </a:rPr>
+              <a:t>Microinverter architectures </a:t>
+            </a:r>
+            <a:r>
+              <a:rPr lang="en-US" sz="1100" dirty="0">
+                <a:solidFill>
+                  <a:schemeClr val="dk1"/>
+                </a:solidFill>
+                <a:latin typeface="Calibri"/>
+                <a:ea typeface="Calibri"/>
+                <a:cs typeface="Calibri"/>
+                <a:sym typeface="Calibri"/>
+              </a:rPr>
+              <a:t>eliminate high-voltage DC runs, significantly reducing fire risk</a:t>
+            </a:r>
+          </a:p>
+          <a:p>
+            <a:pPr marL="94060" lvl="0" indent="-103585">
+              <a:buClr>
+                <a:schemeClr val="dk1"/>
+              </a:buClr>
+              <a:buSzPts val="1200"/>
+              <a:buFont typeface="Arial"/>
+              <a:buChar char="•"/>
+            </a:pPr>
+            <a:r>
+              <a:rPr lang="en-US" sz="1100" b="1" dirty="0">
+                <a:solidFill>
+                  <a:srgbClr val="FF0000"/>
+                </a:solidFill>
+                <a:latin typeface="Calibri"/>
+                <a:ea typeface="Calibri"/>
+                <a:cs typeface="Calibri"/>
+                <a:sym typeface="Calibri"/>
+              </a:rPr>
+              <a:t>Physical requirements </a:t>
+            </a:r>
+            <a:r>
+              <a:rPr lang="en-US" sz="1100" dirty="0">
+                <a:solidFill>
+                  <a:schemeClr val="dk1"/>
+                </a:solidFill>
+                <a:latin typeface="Calibri"/>
+                <a:ea typeface="Calibri"/>
+                <a:cs typeface="Calibri"/>
+                <a:sym typeface="Calibri"/>
+              </a:rPr>
+              <a:t>- </a:t>
+            </a:r>
+            <a:r>
+              <a:rPr lang="en-US" sz="1100" dirty="0">
+                <a:solidFill>
+                  <a:srgbClr val="0070C0"/>
+                </a:solidFill>
+                <a:latin typeface="Calibri"/>
+                <a:ea typeface="Calibri"/>
+                <a:cs typeface="Calibri"/>
+                <a:sym typeface="Calibri"/>
+              </a:rPr>
+              <a:t>ventilation and clearance around inverters, UL 1741/1703 certified equipment, pest screens to prevent wiring damage, and clearly labeled manual disconnect switches</a:t>
+            </a:r>
+          </a:p>
+          <a:p>
+            <a:pPr marL="94060" lvl="0" indent="-103585">
+              <a:buClr>
+                <a:schemeClr val="dk1"/>
+              </a:buClr>
+              <a:buSzPts val="1200"/>
+              <a:buFont typeface="Arial"/>
+              <a:buChar char="•"/>
+            </a:pPr>
+            <a:r>
+              <a:rPr lang="en-US" sz="1100" dirty="0">
+                <a:solidFill>
+                  <a:schemeClr val="dk1"/>
+                </a:solidFill>
+                <a:latin typeface="Calibri"/>
+                <a:ea typeface="Calibri"/>
+                <a:cs typeface="Calibri"/>
+                <a:sym typeface="Calibri"/>
+              </a:rPr>
+              <a:t>Routine inspections every one to two years catch loose connections and corrosion before they escalate.</a:t>
+            </a:r>
+            <a:endParaRPr sz="1100" dirty="0">
+              <a:solidFill>
+                <a:schemeClr val="dk1"/>
+              </a:solidFill>
+              <a:latin typeface="Calibri"/>
+              <a:ea typeface="Calibri"/>
+              <a:cs typeface="Calibri"/>
+              <a:sym typeface="Calibri"/>
+            </a:endParaRPr>
+          </a:p>
+        </p:txBody>
+      </p:sp>
     </p:spTree>
     <p:extLst>
       <p:ext uri="{BB962C8B-B14F-4D97-AF65-F5344CB8AC3E}">
         <p14:creationId xmlns:p14="http://schemas.microsoft.com/office/powerpoint/2010/main" val="405659863"/>
+      </p:ext>
+    </p:extLst>
+  </p:cSld>
+  <p:clrMapOvr>
+    <a:masterClrMapping/>
+  </p:clrMapOvr>
+</p:sld>
+</file>
+
+<file path=ppt/slides/slide13.xml><?xml version="1.0" encoding="utf-8"?>
+<p:sld xmlns:a="http://schemas.openxmlformats.org/drawingml/2006/main" xmlns:r="http://schemas.openxmlformats.org/officeDocument/2006/relationships" xmlns:p="http://schemas.openxmlformats.org/presentationml/2006/main">
+  <p:cSld>
+    <p:spTree>
+      <p:nvGrpSpPr>
+        <p:cNvPr id="1" name="Shape 154">
+          <a:extLst>
+            <a:ext uri="{FF2B5EF4-FFF2-40B4-BE49-F238E27FC236}">
+              <a16:creationId xmlns:a16="http://schemas.microsoft.com/office/drawing/2014/main" id="{3133FAEB-61AA-AE32-FAE0-59886862EA19}"/>
+            </a:ext>
+          </a:extLst>
+        </p:cNvPr>
+        <p:cNvGrpSpPr/>
+        <p:nvPr/>
+      </p:nvGrpSpPr>
+      <p:grpSpPr>
+        <a:xfrm>
+          <a:off x="0" y="0"/>
+          <a:ext cx="0" cy="0"/>
+          <a:chOff x="0" y="0"/>
+          <a:chExt cx="0" cy="0"/>
+        </a:xfrm>
+      </p:grpSpPr>
+      <p:sp>
+        <p:nvSpPr>
+          <p:cNvPr id="155" name="Google Shape;155;p20">
+            <a:extLst>
+              <a:ext uri="{FF2B5EF4-FFF2-40B4-BE49-F238E27FC236}">
+                <a16:creationId xmlns:a16="http://schemas.microsoft.com/office/drawing/2014/main" id="{23411E3C-AB25-E2C3-9D72-E959B44E0F1E}"/>
+              </a:ext>
+            </a:extLst>
+          </p:cNvPr>
+          <p:cNvSpPr txBox="1"/>
+          <p:nvPr/>
+        </p:nvSpPr>
+        <p:spPr>
+          <a:xfrm>
+            <a:off x="65623" y="39645"/>
+            <a:ext cx="3988200" cy="438551"/>
+          </a:xfrm>
+          <a:prstGeom prst="rect">
+            <a:avLst/>
+          </a:prstGeom>
+          <a:noFill/>
+          <a:ln>
+            <a:noFill/>
+          </a:ln>
+        </p:spPr>
+        <p:txBody>
+          <a:bodyPr spcFirstLastPara="1" wrap="square" lIns="68575" tIns="34275" rIns="68575" bIns="34275" anchor="t" anchorCtr="0">
+            <a:spAutoFit/>
+          </a:bodyPr>
+          <a:lstStyle/>
+          <a:p>
+            <a:pPr lvl="0"/>
+            <a:r>
+              <a:rPr lang="en-US" sz="2400" b="1" dirty="0">
+                <a:latin typeface="Calibri" panose="020F0502020204030204" pitchFamily="34" charset="0"/>
+                <a:cs typeface="Calibri" panose="020F0502020204030204" pitchFamily="34" charset="0"/>
+              </a:rPr>
+              <a:t>Stirling heat solar system</a:t>
+            </a:r>
+            <a:endParaRPr sz="2400" b="1" i="0" dirty="0">
+              <a:solidFill>
+                <a:srgbClr val="333333"/>
+              </a:solidFill>
+              <a:latin typeface="Calibri" panose="020F0502020204030204" pitchFamily="34" charset="0"/>
+              <a:ea typeface="Calibri"/>
+              <a:cs typeface="Calibri" panose="020F0502020204030204" pitchFamily="34" charset="0"/>
+              <a:sym typeface="Calibri"/>
+            </a:endParaRPr>
+          </a:p>
+        </p:txBody>
+      </p:sp>
+      <p:sp>
+        <p:nvSpPr>
+          <p:cNvPr id="156" name="Google Shape;156;p20">
+            <a:extLst>
+              <a:ext uri="{FF2B5EF4-FFF2-40B4-BE49-F238E27FC236}">
+                <a16:creationId xmlns:a16="http://schemas.microsoft.com/office/drawing/2014/main" id="{1E2D22CB-11DC-598B-00F2-CF988167C5BC}"/>
+              </a:ext>
+            </a:extLst>
+          </p:cNvPr>
+          <p:cNvSpPr txBox="1"/>
+          <p:nvPr/>
+        </p:nvSpPr>
+        <p:spPr>
+          <a:xfrm>
+            <a:off x="98400" y="450607"/>
+            <a:ext cx="5159400" cy="2269822"/>
+          </a:xfrm>
+          <a:prstGeom prst="rect">
+            <a:avLst/>
+          </a:prstGeom>
+          <a:solidFill>
+            <a:srgbClr val="FFF2CC"/>
+          </a:solidFill>
+          <a:ln w="7150" cap="flat" cmpd="sng">
+            <a:solidFill>
+              <a:srgbClr val="FF0000"/>
+            </a:solidFill>
+            <a:prstDash val="solid"/>
+            <a:round/>
+            <a:headEnd type="none" w="sm" len="sm"/>
+            <a:tailEnd type="none" w="sm" len="sm"/>
+          </a:ln>
+        </p:spPr>
+        <p:txBody>
+          <a:bodyPr spcFirstLastPara="1" wrap="square" lIns="68575" tIns="34275" rIns="68575" bIns="34275" anchor="t" anchorCtr="0">
+            <a:spAutoFit/>
+          </a:bodyPr>
+          <a:lstStyle/>
+          <a:p>
+            <a:pPr marL="171450" indent="-171450">
+              <a:buFont typeface="Arial" panose="020B0604020202020204" pitchFamily="34" charset="0"/>
+              <a:buChar char="•"/>
+            </a:pPr>
+            <a:r>
+              <a:rPr lang="en-US" sz="1100" dirty="0">
+                <a:latin typeface="Calibri" panose="020F0502020204030204" pitchFamily="34" charset="0"/>
+                <a:cs typeface="Calibri" panose="020F0502020204030204" pitchFamily="34" charset="0"/>
+              </a:rPr>
+              <a:t>A Stirling heat solar system uses a large parabolic dish of mirrors to concentrate sunlight onto a Stirling engine, which drives a generator to produce electricity</a:t>
+            </a:r>
+          </a:p>
+          <a:p>
+            <a:pPr marL="171450" indent="-171450">
+              <a:buFont typeface="Arial" panose="020B0604020202020204" pitchFamily="34" charset="0"/>
+              <a:buChar char="•"/>
+            </a:pPr>
+            <a:r>
+              <a:rPr lang="en-US" sz="1100" dirty="0">
+                <a:latin typeface="Calibri" panose="020F0502020204030204" pitchFamily="34" charset="0"/>
+                <a:cs typeface="Calibri" panose="020F0502020204030204" pitchFamily="34" charset="0"/>
+              </a:rPr>
+              <a:t>The engine runs on the temperature difference created by the focused solar heat. It is modular, water-free, and emission-free during operation, making it appealing for utility-scale solar farms in sunny, arid regions</a:t>
+            </a:r>
+          </a:p>
+          <a:p>
+            <a:pPr marL="171450" indent="-171450">
+              <a:buFont typeface="Arial" panose="020B0604020202020204" pitchFamily="34" charset="0"/>
+              <a:buChar char="•"/>
+            </a:pPr>
+            <a:r>
+              <a:rPr lang="en-US" sz="1100" dirty="0">
+                <a:latin typeface="Calibri" panose="020F0502020204030204" pitchFamily="34" charset="0"/>
+                <a:cs typeface="Calibri" panose="020F0502020204030204" pitchFamily="34" charset="0"/>
+              </a:rPr>
+              <a:t>It is not used in homes because of high cost, complexity, maintenance</a:t>
+            </a:r>
+          </a:p>
+          <a:p>
+            <a:pPr marL="171450" indent="-171450">
+              <a:buFont typeface="Arial" panose="020B0604020202020204" pitchFamily="34" charset="0"/>
+              <a:buChar char="•"/>
+            </a:pPr>
+            <a:r>
+              <a:rPr lang="en-US" sz="1100" dirty="0">
+                <a:latin typeface="Calibri" panose="020F0502020204030204" pitchFamily="34" charset="0"/>
+                <a:cs typeface="Calibri" panose="020F0502020204030204" pitchFamily="34" charset="0"/>
+              </a:rPr>
+              <a:t>A single unit can cost tens of thousands of dollars while producing modest output, making solar PV far more economical</a:t>
+            </a:r>
+          </a:p>
+          <a:p>
+            <a:pPr marL="171450" indent="-171450">
+              <a:buFont typeface="Arial" panose="020B0604020202020204" pitchFamily="34" charset="0"/>
+              <a:buChar char="•"/>
+            </a:pPr>
+            <a:r>
+              <a:rPr lang="en-US" sz="1100" dirty="0">
+                <a:latin typeface="Calibri" panose="020F0502020204030204" pitchFamily="34" charset="0"/>
+                <a:cs typeface="Calibri" panose="020F0502020204030204" pitchFamily="34" charset="0"/>
+              </a:rPr>
+              <a:t>The system has many moving parts requiring skilled maintenance, needs direct clear-sky sunlight (</a:t>
+            </a:r>
+            <a:r>
+              <a:rPr lang="en-US" sz="1100" dirty="0">
+                <a:solidFill>
+                  <a:srgbClr val="FF0000"/>
+                </a:solidFill>
+                <a:latin typeface="Calibri" panose="020F0502020204030204" pitchFamily="34" charset="0"/>
+                <a:cs typeface="Calibri" panose="020F0502020204030204" pitchFamily="34" charset="0"/>
+              </a:rPr>
+              <a:t>no performance on cloudy days</a:t>
+            </a:r>
+            <a:r>
+              <a:rPr lang="en-US" sz="1100" dirty="0">
+                <a:latin typeface="Calibri" panose="020F0502020204030204" pitchFamily="34" charset="0"/>
+                <a:cs typeface="Calibri" panose="020F0502020204030204" pitchFamily="34" charset="0"/>
+              </a:rPr>
+              <a:t>), and the large rotating dish is impractical for rooftops</a:t>
+            </a:r>
+          </a:p>
+          <a:p>
+            <a:pPr marL="171450" indent="-171450">
+              <a:buFont typeface="Arial" panose="020B0604020202020204" pitchFamily="34" charset="0"/>
+              <a:buChar char="•"/>
+            </a:pPr>
+            <a:r>
+              <a:rPr lang="en-US" sz="1100" dirty="0">
+                <a:solidFill>
+                  <a:srgbClr val="FF0000"/>
+                </a:solidFill>
+                <a:latin typeface="Calibri" panose="020F0502020204030204" pitchFamily="34" charset="0"/>
+                <a:cs typeface="Calibri" panose="020F0502020204030204" pitchFamily="34" charset="0"/>
+              </a:rPr>
+              <a:t>Silicon solar panels, by contrast, have no moving parts, dropped below $0.10 per watt, and work even in diffuse light</a:t>
+            </a:r>
+          </a:p>
+        </p:txBody>
+      </p:sp>
+      <p:pic>
+        <p:nvPicPr>
+          <p:cNvPr id="2" name="Picture 1">
+            <a:extLst>
+              <a:ext uri="{FF2B5EF4-FFF2-40B4-BE49-F238E27FC236}">
+                <a16:creationId xmlns:a16="http://schemas.microsoft.com/office/drawing/2014/main" id="{53A0719B-25B5-AEC1-AEA9-B7D4BD24E3C0}"/>
+              </a:ext>
+            </a:extLst>
+          </p:cNvPr>
+          <p:cNvPicPr>
+            <a:picLocks noChangeAspect="1"/>
+          </p:cNvPicPr>
+          <p:nvPr/>
+        </p:nvPicPr>
+        <p:blipFill>
+          <a:blip r:embed="rId3" cstate="email">
+            <a:extLst>
+              <a:ext uri="{28A0092B-C50C-407E-A947-70E740481C1C}">
+                <a14:useLocalDpi xmlns:a14="http://schemas.microsoft.com/office/drawing/2010/main"/>
+              </a:ext>
+            </a:extLst>
+          </a:blip>
+          <a:stretch>
+            <a:fillRect/>
+          </a:stretch>
+        </p:blipFill>
+        <p:spPr>
+          <a:xfrm>
+            <a:off x="5418586" y="258920"/>
+            <a:ext cx="3612229" cy="2057400"/>
+          </a:xfrm>
+          <a:prstGeom prst="rect">
+            <a:avLst/>
+          </a:prstGeom>
+        </p:spPr>
+      </p:pic>
+      <p:sp>
+        <p:nvSpPr>
+          <p:cNvPr id="3" name="Google Shape;156;p20">
+            <a:extLst>
+              <a:ext uri="{FF2B5EF4-FFF2-40B4-BE49-F238E27FC236}">
+                <a16:creationId xmlns:a16="http://schemas.microsoft.com/office/drawing/2014/main" id="{FB7881BC-D125-7374-E30B-2B59C73729DB}"/>
+              </a:ext>
+            </a:extLst>
+          </p:cNvPr>
+          <p:cNvSpPr txBox="1"/>
+          <p:nvPr/>
+        </p:nvSpPr>
+        <p:spPr>
+          <a:xfrm>
+            <a:off x="98400" y="2876550"/>
+            <a:ext cx="6378600" cy="2131322"/>
+          </a:xfrm>
+          <a:prstGeom prst="rect">
+            <a:avLst/>
+          </a:prstGeom>
+          <a:solidFill>
+            <a:srgbClr val="FFF2CC"/>
+          </a:solidFill>
+          <a:ln w="7150" cap="flat" cmpd="sng">
+            <a:solidFill>
+              <a:srgbClr val="FF0000"/>
+            </a:solidFill>
+            <a:prstDash val="solid"/>
+            <a:round/>
+            <a:headEnd type="none" w="sm" len="sm"/>
+            <a:tailEnd type="none" w="sm" len="sm"/>
+          </a:ln>
+        </p:spPr>
+        <p:txBody>
+          <a:bodyPr spcFirstLastPara="1" wrap="square" lIns="68575" tIns="34275" rIns="68575" bIns="34275" anchor="t" anchorCtr="0">
+            <a:spAutoFit/>
+          </a:bodyPr>
+          <a:lstStyle/>
+          <a:p>
+            <a:pPr marL="171450" indent="-171450">
+              <a:buFont typeface="Arial" panose="020B0604020202020204" pitchFamily="34" charset="0"/>
+              <a:buChar char="•"/>
+            </a:pPr>
+            <a:r>
+              <a:rPr lang="en-US" sz="1200" b="1" dirty="0">
+                <a:solidFill>
+                  <a:srgbClr val="FF0000"/>
+                </a:solidFill>
+                <a:latin typeface="Calibri" panose="020F0502020204030204" pitchFamily="34" charset="0"/>
+                <a:cs typeface="Calibri" panose="020F0502020204030204" pitchFamily="34" charset="0"/>
+              </a:rPr>
+              <a:t>A peel-and-stick solar film </a:t>
+            </a:r>
+            <a:r>
+              <a:rPr lang="en-US" sz="1200" dirty="0">
+                <a:latin typeface="Calibri" panose="020F0502020204030204" pitchFamily="34" charset="0"/>
+                <a:cs typeface="Calibri" panose="020F0502020204030204" pitchFamily="34" charset="0"/>
+              </a:rPr>
+              <a:t>thinner than a human hair generates as much electricity as a twenty-thousand-dollar silicon panel system</a:t>
+            </a:r>
+          </a:p>
+          <a:p>
+            <a:pPr marL="171450" indent="-171450">
+              <a:buFont typeface="Arial" panose="020B0604020202020204" pitchFamily="34" charset="0"/>
+              <a:buChar char="•"/>
+            </a:pPr>
+            <a:r>
+              <a:rPr lang="en-US" sz="1100" dirty="0">
+                <a:latin typeface="Calibri" panose="020F0502020204030204" pitchFamily="34" charset="0"/>
+                <a:cs typeface="Calibri" panose="020F0502020204030204" pitchFamily="34" charset="0"/>
+              </a:rPr>
+              <a:t>Can be easily installed without a single tool, rack, or contractor</a:t>
+            </a:r>
+          </a:p>
+          <a:p>
+            <a:pPr marL="171450" indent="-171450">
+              <a:buFont typeface="Arial" panose="020B0604020202020204" pitchFamily="34" charset="0"/>
+              <a:buChar char="•"/>
+            </a:pPr>
+            <a:r>
+              <a:rPr lang="en-US" sz="1100" dirty="0">
+                <a:latin typeface="Calibri" panose="020F0502020204030204" pitchFamily="34" charset="0"/>
+                <a:cs typeface="Calibri" panose="020F0502020204030204" pitchFamily="34" charset="0"/>
+              </a:rPr>
+              <a:t>MIT spinout Active Surfaces, founded by PhD graduate Richard Swartwout and backed by over ten million dollars in funding, has built this technology on perovskite - a crystalline semiconductor that has surpassed silicon efficiency records certified by the National Renewable Energy Laboratory, manufactured through roll-to-roll printing at a fraction of silicon's cost</a:t>
+            </a:r>
+          </a:p>
+          <a:p>
+            <a:pPr marL="171450" indent="-171450">
+              <a:buFont typeface="Arial" panose="020B0604020202020204" pitchFamily="34" charset="0"/>
+              <a:buChar char="•"/>
+            </a:pPr>
+            <a:r>
+              <a:rPr lang="en-US" sz="1100" dirty="0">
+                <a:latin typeface="Calibri" panose="020F0502020204030204" pitchFamily="34" charset="0"/>
+                <a:cs typeface="Calibri" panose="020F0502020204030204" pitchFamily="34" charset="0"/>
+              </a:rPr>
+              <a:t>For conventional rooftop solar, up to fifty percent of total system cost is pure labor. Active Surfaces eliminates that entirely. </a:t>
+            </a:r>
+          </a:p>
+          <a:p>
+            <a:pPr marL="171450" indent="-171450">
+              <a:buFont typeface="Arial" panose="020B0604020202020204" pitchFamily="34" charset="0"/>
+              <a:buChar char="•"/>
+            </a:pPr>
+            <a:r>
+              <a:rPr lang="en-US" sz="1100" dirty="0">
+                <a:latin typeface="Calibri" panose="020F0502020204030204" pitchFamily="34" charset="0"/>
+                <a:cs typeface="Calibri" panose="020F0502020204030204" pitchFamily="34" charset="0"/>
+              </a:rPr>
+              <a:t>This technology has been sidelined by a forty-billion-dollar installation industry whose entire business model collapses the moment a homeowner can roll their own power system onto a roof in an afternoon. </a:t>
+            </a:r>
+          </a:p>
+          <a:p>
+            <a:pPr marL="171450" indent="-171450">
+              <a:buFont typeface="Arial" panose="020B0604020202020204" pitchFamily="34" charset="0"/>
+              <a:buChar char="•"/>
+            </a:pPr>
+            <a:r>
+              <a:rPr lang="en-US" sz="1100" dirty="0">
+                <a:latin typeface="Calibri" panose="020F0502020204030204" pitchFamily="34" charset="0"/>
+                <a:cs typeface="Calibri" panose="020F0502020204030204" pitchFamily="34" charset="0"/>
+                <a:hlinkClick r:id="rId4"/>
+              </a:rPr>
+              <a:t>https://www.youtube.com/watch?v=I3nZFFlIVCY</a:t>
+            </a:r>
+            <a:endParaRPr lang="en-US" sz="1100" dirty="0">
+              <a:latin typeface="Calibri" panose="020F0502020204030204" pitchFamily="34" charset="0"/>
+              <a:cs typeface="Calibri" panose="020F0502020204030204" pitchFamily="34" charset="0"/>
+            </a:endParaRPr>
+          </a:p>
+        </p:txBody>
+      </p:sp>
+      <p:pic>
+        <p:nvPicPr>
+          <p:cNvPr id="5" name="Picture 4" descr="Wholesale technology solar power flexible panels price olar panels high quality flexible panel 100w olar panel flexible,2 Pieces">
+            <a:extLst>
+              <a:ext uri="{FF2B5EF4-FFF2-40B4-BE49-F238E27FC236}">
+                <a16:creationId xmlns:a16="http://schemas.microsoft.com/office/drawing/2014/main" id="{F80F9C02-CE18-624F-3FD0-9B0A94508021}"/>
+              </a:ext>
+            </a:extLst>
+          </p:cNvPr>
+          <p:cNvPicPr>
+            <a:picLocks noChangeAspect="1"/>
+          </p:cNvPicPr>
+          <p:nvPr/>
+        </p:nvPicPr>
+        <p:blipFill>
+          <a:blip r:embed="rId5" cstate="email">
+            <a:extLst>
+              <a:ext uri="{28A0092B-C50C-407E-A947-70E740481C1C}">
+                <a14:useLocalDpi xmlns:a14="http://schemas.microsoft.com/office/drawing/2010/main"/>
+              </a:ext>
+            </a:extLst>
+          </a:blip>
+          <a:stretch>
+            <a:fillRect/>
+          </a:stretch>
+        </p:blipFill>
+        <p:spPr>
+          <a:xfrm>
+            <a:off x="6710696" y="2721872"/>
+            <a:ext cx="2286000" cy="2286000"/>
+          </a:xfrm>
+          <a:prstGeom prst="rect">
+            <a:avLst/>
+          </a:prstGeom>
+        </p:spPr>
+      </p:pic>
+    </p:spTree>
+    <p:extLst>
+      <p:ext uri="{BB962C8B-B14F-4D97-AF65-F5344CB8AC3E}">
+        <p14:creationId xmlns:p14="http://schemas.microsoft.com/office/powerpoint/2010/main" val="1180087505"/>
+      </p:ext>
+    </p:extLst>
+  </p:cSld>
+  <p:clrMapOvr>
+    <a:masterClrMapping/>
+  </p:clrMapOvr>
+</p:sld>
+</file>
+
+<file path=ppt/slides/slide14.xml><?xml version="1.0" encoding="utf-8"?>
+<p:sld xmlns:a="http://schemas.openxmlformats.org/drawingml/2006/main" xmlns:r="http://schemas.openxmlformats.org/officeDocument/2006/relationships" xmlns:p="http://schemas.openxmlformats.org/presentationml/2006/main">
+  <p:cSld>
+    <p:spTree>
+      <p:nvGrpSpPr>
+        <p:cNvPr id="1" name="Shape 154">
+          <a:extLst>
+            <a:ext uri="{FF2B5EF4-FFF2-40B4-BE49-F238E27FC236}">
+              <a16:creationId xmlns:a16="http://schemas.microsoft.com/office/drawing/2014/main" id="{3133FAEB-61AA-AE32-FAE0-59886862EA19}"/>
+            </a:ext>
+          </a:extLst>
+        </p:cNvPr>
+        <p:cNvGrpSpPr/>
+        <p:nvPr/>
+      </p:nvGrpSpPr>
+      <p:grpSpPr>
+        <a:xfrm>
+          <a:off x="0" y="0"/>
+          <a:ext cx="0" cy="0"/>
+          <a:chOff x="0" y="0"/>
+          <a:chExt cx="0" cy="0"/>
+        </a:xfrm>
+      </p:grpSpPr>
+      <p:sp>
+        <p:nvSpPr>
+          <p:cNvPr id="155" name="Google Shape;155;p20">
+            <a:extLst>
+              <a:ext uri="{FF2B5EF4-FFF2-40B4-BE49-F238E27FC236}">
+                <a16:creationId xmlns:a16="http://schemas.microsoft.com/office/drawing/2014/main" id="{23411E3C-AB25-E2C3-9D72-E959B44E0F1E}"/>
+              </a:ext>
+            </a:extLst>
+          </p:cNvPr>
+          <p:cNvSpPr txBox="1"/>
+          <p:nvPr/>
+        </p:nvSpPr>
+        <p:spPr>
+          <a:xfrm>
+            <a:off x="65623" y="39645"/>
+            <a:ext cx="3988200" cy="346200"/>
+          </a:xfrm>
+          <a:prstGeom prst="rect">
+            <a:avLst/>
+          </a:prstGeom>
+          <a:noFill/>
+          <a:ln>
+            <a:noFill/>
+          </a:ln>
+        </p:spPr>
+        <p:txBody>
+          <a:bodyPr spcFirstLastPara="1" wrap="square" lIns="68575" tIns="34275" rIns="68575" bIns="34275" anchor="t" anchorCtr="0">
+            <a:spAutoFit/>
+          </a:bodyPr>
+          <a:lstStyle/>
+          <a:p>
+            <a:pPr marL="0" marR="0" lvl="0" indent="0" algn="l" rtl="0">
+              <a:spcBef>
+                <a:spcPts val="0"/>
+              </a:spcBef>
+              <a:spcAft>
+                <a:spcPts val="0"/>
+              </a:spcAft>
+              <a:buNone/>
+            </a:pPr>
+            <a:r>
+              <a:rPr lang="en-US" sz="1800" b="1" i="0" u="none" strike="noStrike" cap="none" dirty="0">
+                <a:solidFill>
+                  <a:schemeClr val="dk1"/>
+                </a:solidFill>
+                <a:latin typeface="Calibri"/>
+                <a:ea typeface="Calibri"/>
+                <a:cs typeface="Calibri"/>
+                <a:sym typeface="Calibri"/>
+              </a:rPr>
+              <a:t>Evacuated Tube Collector</a:t>
+            </a:r>
+            <a:endParaRPr sz="1800" b="1" i="0" dirty="0">
+              <a:solidFill>
+                <a:srgbClr val="333333"/>
+              </a:solidFill>
+              <a:latin typeface="Calibri"/>
+              <a:ea typeface="Calibri"/>
+              <a:cs typeface="Calibri"/>
+              <a:sym typeface="Calibri"/>
+            </a:endParaRPr>
+          </a:p>
+        </p:txBody>
+      </p:sp>
+      <p:sp>
+        <p:nvSpPr>
+          <p:cNvPr id="156" name="Google Shape;156;p20">
+            <a:extLst>
+              <a:ext uri="{FF2B5EF4-FFF2-40B4-BE49-F238E27FC236}">
+                <a16:creationId xmlns:a16="http://schemas.microsoft.com/office/drawing/2014/main" id="{1E2D22CB-11DC-598B-00F2-CF988167C5BC}"/>
+              </a:ext>
+            </a:extLst>
+          </p:cNvPr>
+          <p:cNvSpPr txBox="1"/>
+          <p:nvPr/>
+        </p:nvSpPr>
+        <p:spPr>
+          <a:xfrm>
+            <a:off x="65625" y="385894"/>
+            <a:ext cx="4473600" cy="4593535"/>
+          </a:xfrm>
+          <a:prstGeom prst="rect">
+            <a:avLst/>
+          </a:prstGeom>
+          <a:solidFill>
+            <a:srgbClr val="FFF2CC"/>
+          </a:solidFill>
+          <a:ln w="7150" cap="flat" cmpd="sng">
+            <a:solidFill>
+              <a:srgbClr val="FF0000"/>
+            </a:solidFill>
+            <a:prstDash val="solid"/>
+            <a:round/>
+            <a:headEnd type="none" w="sm" len="sm"/>
+            <a:tailEnd type="none" w="sm" len="sm"/>
+          </a:ln>
+        </p:spPr>
+        <p:txBody>
+          <a:bodyPr spcFirstLastPara="1" wrap="square" lIns="68575" tIns="34275" rIns="68575" bIns="34275" anchor="t" anchorCtr="0">
+            <a:spAutoFit/>
+          </a:bodyPr>
+          <a:lstStyle/>
+          <a:p>
+            <a:pPr marL="94060" lvl="0" indent="-103585">
+              <a:buClr>
+                <a:schemeClr val="dk1"/>
+              </a:buClr>
+              <a:buSzPts val="1200"/>
+              <a:buFont typeface="Arial"/>
+              <a:buChar char="•"/>
+            </a:pPr>
+            <a:r>
+              <a:rPr lang="en-US" sz="1200" dirty="0">
+                <a:solidFill>
+                  <a:schemeClr val="dk1"/>
+                </a:solidFill>
+                <a:latin typeface="Calibri"/>
+                <a:ea typeface="Calibri"/>
+                <a:cs typeface="Calibri"/>
+                <a:sym typeface="Calibri"/>
+              </a:rPr>
+              <a:t>A type of solar thermal collector used for heating water or fluids</a:t>
+            </a:r>
+          </a:p>
+          <a:p>
+            <a:pPr marL="94060" lvl="0" indent="-103585">
+              <a:buClr>
+                <a:schemeClr val="dk1"/>
+              </a:buClr>
+              <a:buSzPts val="1200"/>
+              <a:buFont typeface="Arial"/>
+              <a:buChar char="•"/>
+            </a:pPr>
+            <a:r>
+              <a:rPr lang="en-US" sz="1200" dirty="0">
+                <a:solidFill>
+                  <a:schemeClr val="dk1"/>
+                </a:solidFill>
+                <a:latin typeface="Calibri"/>
+                <a:ea typeface="Calibri"/>
+                <a:cs typeface="Calibri"/>
+                <a:sym typeface="Calibri"/>
+              </a:rPr>
+              <a:t>The heat loss is minimized by surrounding the absorber with a vacuum (evacuated) glass tube (works like a thermos)</a:t>
+            </a:r>
+          </a:p>
+          <a:p>
+            <a:pPr marL="94060" lvl="0" indent="-103585">
+              <a:buClr>
+                <a:schemeClr val="dk1"/>
+              </a:buClr>
+              <a:buSzPts val="1200"/>
+              <a:buFont typeface="Arial"/>
+              <a:buChar char="•"/>
+            </a:pPr>
+            <a:r>
+              <a:rPr lang="en-US" sz="900" dirty="0">
+                <a:solidFill>
+                  <a:schemeClr val="dk1"/>
+                </a:solidFill>
+                <a:latin typeface="Calibri"/>
+                <a:ea typeface="Calibri"/>
+                <a:cs typeface="Calibri"/>
+                <a:sym typeface="Calibri"/>
+                <a:hlinkClick r:id="rId3"/>
+              </a:rPr>
+              <a:t>https://</a:t>
+            </a:r>
+            <a:r>
+              <a:rPr lang="en-US" sz="900" dirty="0" err="1">
+                <a:solidFill>
+                  <a:schemeClr val="dk1"/>
+                </a:solidFill>
+                <a:latin typeface="Calibri"/>
+                <a:ea typeface="Calibri"/>
+                <a:cs typeface="Calibri"/>
+                <a:sym typeface="Calibri"/>
+                <a:hlinkClick r:id="rId3"/>
+              </a:rPr>
+              <a:t>www.sciencedirect.com</a:t>
+            </a:r>
+            <a:r>
+              <a:rPr lang="en-US" sz="900" dirty="0">
+                <a:solidFill>
+                  <a:schemeClr val="dk1"/>
+                </a:solidFill>
+                <a:latin typeface="Calibri"/>
+                <a:ea typeface="Calibri"/>
+                <a:cs typeface="Calibri"/>
+                <a:sym typeface="Calibri"/>
+                <a:hlinkClick r:id="rId3"/>
+              </a:rPr>
+              <a:t>/topics/engineering/evacuated-tube-solar-collector</a:t>
+            </a:r>
+            <a:endParaRPr lang="en-US" sz="900" dirty="0">
+              <a:solidFill>
+                <a:schemeClr val="dk1"/>
+              </a:solidFill>
+              <a:latin typeface="Calibri"/>
+              <a:ea typeface="Calibri"/>
+              <a:cs typeface="Calibri"/>
+              <a:sym typeface="Calibri"/>
+            </a:endParaRPr>
+          </a:p>
+          <a:p>
+            <a:pPr marL="94060" lvl="0" indent="-103585">
+              <a:buClr>
+                <a:schemeClr val="dk1"/>
+              </a:buClr>
+              <a:buSzPts val="1200"/>
+              <a:buFont typeface="Arial"/>
+              <a:buChar char="•"/>
+            </a:pPr>
+            <a:r>
+              <a:rPr lang="en-US" sz="1200" dirty="0">
+                <a:solidFill>
+                  <a:srgbClr val="FF0000"/>
+                </a:solidFill>
+                <a:latin typeface="Calibri"/>
+                <a:ea typeface="Calibri"/>
+                <a:cs typeface="Calibri"/>
+                <a:sym typeface="Calibri"/>
+              </a:rPr>
+              <a:t>Each collector consists of rows of parallel, double-walled borosilicate glass tubes connected to a header pipe</a:t>
+            </a:r>
+          </a:p>
+          <a:p>
+            <a:pPr marL="94060" lvl="0" indent="-103585">
+              <a:buClr>
+                <a:schemeClr val="dk1"/>
+              </a:buClr>
+              <a:buSzPts val="1200"/>
+              <a:buFont typeface="Arial"/>
+              <a:buChar char="•"/>
+            </a:pPr>
+            <a:r>
+              <a:rPr lang="en-US" sz="1200" dirty="0">
+                <a:solidFill>
+                  <a:schemeClr val="dk1"/>
+                </a:solidFill>
+                <a:latin typeface="Calibri"/>
+                <a:ea typeface="Calibri"/>
+                <a:cs typeface="Calibri"/>
+                <a:sym typeface="Calibri"/>
+              </a:rPr>
+              <a:t>The space between the two glass walls is evacuated (air removed), creating a near-perfect insulating vacuum that prevents convective and conductive heat loss</a:t>
+            </a:r>
+          </a:p>
+          <a:p>
+            <a:pPr marL="94060" lvl="0" indent="-103585">
+              <a:buClr>
+                <a:schemeClr val="dk1"/>
+              </a:buClr>
+              <a:buSzPts val="1200"/>
+              <a:buFont typeface="Arial"/>
+              <a:buChar char="•"/>
+            </a:pPr>
+            <a:r>
+              <a:rPr lang="en-US" sz="1200" dirty="0">
+                <a:solidFill>
+                  <a:srgbClr val="FF0000"/>
+                </a:solidFill>
+                <a:latin typeface="Calibri"/>
+                <a:ea typeface="Calibri"/>
+                <a:cs typeface="Calibri"/>
+                <a:sym typeface="Calibri"/>
+              </a:rPr>
+              <a:t>Inside the tube, a selective coating on the inner glass absorbs solar radiation, and aluminum fins transfer that heat to a copper heat pipe</a:t>
+            </a:r>
+          </a:p>
+          <a:p>
+            <a:pPr marL="94060" lvl="0" indent="-103585">
+              <a:buClr>
+                <a:schemeClr val="dk1"/>
+              </a:buClr>
+              <a:buSzPts val="1200"/>
+              <a:buFont typeface="Arial"/>
+              <a:buChar char="•"/>
+            </a:pPr>
+            <a:r>
+              <a:rPr lang="en-US" sz="1200" dirty="0">
+                <a:solidFill>
+                  <a:schemeClr val="dk1"/>
+                </a:solidFill>
+                <a:latin typeface="Calibri"/>
+                <a:ea typeface="Calibri"/>
+                <a:cs typeface="Calibri"/>
+                <a:sym typeface="Calibri"/>
+              </a:rPr>
+              <a:t>The heat pipe contains a small amount of that vaporizes from the heat, rises to a condenser at the top, and transfers its energy to the circulating heat transfer fluid (typically a water/propylene glycol mix) in the manifold</a:t>
+            </a:r>
+          </a:p>
+          <a:p>
+            <a:pPr marL="94060" lvl="0" indent="-103585">
+              <a:buClr>
+                <a:schemeClr val="dk1"/>
+              </a:buClr>
+              <a:buSzPts val="1200"/>
+              <a:buFont typeface="Arial"/>
+              <a:buChar char="•"/>
+            </a:pPr>
+            <a:r>
+              <a:rPr lang="en-US" sz="900" dirty="0">
+                <a:solidFill>
+                  <a:schemeClr val="dk1"/>
+                </a:solidFill>
+                <a:latin typeface="Calibri"/>
+                <a:ea typeface="Calibri"/>
+                <a:cs typeface="Calibri"/>
+                <a:sym typeface="Calibri"/>
+                <a:hlinkClick r:id="rId4"/>
+              </a:rPr>
+              <a:t>https://www.reddit.com/r/solar/comments/rvgyfv/evacuated_tube_solar/</a:t>
+            </a:r>
+            <a:endParaRPr lang="en-US" sz="900" dirty="0">
+              <a:solidFill>
+                <a:schemeClr val="dk1"/>
+              </a:solidFill>
+              <a:latin typeface="Calibri"/>
+              <a:ea typeface="Calibri"/>
+              <a:cs typeface="Calibri"/>
+              <a:sym typeface="Calibri"/>
+            </a:endParaRPr>
+          </a:p>
+          <a:p>
+            <a:pPr marL="94060" lvl="0" indent="-103585">
+              <a:buClr>
+                <a:schemeClr val="dk1"/>
+              </a:buClr>
+              <a:buSzPts val="1200"/>
+              <a:buFont typeface="Arial"/>
+              <a:buChar char="•"/>
+            </a:pPr>
+            <a:r>
+              <a:rPr lang="en-US" sz="1200" dirty="0">
+                <a:solidFill>
+                  <a:srgbClr val="FF0000"/>
+                </a:solidFill>
+                <a:latin typeface="Calibri"/>
+                <a:ea typeface="Calibri"/>
+                <a:cs typeface="Calibri"/>
+                <a:sym typeface="Calibri"/>
+              </a:rPr>
+              <a:t>Tube interior can reach ~400°F while the outside remains cool to the touch</a:t>
+            </a:r>
+            <a:r>
+              <a:rPr lang="en-US" sz="1200" dirty="0">
+                <a:solidFill>
+                  <a:schemeClr val="dk1"/>
+                </a:solidFill>
+                <a:latin typeface="Calibri"/>
+                <a:ea typeface="Calibri"/>
+                <a:cs typeface="Calibri"/>
+                <a:sym typeface="Calibri"/>
+              </a:rPr>
+              <a:t>; Works well even in cloudy, cold climates (northern US, Canada); The cylindrical shape means sunlight always strikes at roughly a 90° angle, performing well in morning, evening, or overcast condition; If one tube breaks, the rest of the system continues operating at reduced capacity</a:t>
+            </a:r>
+          </a:p>
+          <a:p>
+            <a:pPr marL="94060" lvl="0" indent="-103585">
+              <a:buClr>
+                <a:schemeClr val="dk1"/>
+              </a:buClr>
+              <a:buSzPts val="1200"/>
+              <a:buFont typeface="Arial"/>
+              <a:buChar char="•"/>
+            </a:pPr>
+            <a:r>
+              <a:rPr lang="en-US" sz="1200" dirty="0">
+                <a:solidFill>
+                  <a:schemeClr val="dk1"/>
+                </a:solidFill>
+                <a:latin typeface="Calibri"/>
+                <a:ea typeface="Calibri"/>
+                <a:cs typeface="Calibri"/>
+                <a:sym typeface="Calibri"/>
+              </a:rPr>
+              <a:t>Used for domestic hot water heating, space heating, and industrial process heat</a:t>
+            </a:r>
+          </a:p>
+        </p:txBody>
+      </p:sp>
+      <p:pic>
+        <p:nvPicPr>
+          <p:cNvPr id="4" name="Picture 3">
+            <a:extLst>
+              <a:ext uri="{FF2B5EF4-FFF2-40B4-BE49-F238E27FC236}">
+                <a16:creationId xmlns:a16="http://schemas.microsoft.com/office/drawing/2014/main" id="{990E4B7B-5138-F8F2-51A7-D220007483C3}"/>
+              </a:ext>
+            </a:extLst>
+          </p:cNvPr>
+          <p:cNvPicPr>
+            <a:picLocks noChangeAspect="1"/>
+          </p:cNvPicPr>
+          <p:nvPr/>
+        </p:nvPicPr>
+        <p:blipFill>
+          <a:blip r:embed="rId5" cstate="email">
+            <a:extLst>
+              <a:ext uri="{28A0092B-C50C-407E-A947-70E740481C1C}">
+                <a14:useLocalDpi xmlns:a14="http://schemas.microsoft.com/office/drawing/2010/main"/>
+              </a:ext>
+            </a:extLst>
+          </a:blip>
+          <a:stretch>
+            <a:fillRect/>
+          </a:stretch>
+        </p:blipFill>
+        <p:spPr>
+          <a:xfrm>
+            <a:off x="7371199" y="2293517"/>
+            <a:ext cx="1681018" cy="1320800"/>
+          </a:xfrm>
+          <a:prstGeom prst="rect">
+            <a:avLst/>
+          </a:prstGeom>
+        </p:spPr>
+      </p:pic>
+      <p:pic>
+        <p:nvPicPr>
+          <p:cNvPr id="9" name="Picture 8" descr="Evacuated Tube Solar Collector">
+            <a:extLst>
+              <a:ext uri="{FF2B5EF4-FFF2-40B4-BE49-F238E27FC236}">
+                <a16:creationId xmlns:a16="http://schemas.microsoft.com/office/drawing/2014/main" id="{60444A0C-417D-93FD-46D9-9170853ABE49}"/>
+              </a:ext>
+            </a:extLst>
+          </p:cNvPr>
+          <p:cNvPicPr>
+            <a:picLocks noChangeAspect="1"/>
+          </p:cNvPicPr>
+          <p:nvPr/>
+        </p:nvPicPr>
+        <p:blipFill>
+          <a:blip r:embed="rId6" cstate="email">
+            <a:extLst>
+              <a:ext uri="{28A0092B-C50C-407E-A947-70E740481C1C}">
+                <a14:useLocalDpi xmlns:a14="http://schemas.microsoft.com/office/drawing/2010/main"/>
+              </a:ext>
+            </a:extLst>
+          </a:blip>
+          <a:stretch>
+            <a:fillRect/>
+          </a:stretch>
+        </p:blipFill>
+        <p:spPr>
+          <a:xfrm>
+            <a:off x="7159727" y="147845"/>
+            <a:ext cx="1905000" cy="1320800"/>
+          </a:xfrm>
+          <a:prstGeom prst="rect">
+            <a:avLst/>
+          </a:prstGeom>
+        </p:spPr>
+      </p:pic>
+      <p:pic>
+        <p:nvPicPr>
+          <p:cNvPr id="10" name="Picture 9" descr="CTC evacuated tube solar thermal collector mounted on a dark tiled roof.">
+            <a:extLst>
+              <a:ext uri="{FF2B5EF4-FFF2-40B4-BE49-F238E27FC236}">
+                <a16:creationId xmlns:a16="http://schemas.microsoft.com/office/drawing/2014/main" id="{FC8051F2-2EBF-7406-CACC-7C1A21D6A943}"/>
+              </a:ext>
+            </a:extLst>
+          </p:cNvPr>
+          <p:cNvPicPr>
+            <a:picLocks noChangeAspect="1"/>
+          </p:cNvPicPr>
+          <p:nvPr/>
+        </p:nvPicPr>
+        <p:blipFill>
+          <a:blip r:embed="rId7" cstate="email">
+            <a:extLst>
+              <a:ext uri="{28A0092B-C50C-407E-A947-70E740481C1C}">
+                <a14:useLocalDpi xmlns:a14="http://schemas.microsoft.com/office/drawing/2010/main"/>
+              </a:ext>
+            </a:extLst>
+          </a:blip>
+          <a:stretch>
+            <a:fillRect/>
+          </a:stretch>
+        </p:blipFill>
+        <p:spPr>
+          <a:xfrm>
+            <a:off x="4673205" y="147845"/>
+            <a:ext cx="2101706" cy="1198629"/>
+          </a:xfrm>
+          <a:prstGeom prst="rect">
+            <a:avLst/>
+          </a:prstGeom>
+        </p:spPr>
+      </p:pic>
+      <p:pic>
+        <p:nvPicPr>
+          <p:cNvPr id="11" name="Picture 10" descr="Frontiers | Experimental Investigation of a Medium Temperature Single-Phase  Thermosyphon in an Evacuated Tube Receiver Coupled With Compound Parabolic  Concentrator">
+            <a:extLst>
+              <a:ext uri="{FF2B5EF4-FFF2-40B4-BE49-F238E27FC236}">
+                <a16:creationId xmlns:a16="http://schemas.microsoft.com/office/drawing/2014/main" id="{C721DB2B-9EFC-F0B3-CD61-C4AC393620F1}"/>
+              </a:ext>
+            </a:extLst>
+          </p:cNvPr>
+          <p:cNvPicPr>
+            <a:picLocks noChangeAspect="1"/>
+          </p:cNvPicPr>
+          <p:nvPr/>
+        </p:nvPicPr>
+        <p:blipFill>
+          <a:blip r:embed="rId8" cstate="email">
+            <a:extLst>
+              <a:ext uri="{28A0092B-C50C-407E-A947-70E740481C1C}">
+                <a14:useLocalDpi xmlns:a14="http://schemas.microsoft.com/office/drawing/2010/main"/>
+              </a:ext>
+            </a:extLst>
+          </a:blip>
+          <a:stretch>
+            <a:fillRect/>
+          </a:stretch>
+        </p:blipFill>
+        <p:spPr>
+          <a:xfrm>
+            <a:off x="4691402" y="1683319"/>
+            <a:ext cx="2446966" cy="2647003"/>
+          </a:xfrm>
+          <a:prstGeom prst="rect">
+            <a:avLst/>
+          </a:prstGeom>
+        </p:spPr>
+      </p:pic>
+    </p:spTree>
+    <p:extLst>
+      <p:ext uri="{BB962C8B-B14F-4D97-AF65-F5344CB8AC3E}">
+        <p14:creationId xmlns:p14="http://schemas.microsoft.com/office/powerpoint/2010/main" val="2592298919"/>
       </p:ext>
     </p:extLst>
   </p:cSld>
